--- a/docs/후속실험3_발표.pptx
+++ b/docs/후속실험3_발표.pptx
@@ -1555,7 +1555,7 @@
                   <c:v>-0.0352</c:v>
                 </c:pt>
                 <c:pt idx="2">
-                  <c:v>-0.0385</c:v>
+                  <c:v>-0.0372</c:v>
                 </c:pt>
                 <c:pt idx="3">
                   <c:v>-0.0385</c:v>
@@ -26477,11 +26477,11 @@
         <p:spPr>
           <a:xfrm>
             <a:off x="8001000" y="2011680"/>
-            <a:ext cx="3611880" cy="2148840"/>
+            <a:ext cx="3611880" cy="2331720"/>
           </a:xfrm>
           <a:prstGeom prst="roundRect">
             <a:avLst>
-              <a:gd name="adj" fmla="val 2553"/>
+              <a:gd name="adj" fmla="val 2353"/>
             </a:avLst>
           </a:prstGeom>
           <a:solidFill>
@@ -26543,7 +26543,7 @@
         <p:spPr>
           <a:xfrm>
             <a:off x="8275320" y="2542032"/>
-            <a:ext cx="3063240" cy="1435608"/>
+            <a:ext cx="3063240" cy="1618488"/>
           </a:xfrm>
           <a:prstGeom prst="rect">
             <a:avLst/>
@@ -26570,7 +26570,7 @@
                 <a:ea typeface="맑은 고딕" pitchFamily="34" charset="-122"/>
                 <a:cs typeface="맑은 고딕" pitchFamily="34" charset="-120"/>
               </a:rPr>
-              <a:t>AUC  +0.0282  [+0.013, +0.045]   유의</a:t>
+              <a:t>AUC  +0.0205  [+0.000, +0.042]   경계</a:t>
             </a:r>
             <a:endParaRPr lang="en-US" sz="1200" dirty="0"/>
           </a:p>
@@ -26590,7 +26590,7 @@
                 <a:ea typeface="맑은 고딕" pitchFamily="34" charset="-122"/>
                 <a:cs typeface="맑은 고딕" pitchFamily="34" charset="-120"/>
               </a:rPr>
-              <a:t>MSE  −0.2534  [−0.294, −0.212]   유의</a:t>
+              <a:t>MSE  −0.2535  [−0.292, −0.217]   유의</a:t>
             </a:r>
             <a:endParaRPr lang="en-US" sz="1200" dirty="0"/>
           </a:p>
@@ -26601,6 +26601,26 @@
               </a:lnSpc>
               <a:buNone/>
             </a:pPr>
+            <a:endParaRPr lang="en-US" sz="1200" dirty="0"/>
+          </a:p>
+          <a:p>
+            <a:pPr indent="0" marL="0">
+              <a:lnSpc>
+                <a:spcPts val="1700"/>
+              </a:lnSpc>
+              <a:buNone/>
+            </a:pPr>
+            <a:r>
+              <a:rPr lang="en-US" sz="1200" dirty="0">
+                <a:solidFill>
+                  <a:srgbClr val="55636E"/>
+                </a:solidFill>
+                <a:latin typeface="맑은 고딕" pitchFamily="34" charset="0"/>
+                <a:ea typeface="맑은 고딕" pitchFamily="34" charset="-122"/>
+                <a:cs typeface="맑은 고딕" pitchFamily="34" charset="-120"/>
+              </a:rPr>
+              <a:t>가중평균 기준이다. AUC 우위는 하한이 0에 닿아 경계선이고, MSE 우위는 확실하다.</a:t>
+            </a:r>
             <a:endParaRPr lang="en-US" sz="1200" dirty="0"/>
           </a:p>
           <a:p>
@@ -26633,12 +26653,12 @@
         </p:nvSpPr>
         <p:spPr>
           <a:xfrm>
-            <a:off x="8001000" y="4343400"/>
-            <a:ext cx="3611880" cy="1874520"/>
+            <a:off x="8001000" y="4480560"/>
+            <a:ext cx="3611880" cy="1828800"/>
           </a:xfrm>
           <a:prstGeom prst="roundRect">
             <a:avLst>
-              <a:gd name="adj" fmla="val 2927"/>
+              <a:gd name="adj" fmla="val 3000"/>
             </a:avLst>
           </a:prstGeom>
           <a:solidFill>
@@ -26660,7 +26680,7 @@
         </p:nvSpPr>
         <p:spPr>
           <a:xfrm>
-            <a:off x="8275320" y="4526280"/>
+            <a:off x="8275320" y="4663440"/>
             <a:ext cx="3063240" cy="310896"/>
           </a:xfrm>
           <a:prstGeom prst="rect">
@@ -26699,8 +26719,8 @@
         </p:nvSpPr>
         <p:spPr>
           <a:xfrm>
-            <a:off x="8275320" y="4873752"/>
-            <a:ext cx="3063240" cy="1161288"/>
+            <a:off x="8275320" y="5010912"/>
+            <a:ext cx="3063240" cy="1115568"/>
           </a:xfrm>
           <a:prstGeom prst="rect">
             <a:avLst/>

--- a/docs/후속실험3_발표.pptx
+++ b/docs/후속실험3_발표.pptx
@@ -25870,7 +25870,7 @@
                 <a:ea typeface="맑은 고딕" pitchFamily="34" charset="-122"/>
                 <a:cs typeface="맑은 고딕" pitchFamily="34" charset="-120"/>
               </a:rPr>
-              <a:t>조건 설계 ① — 갈래 ②·③</a:t>
+              <a:t>조건 설계 ① — 갈래 ②·③ (교수님 지시)</a:t>
             </a:r>
             <a:endParaRPr lang="en-US" sz="2900" dirty="0"/>
           </a:p>
@@ -25885,7 +25885,7 @@
         <p:spPr>
           <a:xfrm>
             <a:off x="566928" y="1627632"/>
-            <a:ext cx="11064240" cy="310896"/>
+            <a:ext cx="11064240" cy="457200"/>
           </a:xfrm>
           <a:prstGeom prst="rect">
             <a:avLst/>
@@ -25901,7 +25901,7 @@
               <a:buNone/>
             </a:pPr>
             <a:r>
-              <a:rPr lang="en-US" sz="1250" dirty="0">
+              <a:rPr lang="en-US" sz="1200" dirty="0">
                 <a:solidFill>
                   <a:srgbClr val="55636E"/>
                 </a:solidFill>
@@ -25909,9 +25909,9 @@
                 <a:ea typeface="맑은 고딕" pitchFamily="34" charset="-122"/>
                 <a:cs typeface="맑은 고딕" pitchFamily="34" charset="-120"/>
               </a:rPr>
-              <a:t>면적 항이 없는 조건이다. prior 식은 z = a·logit(p̄) + b 이고 a ∈ [0.5, 2], b는 아래 범위에서 학습한다.</a:t>
+              <a:t>면적 항이 없는 조건이다. prior 식은  z = a·logit(p̄) + b  하나뿐이고, 여기서 a는 USGS 값을 얼마나 믿을지(기울기), b는 확률 수준을 위아래로 옮기는 값(높이)이다.</a:t>
             </a:r>
-            <a:endParaRPr lang="en-US" sz="1250" dirty="0"/>
+            <a:endParaRPr lang="en-US" sz="1200" dirty="0"/>
           </a:p>
         </p:txBody>
       </p:sp>
@@ -25930,7 +25930,7 @@
           </p:nvPr>
         </p:nvGraphicFramePr>
         <p:xfrm>
-          <a:off x="566928" y="2011680"/>
+          <a:off x="566928" y="2139696"/>
           <a:ext cx="11064240" cy="914400"/>
         </p:xfrm>
         <a:graphic>
@@ -25939,13 +25939,12 @@
               <a:tblPr/>
               <a:tblGrid>
                 <a:gridCol w="566928"/>
-                <a:gridCol w="1691640"/>
-                <a:gridCol w="2743200"/>
+                <a:gridCol w="1600200"/>
                 <a:gridCol w="914400"/>
-                <a:gridCol w="1143000"/>
-                <a:gridCol w="1298448"/>
-                <a:gridCol w="1298448"/>
-                <a:gridCol w="1408176"/>
+                <a:gridCol w="1051560"/>
+                <a:gridCol w="1234440"/>
+                <a:gridCol w="1005840"/>
+                <a:gridCol w="4690872"/>
               </a:tblGrid>
               <a:tr h="310896">
                 <a:tc>
@@ -26089,74 +26088,6 @@
                     <a:bodyPr/>
                     <a:lstStyle/>
                     <a:p>
-                      <a:pPr algn="l" indent="0" marL="0">
-                        <a:buNone/>
-                      </a:pPr>
-                      <a:r>
-                        <a:rPr lang="en-US" sz="1050" b="1" dirty="0">
-                          <a:solidFill>
-                            <a:srgbClr val="1C2A33"/>
-                          </a:solidFill>
-                          <a:latin typeface="맑은 고딕" pitchFamily="34" charset="0"/>
-                          <a:ea typeface="맑은 고딕" pitchFamily="34" charset="-122"/>
-                          <a:cs typeface="맑은 고딕" pitchFamily="34" charset="-120"/>
-                        </a:rPr>
-                        <a:t>브랜치</a:t>
-                      </a:r>
-                      <a:endParaRPr lang="en-US" sz="1050" dirty="0">
-                        <a:latin typeface="맑은 고딕" charset="0"/>
-                        <a:ea typeface="맑은 고딕" charset="0"/>
-                        <a:cs typeface="맑은 고딕" charset="0"/>
-                      </a:endParaRPr>
-                    </a:p>
-                  </a:txBody>
-                  <a:tcPr marL="91440" marR="91440" marT="45720" marB="45720" anchor="ctr">
-                    <a:lnL w="12700" cap="flat" cmpd="sng" algn="ctr">
-                      <a:solidFill>
-                        <a:srgbClr val="E3E9EC"/>
-                      </a:solidFill>
-                      <a:prstDash val="solid"/>
-                      <a:round/>
-                      <a:headEnd type="none" w="med" len="med"/>
-                      <a:tailEnd type="none" w="med" len="med"/>
-                    </a:lnL>
-                    <a:lnR w="12700" cap="flat" cmpd="sng" algn="ctr">
-                      <a:solidFill>
-                        <a:srgbClr val="E3E9EC"/>
-                      </a:solidFill>
-                      <a:prstDash val="solid"/>
-                      <a:round/>
-                      <a:headEnd type="none" w="med" len="med"/>
-                      <a:tailEnd type="none" w="med" len="med"/>
-                    </a:lnR>
-                    <a:lnT w="12700" cap="flat" cmpd="sng" algn="ctr">
-                      <a:solidFill>
-                        <a:srgbClr val="E3E9EC"/>
-                      </a:solidFill>
-                      <a:prstDash val="solid"/>
-                      <a:round/>
-                      <a:headEnd type="none" w="med" len="med"/>
-                      <a:tailEnd type="none" w="med" len="med"/>
-                    </a:lnT>
-                    <a:lnB w="12700" cap="flat" cmpd="sng" algn="ctr">
-                      <a:solidFill>
-                        <a:srgbClr val="E3E9EC"/>
-                      </a:solidFill>
-                      <a:prstDash val="solid"/>
-                      <a:round/>
-                      <a:headEnd type="none" w="med" len="med"/>
-                      <a:tailEnd type="none" w="med" len="med"/>
-                    </a:lnB>
-                    <a:solidFill>
-                      <a:srgbClr val="F1F5F7"/>
-                    </a:solidFill>
-                  </a:tcPr>
-                </a:tc>
-                <a:tc>
-                  <a:txBody>
-                    <a:bodyPr/>
-                    <a:lstStyle/>
-                    <a:p>
                       <a:pPr algn="r" indent="0" marL="0">
                         <a:buNone/>
                       </a:pPr>
@@ -26305,74 +26236,6 @@
                           <a:ea typeface="맑은 고딕" pitchFamily="34" charset="-122"/>
                           <a:cs typeface="맑은 고딕" pitchFamily="34" charset="-120"/>
                         </a:rPr>
-                        <a:t>학습된 a_LS</a:t>
-                      </a:r>
-                      <a:endParaRPr lang="en-US" sz="1050" dirty="0">
-                        <a:latin typeface="맑은 고딕" charset="0"/>
-                        <a:ea typeface="맑은 고딕" charset="0"/>
-                        <a:cs typeface="맑은 고딕" charset="0"/>
-                      </a:endParaRPr>
-                    </a:p>
-                  </a:txBody>
-                  <a:tcPr marL="91440" marR="91440" marT="45720" marB="45720" anchor="ctr">
-                    <a:lnL w="12700" cap="flat" cmpd="sng" algn="ctr">
-                      <a:solidFill>
-                        <a:srgbClr val="E3E9EC"/>
-                      </a:solidFill>
-                      <a:prstDash val="solid"/>
-                      <a:round/>
-                      <a:headEnd type="none" w="med" len="med"/>
-                      <a:tailEnd type="none" w="med" len="med"/>
-                    </a:lnL>
-                    <a:lnR w="12700" cap="flat" cmpd="sng" algn="ctr">
-                      <a:solidFill>
-                        <a:srgbClr val="E3E9EC"/>
-                      </a:solidFill>
-                      <a:prstDash val="solid"/>
-                      <a:round/>
-                      <a:headEnd type="none" w="med" len="med"/>
-                      <a:tailEnd type="none" w="med" len="med"/>
-                    </a:lnR>
-                    <a:lnT w="12700" cap="flat" cmpd="sng" algn="ctr">
-                      <a:solidFill>
-                        <a:srgbClr val="E3E9EC"/>
-                      </a:solidFill>
-                      <a:prstDash val="solid"/>
-                      <a:round/>
-                      <a:headEnd type="none" w="med" len="med"/>
-                      <a:tailEnd type="none" w="med" len="med"/>
-                    </a:lnT>
-                    <a:lnB w="12700" cap="flat" cmpd="sng" algn="ctr">
-                      <a:solidFill>
-                        <a:srgbClr val="E3E9EC"/>
-                      </a:solidFill>
-                      <a:prstDash val="solid"/>
-                      <a:round/>
-                      <a:headEnd type="none" w="med" len="med"/>
-                      <a:tailEnd type="none" w="med" len="med"/>
-                    </a:lnB>
-                    <a:solidFill>
-                      <a:srgbClr val="F1F5F7"/>
-                    </a:solidFill>
-                  </a:tcPr>
-                </a:tc>
-                <a:tc>
-                  <a:txBody>
-                    <a:bodyPr/>
-                    <a:lstStyle/>
-                    <a:p>
-                      <a:pPr algn="r" indent="0" marL="0">
-                        <a:buNone/>
-                      </a:pPr>
-                      <a:r>
-                        <a:rPr lang="en-US" sz="1050" b="1" dirty="0">
-                          <a:solidFill>
-                            <a:srgbClr val="1C2A33"/>
-                          </a:solidFill>
-                          <a:latin typeface="맑은 고딕" pitchFamily="34" charset="0"/>
-                          <a:ea typeface="맑은 고딕" pitchFamily="34" charset="-122"/>
-                          <a:cs typeface="맑은 고딕" pitchFamily="34" charset="-120"/>
-                        </a:rPr>
                         <a:t>학습된 b_LS</a:t>
                       </a:r>
                       <a:endParaRPr lang="en-US" sz="1050" dirty="0">
@@ -26442,6 +26305,74 @@
                           <a:cs typeface="맑은 고딕" pitchFamily="34" charset="-120"/>
                         </a:rPr>
                         <a:t>NLL</a:t>
+                      </a:r>
+                      <a:endParaRPr lang="en-US" sz="1050" dirty="0">
+                        <a:latin typeface="맑은 고딕" charset="0"/>
+                        <a:ea typeface="맑은 고딕" charset="0"/>
+                        <a:cs typeface="맑은 고딕" charset="0"/>
+                      </a:endParaRPr>
+                    </a:p>
+                  </a:txBody>
+                  <a:tcPr marL="91440" marR="91440" marT="45720" marB="45720" anchor="ctr">
+                    <a:lnL w="12700" cap="flat" cmpd="sng" algn="ctr">
+                      <a:solidFill>
+                        <a:srgbClr val="E3E9EC"/>
+                      </a:solidFill>
+                      <a:prstDash val="solid"/>
+                      <a:round/>
+                      <a:headEnd type="none" w="med" len="med"/>
+                      <a:tailEnd type="none" w="med" len="med"/>
+                    </a:lnL>
+                    <a:lnR w="12700" cap="flat" cmpd="sng" algn="ctr">
+                      <a:solidFill>
+                        <a:srgbClr val="E3E9EC"/>
+                      </a:solidFill>
+                      <a:prstDash val="solid"/>
+                      <a:round/>
+                      <a:headEnd type="none" w="med" len="med"/>
+                      <a:tailEnd type="none" w="med" len="med"/>
+                    </a:lnR>
+                    <a:lnT w="12700" cap="flat" cmpd="sng" algn="ctr">
+                      <a:solidFill>
+                        <a:srgbClr val="E3E9EC"/>
+                      </a:solidFill>
+                      <a:prstDash val="solid"/>
+                      <a:round/>
+                      <a:headEnd type="none" w="med" len="med"/>
+                      <a:tailEnd type="none" w="med" len="med"/>
+                    </a:lnT>
+                    <a:lnB w="12700" cap="flat" cmpd="sng" algn="ctr">
+                      <a:solidFill>
+                        <a:srgbClr val="E3E9EC"/>
+                      </a:solidFill>
+                      <a:prstDash val="solid"/>
+                      <a:round/>
+                      <a:headEnd type="none" w="med" len="med"/>
+                      <a:tailEnd type="none" w="med" len="med"/>
+                    </a:lnB>
+                    <a:solidFill>
+                      <a:srgbClr val="F1F5F7"/>
+                    </a:solidFill>
+                  </a:tcPr>
+                </a:tc>
+                <a:tc>
+                  <a:txBody>
+                    <a:bodyPr/>
+                    <a:lstStyle/>
+                    <a:p>
+                      <a:pPr algn="l" indent="0" marL="0">
+                        <a:buNone/>
+                      </a:pPr>
+                      <a:r>
+                        <a:rPr lang="en-US" sz="1050" b="1" dirty="0">
+                          <a:solidFill>
+                            <a:srgbClr val="1C2A33"/>
+                          </a:solidFill>
+                          <a:latin typeface="맑은 고딕" pitchFamily="34" charset="0"/>
+                          <a:ea typeface="맑은 고딕" pitchFamily="34" charset="-122"/>
+                          <a:cs typeface="맑은 고딕" pitchFamily="34" charset="-120"/>
+                        </a:rPr>
+                        <a:t>무엇을 보려는 조건인가</a:t>
                       </a:r>
                       <a:endParaRPr lang="en-US" sz="1050" dirty="0">
                         <a:latin typeface="맑은 고딕" charset="0"/>
@@ -26635,74 +26566,6 @@
                     <a:bodyPr/>
                     <a:lstStyle/>
                     <a:p>
-                      <a:pPr algn="l" indent="0" marL="0">
-                        <a:buNone/>
-                      </a:pPr>
-                      <a:r>
-                        <a:rPr lang="en-US" sz="1050" dirty="0">
-                          <a:solidFill>
-                            <a:srgbClr val="8A9BA8"/>
-                          </a:solidFill>
-                          <a:latin typeface="맑은 고딕" pitchFamily="34" charset="0"/>
-                          <a:ea typeface="맑은 고딕" pitchFamily="34" charset="-122"/>
-                          <a:cs typeface="맑은 고딕" pitchFamily="34" charset="-120"/>
-                        </a:rPr>
-                        <a:t>followup1-1-wood</a:t>
-                      </a:r>
-                      <a:endParaRPr lang="en-US" sz="1050" dirty="0">
-                        <a:latin typeface="맑은 고딕" charset="0"/>
-                        <a:ea typeface="맑은 고딕" charset="0"/>
-                        <a:cs typeface="맑은 고딕" charset="0"/>
-                      </a:endParaRPr>
-                    </a:p>
-                  </a:txBody>
-                  <a:tcPr marL="91440" marR="91440" marT="45720" marB="45720" anchor="ctr">
-                    <a:lnL w="12700" cap="flat" cmpd="sng" algn="ctr">
-                      <a:solidFill>
-                        <a:srgbClr val="E3E9EC"/>
-                      </a:solidFill>
-                      <a:prstDash val="solid"/>
-                      <a:round/>
-                      <a:headEnd type="none" w="med" len="med"/>
-                      <a:tailEnd type="none" w="med" len="med"/>
-                    </a:lnL>
-                    <a:lnR w="12700" cap="flat" cmpd="sng" algn="ctr">
-                      <a:solidFill>
-                        <a:srgbClr val="E3E9EC"/>
-                      </a:solidFill>
-                      <a:prstDash val="solid"/>
-                      <a:round/>
-                      <a:headEnd type="none" w="med" len="med"/>
-                      <a:tailEnd type="none" w="med" len="med"/>
-                    </a:lnR>
-                    <a:lnT w="12700" cap="flat" cmpd="sng" algn="ctr">
-                      <a:solidFill>
-                        <a:srgbClr val="E3E9EC"/>
-                      </a:solidFill>
-                      <a:prstDash val="solid"/>
-                      <a:round/>
-                      <a:headEnd type="none" w="med" len="med"/>
-                      <a:tailEnd type="none" w="med" len="med"/>
-                    </a:lnT>
-                    <a:lnB w="12700" cap="flat" cmpd="sng" algn="ctr">
-                      <a:solidFill>
-                        <a:srgbClr val="E3E9EC"/>
-                      </a:solidFill>
-                      <a:prstDash val="solid"/>
-                      <a:round/>
-                      <a:headEnd type="none" w="med" len="med"/>
-                      <a:tailEnd type="none" w="med" len="med"/>
-                    </a:lnB>
-                    <a:solidFill>
-                      <a:srgbClr val="FAFCFD"/>
-                    </a:solidFill>
-                  </a:tcPr>
-                </a:tc>
-                <a:tc>
-                  <a:txBody>
-                    <a:bodyPr/>
-                    <a:lstStyle/>
-                    <a:p>
                       <a:pPr algn="r" indent="0" marL="0">
                         <a:buNone/>
                       </a:pPr>
@@ -26851,74 +26714,6 @@
                           <a:ea typeface="Calibri" pitchFamily="34" charset="-122"/>
                           <a:cs typeface="Calibri" pitchFamily="34" charset="-120"/>
                         </a:rPr>
-                        <a:t>0.504</a:t>
-                      </a:r>
-                      <a:endParaRPr lang="en-US" sz="1050" dirty="0">
-                        <a:latin typeface="Calibri" charset="0"/>
-                        <a:ea typeface="Calibri" charset="0"/>
-                        <a:cs typeface="Calibri" charset="0"/>
-                      </a:endParaRPr>
-                    </a:p>
-                  </a:txBody>
-                  <a:tcPr marL="91440" marR="91440" marT="45720" marB="45720" anchor="ctr">
-                    <a:lnL w="12700" cap="flat" cmpd="sng" algn="ctr">
-                      <a:solidFill>
-                        <a:srgbClr val="E3E9EC"/>
-                      </a:solidFill>
-                      <a:prstDash val="solid"/>
-                      <a:round/>
-                      <a:headEnd type="none" w="med" len="med"/>
-                      <a:tailEnd type="none" w="med" len="med"/>
-                    </a:lnL>
-                    <a:lnR w="12700" cap="flat" cmpd="sng" algn="ctr">
-                      <a:solidFill>
-                        <a:srgbClr val="E3E9EC"/>
-                      </a:solidFill>
-                      <a:prstDash val="solid"/>
-                      <a:round/>
-                      <a:headEnd type="none" w="med" len="med"/>
-                      <a:tailEnd type="none" w="med" len="med"/>
-                    </a:lnR>
-                    <a:lnT w="12700" cap="flat" cmpd="sng" algn="ctr">
-                      <a:solidFill>
-                        <a:srgbClr val="E3E9EC"/>
-                      </a:solidFill>
-                      <a:prstDash val="solid"/>
-                      <a:round/>
-                      <a:headEnd type="none" w="med" len="med"/>
-                      <a:tailEnd type="none" w="med" len="med"/>
-                    </a:lnT>
-                    <a:lnB w="12700" cap="flat" cmpd="sng" algn="ctr">
-                      <a:solidFill>
-                        <a:srgbClr val="E3E9EC"/>
-                      </a:solidFill>
-                      <a:prstDash val="solid"/>
-                      <a:round/>
-                      <a:headEnd type="none" w="med" len="med"/>
-                      <a:tailEnd type="none" w="med" len="med"/>
-                    </a:lnB>
-                    <a:solidFill>
-                      <a:srgbClr val="FAFCFD"/>
-                    </a:solidFill>
-                  </a:tcPr>
-                </a:tc>
-                <a:tc>
-                  <a:txBody>
-                    <a:bodyPr/>
-                    <a:lstStyle/>
-                    <a:p>
-                      <a:pPr algn="r" indent="0" marL="0">
-                        <a:buNone/>
-                      </a:pPr>
-                      <a:r>
-                        <a:rPr lang="en-US" sz="1050" dirty="0">
-                          <a:solidFill>
-                            <a:srgbClr val="8A9BA8"/>
-                          </a:solidFill>
-                          <a:latin typeface="Calibri" pitchFamily="34" charset="0"/>
-                          <a:ea typeface="Calibri" pitchFamily="34" charset="-122"/>
-                          <a:cs typeface="Calibri" pitchFamily="34" charset="-120"/>
-                        </a:rPr>
                         <a:t>1.989</a:t>
                       </a:r>
                       <a:endParaRPr lang="en-US" sz="1050" dirty="0">
@@ -26993,6 +26788,74 @@
                         <a:latin typeface="Calibri" charset="0"/>
                         <a:ea typeface="Calibri" charset="0"/>
                         <a:cs typeface="Calibri" charset="0"/>
+                      </a:endParaRPr>
+                    </a:p>
+                  </a:txBody>
+                  <a:tcPr marL="91440" marR="91440" marT="45720" marB="45720" anchor="ctr">
+                    <a:lnL w="12700" cap="flat" cmpd="sng" algn="ctr">
+                      <a:solidFill>
+                        <a:srgbClr val="E3E9EC"/>
+                      </a:solidFill>
+                      <a:prstDash val="solid"/>
+                      <a:round/>
+                      <a:headEnd type="none" w="med" len="med"/>
+                      <a:tailEnd type="none" w="med" len="med"/>
+                    </a:lnL>
+                    <a:lnR w="12700" cap="flat" cmpd="sng" algn="ctr">
+                      <a:solidFill>
+                        <a:srgbClr val="E3E9EC"/>
+                      </a:solidFill>
+                      <a:prstDash val="solid"/>
+                      <a:round/>
+                      <a:headEnd type="none" w="med" len="med"/>
+                      <a:tailEnd type="none" w="med" len="med"/>
+                    </a:lnR>
+                    <a:lnT w="12700" cap="flat" cmpd="sng" algn="ctr">
+                      <a:solidFill>
+                        <a:srgbClr val="E3E9EC"/>
+                      </a:solidFill>
+                      <a:prstDash val="solid"/>
+                      <a:round/>
+                      <a:headEnd type="none" w="med" len="med"/>
+                      <a:tailEnd type="none" w="med" len="med"/>
+                    </a:lnT>
+                    <a:lnB w="12700" cap="flat" cmpd="sng" algn="ctr">
+                      <a:solidFill>
+                        <a:srgbClr val="E3E9EC"/>
+                      </a:solidFill>
+                      <a:prstDash val="solid"/>
+                      <a:round/>
+                      <a:headEnd type="none" w="med" len="med"/>
+                      <a:tailEnd type="none" w="med" len="med"/>
+                    </a:lnB>
+                    <a:solidFill>
+                      <a:srgbClr val="FAFCFD"/>
+                    </a:solidFill>
+                  </a:tcPr>
+                </a:tc>
+                <a:tc>
+                  <a:txBody>
+                    <a:bodyPr/>
+                    <a:lstStyle/>
+                    <a:p>
+                      <a:pPr algn="l" indent="0" marL="0">
+                        <a:buNone/>
+                      </a:pPr>
+                      <a:r>
+                        <a:rPr lang="en-US" sz="1050" dirty="0">
+                          <a:solidFill>
+                            <a:srgbClr val="8A9BA8"/>
+                          </a:solidFill>
+                          <a:latin typeface="맑은 고딕" pitchFamily="34" charset="0"/>
+                          <a:ea typeface="맑은 고딕" pitchFamily="34" charset="-122"/>
+                          <a:cs typeface="맑은 고딕" pitchFamily="34" charset="-120"/>
+                        </a:rPr>
+                        <a:t>작년 실험. 비교 출발점</a:t>
+                      </a:r>
+                      <a:endParaRPr lang="en-US" sz="1050" dirty="0">
+                        <a:latin typeface="맑은 고딕" charset="0"/>
+                        <a:ea typeface="맑은 고딕" charset="0"/>
+                        <a:cs typeface="맑은 고딕" charset="0"/>
                       </a:endParaRPr>
                     </a:p>
                   </a:txBody>
@@ -27181,74 +27044,6 @@
                     <a:bodyPr/>
                     <a:lstStyle/>
                     <a:p>
-                      <a:pPr algn="l" indent="0" marL="0">
-                        <a:buNone/>
-                      </a:pPr>
-                      <a:r>
-                        <a:rPr lang="en-US" sz="1050" dirty="0">
-                          <a:solidFill>
-                            <a:srgbClr val="8A9BA8"/>
-                          </a:solidFill>
-                          <a:latin typeface="맑은 고딕" pitchFamily="34" charset="0"/>
-                          <a:ea typeface="맑은 고딕" pitchFamily="34" charset="-122"/>
-                          <a:cs typeface="맑은 고딕" pitchFamily="34" charset="-120"/>
-                        </a:rPr>
-                        <a:t>followup2-1-wood</a:t>
-                      </a:r>
-                      <a:endParaRPr lang="en-US" sz="1050" dirty="0">
-                        <a:latin typeface="맑은 고딕" charset="0"/>
-                        <a:ea typeface="맑은 고딕" charset="0"/>
-                        <a:cs typeface="맑은 고딕" charset="0"/>
-                      </a:endParaRPr>
-                    </a:p>
-                  </a:txBody>
-                  <a:tcPr marL="91440" marR="91440" marT="45720" marB="45720" anchor="ctr">
-                    <a:lnL w="12700" cap="flat" cmpd="sng" algn="ctr">
-                      <a:solidFill>
-                        <a:srgbClr val="E3E9EC"/>
-                      </a:solidFill>
-                      <a:prstDash val="solid"/>
-                      <a:round/>
-                      <a:headEnd type="none" w="med" len="med"/>
-                      <a:tailEnd type="none" w="med" len="med"/>
-                    </a:lnL>
-                    <a:lnR w="12700" cap="flat" cmpd="sng" algn="ctr">
-                      <a:solidFill>
-                        <a:srgbClr val="E3E9EC"/>
-                      </a:solidFill>
-                      <a:prstDash val="solid"/>
-                      <a:round/>
-                      <a:headEnd type="none" w="med" len="med"/>
-                      <a:tailEnd type="none" w="med" len="med"/>
-                    </a:lnR>
-                    <a:lnT w="12700" cap="flat" cmpd="sng" algn="ctr">
-                      <a:solidFill>
-                        <a:srgbClr val="E3E9EC"/>
-                      </a:solidFill>
-                      <a:prstDash val="solid"/>
-                      <a:round/>
-                      <a:headEnd type="none" w="med" len="med"/>
-                      <a:tailEnd type="none" w="med" len="med"/>
-                    </a:lnT>
-                    <a:lnB w="12700" cap="flat" cmpd="sng" algn="ctr">
-                      <a:solidFill>
-                        <a:srgbClr val="E3E9EC"/>
-                      </a:solidFill>
-                      <a:prstDash val="solid"/>
-                      <a:round/>
-                      <a:headEnd type="none" w="med" len="med"/>
-                      <a:tailEnd type="none" w="med" len="med"/>
-                    </a:lnB>
-                    <a:solidFill>
-                      <a:srgbClr val="FAFCFD"/>
-                    </a:solidFill>
-                  </a:tcPr>
-                </a:tc>
-                <a:tc>
-                  <a:txBody>
-                    <a:bodyPr/>
-                    <a:lstStyle/>
-                    <a:p>
                       <a:pPr algn="r" indent="0" marL="0">
                         <a:buNone/>
                       </a:pPr>
@@ -27397,74 +27192,6 @@
                           <a:ea typeface="Calibri" pitchFamily="34" charset="-122"/>
                           <a:cs typeface="Calibri" pitchFamily="34" charset="-120"/>
                         </a:rPr>
-                        <a:t>0.723</a:t>
-                      </a:r>
-                      <a:endParaRPr lang="en-US" sz="1050" dirty="0">
-                        <a:latin typeface="Calibri" charset="0"/>
-                        <a:ea typeface="Calibri" charset="0"/>
-                        <a:cs typeface="Calibri" charset="0"/>
-                      </a:endParaRPr>
-                    </a:p>
-                  </a:txBody>
-                  <a:tcPr marL="91440" marR="91440" marT="45720" marB="45720" anchor="ctr">
-                    <a:lnL w="12700" cap="flat" cmpd="sng" algn="ctr">
-                      <a:solidFill>
-                        <a:srgbClr val="E3E9EC"/>
-                      </a:solidFill>
-                      <a:prstDash val="solid"/>
-                      <a:round/>
-                      <a:headEnd type="none" w="med" len="med"/>
-                      <a:tailEnd type="none" w="med" len="med"/>
-                    </a:lnL>
-                    <a:lnR w="12700" cap="flat" cmpd="sng" algn="ctr">
-                      <a:solidFill>
-                        <a:srgbClr val="E3E9EC"/>
-                      </a:solidFill>
-                      <a:prstDash val="solid"/>
-                      <a:round/>
-                      <a:headEnd type="none" w="med" len="med"/>
-                      <a:tailEnd type="none" w="med" len="med"/>
-                    </a:lnR>
-                    <a:lnT w="12700" cap="flat" cmpd="sng" algn="ctr">
-                      <a:solidFill>
-                        <a:srgbClr val="E3E9EC"/>
-                      </a:solidFill>
-                      <a:prstDash val="solid"/>
-                      <a:round/>
-                      <a:headEnd type="none" w="med" len="med"/>
-                      <a:tailEnd type="none" w="med" len="med"/>
-                    </a:lnT>
-                    <a:lnB w="12700" cap="flat" cmpd="sng" algn="ctr">
-                      <a:solidFill>
-                        <a:srgbClr val="E3E9EC"/>
-                      </a:solidFill>
-                      <a:prstDash val="solid"/>
-                      <a:round/>
-                      <a:headEnd type="none" w="med" len="med"/>
-                      <a:tailEnd type="none" w="med" len="med"/>
-                    </a:lnB>
-                    <a:solidFill>
-                      <a:srgbClr val="FAFCFD"/>
-                    </a:solidFill>
-                  </a:tcPr>
-                </a:tc>
-                <a:tc>
-                  <a:txBody>
-                    <a:bodyPr/>
-                    <a:lstStyle/>
-                    <a:p>
-                      <a:pPr algn="r" indent="0" marL="0">
-                        <a:buNone/>
-                      </a:pPr>
-                      <a:r>
-                        <a:rPr lang="en-US" sz="1050" dirty="0">
-                          <a:solidFill>
-                            <a:srgbClr val="8A9BA8"/>
-                          </a:solidFill>
-                          <a:latin typeface="Calibri" pitchFamily="34" charset="0"/>
-                          <a:ea typeface="Calibri" pitchFamily="34" charset="-122"/>
-                          <a:cs typeface="Calibri" pitchFamily="34" charset="-120"/>
-                        </a:rPr>
                         <a:t>3.956</a:t>
                       </a:r>
                       <a:endParaRPr lang="en-US" sz="1050" dirty="0">
@@ -27539,6 +27266,74 @@
                         <a:latin typeface="Calibri" charset="0"/>
                         <a:ea typeface="Calibri" charset="0"/>
                         <a:cs typeface="Calibri" charset="0"/>
+                      </a:endParaRPr>
+                    </a:p>
+                  </a:txBody>
+                  <a:tcPr marL="91440" marR="91440" marT="45720" marB="45720" anchor="ctr">
+                    <a:lnL w="12700" cap="flat" cmpd="sng" algn="ctr">
+                      <a:solidFill>
+                        <a:srgbClr val="E3E9EC"/>
+                      </a:solidFill>
+                      <a:prstDash val="solid"/>
+                      <a:round/>
+                      <a:headEnd type="none" w="med" len="med"/>
+                      <a:tailEnd type="none" w="med" len="med"/>
+                    </a:lnL>
+                    <a:lnR w="12700" cap="flat" cmpd="sng" algn="ctr">
+                      <a:solidFill>
+                        <a:srgbClr val="E3E9EC"/>
+                      </a:solidFill>
+                      <a:prstDash val="solid"/>
+                      <a:round/>
+                      <a:headEnd type="none" w="med" len="med"/>
+                      <a:tailEnd type="none" w="med" len="med"/>
+                    </a:lnR>
+                    <a:lnT w="12700" cap="flat" cmpd="sng" algn="ctr">
+                      <a:solidFill>
+                        <a:srgbClr val="E3E9EC"/>
+                      </a:solidFill>
+                      <a:prstDash val="solid"/>
+                      <a:round/>
+                      <a:headEnd type="none" w="med" len="med"/>
+                      <a:tailEnd type="none" w="med" len="med"/>
+                    </a:lnT>
+                    <a:lnB w="12700" cap="flat" cmpd="sng" algn="ctr">
+                      <a:solidFill>
+                        <a:srgbClr val="E3E9EC"/>
+                      </a:solidFill>
+                      <a:prstDash val="solid"/>
+                      <a:round/>
+                      <a:headEnd type="none" w="med" len="med"/>
+                      <a:tailEnd type="none" w="med" len="med"/>
+                    </a:lnB>
+                    <a:solidFill>
+                      <a:srgbClr val="FAFCFD"/>
+                    </a:solidFill>
+                  </a:tcPr>
+                </a:tc>
+                <a:tc>
+                  <a:txBody>
+                    <a:bodyPr/>
+                    <a:lstStyle/>
+                    <a:p>
+                      <a:pPr algn="l" indent="0" marL="0">
+                        <a:buNone/>
+                      </a:pPr>
+                      <a:r>
+                        <a:rPr lang="en-US" sz="1050" dirty="0">
+                          <a:solidFill>
+                            <a:srgbClr val="8A9BA8"/>
+                          </a:solidFill>
+                          <a:latin typeface="맑은 고딕" pitchFamily="34" charset="0"/>
+                          <a:ea typeface="맑은 고딕" pitchFamily="34" charset="-122"/>
+                          <a:cs typeface="맑은 고딕" pitchFamily="34" charset="-120"/>
+                        </a:rPr>
+                        <a:t>작년 실험. LQ만 집계 방식이 다르다</a:t>
+                      </a:r>
+                      <a:endParaRPr lang="en-US" sz="1050" dirty="0">
+                        <a:latin typeface="맑은 고딕" charset="0"/>
+                        <a:ea typeface="맑은 고딕" charset="0"/>
+                        <a:cs typeface="맑은 고딕" charset="0"/>
                       </a:endParaRPr>
                     </a:p>
                   </a:txBody>
@@ -27727,74 +27522,6 @@
                     <a:bodyPr/>
                     <a:lstStyle/>
                     <a:p>
-                      <a:pPr algn="l" indent="0" marL="0">
-                        <a:buNone/>
-                      </a:pPr>
-                      <a:r>
-                        <a:rPr lang="en-US" sz="1050" b="1" dirty="0">
-                          <a:solidFill>
-                            <a:srgbClr val="1C2A33"/>
-                          </a:solidFill>
-                          <a:latin typeface="맑은 고딕" pitchFamily="34" charset="0"/>
-                          <a:ea typeface="맑은 고딕" pitchFamily="34" charset="-122"/>
-                          <a:cs typeface="맑은 고딕" pitchFamily="34" charset="-120"/>
-                        </a:rPr>
-                        <a:t>followup3-avg-b4</a:t>
-                      </a:r>
-                      <a:endParaRPr lang="en-US" sz="1050" dirty="0">
-                        <a:latin typeface="맑은 고딕" charset="0"/>
-                        <a:ea typeface="맑은 고딕" charset="0"/>
-                        <a:cs typeface="맑은 고딕" charset="0"/>
-                      </a:endParaRPr>
-                    </a:p>
-                  </a:txBody>
-                  <a:tcPr marL="91440" marR="91440" marT="45720" marB="45720" anchor="ctr">
-                    <a:lnL w="12700" cap="flat" cmpd="sng" algn="ctr">
-                      <a:solidFill>
-                        <a:srgbClr val="E3E9EC"/>
-                      </a:solidFill>
-                      <a:prstDash val="solid"/>
-                      <a:round/>
-                      <a:headEnd type="none" w="med" len="med"/>
-                      <a:tailEnd type="none" w="med" len="med"/>
-                    </a:lnL>
-                    <a:lnR w="12700" cap="flat" cmpd="sng" algn="ctr">
-                      <a:solidFill>
-                        <a:srgbClr val="E3E9EC"/>
-                      </a:solidFill>
-                      <a:prstDash val="solid"/>
-                      <a:round/>
-                      <a:headEnd type="none" w="med" len="med"/>
-                      <a:tailEnd type="none" w="med" len="med"/>
-                    </a:lnR>
-                    <a:lnT w="12700" cap="flat" cmpd="sng" algn="ctr">
-                      <a:solidFill>
-                        <a:srgbClr val="E3E9EC"/>
-                      </a:solidFill>
-                      <a:prstDash val="solid"/>
-                      <a:round/>
-                      <a:headEnd type="none" w="med" len="med"/>
-                      <a:tailEnd type="none" w="med" len="med"/>
-                    </a:lnT>
-                    <a:lnB w="12700" cap="flat" cmpd="sng" algn="ctr">
-                      <a:solidFill>
-                        <a:srgbClr val="E3E9EC"/>
-                      </a:solidFill>
-                      <a:prstDash val="solid"/>
-                      <a:round/>
-                      <a:headEnd type="none" w="med" len="med"/>
-                      <a:tailEnd type="none" w="med" len="med"/>
-                    </a:lnB>
-                    <a:solidFill>
-                      <a:srgbClr val="FFFFFF"/>
-                    </a:solidFill>
-                  </a:tcPr>
-                </a:tc>
-                <a:tc>
-                  <a:txBody>
-                    <a:bodyPr/>
-                    <a:lstStyle/>
-                    <a:p>
                       <a:pPr algn="r" indent="0" marL="0">
                         <a:buNone/>
                       </a:pPr>
@@ -27943,74 +27670,6 @@
                           <a:ea typeface="Calibri" pitchFamily="34" charset="-122"/>
                           <a:cs typeface="Calibri" pitchFamily="34" charset="-120"/>
                         </a:rPr>
-                        <a:t>0.727</a:t>
-                      </a:r>
-                      <a:endParaRPr lang="en-US" sz="1050" dirty="0">
-                        <a:latin typeface="Calibri" charset="0"/>
-                        <a:ea typeface="Calibri" charset="0"/>
-                        <a:cs typeface="Calibri" charset="0"/>
-                      </a:endParaRPr>
-                    </a:p>
-                  </a:txBody>
-                  <a:tcPr marL="91440" marR="91440" marT="45720" marB="45720" anchor="ctr">
-                    <a:lnL w="12700" cap="flat" cmpd="sng" algn="ctr">
-                      <a:solidFill>
-                        <a:srgbClr val="E3E9EC"/>
-                      </a:solidFill>
-                      <a:prstDash val="solid"/>
-                      <a:round/>
-                      <a:headEnd type="none" w="med" len="med"/>
-                      <a:tailEnd type="none" w="med" len="med"/>
-                    </a:lnL>
-                    <a:lnR w="12700" cap="flat" cmpd="sng" algn="ctr">
-                      <a:solidFill>
-                        <a:srgbClr val="E3E9EC"/>
-                      </a:solidFill>
-                      <a:prstDash val="solid"/>
-                      <a:round/>
-                      <a:headEnd type="none" w="med" len="med"/>
-                      <a:tailEnd type="none" w="med" len="med"/>
-                    </a:lnR>
-                    <a:lnT w="12700" cap="flat" cmpd="sng" algn="ctr">
-                      <a:solidFill>
-                        <a:srgbClr val="E3E9EC"/>
-                      </a:solidFill>
-                      <a:prstDash val="solid"/>
-                      <a:round/>
-                      <a:headEnd type="none" w="med" len="med"/>
-                      <a:tailEnd type="none" w="med" len="med"/>
-                    </a:lnT>
-                    <a:lnB w="12700" cap="flat" cmpd="sng" algn="ctr">
-                      <a:solidFill>
-                        <a:srgbClr val="E3E9EC"/>
-                      </a:solidFill>
-                      <a:prstDash val="solid"/>
-                      <a:round/>
-                      <a:headEnd type="none" w="med" len="med"/>
-                      <a:tailEnd type="none" w="med" len="med"/>
-                    </a:lnB>
-                    <a:solidFill>
-                      <a:srgbClr val="FFFFFF"/>
-                    </a:solidFill>
-                  </a:tcPr>
-                </a:tc>
-                <a:tc>
-                  <a:txBody>
-                    <a:bodyPr/>
-                    <a:lstStyle/>
-                    <a:p>
-                      <a:pPr algn="r" indent="0" marL="0">
-                        <a:buNone/>
-                      </a:pPr>
-                      <a:r>
-                        <a:rPr lang="en-US" sz="1050" b="1" dirty="0">
-                          <a:solidFill>
-                            <a:srgbClr val="1C2A33"/>
-                          </a:solidFill>
-                          <a:latin typeface="Calibri" pitchFamily="34" charset="0"/>
-                          <a:ea typeface="Calibri" pitchFamily="34" charset="-122"/>
-                          <a:cs typeface="Calibri" pitchFamily="34" charset="-120"/>
-                        </a:rPr>
                         <a:t>3.954</a:t>
                       </a:r>
                       <a:endParaRPr lang="en-US" sz="1050" dirty="0">
@@ -28085,6 +27744,74 @@
                         <a:latin typeface="Calibri" charset="0"/>
                         <a:ea typeface="Calibri" charset="0"/>
                         <a:cs typeface="Calibri" charset="0"/>
+                      </a:endParaRPr>
+                    </a:p>
+                  </a:txBody>
+                  <a:tcPr marL="91440" marR="91440" marT="45720" marB="45720" anchor="ctr">
+                    <a:lnL w="12700" cap="flat" cmpd="sng" algn="ctr">
+                      <a:solidFill>
+                        <a:srgbClr val="E3E9EC"/>
+                      </a:solidFill>
+                      <a:prstDash val="solid"/>
+                      <a:round/>
+                      <a:headEnd type="none" w="med" len="med"/>
+                      <a:tailEnd type="none" w="med" len="med"/>
+                    </a:lnL>
+                    <a:lnR w="12700" cap="flat" cmpd="sng" algn="ctr">
+                      <a:solidFill>
+                        <a:srgbClr val="E3E9EC"/>
+                      </a:solidFill>
+                      <a:prstDash val="solid"/>
+                      <a:round/>
+                      <a:headEnd type="none" w="med" len="med"/>
+                      <a:tailEnd type="none" w="med" len="med"/>
+                    </a:lnR>
+                    <a:lnT w="12700" cap="flat" cmpd="sng" algn="ctr">
+                      <a:solidFill>
+                        <a:srgbClr val="E3E9EC"/>
+                      </a:solidFill>
+                      <a:prstDash val="solid"/>
+                      <a:round/>
+                      <a:headEnd type="none" w="med" len="med"/>
+                      <a:tailEnd type="none" w="med" len="med"/>
+                    </a:lnT>
+                    <a:lnB w="12700" cap="flat" cmpd="sng" algn="ctr">
+                      <a:solidFill>
+                        <a:srgbClr val="E3E9EC"/>
+                      </a:solidFill>
+                      <a:prstDash val="solid"/>
+                      <a:round/>
+                      <a:headEnd type="none" w="med" len="med"/>
+                      <a:tailEnd type="none" w="med" len="med"/>
+                    </a:lnB>
+                    <a:solidFill>
+                      <a:srgbClr val="FFFFFF"/>
+                    </a:solidFill>
+                  </a:tcPr>
+                </a:tc>
+                <a:tc>
+                  <a:txBody>
+                    <a:bodyPr/>
+                    <a:lstStyle/>
+                    <a:p>
+                      <a:pPr algn="l" indent="0" marL="0">
+                        <a:buNone/>
+                      </a:pPr>
+                      <a:r>
+                        <a:rPr lang="en-US" sz="1050" b="1" dirty="0">
+                          <a:solidFill>
+                            <a:srgbClr val="1C2A33"/>
+                          </a:solidFill>
+                          <a:latin typeface="맑은 고딕" pitchFamily="34" charset="0"/>
+                          <a:ea typeface="맑은 고딕" pitchFamily="34" charset="-122"/>
+                          <a:cs typeface="맑은 고딕" pitchFamily="34" charset="-120"/>
+                        </a:rPr>
+                        <a:t>b 상한을 4로 넓혀 본다</a:t>
+                      </a:r>
+                      <a:endParaRPr lang="en-US" sz="1050" dirty="0">
+                        <a:latin typeface="맑은 고딕" charset="0"/>
+                        <a:ea typeface="맑은 고딕" charset="0"/>
+                        <a:cs typeface="맑은 고딕" charset="0"/>
                       </a:endParaRPr>
                     </a:p>
                   </a:txBody>
@@ -28273,74 +28000,6 @@
                     <a:bodyPr/>
                     <a:lstStyle/>
                     <a:p>
-                      <a:pPr algn="l" indent="0" marL="0">
-                        <a:buNone/>
-                      </a:pPr>
-                      <a:r>
-                        <a:rPr lang="en-US" sz="1050" b="1" dirty="0">
-                          <a:solidFill>
-                            <a:srgbClr val="1C2A33"/>
-                          </a:solidFill>
-                          <a:latin typeface="맑은 고딕" pitchFamily="34" charset="0"/>
-                          <a:ea typeface="맑은 고딕" pitchFamily="34" charset="-122"/>
-                          <a:cs typeface="맑은 고딕" pitchFamily="34" charset="-120"/>
-                        </a:rPr>
-                        <a:t>followup3-avg-b10</a:t>
-                      </a:r>
-                      <a:endParaRPr lang="en-US" sz="1050" dirty="0">
-                        <a:latin typeface="맑은 고딕" charset="0"/>
-                        <a:ea typeface="맑은 고딕" charset="0"/>
-                        <a:cs typeface="맑은 고딕" charset="0"/>
-                      </a:endParaRPr>
-                    </a:p>
-                  </a:txBody>
-                  <a:tcPr marL="91440" marR="91440" marT="45720" marB="45720" anchor="ctr">
-                    <a:lnL w="12700" cap="flat" cmpd="sng" algn="ctr">
-                      <a:solidFill>
-                        <a:srgbClr val="E3E9EC"/>
-                      </a:solidFill>
-                      <a:prstDash val="solid"/>
-                      <a:round/>
-                      <a:headEnd type="none" w="med" len="med"/>
-                      <a:tailEnd type="none" w="med" len="med"/>
-                    </a:lnL>
-                    <a:lnR w="12700" cap="flat" cmpd="sng" algn="ctr">
-                      <a:solidFill>
-                        <a:srgbClr val="E3E9EC"/>
-                      </a:solidFill>
-                      <a:prstDash val="solid"/>
-                      <a:round/>
-                      <a:headEnd type="none" w="med" len="med"/>
-                      <a:tailEnd type="none" w="med" len="med"/>
-                    </a:lnR>
-                    <a:lnT w="12700" cap="flat" cmpd="sng" algn="ctr">
-                      <a:solidFill>
-                        <a:srgbClr val="E3E9EC"/>
-                      </a:solidFill>
-                      <a:prstDash val="solid"/>
-                      <a:round/>
-                      <a:headEnd type="none" w="med" len="med"/>
-                      <a:tailEnd type="none" w="med" len="med"/>
-                    </a:lnT>
-                    <a:lnB w="12700" cap="flat" cmpd="sng" algn="ctr">
-                      <a:solidFill>
-                        <a:srgbClr val="E3E9EC"/>
-                      </a:solidFill>
-                      <a:prstDash val="solid"/>
-                      <a:round/>
-                      <a:headEnd type="none" w="med" len="med"/>
-                      <a:tailEnd type="none" w="med" len="med"/>
-                    </a:lnB>
-                    <a:solidFill>
-                      <a:srgbClr val="FFFFFF"/>
-                    </a:solidFill>
-                  </a:tcPr>
-                </a:tc>
-                <a:tc>
-                  <a:txBody>
-                    <a:bodyPr/>
-                    <a:lstStyle/>
-                    <a:p>
                       <a:pPr algn="r" indent="0" marL="0">
                         <a:buNone/>
                       </a:pPr>
@@ -28489,74 +28148,6 @@
                           <a:ea typeface="Calibri" pitchFamily="34" charset="-122"/>
                           <a:cs typeface="Calibri" pitchFamily="34" charset="-120"/>
                         </a:rPr>
-                        <a:t>1.568</a:t>
-                      </a:r>
-                      <a:endParaRPr lang="en-US" sz="1050" dirty="0">
-                        <a:latin typeface="Calibri" charset="0"/>
-                        <a:ea typeface="Calibri" charset="0"/>
-                        <a:cs typeface="Calibri" charset="0"/>
-                      </a:endParaRPr>
-                    </a:p>
-                  </a:txBody>
-                  <a:tcPr marL="91440" marR="91440" marT="45720" marB="45720" anchor="ctr">
-                    <a:lnL w="12700" cap="flat" cmpd="sng" algn="ctr">
-                      <a:solidFill>
-                        <a:srgbClr val="E3E9EC"/>
-                      </a:solidFill>
-                      <a:prstDash val="solid"/>
-                      <a:round/>
-                      <a:headEnd type="none" w="med" len="med"/>
-                      <a:tailEnd type="none" w="med" len="med"/>
-                    </a:lnL>
-                    <a:lnR w="12700" cap="flat" cmpd="sng" algn="ctr">
-                      <a:solidFill>
-                        <a:srgbClr val="E3E9EC"/>
-                      </a:solidFill>
-                      <a:prstDash val="solid"/>
-                      <a:round/>
-                      <a:headEnd type="none" w="med" len="med"/>
-                      <a:tailEnd type="none" w="med" len="med"/>
-                    </a:lnR>
-                    <a:lnT w="12700" cap="flat" cmpd="sng" algn="ctr">
-                      <a:solidFill>
-                        <a:srgbClr val="E3E9EC"/>
-                      </a:solidFill>
-                      <a:prstDash val="solid"/>
-                      <a:round/>
-                      <a:headEnd type="none" w="med" len="med"/>
-                      <a:tailEnd type="none" w="med" len="med"/>
-                    </a:lnT>
-                    <a:lnB w="12700" cap="flat" cmpd="sng" algn="ctr">
-                      <a:solidFill>
-                        <a:srgbClr val="E3E9EC"/>
-                      </a:solidFill>
-                      <a:prstDash val="solid"/>
-                      <a:round/>
-                      <a:headEnd type="none" w="med" len="med"/>
-                      <a:tailEnd type="none" w="med" len="med"/>
-                    </a:lnB>
-                    <a:solidFill>
-                      <a:srgbClr val="FFFFFF"/>
-                    </a:solidFill>
-                  </a:tcPr>
-                </a:tc>
-                <a:tc>
-                  <a:txBody>
-                    <a:bodyPr/>
-                    <a:lstStyle/>
-                    <a:p>
-                      <a:pPr algn="r" indent="0" marL="0">
-                        <a:buNone/>
-                      </a:pPr>
-                      <a:r>
-                        <a:rPr lang="en-US" sz="1050" b="1" dirty="0">
-                          <a:solidFill>
-                            <a:srgbClr val="1C2A33"/>
-                          </a:solidFill>
-                          <a:latin typeface="Calibri" pitchFamily="34" charset="0"/>
-                          <a:ea typeface="Calibri" pitchFamily="34" charset="-122"/>
-                          <a:cs typeface="Calibri" pitchFamily="34" charset="-120"/>
-                        </a:rPr>
                         <a:t>9.523</a:t>
                       </a:r>
                       <a:endParaRPr lang="en-US" sz="1050" dirty="0">
@@ -28631,6 +28222,74 @@
                         <a:latin typeface="Calibri" charset="0"/>
                         <a:ea typeface="Calibri" charset="0"/>
                         <a:cs typeface="Calibri" charset="0"/>
+                      </a:endParaRPr>
+                    </a:p>
+                  </a:txBody>
+                  <a:tcPr marL="91440" marR="91440" marT="45720" marB="45720" anchor="ctr">
+                    <a:lnL w="12700" cap="flat" cmpd="sng" algn="ctr">
+                      <a:solidFill>
+                        <a:srgbClr val="E3E9EC"/>
+                      </a:solidFill>
+                      <a:prstDash val="solid"/>
+                      <a:round/>
+                      <a:headEnd type="none" w="med" len="med"/>
+                      <a:tailEnd type="none" w="med" len="med"/>
+                    </a:lnL>
+                    <a:lnR w="12700" cap="flat" cmpd="sng" algn="ctr">
+                      <a:solidFill>
+                        <a:srgbClr val="E3E9EC"/>
+                      </a:solidFill>
+                      <a:prstDash val="solid"/>
+                      <a:round/>
+                      <a:headEnd type="none" w="med" len="med"/>
+                      <a:tailEnd type="none" w="med" len="med"/>
+                    </a:lnR>
+                    <a:lnT w="12700" cap="flat" cmpd="sng" algn="ctr">
+                      <a:solidFill>
+                        <a:srgbClr val="E3E9EC"/>
+                      </a:solidFill>
+                      <a:prstDash val="solid"/>
+                      <a:round/>
+                      <a:headEnd type="none" w="med" len="med"/>
+                      <a:tailEnd type="none" w="med" len="med"/>
+                    </a:lnT>
+                    <a:lnB w="12700" cap="flat" cmpd="sng" algn="ctr">
+                      <a:solidFill>
+                        <a:srgbClr val="E3E9EC"/>
+                      </a:solidFill>
+                      <a:prstDash val="solid"/>
+                      <a:round/>
+                      <a:headEnd type="none" w="med" len="med"/>
+                      <a:tailEnd type="none" w="med" len="med"/>
+                    </a:lnB>
+                    <a:solidFill>
+                      <a:srgbClr val="FFFFFF"/>
+                    </a:solidFill>
+                  </a:tcPr>
+                </a:tc>
+                <a:tc>
+                  <a:txBody>
+                    <a:bodyPr/>
+                    <a:lstStyle/>
+                    <a:p>
+                      <a:pPr algn="l" indent="0" marL="0">
+                        <a:buNone/>
+                      </a:pPr>
+                      <a:r>
+                        <a:rPr lang="en-US" sz="1050" b="1" dirty="0">
+                          <a:solidFill>
+                            <a:srgbClr val="1C2A33"/>
+                          </a:solidFill>
+                          <a:latin typeface="맑은 고딕" pitchFamily="34" charset="0"/>
+                          <a:ea typeface="맑은 고딕" pitchFamily="34" charset="-122"/>
+                          <a:cs typeface="맑은 고딕" pitchFamily="34" charset="-120"/>
+                        </a:rPr>
+                        <a:t>b 상한을 10까지 넓혀 본다</a:t>
+                      </a:r>
+                      <a:endParaRPr lang="en-US" sz="1050" dirty="0">
+                        <a:latin typeface="맑은 고딕" charset="0"/>
+                        <a:ea typeface="맑은 고딕" charset="0"/>
+                        <a:cs typeface="맑은 고딕" charset="0"/>
                       </a:endParaRPr>
                     </a:p>
                   </a:txBody>
@@ -28819,74 +28478,6 @@
                     <a:bodyPr/>
                     <a:lstStyle/>
                     <a:p>
-                      <a:pPr algn="l" indent="0" marL="0">
-                        <a:buNone/>
-                      </a:pPr>
-                      <a:r>
-                        <a:rPr lang="en-US" sz="1050" b="1" dirty="0">
-                          <a:solidFill>
-                            <a:srgbClr val="1C2A33"/>
-                          </a:solidFill>
-                          <a:latin typeface="맑은 고딕" pitchFamily="34" charset="0"/>
-                          <a:ea typeface="맑은 고딕" pitchFamily="34" charset="-122"/>
-                          <a:cs typeface="맑은 고딕" pitchFamily="34" charset="-120"/>
-                        </a:rPr>
-                        <a:t>followup3-lqmax-b10</a:t>
-                      </a:r>
-                      <a:endParaRPr lang="en-US" sz="1050" dirty="0">
-                        <a:latin typeface="맑은 고딕" charset="0"/>
-                        <a:ea typeface="맑은 고딕" charset="0"/>
-                        <a:cs typeface="맑은 고딕" charset="0"/>
-                      </a:endParaRPr>
-                    </a:p>
-                  </a:txBody>
-                  <a:tcPr marL="91440" marR="91440" marT="45720" marB="45720" anchor="ctr">
-                    <a:lnL w="12700" cap="flat" cmpd="sng" algn="ctr">
-                      <a:solidFill>
-                        <a:srgbClr val="E3E9EC"/>
-                      </a:solidFill>
-                      <a:prstDash val="solid"/>
-                      <a:round/>
-                      <a:headEnd type="none" w="med" len="med"/>
-                      <a:tailEnd type="none" w="med" len="med"/>
-                    </a:lnL>
-                    <a:lnR w="12700" cap="flat" cmpd="sng" algn="ctr">
-                      <a:solidFill>
-                        <a:srgbClr val="E3E9EC"/>
-                      </a:solidFill>
-                      <a:prstDash val="solid"/>
-                      <a:round/>
-                      <a:headEnd type="none" w="med" len="med"/>
-                      <a:tailEnd type="none" w="med" len="med"/>
-                    </a:lnR>
-                    <a:lnT w="12700" cap="flat" cmpd="sng" algn="ctr">
-                      <a:solidFill>
-                        <a:srgbClr val="E3E9EC"/>
-                      </a:solidFill>
-                      <a:prstDash val="solid"/>
-                      <a:round/>
-                      <a:headEnd type="none" w="med" len="med"/>
-                      <a:tailEnd type="none" w="med" len="med"/>
-                    </a:lnT>
-                    <a:lnB w="12700" cap="flat" cmpd="sng" algn="ctr">
-                      <a:solidFill>
-                        <a:srgbClr val="E3E9EC"/>
-                      </a:solidFill>
-                      <a:prstDash val="solid"/>
-                      <a:round/>
-                      <a:headEnd type="none" w="med" len="med"/>
-                      <a:tailEnd type="none" w="med" len="med"/>
-                    </a:lnB>
-                    <a:solidFill>
-                      <a:srgbClr val="FFFFFF"/>
-                    </a:solidFill>
-                  </a:tcPr>
-                </a:tc>
-                <a:tc>
-                  <a:txBody>
-                    <a:bodyPr/>
-                    <a:lstStyle/>
-                    <a:p>
                       <a:pPr algn="r" indent="0" marL="0">
                         <a:buNone/>
                       </a:pPr>
@@ -29035,74 +28626,6 @@
                           <a:ea typeface="Calibri" pitchFamily="34" charset="-122"/>
                           <a:cs typeface="Calibri" pitchFamily="34" charset="-120"/>
                         </a:rPr>
-                        <a:t>1.583</a:t>
-                      </a:r>
-                      <a:endParaRPr lang="en-US" sz="1050" dirty="0">
-                        <a:latin typeface="Calibri" charset="0"/>
-                        <a:ea typeface="Calibri" charset="0"/>
-                        <a:cs typeface="Calibri" charset="0"/>
-                      </a:endParaRPr>
-                    </a:p>
-                  </a:txBody>
-                  <a:tcPr marL="91440" marR="91440" marT="45720" marB="45720" anchor="ctr">
-                    <a:lnL w="12700" cap="flat" cmpd="sng" algn="ctr">
-                      <a:solidFill>
-                        <a:srgbClr val="E3E9EC"/>
-                      </a:solidFill>
-                      <a:prstDash val="solid"/>
-                      <a:round/>
-                      <a:headEnd type="none" w="med" len="med"/>
-                      <a:tailEnd type="none" w="med" len="med"/>
-                    </a:lnL>
-                    <a:lnR w="12700" cap="flat" cmpd="sng" algn="ctr">
-                      <a:solidFill>
-                        <a:srgbClr val="E3E9EC"/>
-                      </a:solidFill>
-                      <a:prstDash val="solid"/>
-                      <a:round/>
-                      <a:headEnd type="none" w="med" len="med"/>
-                      <a:tailEnd type="none" w="med" len="med"/>
-                    </a:lnR>
-                    <a:lnT w="12700" cap="flat" cmpd="sng" algn="ctr">
-                      <a:solidFill>
-                        <a:srgbClr val="E3E9EC"/>
-                      </a:solidFill>
-                      <a:prstDash val="solid"/>
-                      <a:round/>
-                      <a:headEnd type="none" w="med" len="med"/>
-                      <a:tailEnd type="none" w="med" len="med"/>
-                    </a:lnT>
-                    <a:lnB w="12700" cap="flat" cmpd="sng" algn="ctr">
-                      <a:solidFill>
-                        <a:srgbClr val="E3E9EC"/>
-                      </a:solidFill>
-                      <a:prstDash val="solid"/>
-                      <a:round/>
-                      <a:headEnd type="none" w="med" len="med"/>
-                      <a:tailEnd type="none" w="med" len="med"/>
-                    </a:lnB>
-                    <a:solidFill>
-                      <a:srgbClr val="FFFFFF"/>
-                    </a:solidFill>
-                  </a:tcPr>
-                </a:tc>
-                <a:tc>
-                  <a:txBody>
-                    <a:bodyPr/>
-                    <a:lstStyle/>
-                    <a:p>
-                      <a:pPr algn="r" indent="0" marL="0">
-                        <a:buNone/>
-                      </a:pPr>
-                      <a:r>
-                        <a:rPr lang="en-US" sz="1050" b="1" dirty="0">
-                          <a:solidFill>
-                            <a:srgbClr val="1C2A33"/>
-                          </a:solidFill>
-                          <a:latin typeface="Calibri" pitchFamily="34" charset="0"/>
-                          <a:ea typeface="Calibri" pitchFamily="34" charset="-122"/>
-                          <a:cs typeface="Calibri" pitchFamily="34" charset="-120"/>
-                        </a:rPr>
                         <a:t>9.589</a:t>
                       </a:r>
                       <a:endParaRPr lang="en-US" sz="1050" dirty="0">
@@ -29177,6 +28700,74 @@
                         <a:latin typeface="Calibri" charset="0"/>
                         <a:ea typeface="Calibri" charset="0"/>
                         <a:cs typeface="Calibri" charset="0"/>
+                      </a:endParaRPr>
+                    </a:p>
+                  </a:txBody>
+                  <a:tcPr marL="91440" marR="91440" marT="45720" marB="45720" anchor="ctr">
+                    <a:lnL w="12700" cap="flat" cmpd="sng" algn="ctr">
+                      <a:solidFill>
+                        <a:srgbClr val="E3E9EC"/>
+                      </a:solidFill>
+                      <a:prstDash val="solid"/>
+                      <a:round/>
+                      <a:headEnd type="none" w="med" len="med"/>
+                      <a:tailEnd type="none" w="med" len="med"/>
+                    </a:lnL>
+                    <a:lnR w="12700" cap="flat" cmpd="sng" algn="ctr">
+                      <a:solidFill>
+                        <a:srgbClr val="E3E9EC"/>
+                      </a:solidFill>
+                      <a:prstDash val="solid"/>
+                      <a:round/>
+                      <a:headEnd type="none" w="med" len="med"/>
+                      <a:tailEnd type="none" w="med" len="med"/>
+                    </a:lnR>
+                    <a:lnT w="12700" cap="flat" cmpd="sng" algn="ctr">
+                      <a:solidFill>
+                        <a:srgbClr val="E3E9EC"/>
+                      </a:solidFill>
+                      <a:prstDash val="solid"/>
+                      <a:round/>
+                      <a:headEnd type="none" w="med" len="med"/>
+                      <a:tailEnd type="none" w="med" len="med"/>
+                    </a:lnT>
+                    <a:lnB w="12700" cap="flat" cmpd="sng" algn="ctr">
+                      <a:solidFill>
+                        <a:srgbClr val="E3E9EC"/>
+                      </a:solidFill>
+                      <a:prstDash val="solid"/>
+                      <a:round/>
+                      <a:headEnd type="none" w="med" len="med"/>
+                      <a:tailEnd type="none" w="med" len="med"/>
+                    </a:lnB>
+                    <a:solidFill>
+                      <a:srgbClr val="FFFFFF"/>
+                    </a:solidFill>
+                  </a:tcPr>
+                </a:tc>
+                <a:tc>
+                  <a:txBody>
+                    <a:bodyPr/>
+                    <a:lstStyle/>
+                    <a:p>
+                      <a:pPr algn="l" indent="0" marL="0">
+                        <a:buNone/>
+                      </a:pPr>
+                      <a:r>
+                        <a:rPr lang="en-US" sz="1050" b="1" dirty="0">
+                          <a:solidFill>
+                            <a:srgbClr val="1C2A33"/>
+                          </a:solidFill>
+                          <a:latin typeface="맑은 고딕" pitchFamily="34" charset="0"/>
+                          <a:ea typeface="맑은 고딕" pitchFamily="34" charset="-122"/>
+                          <a:cs typeface="맑은 고딕" pitchFamily="34" charset="-120"/>
+                        </a:rPr>
+                        <a:t>2번과 같되 LQ를 최대집계로</a:t>
+                      </a:r>
+                      <a:endParaRPr lang="en-US" sz="1050" dirty="0">
+                        <a:latin typeface="맑은 고딕" charset="0"/>
+                        <a:ea typeface="맑은 고딕" charset="0"/>
+                        <a:cs typeface="맑은 고딕" charset="0"/>
                       </a:endParaRPr>
                     </a:p>
                   </a:txBody>
@@ -29365,74 +28956,6 @@
                     <a:bodyPr/>
                     <a:lstStyle/>
                     <a:p>
-                      <a:pPr algn="l" indent="0" marL="0">
-                        <a:buNone/>
-                      </a:pPr>
-                      <a:r>
-                        <a:rPr lang="en-US" sz="1050" b="1" dirty="0">
-                          <a:solidFill>
-                            <a:srgbClr val="1C2A33"/>
-                          </a:solidFill>
-                          <a:latin typeface="맑은 고딕" pitchFamily="34" charset="0"/>
-                          <a:ea typeface="맑은 고딕" pitchFamily="34" charset="-122"/>
-                          <a:cs typeface="맑은 고딕" pitchFamily="34" charset="-120"/>
-                        </a:rPr>
-                        <a:t>(2번 그대로 · 학습 없음)</a:t>
-                      </a:r>
-                      <a:endParaRPr lang="en-US" sz="1050" dirty="0">
-                        <a:latin typeface="맑은 고딕" charset="0"/>
-                        <a:ea typeface="맑은 고딕" charset="0"/>
-                        <a:cs typeface="맑은 고딕" charset="0"/>
-                      </a:endParaRPr>
-                    </a:p>
-                  </a:txBody>
-                  <a:tcPr marL="91440" marR="91440" marT="45720" marB="45720" anchor="ctr">
-                    <a:lnL w="12700" cap="flat" cmpd="sng" algn="ctr">
-                      <a:solidFill>
-                        <a:srgbClr val="E3E9EC"/>
-                      </a:solidFill>
-                      <a:prstDash val="solid"/>
-                      <a:round/>
-                      <a:headEnd type="none" w="med" len="med"/>
-                      <a:tailEnd type="none" w="med" len="med"/>
-                    </a:lnL>
-                    <a:lnR w="12700" cap="flat" cmpd="sng" algn="ctr">
-                      <a:solidFill>
-                        <a:srgbClr val="E3E9EC"/>
-                      </a:solidFill>
-                      <a:prstDash val="solid"/>
-                      <a:round/>
-                      <a:headEnd type="none" w="med" len="med"/>
-                      <a:tailEnd type="none" w="med" len="med"/>
-                    </a:lnR>
-                    <a:lnT w="12700" cap="flat" cmpd="sng" algn="ctr">
-                      <a:solidFill>
-                        <a:srgbClr val="E3E9EC"/>
-                      </a:solidFill>
-                      <a:prstDash val="solid"/>
-                      <a:round/>
-                      <a:headEnd type="none" w="med" len="med"/>
-                      <a:tailEnd type="none" w="med" len="med"/>
-                    </a:lnT>
-                    <a:lnB w="12700" cap="flat" cmpd="sng" algn="ctr">
-                      <a:solidFill>
-                        <a:srgbClr val="E3E9EC"/>
-                      </a:solidFill>
-                      <a:prstDash val="solid"/>
-                      <a:round/>
-                      <a:headEnd type="none" w="med" len="med"/>
-                      <a:tailEnd type="none" w="med" len="med"/>
-                    </a:lnB>
-                    <a:solidFill>
-                      <a:srgbClr val="FFFFFF"/>
-                    </a:solidFill>
-                  </a:tcPr>
-                </a:tc>
-                <a:tc>
-                  <a:txBody>
-                    <a:bodyPr/>
-                    <a:lstStyle/>
-                    <a:p>
                       <a:pPr algn="r" indent="0" marL="0">
                         <a:buNone/>
                       </a:pPr>
@@ -29581,74 +29104,6 @@
                           <a:ea typeface="Calibri" pitchFamily="34" charset="-122"/>
                           <a:cs typeface="Calibri" pitchFamily="34" charset="-120"/>
                         </a:rPr>
-                        <a:t>1.568</a:t>
-                      </a:r>
-                      <a:endParaRPr lang="en-US" sz="1050" dirty="0">
-                        <a:latin typeface="Calibri" charset="0"/>
-                        <a:ea typeface="Calibri" charset="0"/>
-                        <a:cs typeface="Calibri" charset="0"/>
-                      </a:endParaRPr>
-                    </a:p>
-                  </a:txBody>
-                  <a:tcPr marL="91440" marR="91440" marT="45720" marB="45720" anchor="ctr">
-                    <a:lnL w="12700" cap="flat" cmpd="sng" algn="ctr">
-                      <a:solidFill>
-                        <a:srgbClr val="E3E9EC"/>
-                      </a:solidFill>
-                      <a:prstDash val="solid"/>
-                      <a:round/>
-                      <a:headEnd type="none" w="med" len="med"/>
-                      <a:tailEnd type="none" w="med" len="med"/>
-                    </a:lnL>
-                    <a:lnR w="12700" cap="flat" cmpd="sng" algn="ctr">
-                      <a:solidFill>
-                        <a:srgbClr val="E3E9EC"/>
-                      </a:solidFill>
-                      <a:prstDash val="solid"/>
-                      <a:round/>
-                      <a:headEnd type="none" w="med" len="med"/>
-                      <a:tailEnd type="none" w="med" len="med"/>
-                    </a:lnR>
-                    <a:lnT w="12700" cap="flat" cmpd="sng" algn="ctr">
-                      <a:solidFill>
-                        <a:srgbClr val="E3E9EC"/>
-                      </a:solidFill>
-                      <a:prstDash val="solid"/>
-                      <a:round/>
-                      <a:headEnd type="none" w="med" len="med"/>
-                      <a:tailEnd type="none" w="med" len="med"/>
-                    </a:lnT>
-                    <a:lnB w="12700" cap="flat" cmpd="sng" algn="ctr">
-                      <a:solidFill>
-                        <a:srgbClr val="E3E9EC"/>
-                      </a:solidFill>
-                      <a:prstDash val="solid"/>
-                      <a:round/>
-                      <a:headEnd type="none" w="med" len="med"/>
-                      <a:tailEnd type="none" w="med" len="med"/>
-                    </a:lnB>
-                    <a:solidFill>
-                      <a:srgbClr val="FFFFFF"/>
-                    </a:solidFill>
-                  </a:tcPr>
-                </a:tc>
-                <a:tc>
-                  <a:txBody>
-                    <a:bodyPr/>
-                    <a:lstStyle/>
-                    <a:p>
-                      <a:pPr algn="r" indent="0" marL="0">
-                        <a:buNone/>
-                      </a:pPr>
-                      <a:r>
-                        <a:rPr lang="en-US" sz="1050" b="1" dirty="0">
-                          <a:solidFill>
-                            <a:srgbClr val="1C2A33"/>
-                          </a:solidFill>
-                          <a:latin typeface="Calibri" pitchFamily="34" charset="0"/>
-                          <a:ea typeface="Calibri" pitchFamily="34" charset="-122"/>
-                          <a:cs typeface="Calibri" pitchFamily="34" charset="-120"/>
-                        </a:rPr>
                         <a:t>9.523</a:t>
                       </a:r>
                       <a:endParaRPr lang="en-US" sz="1050" dirty="0">
@@ -29723,6 +29178,74 @@
                         <a:latin typeface="Calibri" charset="0"/>
                         <a:ea typeface="Calibri" charset="0"/>
                         <a:cs typeface="Calibri" charset="0"/>
+                      </a:endParaRPr>
+                    </a:p>
+                  </a:txBody>
+                  <a:tcPr marL="91440" marR="91440" marT="45720" marB="45720" anchor="ctr">
+                    <a:lnL w="12700" cap="flat" cmpd="sng" algn="ctr">
+                      <a:solidFill>
+                        <a:srgbClr val="E3E9EC"/>
+                      </a:solidFill>
+                      <a:prstDash val="solid"/>
+                      <a:round/>
+                      <a:headEnd type="none" w="med" len="med"/>
+                      <a:tailEnd type="none" w="med" len="med"/>
+                    </a:lnL>
+                    <a:lnR w="12700" cap="flat" cmpd="sng" algn="ctr">
+                      <a:solidFill>
+                        <a:srgbClr val="E3E9EC"/>
+                      </a:solidFill>
+                      <a:prstDash val="solid"/>
+                      <a:round/>
+                      <a:headEnd type="none" w="med" len="med"/>
+                      <a:tailEnd type="none" w="med" len="med"/>
+                    </a:lnR>
+                    <a:lnT w="12700" cap="flat" cmpd="sng" algn="ctr">
+                      <a:solidFill>
+                        <a:srgbClr val="E3E9EC"/>
+                      </a:solidFill>
+                      <a:prstDash val="solid"/>
+                      <a:round/>
+                      <a:headEnd type="none" w="med" len="med"/>
+                      <a:tailEnd type="none" w="med" len="med"/>
+                    </a:lnT>
+                    <a:lnB w="12700" cap="flat" cmpd="sng" algn="ctr">
+                      <a:solidFill>
+                        <a:srgbClr val="E3E9EC"/>
+                      </a:solidFill>
+                      <a:prstDash val="solid"/>
+                      <a:round/>
+                      <a:headEnd type="none" w="med" len="med"/>
+                      <a:tailEnd type="none" w="med" len="med"/>
+                    </a:lnB>
+                    <a:solidFill>
+                      <a:srgbClr val="FFFFFF"/>
+                    </a:solidFill>
+                  </a:tcPr>
+                </a:tc>
+                <a:tc>
+                  <a:txBody>
+                    <a:bodyPr/>
+                    <a:lstStyle/>
+                    <a:p>
+                      <a:pPr algn="l" indent="0" marL="0">
+                        <a:buNone/>
+                      </a:pPr>
+                      <a:r>
+                        <a:rPr lang="en-US" sz="1050" b="1" dirty="0">
+                          <a:solidFill>
+                            <a:srgbClr val="1C2A33"/>
+                          </a:solidFill>
+                          <a:latin typeface="맑은 고딕" pitchFamily="34" charset="0"/>
+                          <a:ea typeface="맑은 고딕" pitchFamily="34" charset="-122"/>
+                          <a:cs typeface="맑은 고딕" pitchFamily="34" charset="-120"/>
+                        </a:rPr>
+                        <a:t>2번 모델 그대로. 정답만 자연+혼재로</a:t>
+                      </a:r>
+                      <a:endParaRPr lang="en-US" sz="1050" dirty="0">
+                        <a:latin typeface="맑은 고딕" charset="0"/>
+                        <a:ea typeface="맑은 고딕" charset="0"/>
+                        <a:cs typeface="맑은 고딕" charset="0"/>
                       </a:endParaRPr>
                     </a:p>
                   </a:txBody>
@@ -29911,74 +29434,6 @@
                     <a:bodyPr/>
                     <a:lstStyle/>
                     <a:p>
-                      <a:pPr algn="l" indent="0" marL="0">
-                        <a:buNone/>
-                      </a:pPr>
-                      <a:r>
-                        <a:rPr lang="en-US" sz="1050" b="1" dirty="0">
-                          <a:solidFill>
-                            <a:srgbClr val="1C2A33"/>
-                          </a:solidFill>
-                          <a:latin typeface="맑은 고딕" pitchFamily="34" charset="0"/>
-                          <a:ea typeface="맑은 고딕" pitchFamily="34" charset="-122"/>
-                          <a:cs typeface="맑은 고딕" pitchFamily="34" charset="-120"/>
-                        </a:rPr>
-                        <a:t>(3번 그대로 · 학습 없음)</a:t>
-                      </a:r>
-                      <a:endParaRPr lang="en-US" sz="1050" dirty="0">
-                        <a:latin typeface="맑은 고딕" charset="0"/>
-                        <a:ea typeface="맑은 고딕" charset="0"/>
-                        <a:cs typeface="맑은 고딕" charset="0"/>
-                      </a:endParaRPr>
-                    </a:p>
-                  </a:txBody>
-                  <a:tcPr marL="91440" marR="91440" marT="45720" marB="45720" anchor="ctr">
-                    <a:lnL w="12700" cap="flat" cmpd="sng" algn="ctr">
-                      <a:solidFill>
-                        <a:srgbClr val="E3E9EC"/>
-                      </a:solidFill>
-                      <a:prstDash val="solid"/>
-                      <a:round/>
-                      <a:headEnd type="none" w="med" len="med"/>
-                      <a:tailEnd type="none" w="med" len="med"/>
-                    </a:lnL>
-                    <a:lnR w="12700" cap="flat" cmpd="sng" algn="ctr">
-                      <a:solidFill>
-                        <a:srgbClr val="E3E9EC"/>
-                      </a:solidFill>
-                      <a:prstDash val="solid"/>
-                      <a:round/>
-                      <a:headEnd type="none" w="med" len="med"/>
-                      <a:tailEnd type="none" w="med" len="med"/>
-                    </a:lnR>
-                    <a:lnT w="12700" cap="flat" cmpd="sng" algn="ctr">
-                      <a:solidFill>
-                        <a:srgbClr val="E3E9EC"/>
-                      </a:solidFill>
-                      <a:prstDash val="solid"/>
-                      <a:round/>
-                      <a:headEnd type="none" w="med" len="med"/>
-                      <a:tailEnd type="none" w="med" len="med"/>
-                    </a:lnT>
-                    <a:lnB w="12700" cap="flat" cmpd="sng" algn="ctr">
-                      <a:solidFill>
-                        <a:srgbClr val="E3E9EC"/>
-                      </a:solidFill>
-                      <a:prstDash val="solid"/>
-                      <a:round/>
-                      <a:headEnd type="none" w="med" len="med"/>
-                      <a:tailEnd type="none" w="med" len="med"/>
-                    </a:lnB>
-                    <a:solidFill>
-                      <a:srgbClr val="FFFFFF"/>
-                    </a:solidFill>
-                  </a:tcPr>
-                </a:tc>
-                <a:tc>
-                  <a:txBody>
-                    <a:bodyPr/>
-                    <a:lstStyle/>
-                    <a:p>
                       <a:pPr algn="r" indent="0" marL="0">
                         <a:buNone/>
                       </a:pPr>
@@ -30127,74 +29582,6 @@
                           <a:ea typeface="Calibri" pitchFamily="34" charset="-122"/>
                           <a:cs typeface="Calibri" pitchFamily="34" charset="-120"/>
                         </a:rPr>
-                        <a:t>1.583</a:t>
-                      </a:r>
-                      <a:endParaRPr lang="en-US" sz="1050" dirty="0">
-                        <a:latin typeface="Calibri" charset="0"/>
-                        <a:ea typeface="Calibri" charset="0"/>
-                        <a:cs typeface="Calibri" charset="0"/>
-                      </a:endParaRPr>
-                    </a:p>
-                  </a:txBody>
-                  <a:tcPr marL="91440" marR="91440" marT="45720" marB="45720" anchor="ctr">
-                    <a:lnL w="12700" cap="flat" cmpd="sng" algn="ctr">
-                      <a:solidFill>
-                        <a:srgbClr val="E3E9EC"/>
-                      </a:solidFill>
-                      <a:prstDash val="solid"/>
-                      <a:round/>
-                      <a:headEnd type="none" w="med" len="med"/>
-                      <a:tailEnd type="none" w="med" len="med"/>
-                    </a:lnL>
-                    <a:lnR w="12700" cap="flat" cmpd="sng" algn="ctr">
-                      <a:solidFill>
-                        <a:srgbClr val="E3E9EC"/>
-                      </a:solidFill>
-                      <a:prstDash val="solid"/>
-                      <a:round/>
-                      <a:headEnd type="none" w="med" len="med"/>
-                      <a:tailEnd type="none" w="med" len="med"/>
-                    </a:lnR>
-                    <a:lnT w="12700" cap="flat" cmpd="sng" algn="ctr">
-                      <a:solidFill>
-                        <a:srgbClr val="E3E9EC"/>
-                      </a:solidFill>
-                      <a:prstDash val="solid"/>
-                      <a:round/>
-                      <a:headEnd type="none" w="med" len="med"/>
-                      <a:tailEnd type="none" w="med" len="med"/>
-                    </a:lnT>
-                    <a:lnB w="12700" cap="flat" cmpd="sng" algn="ctr">
-                      <a:solidFill>
-                        <a:srgbClr val="E3E9EC"/>
-                      </a:solidFill>
-                      <a:prstDash val="solid"/>
-                      <a:round/>
-                      <a:headEnd type="none" w="med" len="med"/>
-                      <a:tailEnd type="none" w="med" len="med"/>
-                    </a:lnB>
-                    <a:solidFill>
-                      <a:srgbClr val="FFFFFF"/>
-                    </a:solidFill>
-                  </a:tcPr>
-                </a:tc>
-                <a:tc>
-                  <a:txBody>
-                    <a:bodyPr/>
-                    <a:lstStyle/>
-                    <a:p>
-                      <a:pPr algn="r" indent="0" marL="0">
-                        <a:buNone/>
-                      </a:pPr>
-                      <a:r>
-                        <a:rPr lang="en-US" sz="1050" b="1" dirty="0">
-                          <a:solidFill>
-                            <a:srgbClr val="1C2A33"/>
-                          </a:solidFill>
-                          <a:latin typeface="Calibri" pitchFamily="34" charset="0"/>
-                          <a:ea typeface="Calibri" pitchFamily="34" charset="-122"/>
-                          <a:cs typeface="Calibri" pitchFamily="34" charset="-120"/>
-                        </a:rPr>
                         <a:t>9.589</a:t>
                       </a:r>
                       <a:endParaRPr lang="en-US" sz="1050" dirty="0">
@@ -30314,6 +29701,74 @@
                     </a:solidFill>
                   </a:tcPr>
                 </a:tc>
+                <a:tc>
+                  <a:txBody>
+                    <a:bodyPr/>
+                    <a:lstStyle/>
+                    <a:p>
+                      <a:pPr algn="l" indent="0" marL="0">
+                        <a:buNone/>
+                      </a:pPr>
+                      <a:r>
+                        <a:rPr lang="en-US" sz="1050" b="1" dirty="0">
+                          <a:solidFill>
+                            <a:srgbClr val="1C2A33"/>
+                          </a:solidFill>
+                          <a:latin typeface="맑은 고딕" pitchFamily="34" charset="0"/>
+                          <a:ea typeface="맑은 고딕" pitchFamily="34" charset="-122"/>
+                          <a:cs typeface="맑은 고딕" pitchFamily="34" charset="-120"/>
+                        </a:rPr>
+                        <a:t>3번 모델 그대로. 정답만 자연+혼재로</a:t>
+                      </a:r>
+                      <a:endParaRPr lang="en-US" sz="1050" dirty="0">
+                        <a:latin typeface="맑은 고딕" charset="0"/>
+                        <a:ea typeface="맑은 고딕" charset="0"/>
+                        <a:cs typeface="맑은 고딕" charset="0"/>
+                      </a:endParaRPr>
+                    </a:p>
+                  </a:txBody>
+                  <a:tcPr marL="91440" marR="91440" marT="45720" marB="45720" anchor="ctr">
+                    <a:lnL w="12700" cap="flat" cmpd="sng" algn="ctr">
+                      <a:solidFill>
+                        <a:srgbClr val="E3E9EC"/>
+                      </a:solidFill>
+                      <a:prstDash val="solid"/>
+                      <a:round/>
+                      <a:headEnd type="none" w="med" len="med"/>
+                      <a:tailEnd type="none" w="med" len="med"/>
+                    </a:lnL>
+                    <a:lnR w="12700" cap="flat" cmpd="sng" algn="ctr">
+                      <a:solidFill>
+                        <a:srgbClr val="E3E9EC"/>
+                      </a:solidFill>
+                      <a:prstDash val="solid"/>
+                      <a:round/>
+                      <a:headEnd type="none" w="med" len="med"/>
+                      <a:tailEnd type="none" w="med" len="med"/>
+                    </a:lnR>
+                    <a:lnT w="12700" cap="flat" cmpd="sng" algn="ctr">
+                      <a:solidFill>
+                        <a:srgbClr val="E3E9EC"/>
+                      </a:solidFill>
+                      <a:prstDash val="solid"/>
+                      <a:round/>
+                      <a:headEnd type="none" w="med" len="med"/>
+                      <a:tailEnd type="none" w="med" len="med"/>
+                    </a:lnT>
+                    <a:lnB w="12700" cap="flat" cmpd="sng" algn="ctr">
+                      <a:solidFill>
+                        <a:srgbClr val="E3E9EC"/>
+                      </a:solidFill>
+                      <a:prstDash val="solid"/>
+                      <a:round/>
+                      <a:headEnd type="none" w="med" len="med"/>
+                      <a:tailEnd type="none" w="med" len="med"/>
+                    </a:lnB>
+                    <a:solidFill>
+                      <a:srgbClr val="FFFFFF"/>
+                    </a:solidFill>
+                  </a:tcPr>
+                </a:tc>
               </a:tr>
             </a:tbl>
           </a:graphicData>
@@ -30327,12 +29782,12 @@
         </p:nvSpPr>
         <p:spPr>
           <a:xfrm>
-            <a:off x="566928" y="4617720"/>
-            <a:ext cx="5394960" cy="1737360"/>
+            <a:off x="566928" y="4773168"/>
+            <a:ext cx="5394960" cy="1463040"/>
           </a:xfrm>
           <a:prstGeom prst="roundRect">
             <a:avLst>
-              <a:gd name="adj" fmla="val 3158"/>
+              <a:gd name="adj" fmla="val 3750"/>
             </a:avLst>
           </a:prstGeom>
           <a:solidFill>
@@ -30354,7 +29809,7 @@
         </p:nvSpPr>
         <p:spPr>
           <a:xfrm>
-            <a:off x="841248" y="4800600"/>
+            <a:off x="841248" y="4956048"/>
             <a:ext cx="4846320" cy="310896"/>
           </a:xfrm>
           <a:prstGeom prst="rect">
@@ -30379,7 +29834,7 @@
                 <a:ea typeface="맑은 고딕" pitchFamily="34" charset="-122"/>
                 <a:cs typeface="맑은 고딕" pitchFamily="34" charset="-120"/>
               </a:rPr>
-              <a:t>② b는 넓혀도 상한에 붙는다</a:t>
+              <a:t>② b를 넓혀도 계속 상한에 붙는다</a:t>
             </a:r>
             <a:endParaRPr lang="en-US" sz="1450" dirty="0"/>
           </a:p>
@@ -30393,8 +29848,8 @@
         </p:nvSpPr>
         <p:spPr>
           <a:xfrm>
-            <a:off x="841248" y="5148072"/>
-            <a:ext cx="4846320" cy="1024128"/>
+            <a:off x="841248" y="5303520"/>
+            <a:ext cx="4846320" cy="749808"/>
           </a:xfrm>
           <a:prstGeom prst="rect">
             <a:avLst/>
@@ -30421,27 +29876,7 @@
                 <a:ea typeface="맑은 고딕" pitchFamily="34" charset="-122"/>
                 <a:cs typeface="맑은 고딕" pitchFamily="34" charset="-120"/>
               </a:rPr>
-              <a:t>b_LS가 상한 4에서 3.954, 상한 10에서 9.523으로 둘 다 끝에 붙었다.</a:t>
-            </a:r>
-            <a:endParaRPr lang="en-US" sz="1200" dirty="0"/>
-          </a:p>
-          <a:p>
-            <a:pPr indent="0" marL="0">
-              <a:lnSpc>
-                <a:spcPts val="1700"/>
-              </a:lnSpc>
-              <a:buNone/>
-            </a:pPr>
-            <a:r>
-              <a:rPr lang="en-US" sz="1200" dirty="0">
-                <a:solidFill>
-                  <a:srgbClr val="55636E"/>
-                </a:solidFill>
-                <a:latin typeface="맑은 고딕" pitchFamily="34" charset="0"/>
-                <a:ea typeface="맑은 고딕" pitchFamily="34" charset="-122"/>
-                <a:cs typeface="맑은 고딕" pitchFamily="34" charset="-120"/>
-              </a:rPr>
-              <a:t>최적값을 찾은 것이 아니라 잘린 것이다. 3번과 6번의 차이는 LQ prior를 시정촌 안 격자들의 평균으로 집계하느냐 최대로 하느냐 하나뿐이다.</a:t>
+              <a:t>최적값을 찾은 게 아니라 잘린 것이라 상한을 4 → 10으로 넓혀 봤는데 3.954 / 9.523 으로 또 끝에 붙는다. 3번과 6번의 차이는 LQ를 시정촌 안 격자들의 평균으로 볼지 최대로 볼지 하나뿐이다.</a:t>
             </a:r>
             <a:endParaRPr lang="en-US" sz="1200" dirty="0"/>
           </a:p>
@@ -30455,12 +29890,12 @@
         </p:nvSpPr>
         <p:spPr>
           <a:xfrm>
-            <a:off x="6236208" y="4617720"/>
-            <a:ext cx="5394960" cy="1737360"/>
+            <a:off x="6236208" y="4773168"/>
+            <a:ext cx="5394960" cy="1463040"/>
           </a:xfrm>
           <a:prstGeom prst="roundRect">
             <a:avLst>
-              <a:gd name="adj" fmla="val 3158"/>
+              <a:gd name="adj" fmla="val 3750"/>
             </a:avLst>
           </a:prstGeom>
           <a:solidFill>
@@ -30482,7 +29917,7 @@
         </p:nvSpPr>
         <p:spPr>
           <a:xfrm>
-            <a:off x="6510528" y="4800600"/>
+            <a:off x="6510528" y="4956048"/>
             <a:ext cx="4846320" cy="310896"/>
           </a:xfrm>
           <a:prstGeom prst="rect">
@@ -30507,7 +29942,7 @@
                 <a:ea typeface="맑은 고딕" pitchFamily="34" charset="-122"/>
                 <a:cs typeface="맑은 고딕" pitchFamily="34" charset="-120"/>
               </a:rPr>
-              <a:t>③ 은 학습을 다시 하지 않는다</a:t>
+              <a:t>③ 은 모델을 다시 학습하지 않는다</a:t>
             </a:r>
             <a:endParaRPr lang="en-US" sz="1450" dirty="0"/>
           </a:p>
@@ -30521,8 +29956,8 @@
         </p:nvSpPr>
         <p:spPr>
           <a:xfrm>
-            <a:off x="6510528" y="5148072"/>
-            <a:ext cx="4846320" cy="1024128"/>
+            <a:off x="6510528" y="5303520"/>
+            <a:ext cx="4846320" cy="749808"/>
           </a:xfrm>
           <a:prstGeom prst="rect">
             <a:avLst/>
@@ -30549,27 +29984,7 @@
                 <a:ea typeface="맑은 고딕" pitchFamily="34" charset="-122"/>
                 <a:cs typeface="맑은 고딕" pitchFamily="34" charset="-120"/>
               </a:rPr>
-              <a:t>4·5번은 2·3번 모델 그대로다. 학습은 GT를 전혀 쓰지 않으므로 같은 seed면 모델이 완전히 같고, 바뀌는 것은 LS 정답뿐이다.</a:t>
-            </a:r>
-            <a:endParaRPr lang="en-US" sz="1200" dirty="0"/>
-          </a:p>
-          <a:p>
-            <a:pPr indent="0" marL="0">
-              <a:lnSpc>
-                <a:spcPts val="1700"/>
-              </a:lnSpc>
-              <a:buNone/>
-            </a:pPr>
-            <a:r>
-              <a:rPr lang="en-US" sz="1200" dirty="0">
-                <a:solidFill>
-                  <a:srgbClr val="55636E"/>
-                </a:solidFill>
-                <a:latin typeface="맑은 고딕" pitchFamily="34" charset="0"/>
-                <a:ea typeface="맑은 고딕" pitchFamily="34" charset="-122"/>
-                <a:cs typeface="맑은 고딕" pitchFamily="34" charset="-120"/>
-              </a:rPr>
-              <a:t>자연·혼재 → 양성 / 인공 → 음성(평가 포함) / 불명 → 평가 제외.  418행 → 398행.</a:t>
+              <a:t>학습에 정답을 전혀 쓰지 않으므로 같은 seed면 모델이 똑같고 채점 기준만 바뀐다. 자연·혼재 → 양성 / 인공 → 음성(채점 포함) / 불명 → 채점 제외.  418행 → 398행.</a:t>
             </a:r>
             <a:endParaRPr lang="en-US" sz="1200" dirty="0"/>
           </a:p>
@@ -30682,7 +30097,7 @@
                 <a:ea typeface="맑은 고딕" pitchFamily="34" charset="-122"/>
                 <a:cs typeface="맑은 고딕" pitchFamily="34" charset="-120"/>
               </a:rPr>
-              <a:t>조건 설계 ② — 갈래 ④ 면적 항 A~J</a:t>
+              <a:t>조건 설계 ② — 갈래 ④ 면적 항</a:t>
             </a:r>
             <a:endParaRPr lang="en-US" sz="2900" dirty="0"/>
           </a:p>
@@ -30696,8 +30111,8 @@
         </p:nvSpPr>
         <p:spPr>
           <a:xfrm>
-            <a:off x="566928" y="1627632"/>
-            <a:ext cx="11064240" cy="512064"/>
+            <a:off x="566928" y="1609344"/>
+            <a:ext cx="6766560" cy="274320"/>
           </a:xfrm>
           <a:prstGeom prst="rect">
             <a:avLst/>
@@ -30713,7 +30128,49 @@
               <a:buNone/>
             </a:pPr>
             <a:r>
-              <a:rPr lang="en-US" sz="1250" dirty="0">
+              <a:rPr lang="en-US" sz="1350" b="1" dirty="0">
+                <a:solidFill>
+                  <a:srgbClr val="1C2A33"/>
+                </a:solidFill>
+                <a:latin typeface="Calibri" pitchFamily="34" charset="0"/>
+                <a:ea typeface="Calibri" pitchFamily="34" charset="-122"/>
+                <a:cs typeface="Calibri" pitchFamily="34" charset="-120"/>
+              </a:rPr>
+              <a:t>z = a · log p̄ + b + c · (log k − m)      k = 시정촌 면적 ÷ 격자 한 칸 넓이</a:t>
+            </a:r>
+            <a:endParaRPr lang="en-US" sz="1350" dirty="0"/>
+          </a:p>
+        </p:txBody>
+      </p:sp>
+      <p:sp>
+        <p:nvSpPr>
+          <p:cNvPr id="5" name="Text 3"/>
+          <p:cNvSpPr txBox="1"/>
+          <p:nvPr/>
+        </p:nvSpPr>
+        <p:spPr>
+          <a:xfrm>
+            <a:off x="566928" y="1938528"/>
+            <a:ext cx="11064240" cy="566928"/>
+          </a:xfrm>
+          <a:prstGeom prst="rect">
+            <a:avLst/>
+          </a:prstGeom>
+          <a:noFill/>
+          <a:ln/>
+        </p:spPr>
+        <p:txBody>
+          <a:bodyPr wrap="square" lIns="0" tIns="0" rIns="0" bIns="0" rtlCol="0" anchor="ctr"/>
+          <a:lstStyle/>
+          <a:p>
+            <a:pPr indent="0" marL="0">
+              <a:lnSpc>
+                <a:spcPts val="1600"/>
+              </a:lnSpc>
+              <a:buNone/>
+            </a:pPr>
+            <a:r>
+              <a:rPr lang="en-US" sz="1150" dirty="0">
                 <a:solidFill>
                   <a:srgbClr val="55636E"/>
                 </a:solidFill>
@@ -30721,9 +30178,9 @@
                 <a:ea typeface="맑은 고딕" pitchFamily="34" charset="-122"/>
                 <a:cs typeface="맑은 고딕" pitchFamily="34" charset="-120"/>
               </a:rPr>
-              <a:t>z = a · log p̄ + b + c · (log k − m).  면적 항이 있는 조건만 logit이 아니라 log를 쓴다 — λ = p̄·k 를 덧셈으로 넣어야 하기 때문이다.  굵은 값이 학습된 값이다.</a:t>
+              <a:t>USGS 값 p̄는 '발생 확률'이 아니라 '격자 한 칸 중 덮이는 면적 비율'이다. 그래서 넓은 시정촌일수록 한 곳이라도 무너질 확률이 높다. 그 면적을 식에 넣은 것이 c·log k 항이고, 유도대로면 a=1, b=0, c=1 이다. 면적 항이 있는 조건만 logit이 아니라 log를 쓰는 이유도 면적을 곱셈(λ = p̄·k)으로 넣으려면 로그가 되어야 하기 때문이다.</a:t>
             </a:r>
-            <a:endParaRPr lang="en-US" sz="1250" dirty="0"/>
+            <a:endParaRPr lang="en-US" sz="1150" dirty="0"/>
           </a:p>
         </p:txBody>
       </p:sp>
@@ -30742,7 +30199,7 @@
           </p:nvPr>
         </p:nvGraphicFramePr>
         <p:xfrm>
-          <a:off x="566928" y="2212848"/>
+          <a:off x="566928" y="2615184"/>
           <a:ext cx="11064240" cy="914400"/>
         </p:xfrm>
         <a:graphic>
@@ -30750,20 +30207,87 @@
             <a:tbl>
               <a:tblPr/>
               <a:tblGrid>
+                <a:gridCol w="566928"/>
                 <a:gridCol w="384048"/>
-                <a:gridCol w="1170432"/>
-                <a:gridCol w="749808"/>
-                <a:gridCol w="841248"/>
-                <a:gridCol w="749808"/>
-                <a:gridCol w="749808"/>
-                <a:gridCol w="749808"/>
-                <a:gridCol w="749808"/>
-                <a:gridCol w="749808"/>
-                <a:gridCol w="1078992"/>
-                <a:gridCol w="603504"/>
-                <a:gridCol w="2487168"/>
+                <a:gridCol w="1024128"/>
+                <a:gridCol w="713232"/>
+                <a:gridCol w="786384"/>
+                <a:gridCol w="713232"/>
+                <a:gridCol w="713232"/>
+                <a:gridCol w="713232"/>
+                <a:gridCol w="713232"/>
+                <a:gridCol w="548640"/>
+                <a:gridCol w="4187952"/>
               </a:tblGrid>
-              <a:tr h="256032">
+              <a:tr h="246888">
+                <a:tc>
+                  <a:txBody>
+                    <a:bodyPr/>
+                    <a:lstStyle/>
+                    <a:p>
+                      <a:pPr algn="l" indent="0" marL="0">
+                        <a:buNone/>
+                      </a:pPr>
+                      <a:r>
+                        <a:rPr lang="en-US" sz="1000" b="1" dirty="0">
+                          <a:solidFill>
+                            <a:srgbClr val="1C2A33"/>
+                          </a:solidFill>
+                          <a:latin typeface="맑은 고딕" pitchFamily="34" charset="0"/>
+                          <a:ea typeface="맑은 고딕" pitchFamily="34" charset="-122"/>
+                          <a:cs typeface="맑은 고딕" pitchFamily="34" charset="-120"/>
+                        </a:rPr>
+                        <a:t>출처</a:t>
+                      </a:r>
+                      <a:endParaRPr lang="en-US" sz="1000" dirty="0">
+                        <a:latin typeface="맑은 고딕" charset="0"/>
+                        <a:ea typeface="맑은 고딕" charset="0"/>
+                        <a:cs typeface="맑은 고딕" charset="0"/>
+                      </a:endParaRPr>
+                    </a:p>
+                  </a:txBody>
+                  <a:tcPr marL="91440" marR="91440" marT="45720" marB="45720" anchor="ctr">
+                    <a:lnL w="12700" cap="flat" cmpd="sng" algn="ctr">
+                      <a:solidFill>
+                        <a:srgbClr val="E3E9EC"/>
+                      </a:solidFill>
+                      <a:prstDash val="solid"/>
+                      <a:round/>
+                      <a:headEnd type="none" w="med" len="med"/>
+                      <a:tailEnd type="none" w="med" len="med"/>
+                    </a:lnL>
+                    <a:lnR w="12700" cap="flat" cmpd="sng" algn="ctr">
+                      <a:solidFill>
+                        <a:srgbClr val="E3E9EC"/>
+                      </a:solidFill>
+                      <a:prstDash val="solid"/>
+                      <a:round/>
+                      <a:headEnd type="none" w="med" len="med"/>
+                      <a:tailEnd type="none" w="med" len="med"/>
+                    </a:lnR>
+                    <a:lnT w="12700" cap="flat" cmpd="sng" algn="ctr">
+                      <a:solidFill>
+                        <a:srgbClr val="E3E9EC"/>
+                      </a:solidFill>
+                      <a:prstDash val="solid"/>
+                      <a:round/>
+                      <a:headEnd type="none" w="med" len="med"/>
+                      <a:tailEnd type="none" w="med" len="med"/>
+                    </a:lnT>
+                    <a:lnB w="12700" cap="flat" cmpd="sng" algn="ctr">
+                      <a:solidFill>
+                        <a:srgbClr val="E3E9EC"/>
+                      </a:solidFill>
+                      <a:prstDash val="solid"/>
+                      <a:round/>
+                      <a:headEnd type="none" w="med" len="med"/>
+                      <a:tailEnd type="none" w="med" len="med"/>
+                    </a:lnB>
+                    <a:solidFill>
+                      <a:srgbClr val="F1F5F7"/>
+                    </a:solidFill>
+                  </a:tcPr>
+                </a:tc>
                 <a:tc>
                   <a:txBody>
                     <a:bodyPr/>
@@ -31314,142 +30838,6 @@
                           <a:ea typeface="맑은 고딕" pitchFamily="34" charset="-122"/>
                           <a:cs typeface="맑은 고딕" pitchFamily="34" charset="-120"/>
                         </a:rPr>
-                        <a:t>중심화</a:t>
-                      </a:r>
-                      <a:endParaRPr lang="en-US" sz="1000" dirty="0">
-                        <a:latin typeface="맑은 고딕" charset="0"/>
-                        <a:ea typeface="맑은 고딕" charset="0"/>
-                        <a:cs typeface="맑은 고딕" charset="0"/>
-                      </a:endParaRPr>
-                    </a:p>
-                  </a:txBody>
-                  <a:tcPr marL="91440" marR="91440" marT="45720" marB="45720" anchor="ctr">
-                    <a:lnL w="12700" cap="flat" cmpd="sng" algn="ctr">
-                      <a:solidFill>
-                        <a:srgbClr val="E3E9EC"/>
-                      </a:solidFill>
-                      <a:prstDash val="solid"/>
-                      <a:round/>
-                      <a:headEnd type="none" w="med" len="med"/>
-                      <a:tailEnd type="none" w="med" len="med"/>
-                    </a:lnL>
-                    <a:lnR w="12700" cap="flat" cmpd="sng" algn="ctr">
-                      <a:solidFill>
-                        <a:srgbClr val="E3E9EC"/>
-                      </a:solidFill>
-                      <a:prstDash val="solid"/>
-                      <a:round/>
-                      <a:headEnd type="none" w="med" len="med"/>
-                      <a:tailEnd type="none" w="med" len="med"/>
-                    </a:lnR>
-                    <a:lnT w="12700" cap="flat" cmpd="sng" algn="ctr">
-                      <a:solidFill>
-                        <a:srgbClr val="E3E9EC"/>
-                      </a:solidFill>
-                      <a:prstDash val="solid"/>
-                      <a:round/>
-                      <a:headEnd type="none" w="med" len="med"/>
-                      <a:tailEnd type="none" w="med" len="med"/>
-                    </a:lnT>
-                    <a:lnB w="12700" cap="flat" cmpd="sng" algn="ctr">
-                      <a:solidFill>
-                        <a:srgbClr val="E3E9EC"/>
-                      </a:solidFill>
-                      <a:prstDash val="solid"/>
-                      <a:round/>
-                      <a:headEnd type="none" w="med" len="med"/>
-                      <a:tailEnd type="none" w="med" len="med"/>
-                    </a:lnB>
-                    <a:solidFill>
-                      <a:srgbClr val="F1F5F7"/>
-                    </a:solidFill>
-                  </a:tcPr>
-                </a:tc>
-                <a:tc>
-                  <a:txBody>
-                    <a:bodyPr/>
-                    <a:lstStyle/>
-                    <a:p>
-                      <a:pPr algn="r" indent="0" marL="0">
-                        <a:buNone/>
-                      </a:pPr>
-                      <a:r>
-                        <a:rPr lang="en-US" sz="1000" b="1" dirty="0">
-                          <a:solidFill>
-                            <a:srgbClr val="1C2A33"/>
-                          </a:solidFill>
-                          <a:latin typeface="맑은 고딕" pitchFamily="34" charset="0"/>
-                          <a:ea typeface="맑은 고딕" pitchFamily="34" charset="-122"/>
-                          <a:cs typeface="맑은 고딕" pitchFamily="34" charset="-120"/>
-                        </a:rPr>
-                        <a:t>b 범위</a:t>
-                      </a:r>
-                      <a:endParaRPr lang="en-US" sz="1000" dirty="0">
-                        <a:latin typeface="맑은 고딕" charset="0"/>
-                        <a:ea typeface="맑은 고딕" charset="0"/>
-                        <a:cs typeface="맑은 고딕" charset="0"/>
-                      </a:endParaRPr>
-                    </a:p>
-                  </a:txBody>
-                  <a:tcPr marL="91440" marR="91440" marT="45720" marB="45720" anchor="ctr">
-                    <a:lnL w="12700" cap="flat" cmpd="sng" algn="ctr">
-                      <a:solidFill>
-                        <a:srgbClr val="E3E9EC"/>
-                      </a:solidFill>
-                      <a:prstDash val="solid"/>
-                      <a:round/>
-                      <a:headEnd type="none" w="med" len="med"/>
-                      <a:tailEnd type="none" w="med" len="med"/>
-                    </a:lnL>
-                    <a:lnR w="12700" cap="flat" cmpd="sng" algn="ctr">
-                      <a:solidFill>
-                        <a:srgbClr val="E3E9EC"/>
-                      </a:solidFill>
-                      <a:prstDash val="solid"/>
-                      <a:round/>
-                      <a:headEnd type="none" w="med" len="med"/>
-                      <a:tailEnd type="none" w="med" len="med"/>
-                    </a:lnR>
-                    <a:lnT w="12700" cap="flat" cmpd="sng" algn="ctr">
-                      <a:solidFill>
-                        <a:srgbClr val="E3E9EC"/>
-                      </a:solidFill>
-                      <a:prstDash val="solid"/>
-                      <a:round/>
-                      <a:headEnd type="none" w="med" len="med"/>
-                      <a:tailEnd type="none" w="med" len="med"/>
-                    </a:lnT>
-                    <a:lnB w="12700" cap="flat" cmpd="sng" algn="ctr">
-                      <a:solidFill>
-                        <a:srgbClr val="E3E9EC"/>
-                      </a:solidFill>
-                      <a:prstDash val="solid"/>
-                      <a:round/>
-                      <a:headEnd type="none" w="med" len="med"/>
-                      <a:tailEnd type="none" w="med" len="med"/>
-                    </a:lnB>
-                    <a:solidFill>
-                      <a:srgbClr val="F1F5F7"/>
-                    </a:solidFill>
-                  </a:tcPr>
-                </a:tc>
-                <a:tc>
-                  <a:txBody>
-                    <a:bodyPr/>
-                    <a:lstStyle/>
-                    <a:p>
-                      <a:pPr algn="r" indent="0" marL="0">
-                        <a:buNone/>
-                      </a:pPr>
-                      <a:r>
-                        <a:rPr lang="en-US" sz="1000" b="1" dirty="0">
-                          <a:solidFill>
-                            <a:srgbClr val="1C2A33"/>
-                          </a:solidFill>
-                          <a:latin typeface="맑은 고딕" pitchFamily="34" charset="0"/>
-                          <a:ea typeface="맑은 고딕" pitchFamily="34" charset="-122"/>
-                          <a:cs typeface="맑은 고딕" pitchFamily="34" charset="-120"/>
-                        </a:rPr>
                         <a:t>학습</a:t>
                       </a:r>
                       <a:endParaRPr lang="en-US" sz="1000" dirty="0">
@@ -31518,7 +30906,7 @@
                           <a:ea typeface="맑은 고딕" pitchFamily="34" charset="-122"/>
                           <a:cs typeface="맑은 고딕" pitchFamily="34" charset="-120"/>
                         </a:rPr>
-                        <a:t>묻는 것</a:t>
+                        <a:t>무엇을 보려는 조건인가</a:t>
                       </a:r>
                       <a:endParaRPr lang="en-US" sz="1000" dirty="0">
                         <a:latin typeface="맑은 고딕" charset="0"/>
@@ -31570,7 +30958,75 @@
                   </a:tcPr>
                 </a:tc>
               </a:tr>
-              <a:tr h="256032">
+              <a:tr h="246888">
+                <a:tc>
+                  <a:txBody>
+                    <a:bodyPr/>
+                    <a:lstStyle/>
+                    <a:p>
+                      <a:pPr algn="l" indent="0" marL="0">
+                        <a:buNone/>
+                      </a:pPr>
+                      <a:r>
+                        <a:rPr lang="en-US" sz="1000" dirty="0">
+                          <a:solidFill>
+                            <a:srgbClr val="55636E"/>
+                          </a:solidFill>
+                          <a:latin typeface="맑은 고딕" pitchFamily="34" charset="0"/>
+                          <a:ea typeface="맑은 고딕" pitchFamily="34" charset="-122"/>
+                          <a:cs typeface="맑은 고딕" pitchFamily="34" charset="-120"/>
+                        </a:rPr>
+                        <a:t>지시</a:t>
+                      </a:r>
+                      <a:endParaRPr lang="en-US" sz="1000" dirty="0">
+                        <a:latin typeface="맑은 고딕" charset="0"/>
+                        <a:ea typeface="맑은 고딕" charset="0"/>
+                        <a:cs typeface="맑은 고딕" charset="0"/>
+                      </a:endParaRPr>
+                    </a:p>
+                  </a:txBody>
+                  <a:tcPr marL="91440" marR="91440" marT="45720" marB="45720" anchor="ctr">
+                    <a:lnL w="12700" cap="flat" cmpd="sng" algn="ctr">
+                      <a:solidFill>
+                        <a:srgbClr val="E3E9EC"/>
+                      </a:solidFill>
+                      <a:prstDash val="solid"/>
+                      <a:round/>
+                      <a:headEnd type="none" w="med" len="med"/>
+                      <a:tailEnd type="none" w="med" len="med"/>
+                    </a:lnL>
+                    <a:lnR w="12700" cap="flat" cmpd="sng" algn="ctr">
+                      <a:solidFill>
+                        <a:srgbClr val="E3E9EC"/>
+                      </a:solidFill>
+                      <a:prstDash val="solid"/>
+                      <a:round/>
+                      <a:headEnd type="none" w="med" len="med"/>
+                      <a:tailEnd type="none" w="med" len="med"/>
+                    </a:lnR>
+                    <a:lnT w="12700" cap="flat" cmpd="sng" algn="ctr">
+                      <a:solidFill>
+                        <a:srgbClr val="E3E9EC"/>
+                      </a:solidFill>
+                      <a:prstDash val="solid"/>
+                      <a:round/>
+                      <a:headEnd type="none" w="med" len="med"/>
+                      <a:tailEnd type="none" w="med" len="med"/>
+                    </a:lnT>
+                    <a:lnB w="12700" cap="flat" cmpd="sng" algn="ctr">
+                      <a:solidFill>
+                        <a:srgbClr val="E3E9EC"/>
+                      </a:solidFill>
+                      <a:prstDash val="solid"/>
+                      <a:round/>
+                      <a:headEnd type="none" w="med" len="med"/>
+                      <a:tailEnd type="none" w="med" len="med"/>
+                    </a:lnB>
+                    <a:solidFill>
+                      <a:srgbClr val="FAFCFD"/>
+                    </a:solidFill>
+                  </a:tcPr>
+                </a:tc>
                 <a:tc>
                   <a:txBody>
                     <a:bodyPr/>
@@ -31635,7 +31091,7 @@
                       <a:tailEnd type="none" w="med" len="med"/>
                     </a:lnB>
                     <a:solidFill>
-                      <a:srgbClr val="FFFFFF"/>
+                      <a:srgbClr val="FAFCFD"/>
                     </a:solidFill>
                   </a:tcPr>
                 </a:tc>
@@ -31703,7 +31159,7 @@
                       <a:tailEnd type="none" w="med" len="med"/>
                     </a:lnB>
                     <a:solidFill>
-                      <a:srgbClr val="FFFFFF"/>
+                      <a:srgbClr val="FAFCFD"/>
                     </a:solidFill>
                   </a:tcPr>
                 </a:tc>
@@ -31771,7 +31227,7 @@
                       <a:tailEnd type="none" w="med" len="med"/>
                     </a:lnB>
                     <a:solidFill>
-                      <a:srgbClr val="FFFFFF"/>
+                      <a:srgbClr val="FAFCFD"/>
                     </a:solidFill>
                   </a:tcPr>
                 </a:tc>
@@ -31839,7 +31295,7 @@
                       <a:tailEnd type="none" w="med" len="med"/>
                     </a:lnB>
                     <a:solidFill>
-                      <a:srgbClr val="FFFFFF"/>
+                      <a:srgbClr val="FAFCFD"/>
                     </a:solidFill>
                   </a:tcPr>
                 </a:tc>
@@ -31907,7 +31363,7 @@
                       <a:tailEnd type="none" w="med" len="med"/>
                     </a:lnB>
                     <a:solidFill>
-                      <a:srgbClr val="FFFFFF"/>
+                      <a:srgbClr val="FAFCFD"/>
                     </a:solidFill>
                   </a:tcPr>
                 </a:tc>
@@ -31975,7 +31431,7 @@
                       <a:tailEnd type="none" w="med" len="med"/>
                     </a:lnB>
                     <a:solidFill>
-                      <a:srgbClr val="FFFFFF"/>
+                      <a:srgbClr val="FAFCFD"/>
                     </a:solidFill>
                   </a:tcPr>
                 </a:tc>
@@ -32043,7 +31499,7 @@
                       <a:tailEnd type="none" w="med" len="med"/>
                     </a:lnB>
                     <a:solidFill>
-                      <a:srgbClr val="FFFFFF"/>
+                      <a:srgbClr val="FAFCFD"/>
                     </a:solidFill>
                   </a:tcPr>
                 </a:tc>
@@ -32111,143 +31567,7 @@
                       <a:tailEnd type="none" w="med" len="med"/>
                     </a:lnB>
                     <a:solidFill>
-                      <a:srgbClr val="FFFFFF"/>
-                    </a:solidFill>
-                  </a:tcPr>
-                </a:tc>
-                <a:tc>
-                  <a:txBody>
-                    <a:bodyPr/>
-                    <a:lstStyle/>
-                    <a:p>
-                      <a:pPr algn="r" indent="0" marL="0">
-                        <a:buNone/>
-                      </a:pPr>
-                      <a:r>
-                        <a:rPr lang="en-US" sz="1000" dirty="0">
-                          <a:solidFill>
-                            <a:srgbClr val="55636E"/>
-                          </a:solidFill>
-                          <a:latin typeface="Calibri" pitchFamily="34" charset="0"/>
-                          <a:ea typeface="Calibri" pitchFamily="34" charset="-122"/>
-                          <a:cs typeface="Calibri" pitchFamily="34" charset="-120"/>
-                        </a:rPr>
-                        <a:t>✗</a:t>
-                      </a:r>
-                      <a:endParaRPr lang="en-US" sz="1000" dirty="0">
-                        <a:latin typeface="Calibri" charset="0"/>
-                        <a:ea typeface="Calibri" charset="0"/>
-                        <a:cs typeface="Calibri" charset="0"/>
-                      </a:endParaRPr>
-                    </a:p>
-                  </a:txBody>
-                  <a:tcPr marL="91440" marR="91440" marT="45720" marB="45720" anchor="ctr">
-                    <a:lnL w="12700" cap="flat" cmpd="sng" algn="ctr">
-                      <a:solidFill>
-                        <a:srgbClr val="E3E9EC"/>
-                      </a:solidFill>
-                      <a:prstDash val="solid"/>
-                      <a:round/>
-                      <a:headEnd type="none" w="med" len="med"/>
-                      <a:tailEnd type="none" w="med" len="med"/>
-                    </a:lnL>
-                    <a:lnR w="12700" cap="flat" cmpd="sng" algn="ctr">
-                      <a:solidFill>
-                        <a:srgbClr val="E3E9EC"/>
-                      </a:solidFill>
-                      <a:prstDash val="solid"/>
-                      <a:round/>
-                      <a:headEnd type="none" w="med" len="med"/>
-                      <a:tailEnd type="none" w="med" len="med"/>
-                    </a:lnR>
-                    <a:lnT w="12700" cap="flat" cmpd="sng" algn="ctr">
-                      <a:solidFill>
-                        <a:srgbClr val="E3E9EC"/>
-                      </a:solidFill>
-                      <a:prstDash val="solid"/>
-                      <a:round/>
-                      <a:headEnd type="none" w="med" len="med"/>
-                      <a:tailEnd type="none" w="med" len="med"/>
-                    </a:lnT>
-                    <a:lnB w="12700" cap="flat" cmpd="sng" algn="ctr">
-                      <a:solidFill>
-                        <a:srgbClr val="E3E9EC"/>
-                      </a:solidFill>
-                      <a:prstDash val="solid"/>
-                      <a:round/>
-                      <a:headEnd type="none" w="med" len="med"/>
-                      <a:tailEnd type="none" w="med" len="med"/>
-                    </a:lnB>
-                    <a:solidFill>
-                      <a:srgbClr val="FFFFFF"/>
-                    </a:solidFill>
-                  </a:tcPr>
-                </a:tc>
-                <a:tc>
-                  <a:txBody>
-                    <a:bodyPr/>
-                    <a:lstStyle/>
-                    <a:p>
-                      <a:pPr algn="r" indent="0" marL="0">
-                        <a:buNone/>
-                      </a:pPr>
-                      <a:r>
-                        <a:rPr lang="en-US" sz="1000" dirty="0">
-                          <a:solidFill>
-                            <a:srgbClr val="55636E"/>
-                          </a:solidFill>
-                          <a:latin typeface="맑은 고딕" pitchFamily="34" charset="0"/>
-                          <a:ea typeface="맑은 고딕" pitchFamily="34" charset="-122"/>
-                          <a:cs typeface="맑은 고딕" pitchFamily="34" charset="-120"/>
-                        </a:rPr>
-                        <a:t>[−2, 4]</a:t>
-                      </a:r>
-                      <a:endParaRPr lang="en-US" sz="1000" dirty="0">
-                        <a:latin typeface="맑은 고딕" charset="0"/>
-                        <a:ea typeface="맑은 고딕" charset="0"/>
-                        <a:cs typeface="맑은 고딕" charset="0"/>
-                      </a:endParaRPr>
-                    </a:p>
-                  </a:txBody>
-                  <a:tcPr marL="91440" marR="91440" marT="45720" marB="45720" anchor="ctr">
-                    <a:lnL w="12700" cap="flat" cmpd="sng" algn="ctr">
-                      <a:solidFill>
-                        <a:srgbClr val="E3E9EC"/>
-                      </a:solidFill>
-                      <a:prstDash val="solid"/>
-                      <a:round/>
-                      <a:headEnd type="none" w="med" len="med"/>
-                      <a:tailEnd type="none" w="med" len="med"/>
-                    </a:lnL>
-                    <a:lnR w="12700" cap="flat" cmpd="sng" algn="ctr">
-                      <a:solidFill>
-                        <a:srgbClr val="E3E9EC"/>
-                      </a:solidFill>
-                      <a:prstDash val="solid"/>
-                      <a:round/>
-                      <a:headEnd type="none" w="med" len="med"/>
-                      <a:tailEnd type="none" w="med" len="med"/>
-                    </a:lnR>
-                    <a:lnT w="12700" cap="flat" cmpd="sng" algn="ctr">
-                      <a:solidFill>
-                        <a:srgbClr val="E3E9EC"/>
-                      </a:solidFill>
-                      <a:prstDash val="solid"/>
-                      <a:round/>
-                      <a:headEnd type="none" w="med" len="med"/>
-                      <a:tailEnd type="none" w="med" len="med"/>
-                    </a:lnT>
-                    <a:lnB w="12700" cap="flat" cmpd="sng" algn="ctr">
-                      <a:solidFill>
-                        <a:srgbClr val="E3E9EC"/>
-                      </a:solidFill>
-                      <a:prstDash val="solid"/>
-                      <a:round/>
-                      <a:headEnd type="none" w="med" len="med"/>
-                      <a:tailEnd type="none" w="med" len="med"/>
-                    </a:lnB>
-                    <a:solidFill>
-                      <a:srgbClr val="FFFFFF"/>
+                      <a:srgbClr val="FAFCFD"/>
                     </a:solidFill>
                   </a:tcPr>
                 </a:tc>
@@ -32315,7 +31635,7 @@
                       <a:tailEnd type="none" w="med" len="med"/>
                     </a:lnB>
                     <a:solidFill>
-                      <a:srgbClr val="FFFFFF"/>
+                      <a:srgbClr val="FAFCFD"/>
                     </a:solidFill>
                   </a:tcPr>
                 </a:tc>
@@ -32336,7 +31656,7 @@
                           <a:ea typeface="맑은 고딕" pitchFamily="34" charset="-122"/>
                           <a:cs typeface="맑은 고딕" pitchFamily="34" charset="-120"/>
                         </a:rPr>
-                        <a:t>유도식 그대로 (기준)</a:t>
+                        <a:t>아무것도 학습 안 함. 유도식 그대로 — 기준점</a:t>
                       </a:r>
                       <a:endParaRPr lang="en-US" sz="1000" dirty="0">
                         <a:latin typeface="맑은 고딕" charset="0"/>
@@ -32383,12 +31703,80 @@
                       <a:tailEnd type="none" w="med" len="med"/>
                     </a:lnB>
                     <a:solidFill>
-                      <a:srgbClr val="FFFFFF"/>
+                      <a:srgbClr val="FAFCFD"/>
                     </a:solidFill>
                   </a:tcPr>
                 </a:tc>
               </a:tr>
-              <a:tr h="256032">
+              <a:tr h="246888">
+                <a:tc>
+                  <a:txBody>
+                    <a:bodyPr/>
+                    <a:lstStyle/>
+                    <a:p>
+                      <a:pPr algn="l" indent="0" marL="0">
+                        <a:buNone/>
+                      </a:pPr>
+                      <a:r>
+                        <a:rPr lang="en-US" sz="1000" dirty="0">
+                          <a:solidFill>
+                            <a:srgbClr val="55636E"/>
+                          </a:solidFill>
+                          <a:latin typeface="맑은 고딕" pitchFamily="34" charset="0"/>
+                          <a:ea typeface="맑은 고딕" pitchFamily="34" charset="-122"/>
+                          <a:cs typeface="맑은 고딕" pitchFamily="34" charset="-120"/>
+                        </a:rPr>
+                        <a:t>지시</a:t>
+                      </a:r>
+                      <a:endParaRPr lang="en-US" sz="1000" dirty="0">
+                        <a:latin typeface="맑은 고딕" charset="0"/>
+                        <a:ea typeface="맑은 고딕" charset="0"/>
+                        <a:cs typeface="맑은 고딕" charset="0"/>
+                      </a:endParaRPr>
+                    </a:p>
+                  </a:txBody>
+                  <a:tcPr marL="91440" marR="91440" marT="45720" marB="45720" anchor="ctr">
+                    <a:lnL w="12700" cap="flat" cmpd="sng" algn="ctr">
+                      <a:solidFill>
+                        <a:srgbClr val="E3E9EC"/>
+                      </a:solidFill>
+                      <a:prstDash val="solid"/>
+                      <a:round/>
+                      <a:headEnd type="none" w="med" len="med"/>
+                      <a:tailEnd type="none" w="med" len="med"/>
+                    </a:lnL>
+                    <a:lnR w="12700" cap="flat" cmpd="sng" algn="ctr">
+                      <a:solidFill>
+                        <a:srgbClr val="E3E9EC"/>
+                      </a:solidFill>
+                      <a:prstDash val="solid"/>
+                      <a:round/>
+                      <a:headEnd type="none" w="med" len="med"/>
+                      <a:tailEnd type="none" w="med" len="med"/>
+                    </a:lnR>
+                    <a:lnT w="12700" cap="flat" cmpd="sng" algn="ctr">
+                      <a:solidFill>
+                        <a:srgbClr val="E3E9EC"/>
+                      </a:solidFill>
+                      <a:prstDash val="solid"/>
+                      <a:round/>
+                      <a:headEnd type="none" w="med" len="med"/>
+                      <a:tailEnd type="none" w="med" len="med"/>
+                    </a:lnT>
+                    <a:lnB w="12700" cap="flat" cmpd="sng" algn="ctr">
+                      <a:solidFill>
+                        <a:srgbClr val="E3E9EC"/>
+                      </a:solidFill>
+                      <a:prstDash val="solid"/>
+                      <a:round/>
+                      <a:headEnd type="none" w="med" len="med"/>
+                      <a:tailEnd type="none" w="med" len="med"/>
+                    </a:lnB>
+                    <a:solidFill>
+                      <a:srgbClr val="FAFCFD"/>
+                    </a:solidFill>
+                  </a:tcPr>
+                </a:tc>
                 <a:tc>
                   <a:txBody>
                     <a:bodyPr/>
@@ -32453,7 +31841,7 @@
                       <a:tailEnd type="none" w="med" len="med"/>
                     </a:lnB>
                     <a:solidFill>
-                      <a:srgbClr val="FFFFFF"/>
+                      <a:srgbClr val="FAFCFD"/>
                     </a:solidFill>
                   </a:tcPr>
                 </a:tc>
@@ -32521,415 +31909,7 @@
                       <a:tailEnd type="none" w="med" len="med"/>
                     </a:lnB>
                     <a:solidFill>
-                      <a:srgbClr val="FFFFFF"/>
-                    </a:solidFill>
-                  </a:tcPr>
-                </a:tc>
-                <a:tc>
-                  <a:txBody>
-                    <a:bodyPr/>
-                    <a:lstStyle/>
-                    <a:p>
-                      <a:pPr algn="r" indent="0" marL="0">
-                        <a:buNone/>
-                      </a:pPr>
-                      <a:r>
-                        <a:rPr lang="en-US" sz="1000" b="1" dirty="0">
-                          <a:solidFill>
-                            <a:srgbClr val="55636E"/>
-                          </a:solidFill>
-                          <a:latin typeface="Calibri" pitchFamily="34" charset="0"/>
-                          <a:ea typeface="Calibri" pitchFamily="34" charset="-122"/>
-                          <a:cs typeface="Calibri" pitchFamily="34" charset="-120"/>
-                        </a:rPr>
-                        <a:t>0.89</a:t>
-                      </a:r>
-                      <a:endParaRPr lang="en-US" sz="1000" dirty="0">
-                        <a:latin typeface="Calibri" charset="0"/>
-                        <a:ea typeface="Calibri" charset="0"/>
-                        <a:cs typeface="Calibri" charset="0"/>
-                      </a:endParaRPr>
-                    </a:p>
-                  </a:txBody>
-                  <a:tcPr marL="91440" marR="91440" marT="45720" marB="45720" anchor="ctr">
-                    <a:lnL w="12700" cap="flat" cmpd="sng" algn="ctr">
-                      <a:solidFill>
-                        <a:srgbClr val="E3E9EC"/>
-                      </a:solidFill>
-                      <a:prstDash val="solid"/>
-                      <a:round/>
-                      <a:headEnd type="none" w="med" len="med"/>
-                      <a:tailEnd type="none" w="med" len="med"/>
-                    </a:lnL>
-                    <a:lnR w="12700" cap="flat" cmpd="sng" algn="ctr">
-                      <a:solidFill>
-                        <a:srgbClr val="E3E9EC"/>
-                      </a:solidFill>
-                      <a:prstDash val="solid"/>
-                      <a:round/>
-                      <a:headEnd type="none" w="med" len="med"/>
-                      <a:tailEnd type="none" w="med" len="med"/>
-                    </a:lnR>
-                    <a:lnT w="12700" cap="flat" cmpd="sng" algn="ctr">
-                      <a:solidFill>
-                        <a:srgbClr val="E3E9EC"/>
-                      </a:solidFill>
-                      <a:prstDash val="solid"/>
-                      <a:round/>
-                      <a:headEnd type="none" w="med" len="med"/>
-                      <a:tailEnd type="none" w="med" len="med"/>
-                    </a:lnT>
-                    <a:lnB w="12700" cap="flat" cmpd="sng" algn="ctr">
-                      <a:solidFill>
-                        <a:srgbClr val="E3E9EC"/>
-                      </a:solidFill>
-                      <a:prstDash val="solid"/>
-                      <a:round/>
-                      <a:headEnd type="none" w="med" len="med"/>
-                      <a:tailEnd type="none" w="med" len="med"/>
-                    </a:lnB>
-                    <a:solidFill>
-                      <a:srgbClr val="FFFFFF"/>
-                    </a:solidFill>
-                  </a:tcPr>
-                </a:tc>
-                <a:tc>
-                  <a:txBody>
-                    <a:bodyPr/>
-                    <a:lstStyle/>
-                    <a:p>
-                      <a:pPr algn="r" indent="0" marL="0">
-                        <a:buNone/>
-                      </a:pPr>
-                      <a:r>
-                        <a:rPr lang="en-US" sz="1000" b="1" dirty="0">
-                          <a:solidFill>
-                            <a:srgbClr val="55636E"/>
-                          </a:solidFill>
-                          <a:latin typeface="Calibri" pitchFamily="34" charset="0"/>
-                          <a:ea typeface="Calibri" pitchFamily="34" charset="-122"/>
-                          <a:cs typeface="Calibri" pitchFamily="34" charset="-120"/>
-                        </a:rPr>
-                        <a:t>4.91</a:t>
-                      </a:r>
-                      <a:endParaRPr lang="en-US" sz="1000" dirty="0">
-                        <a:latin typeface="Calibri" charset="0"/>
-                        <a:ea typeface="Calibri" charset="0"/>
-                        <a:cs typeface="Calibri" charset="0"/>
-                      </a:endParaRPr>
-                    </a:p>
-                  </a:txBody>
-                  <a:tcPr marL="91440" marR="91440" marT="45720" marB="45720" anchor="ctr">
-                    <a:lnL w="12700" cap="flat" cmpd="sng" algn="ctr">
-                      <a:solidFill>
-                        <a:srgbClr val="E3E9EC"/>
-                      </a:solidFill>
-                      <a:prstDash val="solid"/>
-                      <a:round/>
-                      <a:headEnd type="none" w="med" len="med"/>
-                      <a:tailEnd type="none" w="med" len="med"/>
-                    </a:lnL>
-                    <a:lnR w="12700" cap="flat" cmpd="sng" algn="ctr">
-                      <a:solidFill>
-                        <a:srgbClr val="E3E9EC"/>
-                      </a:solidFill>
-                      <a:prstDash val="solid"/>
-                      <a:round/>
-                      <a:headEnd type="none" w="med" len="med"/>
-                      <a:tailEnd type="none" w="med" len="med"/>
-                    </a:lnR>
-                    <a:lnT w="12700" cap="flat" cmpd="sng" algn="ctr">
-                      <a:solidFill>
-                        <a:srgbClr val="E3E9EC"/>
-                      </a:solidFill>
-                      <a:prstDash val="solid"/>
-                      <a:round/>
-                      <a:headEnd type="none" w="med" len="med"/>
-                      <a:tailEnd type="none" w="med" len="med"/>
-                    </a:lnT>
-                    <a:lnB w="12700" cap="flat" cmpd="sng" algn="ctr">
-                      <a:solidFill>
-                        <a:srgbClr val="E3E9EC"/>
-                      </a:solidFill>
-                      <a:prstDash val="solid"/>
-                      <a:round/>
-                      <a:headEnd type="none" w="med" len="med"/>
-                      <a:tailEnd type="none" w="med" len="med"/>
-                    </a:lnB>
-                    <a:solidFill>
-                      <a:srgbClr val="FFFFFF"/>
-                    </a:solidFill>
-                  </a:tcPr>
-                </a:tc>
-                <a:tc>
-                  <a:txBody>
-                    <a:bodyPr/>
-                    <a:lstStyle/>
-                    <a:p>
-                      <a:pPr algn="r" indent="0" marL="0">
-                        <a:buNone/>
-                      </a:pPr>
-                      <a:r>
-                        <a:rPr lang="en-US" sz="1000" b="1" dirty="0">
-                          <a:solidFill>
-                            <a:srgbClr val="55636E"/>
-                          </a:solidFill>
-                          <a:latin typeface="Calibri" pitchFamily="34" charset="0"/>
-                          <a:ea typeface="Calibri" pitchFamily="34" charset="-122"/>
-                          <a:cs typeface="Calibri" pitchFamily="34" charset="-120"/>
-                        </a:rPr>
-                        <a:t>= a</a:t>
-                      </a:r>
-                      <a:endParaRPr lang="en-US" sz="1000" dirty="0">
-                        <a:latin typeface="Calibri" charset="0"/>
-                        <a:ea typeface="Calibri" charset="0"/>
-                        <a:cs typeface="Calibri" charset="0"/>
-                      </a:endParaRPr>
-                    </a:p>
-                  </a:txBody>
-                  <a:tcPr marL="91440" marR="91440" marT="45720" marB="45720" anchor="ctr">
-                    <a:lnL w="12700" cap="flat" cmpd="sng" algn="ctr">
-                      <a:solidFill>
-                        <a:srgbClr val="E3E9EC"/>
-                      </a:solidFill>
-                      <a:prstDash val="solid"/>
-                      <a:round/>
-                      <a:headEnd type="none" w="med" len="med"/>
-                      <a:tailEnd type="none" w="med" len="med"/>
-                    </a:lnL>
-                    <a:lnR w="12700" cap="flat" cmpd="sng" algn="ctr">
-                      <a:solidFill>
-                        <a:srgbClr val="E3E9EC"/>
-                      </a:solidFill>
-                      <a:prstDash val="solid"/>
-                      <a:round/>
-                      <a:headEnd type="none" w="med" len="med"/>
-                      <a:tailEnd type="none" w="med" len="med"/>
-                    </a:lnR>
-                    <a:lnT w="12700" cap="flat" cmpd="sng" algn="ctr">
-                      <a:solidFill>
-                        <a:srgbClr val="E3E9EC"/>
-                      </a:solidFill>
-                      <a:prstDash val="solid"/>
-                      <a:round/>
-                      <a:headEnd type="none" w="med" len="med"/>
-                      <a:tailEnd type="none" w="med" len="med"/>
-                    </a:lnT>
-                    <a:lnB w="12700" cap="flat" cmpd="sng" algn="ctr">
-                      <a:solidFill>
-                        <a:srgbClr val="E3E9EC"/>
-                      </a:solidFill>
-                      <a:prstDash val="solid"/>
-                      <a:round/>
-                      <a:headEnd type="none" w="med" len="med"/>
-                      <a:tailEnd type="none" w="med" len="med"/>
-                    </a:lnB>
-                    <a:solidFill>
-                      <a:srgbClr val="FFFFFF"/>
-                    </a:solidFill>
-                  </a:tcPr>
-                </a:tc>
-                <a:tc>
-                  <a:txBody>
-                    <a:bodyPr/>
-                    <a:lstStyle/>
-                    <a:p>
-                      <a:pPr algn="r" indent="0" marL="0">
-                        <a:buNone/>
-                      </a:pPr>
-                      <a:r>
-                        <a:rPr lang="en-US" sz="1000" b="1" dirty="0">
-                          <a:solidFill>
-                            <a:srgbClr val="55636E"/>
-                          </a:solidFill>
-                          <a:latin typeface="Calibri" pitchFamily="34" charset="0"/>
-                          <a:ea typeface="Calibri" pitchFamily="34" charset="-122"/>
-                          <a:cs typeface="Calibri" pitchFamily="34" charset="-120"/>
-                        </a:rPr>
-                        <a:t>0.50</a:t>
-                      </a:r>
-                      <a:endParaRPr lang="en-US" sz="1000" dirty="0">
-                        <a:latin typeface="Calibri" charset="0"/>
-                        <a:ea typeface="Calibri" charset="0"/>
-                        <a:cs typeface="Calibri" charset="0"/>
-                      </a:endParaRPr>
-                    </a:p>
-                  </a:txBody>
-                  <a:tcPr marL="91440" marR="91440" marT="45720" marB="45720" anchor="ctr">
-                    <a:lnL w="12700" cap="flat" cmpd="sng" algn="ctr">
-                      <a:solidFill>
-                        <a:srgbClr val="E3E9EC"/>
-                      </a:solidFill>
-                      <a:prstDash val="solid"/>
-                      <a:round/>
-                      <a:headEnd type="none" w="med" len="med"/>
-                      <a:tailEnd type="none" w="med" len="med"/>
-                    </a:lnL>
-                    <a:lnR w="12700" cap="flat" cmpd="sng" algn="ctr">
-                      <a:solidFill>
-                        <a:srgbClr val="E3E9EC"/>
-                      </a:solidFill>
-                      <a:prstDash val="solid"/>
-                      <a:round/>
-                      <a:headEnd type="none" w="med" len="med"/>
-                      <a:tailEnd type="none" w="med" len="med"/>
-                    </a:lnR>
-                    <a:lnT w="12700" cap="flat" cmpd="sng" algn="ctr">
-                      <a:solidFill>
-                        <a:srgbClr val="E3E9EC"/>
-                      </a:solidFill>
-                      <a:prstDash val="solid"/>
-                      <a:round/>
-                      <a:headEnd type="none" w="med" len="med"/>
-                      <a:tailEnd type="none" w="med" len="med"/>
-                    </a:lnT>
-                    <a:lnB w="12700" cap="flat" cmpd="sng" algn="ctr">
-                      <a:solidFill>
-                        <a:srgbClr val="E3E9EC"/>
-                      </a:solidFill>
-                      <a:prstDash val="solid"/>
-                      <a:round/>
-                      <a:headEnd type="none" w="med" len="med"/>
-                      <a:tailEnd type="none" w="med" len="med"/>
-                    </a:lnB>
-                    <a:solidFill>
-                      <a:srgbClr val="FFFFFF"/>
-                    </a:solidFill>
-                  </a:tcPr>
-                </a:tc>
-                <a:tc>
-                  <a:txBody>
-                    <a:bodyPr/>
-                    <a:lstStyle/>
-                    <a:p>
-                      <a:pPr algn="r" indent="0" marL="0">
-                        <a:buNone/>
-                      </a:pPr>
-                      <a:r>
-                        <a:rPr lang="en-US" sz="1000" b="1" dirty="0">
-                          <a:solidFill>
-                            <a:srgbClr val="55636E"/>
-                          </a:solidFill>
-                          <a:latin typeface="Calibri" pitchFamily="34" charset="0"/>
-                          <a:ea typeface="Calibri" pitchFamily="34" charset="-122"/>
-                          <a:cs typeface="Calibri" pitchFamily="34" charset="-120"/>
-                        </a:rPr>
-                        <a:t>0.80</a:t>
-                      </a:r>
-                      <a:endParaRPr lang="en-US" sz="1000" dirty="0">
-                        <a:latin typeface="Calibri" charset="0"/>
-                        <a:ea typeface="Calibri" charset="0"/>
-                        <a:cs typeface="Calibri" charset="0"/>
-                      </a:endParaRPr>
-                    </a:p>
-                  </a:txBody>
-                  <a:tcPr marL="91440" marR="91440" marT="45720" marB="45720" anchor="ctr">
-                    <a:lnL w="12700" cap="flat" cmpd="sng" algn="ctr">
-                      <a:solidFill>
-                        <a:srgbClr val="E3E9EC"/>
-                      </a:solidFill>
-                      <a:prstDash val="solid"/>
-                      <a:round/>
-                      <a:headEnd type="none" w="med" len="med"/>
-                      <a:tailEnd type="none" w="med" len="med"/>
-                    </a:lnL>
-                    <a:lnR w="12700" cap="flat" cmpd="sng" algn="ctr">
-                      <a:solidFill>
-                        <a:srgbClr val="E3E9EC"/>
-                      </a:solidFill>
-                      <a:prstDash val="solid"/>
-                      <a:round/>
-                      <a:headEnd type="none" w="med" len="med"/>
-                      <a:tailEnd type="none" w="med" len="med"/>
-                    </a:lnR>
-                    <a:lnT w="12700" cap="flat" cmpd="sng" algn="ctr">
-                      <a:solidFill>
-                        <a:srgbClr val="E3E9EC"/>
-                      </a:solidFill>
-                      <a:prstDash val="solid"/>
-                      <a:round/>
-                      <a:headEnd type="none" w="med" len="med"/>
-                      <a:tailEnd type="none" w="med" len="med"/>
-                    </a:lnT>
-                    <a:lnB w="12700" cap="flat" cmpd="sng" algn="ctr">
-                      <a:solidFill>
-                        <a:srgbClr val="E3E9EC"/>
-                      </a:solidFill>
-                      <a:prstDash val="solid"/>
-                      <a:round/>
-                      <a:headEnd type="none" w="med" len="med"/>
-                      <a:tailEnd type="none" w="med" len="med"/>
-                    </a:lnB>
-                    <a:solidFill>
-                      <a:srgbClr val="FFFFFF"/>
-                    </a:solidFill>
-                  </a:tcPr>
-                </a:tc>
-                <a:tc>
-                  <a:txBody>
-                    <a:bodyPr/>
-                    <a:lstStyle/>
-                    <a:p>
-                      <a:pPr algn="r" indent="0" marL="0">
-                        <a:buNone/>
-                      </a:pPr>
-                      <a:r>
-                        <a:rPr lang="en-US" sz="1000" b="1" dirty="0">
-                          <a:solidFill>
-                            <a:srgbClr val="55636E"/>
-                          </a:solidFill>
-                          <a:latin typeface="Calibri" pitchFamily="34" charset="0"/>
-                          <a:ea typeface="Calibri" pitchFamily="34" charset="-122"/>
-                          <a:cs typeface="Calibri" pitchFamily="34" charset="-120"/>
-                        </a:rPr>
-                        <a:t>= a</a:t>
-                      </a:r>
-                      <a:endParaRPr lang="en-US" sz="1000" dirty="0">
-                        <a:latin typeface="Calibri" charset="0"/>
-                        <a:ea typeface="Calibri" charset="0"/>
-                        <a:cs typeface="Calibri" charset="0"/>
-                      </a:endParaRPr>
-                    </a:p>
-                  </a:txBody>
-                  <a:tcPr marL="91440" marR="91440" marT="45720" marB="45720" anchor="ctr">
-                    <a:lnL w="12700" cap="flat" cmpd="sng" algn="ctr">
-                      <a:solidFill>
-                        <a:srgbClr val="E3E9EC"/>
-                      </a:solidFill>
-                      <a:prstDash val="solid"/>
-                      <a:round/>
-                      <a:headEnd type="none" w="med" len="med"/>
-                      <a:tailEnd type="none" w="med" len="med"/>
-                    </a:lnL>
-                    <a:lnR w="12700" cap="flat" cmpd="sng" algn="ctr">
-                      <a:solidFill>
-                        <a:srgbClr val="E3E9EC"/>
-                      </a:solidFill>
-                      <a:prstDash val="solid"/>
-                      <a:round/>
-                      <a:headEnd type="none" w="med" len="med"/>
-                      <a:tailEnd type="none" w="med" len="med"/>
-                    </a:lnR>
-                    <a:lnT w="12700" cap="flat" cmpd="sng" algn="ctr">
-                      <a:solidFill>
-                        <a:srgbClr val="E3E9EC"/>
-                      </a:solidFill>
-                      <a:prstDash val="solid"/>
-                      <a:round/>
-                      <a:headEnd type="none" w="med" len="med"/>
-                      <a:tailEnd type="none" w="med" len="med"/>
-                    </a:lnT>
-                    <a:lnB w="12700" cap="flat" cmpd="sng" algn="ctr">
-                      <a:solidFill>
-                        <a:srgbClr val="E3E9EC"/>
-                      </a:solidFill>
-                      <a:prstDash val="solid"/>
-                      <a:round/>
-                      <a:headEnd type="none" w="med" len="med"/>
-                      <a:tailEnd type="none" w="med" len="med"/>
-                    </a:lnB>
-                    <a:solidFill>
-                      <a:srgbClr val="FFFFFF"/>
+                      <a:srgbClr val="FAFCFD"/>
                     </a:solidFill>
                   </a:tcPr>
                 </a:tc>
@@ -32950,7 +31930,7 @@
                           <a:ea typeface="Calibri" pitchFamily="34" charset="-122"/>
                           <a:cs typeface="Calibri" pitchFamily="34" charset="-120"/>
                         </a:rPr>
-                        <a:t>✓</a:t>
+                        <a:t>0.89</a:t>
                       </a:r>
                       <a:endParaRPr lang="en-US" sz="1000" dirty="0">
                         <a:latin typeface="Calibri" charset="0"/>
@@ -32997,7 +31977,7 @@
                       <a:tailEnd type="none" w="med" len="med"/>
                     </a:lnB>
                     <a:solidFill>
-                      <a:srgbClr val="FFFFFF"/>
+                      <a:srgbClr val="FAFCFD"/>
                     </a:solidFill>
                   </a:tcPr>
                 </a:tc>
@@ -33014,16 +31994,16 @@
                           <a:solidFill>
                             <a:srgbClr val="55636E"/>
                           </a:solidFill>
-                          <a:latin typeface="맑은 고딕" pitchFamily="34" charset="0"/>
-                          <a:ea typeface="맑은 고딕" pitchFamily="34" charset="-122"/>
-                          <a:cs typeface="맑은 고딕" pitchFamily="34" charset="-120"/>
+                          <a:latin typeface="Calibri" pitchFamily="34" charset="0"/>
+                          <a:ea typeface="Calibri" pitchFamily="34" charset="-122"/>
+                          <a:cs typeface="Calibri" pitchFamily="34" charset="-120"/>
                         </a:rPr>
-                        <a:t>[−20, 20]</a:t>
+                        <a:t>4.91</a:t>
                       </a:r>
                       <a:endParaRPr lang="en-US" sz="1000" dirty="0">
-                        <a:latin typeface="맑은 고딕" charset="0"/>
-                        <a:ea typeface="맑은 고딕" charset="0"/>
-                        <a:cs typeface="맑은 고딕" charset="0"/>
+                        <a:latin typeface="Calibri" charset="0"/>
+                        <a:ea typeface="Calibri" charset="0"/>
+                        <a:cs typeface="Calibri" charset="0"/>
                       </a:endParaRPr>
                     </a:p>
                   </a:txBody>
@@ -33065,7 +32045,279 @@
                       <a:tailEnd type="none" w="med" len="med"/>
                     </a:lnB>
                     <a:solidFill>
-                      <a:srgbClr val="FFFFFF"/>
+                      <a:srgbClr val="FAFCFD"/>
+                    </a:solidFill>
+                  </a:tcPr>
+                </a:tc>
+                <a:tc>
+                  <a:txBody>
+                    <a:bodyPr/>
+                    <a:lstStyle/>
+                    <a:p>
+                      <a:pPr algn="r" indent="0" marL="0">
+                        <a:buNone/>
+                      </a:pPr>
+                      <a:r>
+                        <a:rPr lang="en-US" sz="1000" dirty="0">
+                          <a:solidFill>
+                            <a:srgbClr val="55636E"/>
+                          </a:solidFill>
+                          <a:latin typeface="Calibri" pitchFamily="34" charset="0"/>
+                          <a:ea typeface="Calibri" pitchFamily="34" charset="-122"/>
+                          <a:cs typeface="Calibri" pitchFamily="34" charset="-120"/>
+                        </a:rPr>
+                        <a:t>= a</a:t>
+                      </a:r>
+                      <a:endParaRPr lang="en-US" sz="1000" dirty="0">
+                        <a:latin typeface="Calibri" charset="0"/>
+                        <a:ea typeface="Calibri" charset="0"/>
+                        <a:cs typeface="Calibri" charset="0"/>
+                      </a:endParaRPr>
+                    </a:p>
+                  </a:txBody>
+                  <a:tcPr marL="91440" marR="91440" marT="45720" marB="45720" anchor="ctr">
+                    <a:lnL w="12700" cap="flat" cmpd="sng" algn="ctr">
+                      <a:solidFill>
+                        <a:srgbClr val="E3E9EC"/>
+                      </a:solidFill>
+                      <a:prstDash val="solid"/>
+                      <a:round/>
+                      <a:headEnd type="none" w="med" len="med"/>
+                      <a:tailEnd type="none" w="med" len="med"/>
+                    </a:lnL>
+                    <a:lnR w="12700" cap="flat" cmpd="sng" algn="ctr">
+                      <a:solidFill>
+                        <a:srgbClr val="E3E9EC"/>
+                      </a:solidFill>
+                      <a:prstDash val="solid"/>
+                      <a:round/>
+                      <a:headEnd type="none" w="med" len="med"/>
+                      <a:tailEnd type="none" w="med" len="med"/>
+                    </a:lnR>
+                    <a:lnT w="12700" cap="flat" cmpd="sng" algn="ctr">
+                      <a:solidFill>
+                        <a:srgbClr val="E3E9EC"/>
+                      </a:solidFill>
+                      <a:prstDash val="solid"/>
+                      <a:round/>
+                      <a:headEnd type="none" w="med" len="med"/>
+                      <a:tailEnd type="none" w="med" len="med"/>
+                    </a:lnT>
+                    <a:lnB w="12700" cap="flat" cmpd="sng" algn="ctr">
+                      <a:solidFill>
+                        <a:srgbClr val="E3E9EC"/>
+                      </a:solidFill>
+                      <a:prstDash val="solid"/>
+                      <a:round/>
+                      <a:headEnd type="none" w="med" len="med"/>
+                      <a:tailEnd type="none" w="med" len="med"/>
+                    </a:lnB>
+                    <a:solidFill>
+                      <a:srgbClr val="FAFCFD"/>
+                    </a:solidFill>
+                  </a:tcPr>
+                </a:tc>
+                <a:tc>
+                  <a:txBody>
+                    <a:bodyPr/>
+                    <a:lstStyle/>
+                    <a:p>
+                      <a:pPr algn="r" indent="0" marL="0">
+                        <a:buNone/>
+                      </a:pPr>
+                      <a:r>
+                        <a:rPr lang="en-US" sz="1000" dirty="0">
+                          <a:solidFill>
+                            <a:srgbClr val="55636E"/>
+                          </a:solidFill>
+                          <a:latin typeface="Calibri" pitchFamily="34" charset="0"/>
+                          <a:ea typeface="Calibri" pitchFamily="34" charset="-122"/>
+                          <a:cs typeface="Calibri" pitchFamily="34" charset="-120"/>
+                        </a:rPr>
+                        <a:t>0.50</a:t>
+                      </a:r>
+                      <a:endParaRPr lang="en-US" sz="1000" dirty="0">
+                        <a:latin typeface="Calibri" charset="0"/>
+                        <a:ea typeface="Calibri" charset="0"/>
+                        <a:cs typeface="Calibri" charset="0"/>
+                      </a:endParaRPr>
+                    </a:p>
+                  </a:txBody>
+                  <a:tcPr marL="91440" marR="91440" marT="45720" marB="45720" anchor="ctr">
+                    <a:lnL w="12700" cap="flat" cmpd="sng" algn="ctr">
+                      <a:solidFill>
+                        <a:srgbClr val="E3E9EC"/>
+                      </a:solidFill>
+                      <a:prstDash val="solid"/>
+                      <a:round/>
+                      <a:headEnd type="none" w="med" len="med"/>
+                      <a:tailEnd type="none" w="med" len="med"/>
+                    </a:lnL>
+                    <a:lnR w="12700" cap="flat" cmpd="sng" algn="ctr">
+                      <a:solidFill>
+                        <a:srgbClr val="E3E9EC"/>
+                      </a:solidFill>
+                      <a:prstDash val="solid"/>
+                      <a:round/>
+                      <a:headEnd type="none" w="med" len="med"/>
+                      <a:tailEnd type="none" w="med" len="med"/>
+                    </a:lnR>
+                    <a:lnT w="12700" cap="flat" cmpd="sng" algn="ctr">
+                      <a:solidFill>
+                        <a:srgbClr val="E3E9EC"/>
+                      </a:solidFill>
+                      <a:prstDash val="solid"/>
+                      <a:round/>
+                      <a:headEnd type="none" w="med" len="med"/>
+                      <a:tailEnd type="none" w="med" len="med"/>
+                    </a:lnT>
+                    <a:lnB w="12700" cap="flat" cmpd="sng" algn="ctr">
+                      <a:solidFill>
+                        <a:srgbClr val="E3E9EC"/>
+                      </a:solidFill>
+                      <a:prstDash val="solid"/>
+                      <a:round/>
+                      <a:headEnd type="none" w="med" len="med"/>
+                      <a:tailEnd type="none" w="med" len="med"/>
+                    </a:lnB>
+                    <a:solidFill>
+                      <a:srgbClr val="FAFCFD"/>
+                    </a:solidFill>
+                  </a:tcPr>
+                </a:tc>
+                <a:tc>
+                  <a:txBody>
+                    <a:bodyPr/>
+                    <a:lstStyle/>
+                    <a:p>
+                      <a:pPr algn="r" indent="0" marL="0">
+                        <a:buNone/>
+                      </a:pPr>
+                      <a:r>
+                        <a:rPr lang="en-US" sz="1000" dirty="0">
+                          <a:solidFill>
+                            <a:srgbClr val="55636E"/>
+                          </a:solidFill>
+                          <a:latin typeface="Calibri" pitchFamily="34" charset="0"/>
+                          <a:ea typeface="Calibri" pitchFamily="34" charset="-122"/>
+                          <a:cs typeface="Calibri" pitchFamily="34" charset="-120"/>
+                        </a:rPr>
+                        <a:t>0.80</a:t>
+                      </a:r>
+                      <a:endParaRPr lang="en-US" sz="1000" dirty="0">
+                        <a:latin typeface="Calibri" charset="0"/>
+                        <a:ea typeface="Calibri" charset="0"/>
+                        <a:cs typeface="Calibri" charset="0"/>
+                      </a:endParaRPr>
+                    </a:p>
+                  </a:txBody>
+                  <a:tcPr marL="91440" marR="91440" marT="45720" marB="45720" anchor="ctr">
+                    <a:lnL w="12700" cap="flat" cmpd="sng" algn="ctr">
+                      <a:solidFill>
+                        <a:srgbClr val="E3E9EC"/>
+                      </a:solidFill>
+                      <a:prstDash val="solid"/>
+                      <a:round/>
+                      <a:headEnd type="none" w="med" len="med"/>
+                      <a:tailEnd type="none" w="med" len="med"/>
+                    </a:lnL>
+                    <a:lnR w="12700" cap="flat" cmpd="sng" algn="ctr">
+                      <a:solidFill>
+                        <a:srgbClr val="E3E9EC"/>
+                      </a:solidFill>
+                      <a:prstDash val="solid"/>
+                      <a:round/>
+                      <a:headEnd type="none" w="med" len="med"/>
+                      <a:tailEnd type="none" w="med" len="med"/>
+                    </a:lnR>
+                    <a:lnT w="12700" cap="flat" cmpd="sng" algn="ctr">
+                      <a:solidFill>
+                        <a:srgbClr val="E3E9EC"/>
+                      </a:solidFill>
+                      <a:prstDash val="solid"/>
+                      <a:round/>
+                      <a:headEnd type="none" w="med" len="med"/>
+                      <a:tailEnd type="none" w="med" len="med"/>
+                    </a:lnT>
+                    <a:lnB w="12700" cap="flat" cmpd="sng" algn="ctr">
+                      <a:solidFill>
+                        <a:srgbClr val="E3E9EC"/>
+                      </a:solidFill>
+                      <a:prstDash val="solid"/>
+                      <a:round/>
+                      <a:headEnd type="none" w="med" len="med"/>
+                      <a:tailEnd type="none" w="med" len="med"/>
+                    </a:lnB>
+                    <a:solidFill>
+                      <a:srgbClr val="FAFCFD"/>
+                    </a:solidFill>
+                  </a:tcPr>
+                </a:tc>
+                <a:tc>
+                  <a:txBody>
+                    <a:bodyPr/>
+                    <a:lstStyle/>
+                    <a:p>
+                      <a:pPr algn="r" indent="0" marL="0">
+                        <a:buNone/>
+                      </a:pPr>
+                      <a:r>
+                        <a:rPr lang="en-US" sz="1000" dirty="0">
+                          <a:solidFill>
+                            <a:srgbClr val="55636E"/>
+                          </a:solidFill>
+                          <a:latin typeface="Calibri" pitchFamily="34" charset="0"/>
+                          <a:ea typeface="Calibri" pitchFamily="34" charset="-122"/>
+                          <a:cs typeface="Calibri" pitchFamily="34" charset="-120"/>
+                        </a:rPr>
+                        <a:t>= a</a:t>
+                      </a:r>
+                      <a:endParaRPr lang="en-US" sz="1000" dirty="0">
+                        <a:latin typeface="Calibri" charset="0"/>
+                        <a:ea typeface="Calibri" charset="0"/>
+                        <a:cs typeface="Calibri" charset="0"/>
+                      </a:endParaRPr>
+                    </a:p>
+                  </a:txBody>
+                  <a:tcPr marL="91440" marR="91440" marT="45720" marB="45720" anchor="ctr">
+                    <a:lnL w="12700" cap="flat" cmpd="sng" algn="ctr">
+                      <a:solidFill>
+                        <a:srgbClr val="E3E9EC"/>
+                      </a:solidFill>
+                      <a:prstDash val="solid"/>
+                      <a:round/>
+                      <a:headEnd type="none" w="med" len="med"/>
+                      <a:tailEnd type="none" w="med" len="med"/>
+                    </a:lnL>
+                    <a:lnR w="12700" cap="flat" cmpd="sng" algn="ctr">
+                      <a:solidFill>
+                        <a:srgbClr val="E3E9EC"/>
+                      </a:solidFill>
+                      <a:prstDash val="solid"/>
+                      <a:round/>
+                      <a:headEnd type="none" w="med" len="med"/>
+                      <a:tailEnd type="none" w="med" len="med"/>
+                    </a:lnR>
+                    <a:lnT w="12700" cap="flat" cmpd="sng" algn="ctr">
+                      <a:solidFill>
+                        <a:srgbClr val="E3E9EC"/>
+                      </a:solidFill>
+                      <a:prstDash val="solid"/>
+                      <a:round/>
+                      <a:headEnd type="none" w="med" len="med"/>
+                      <a:tailEnd type="none" w="med" len="med"/>
+                    </a:lnT>
+                    <a:lnB w="12700" cap="flat" cmpd="sng" algn="ctr">
+                      <a:solidFill>
+                        <a:srgbClr val="E3E9EC"/>
+                      </a:solidFill>
+                      <a:prstDash val="solid"/>
+                      <a:round/>
+                      <a:headEnd type="none" w="med" len="med"/>
+                      <a:tailEnd type="none" w="med" len="med"/>
+                    </a:lnB>
+                    <a:solidFill>
+                      <a:srgbClr val="FAFCFD"/>
                     </a:solidFill>
                   </a:tcPr>
                 </a:tc>
@@ -33133,7 +32385,7 @@
                       <a:tailEnd type="none" w="med" len="med"/>
                     </a:lnB>
                     <a:solidFill>
-                      <a:srgbClr val="FFFFFF"/>
+                      <a:srgbClr val="FAFCFD"/>
                     </a:solidFill>
                   </a:tcPr>
                 </a:tc>
@@ -33154,7 +32406,7 @@
                           <a:ea typeface="맑은 고딕" pitchFamily="34" charset="-122"/>
                           <a:cs typeface="맑은 고딕" pitchFamily="34" charset="-120"/>
                         </a:rPr>
-                        <a:t>a와 c를 묶으면</a:t>
+                        <a:t>면적의 힘을 USGS의 힘과 같게 묶고 크기만 학습</a:t>
                       </a:r>
                       <a:endParaRPr lang="en-US" sz="1000" dirty="0">
                         <a:latin typeface="맑은 고딕" charset="0"/>
@@ -33201,12 +32453,80 @@
                       <a:tailEnd type="none" w="med" len="med"/>
                     </a:lnB>
                     <a:solidFill>
-                      <a:srgbClr val="FFFFFF"/>
+                      <a:srgbClr val="FAFCFD"/>
                     </a:solidFill>
                   </a:tcPr>
                 </a:tc>
               </a:tr>
-              <a:tr h="256032">
+              <a:tr h="246888">
+                <a:tc>
+                  <a:txBody>
+                    <a:bodyPr/>
+                    <a:lstStyle/>
+                    <a:p>
+                      <a:pPr algn="l" indent="0" marL="0">
+                        <a:buNone/>
+                      </a:pPr>
+                      <a:r>
+                        <a:rPr lang="en-US" sz="1000" dirty="0">
+                          <a:solidFill>
+                            <a:srgbClr val="55636E"/>
+                          </a:solidFill>
+                          <a:latin typeface="맑은 고딕" pitchFamily="34" charset="0"/>
+                          <a:ea typeface="맑은 고딕" pitchFamily="34" charset="-122"/>
+                          <a:cs typeface="맑은 고딕" pitchFamily="34" charset="-120"/>
+                        </a:rPr>
+                        <a:t>지시</a:t>
+                      </a:r>
+                      <a:endParaRPr lang="en-US" sz="1000" dirty="0">
+                        <a:latin typeface="맑은 고딕" charset="0"/>
+                        <a:ea typeface="맑은 고딕" charset="0"/>
+                        <a:cs typeface="맑은 고딕" charset="0"/>
+                      </a:endParaRPr>
+                    </a:p>
+                  </a:txBody>
+                  <a:tcPr marL="91440" marR="91440" marT="45720" marB="45720" anchor="ctr">
+                    <a:lnL w="12700" cap="flat" cmpd="sng" algn="ctr">
+                      <a:solidFill>
+                        <a:srgbClr val="E3E9EC"/>
+                      </a:solidFill>
+                      <a:prstDash val="solid"/>
+                      <a:round/>
+                      <a:headEnd type="none" w="med" len="med"/>
+                      <a:tailEnd type="none" w="med" len="med"/>
+                    </a:lnL>
+                    <a:lnR w="12700" cap="flat" cmpd="sng" algn="ctr">
+                      <a:solidFill>
+                        <a:srgbClr val="E3E9EC"/>
+                      </a:solidFill>
+                      <a:prstDash val="solid"/>
+                      <a:round/>
+                      <a:headEnd type="none" w="med" len="med"/>
+                      <a:tailEnd type="none" w="med" len="med"/>
+                    </a:lnR>
+                    <a:lnT w="12700" cap="flat" cmpd="sng" algn="ctr">
+                      <a:solidFill>
+                        <a:srgbClr val="E3E9EC"/>
+                      </a:solidFill>
+                      <a:prstDash val="solid"/>
+                      <a:round/>
+                      <a:headEnd type="none" w="med" len="med"/>
+                      <a:tailEnd type="none" w="med" len="med"/>
+                    </a:lnT>
+                    <a:lnB w="12700" cap="flat" cmpd="sng" algn="ctr">
+                      <a:solidFill>
+                        <a:srgbClr val="E3E9EC"/>
+                      </a:solidFill>
+                      <a:prstDash val="solid"/>
+                      <a:round/>
+                      <a:headEnd type="none" w="med" len="med"/>
+                      <a:tailEnd type="none" w="med" len="med"/>
+                    </a:lnB>
+                    <a:solidFill>
+                      <a:srgbClr val="FAFCFD"/>
+                    </a:solidFill>
+                  </a:tcPr>
+                </a:tc>
                 <a:tc>
                   <a:txBody>
                     <a:bodyPr/>
@@ -33271,7 +32591,7 @@
                       <a:tailEnd type="none" w="med" len="med"/>
                     </a:lnB>
                     <a:solidFill>
-                      <a:srgbClr val="FFFFFF"/>
+                      <a:srgbClr val="FAFCFD"/>
                     </a:solidFill>
                   </a:tcPr>
                 </a:tc>
@@ -33339,7 +32659,7 @@
                       <a:tailEnd type="none" w="med" len="med"/>
                     </a:lnB>
                     <a:solidFill>
-                      <a:srgbClr val="FFFFFF"/>
+                      <a:srgbClr val="FAFCFD"/>
                     </a:solidFill>
                   </a:tcPr>
                 </a:tc>
@@ -33352,7 +32672,7 @@
                         <a:buNone/>
                       </a:pPr>
                       <a:r>
-                        <a:rPr lang="en-US" sz="1000" b="1" dirty="0">
+                        <a:rPr lang="en-US" sz="1000" dirty="0">
                           <a:solidFill>
                             <a:srgbClr val="55636E"/>
                           </a:solidFill>
@@ -33407,7 +32727,7 @@
                       <a:tailEnd type="none" w="med" len="med"/>
                     </a:lnB>
                     <a:solidFill>
-                      <a:srgbClr val="FFFFFF"/>
+                      <a:srgbClr val="FAFCFD"/>
                     </a:solidFill>
                   </a:tcPr>
                 </a:tc>
@@ -33420,7 +32740,7 @@
                         <a:buNone/>
                       </a:pPr>
                       <a:r>
-                        <a:rPr lang="en-US" sz="1000" b="1" dirty="0">
+                        <a:rPr lang="en-US" sz="1000" dirty="0">
                           <a:solidFill>
                             <a:srgbClr val="55636E"/>
                           </a:solidFill>
@@ -33475,7 +32795,7 @@
                       <a:tailEnd type="none" w="med" len="med"/>
                     </a:lnB>
                     <a:solidFill>
-                      <a:srgbClr val="FFFFFF"/>
+                      <a:srgbClr val="FAFCFD"/>
                     </a:solidFill>
                   </a:tcPr>
                 </a:tc>
@@ -33543,7 +32863,7 @@
                       <a:tailEnd type="none" w="med" len="med"/>
                     </a:lnB>
                     <a:solidFill>
-                      <a:srgbClr val="FFFFFF"/>
+                      <a:srgbClr val="FAFCFD"/>
                     </a:solidFill>
                   </a:tcPr>
                 </a:tc>
@@ -33556,7 +32876,7 @@
                         <a:buNone/>
                       </a:pPr>
                       <a:r>
-                        <a:rPr lang="en-US" sz="1000" b="1" dirty="0">
+                        <a:rPr lang="en-US" sz="1000" dirty="0">
                           <a:solidFill>
                             <a:srgbClr val="55636E"/>
                           </a:solidFill>
@@ -33611,7 +32931,7 @@
                       <a:tailEnd type="none" w="med" len="med"/>
                     </a:lnB>
                     <a:solidFill>
-                      <a:srgbClr val="FFFFFF"/>
+                      <a:srgbClr val="FAFCFD"/>
                     </a:solidFill>
                   </a:tcPr>
                 </a:tc>
@@ -33624,7 +32944,7 @@
                         <a:buNone/>
                       </a:pPr>
                       <a:r>
-                        <a:rPr lang="en-US" sz="1000" b="1" dirty="0">
+                        <a:rPr lang="en-US" sz="1000" dirty="0">
                           <a:solidFill>
                             <a:srgbClr val="55636E"/>
                           </a:solidFill>
@@ -33679,7 +32999,7 @@
                       <a:tailEnd type="none" w="med" len="med"/>
                     </a:lnB>
                     <a:solidFill>
-                      <a:srgbClr val="FFFFFF"/>
+                      <a:srgbClr val="FAFCFD"/>
                     </a:solidFill>
                   </a:tcPr>
                 </a:tc>
@@ -33747,143 +33067,7 @@
                       <a:tailEnd type="none" w="med" len="med"/>
                     </a:lnB>
                     <a:solidFill>
-                      <a:srgbClr val="FFFFFF"/>
-                    </a:solidFill>
-                  </a:tcPr>
-                </a:tc>
-                <a:tc>
-                  <a:txBody>
-                    <a:bodyPr/>
-                    <a:lstStyle/>
-                    <a:p>
-                      <a:pPr algn="r" indent="0" marL="0">
-                        <a:buNone/>
-                      </a:pPr>
-                      <a:r>
-                        <a:rPr lang="en-US" sz="1000" dirty="0">
-                          <a:solidFill>
-                            <a:srgbClr val="55636E"/>
-                          </a:solidFill>
-                          <a:latin typeface="Calibri" pitchFamily="34" charset="0"/>
-                          <a:ea typeface="Calibri" pitchFamily="34" charset="-122"/>
-                          <a:cs typeface="Calibri" pitchFamily="34" charset="-120"/>
-                        </a:rPr>
-                        <a:t>✓</a:t>
-                      </a:r>
-                      <a:endParaRPr lang="en-US" sz="1000" dirty="0">
-                        <a:latin typeface="Calibri" charset="0"/>
-                        <a:ea typeface="Calibri" charset="0"/>
-                        <a:cs typeface="Calibri" charset="0"/>
-                      </a:endParaRPr>
-                    </a:p>
-                  </a:txBody>
-                  <a:tcPr marL="91440" marR="91440" marT="45720" marB="45720" anchor="ctr">
-                    <a:lnL w="12700" cap="flat" cmpd="sng" algn="ctr">
-                      <a:solidFill>
-                        <a:srgbClr val="E3E9EC"/>
-                      </a:solidFill>
-                      <a:prstDash val="solid"/>
-                      <a:round/>
-                      <a:headEnd type="none" w="med" len="med"/>
-                      <a:tailEnd type="none" w="med" len="med"/>
-                    </a:lnL>
-                    <a:lnR w="12700" cap="flat" cmpd="sng" algn="ctr">
-                      <a:solidFill>
-                        <a:srgbClr val="E3E9EC"/>
-                      </a:solidFill>
-                      <a:prstDash val="solid"/>
-                      <a:round/>
-                      <a:headEnd type="none" w="med" len="med"/>
-                      <a:tailEnd type="none" w="med" len="med"/>
-                    </a:lnR>
-                    <a:lnT w="12700" cap="flat" cmpd="sng" algn="ctr">
-                      <a:solidFill>
-                        <a:srgbClr val="E3E9EC"/>
-                      </a:solidFill>
-                      <a:prstDash val="solid"/>
-                      <a:round/>
-                      <a:headEnd type="none" w="med" len="med"/>
-                      <a:tailEnd type="none" w="med" len="med"/>
-                    </a:lnT>
-                    <a:lnB w="12700" cap="flat" cmpd="sng" algn="ctr">
-                      <a:solidFill>
-                        <a:srgbClr val="E3E9EC"/>
-                      </a:solidFill>
-                      <a:prstDash val="solid"/>
-                      <a:round/>
-                      <a:headEnd type="none" w="med" len="med"/>
-                      <a:tailEnd type="none" w="med" len="med"/>
-                    </a:lnB>
-                    <a:solidFill>
-                      <a:srgbClr val="FFFFFF"/>
-                    </a:solidFill>
-                  </a:tcPr>
-                </a:tc>
-                <a:tc>
-                  <a:txBody>
-                    <a:bodyPr/>
-                    <a:lstStyle/>
-                    <a:p>
-                      <a:pPr algn="r" indent="0" marL="0">
-                        <a:buNone/>
-                      </a:pPr>
-                      <a:r>
-                        <a:rPr lang="en-US" sz="1000" dirty="0">
-                          <a:solidFill>
-                            <a:srgbClr val="55636E"/>
-                          </a:solidFill>
-                          <a:latin typeface="맑은 고딕" pitchFamily="34" charset="0"/>
-                          <a:ea typeface="맑은 고딕" pitchFamily="34" charset="-122"/>
-                          <a:cs typeface="맑은 고딕" pitchFamily="34" charset="-120"/>
-                        </a:rPr>
-                        <a:t>[−20, 20]</a:t>
-                      </a:r>
-                      <a:endParaRPr lang="en-US" sz="1000" dirty="0">
-                        <a:latin typeface="맑은 고딕" charset="0"/>
-                        <a:ea typeface="맑은 고딕" charset="0"/>
-                        <a:cs typeface="맑은 고딕" charset="0"/>
-                      </a:endParaRPr>
-                    </a:p>
-                  </a:txBody>
-                  <a:tcPr marL="91440" marR="91440" marT="45720" marB="45720" anchor="ctr">
-                    <a:lnL w="12700" cap="flat" cmpd="sng" algn="ctr">
-                      <a:solidFill>
-                        <a:srgbClr val="E3E9EC"/>
-                      </a:solidFill>
-                      <a:prstDash val="solid"/>
-                      <a:round/>
-                      <a:headEnd type="none" w="med" len="med"/>
-                      <a:tailEnd type="none" w="med" len="med"/>
-                    </a:lnL>
-                    <a:lnR w="12700" cap="flat" cmpd="sng" algn="ctr">
-                      <a:solidFill>
-                        <a:srgbClr val="E3E9EC"/>
-                      </a:solidFill>
-                      <a:prstDash val="solid"/>
-                      <a:round/>
-                      <a:headEnd type="none" w="med" len="med"/>
-                      <a:tailEnd type="none" w="med" len="med"/>
-                    </a:lnR>
-                    <a:lnT w="12700" cap="flat" cmpd="sng" algn="ctr">
-                      <a:solidFill>
-                        <a:srgbClr val="E3E9EC"/>
-                      </a:solidFill>
-                      <a:prstDash val="solid"/>
-                      <a:round/>
-                      <a:headEnd type="none" w="med" len="med"/>
-                      <a:tailEnd type="none" w="med" len="med"/>
-                    </a:lnT>
-                    <a:lnB w="12700" cap="flat" cmpd="sng" algn="ctr">
-                      <a:solidFill>
-                        <a:srgbClr val="E3E9EC"/>
-                      </a:solidFill>
-                      <a:prstDash val="solid"/>
-                      <a:round/>
-                      <a:headEnd type="none" w="med" len="med"/>
-                      <a:tailEnd type="none" w="med" len="med"/>
-                    </a:lnB>
-                    <a:solidFill>
-                      <a:srgbClr val="FFFFFF"/>
+                      <a:srgbClr val="FAFCFD"/>
                     </a:solidFill>
                   </a:tcPr>
                 </a:tc>
@@ -33951,7 +33135,7 @@
                       <a:tailEnd type="none" w="med" len="med"/>
                     </a:lnB>
                     <a:solidFill>
-                      <a:srgbClr val="FFFFFF"/>
+                      <a:srgbClr val="FAFCFD"/>
                     </a:solidFill>
                   </a:tcPr>
                 </a:tc>
@@ -33972,7 +33156,7 @@
                           <a:ea typeface="맑은 고딕" pitchFamily="34" charset="-122"/>
                           <a:cs typeface="맑은 고딕" pitchFamily="34" charset="-120"/>
                         </a:rPr>
-                        <a:t>c는 1, a·b만 학습</a:t>
+                        <a:t>면적의 힘은 1로 두고 기울기·높이만 학습</a:t>
                       </a:r>
                       <a:endParaRPr lang="en-US" sz="1000" dirty="0">
                         <a:latin typeface="맑은 고딕" charset="0"/>
@@ -34019,12 +33203,80 @@
                       <a:tailEnd type="none" w="med" len="med"/>
                     </a:lnB>
                     <a:solidFill>
-                      <a:srgbClr val="FFFFFF"/>
+                      <a:srgbClr val="FAFCFD"/>
                     </a:solidFill>
                   </a:tcPr>
                 </a:tc>
               </a:tr>
-              <a:tr h="256032">
+              <a:tr h="246888">
+                <a:tc>
+                  <a:txBody>
+                    <a:bodyPr/>
+                    <a:lstStyle/>
+                    <a:p>
+                      <a:pPr algn="l" indent="0" marL="0">
+                        <a:buNone/>
+                      </a:pPr>
+                      <a:r>
+                        <a:rPr lang="en-US" sz="1000" dirty="0">
+                          <a:solidFill>
+                            <a:srgbClr val="55636E"/>
+                          </a:solidFill>
+                          <a:latin typeface="맑은 고딕" pitchFamily="34" charset="0"/>
+                          <a:ea typeface="맑은 고딕" pitchFamily="34" charset="-122"/>
+                          <a:cs typeface="맑은 고딕" pitchFamily="34" charset="-120"/>
+                        </a:rPr>
+                        <a:t>지시</a:t>
+                      </a:r>
+                      <a:endParaRPr lang="en-US" sz="1000" dirty="0">
+                        <a:latin typeface="맑은 고딕" charset="0"/>
+                        <a:ea typeface="맑은 고딕" charset="0"/>
+                        <a:cs typeface="맑은 고딕" charset="0"/>
+                      </a:endParaRPr>
+                    </a:p>
+                  </a:txBody>
+                  <a:tcPr marL="91440" marR="91440" marT="45720" marB="45720" anchor="ctr">
+                    <a:lnL w="12700" cap="flat" cmpd="sng" algn="ctr">
+                      <a:solidFill>
+                        <a:srgbClr val="E3E9EC"/>
+                      </a:solidFill>
+                      <a:prstDash val="solid"/>
+                      <a:round/>
+                      <a:headEnd type="none" w="med" len="med"/>
+                      <a:tailEnd type="none" w="med" len="med"/>
+                    </a:lnL>
+                    <a:lnR w="12700" cap="flat" cmpd="sng" algn="ctr">
+                      <a:solidFill>
+                        <a:srgbClr val="E3E9EC"/>
+                      </a:solidFill>
+                      <a:prstDash val="solid"/>
+                      <a:round/>
+                      <a:headEnd type="none" w="med" len="med"/>
+                      <a:tailEnd type="none" w="med" len="med"/>
+                    </a:lnR>
+                    <a:lnT w="12700" cap="flat" cmpd="sng" algn="ctr">
+                      <a:solidFill>
+                        <a:srgbClr val="E3E9EC"/>
+                      </a:solidFill>
+                      <a:prstDash val="solid"/>
+                      <a:round/>
+                      <a:headEnd type="none" w="med" len="med"/>
+                      <a:tailEnd type="none" w="med" len="med"/>
+                    </a:lnT>
+                    <a:lnB w="12700" cap="flat" cmpd="sng" algn="ctr">
+                      <a:solidFill>
+                        <a:srgbClr val="E3E9EC"/>
+                      </a:solidFill>
+                      <a:prstDash val="solid"/>
+                      <a:round/>
+                      <a:headEnd type="none" w="med" len="med"/>
+                      <a:tailEnd type="none" w="med" len="med"/>
+                    </a:lnB>
+                    <a:solidFill>
+                      <a:srgbClr val="FAFCFD"/>
+                    </a:solidFill>
+                  </a:tcPr>
+                </a:tc>
                 <a:tc>
                   <a:txBody>
                     <a:bodyPr/>
@@ -34089,7 +33341,7 @@
                       <a:tailEnd type="none" w="med" len="med"/>
                     </a:lnB>
                     <a:solidFill>
-                      <a:srgbClr val="FFFFFF"/>
+                      <a:srgbClr val="FAFCFD"/>
                     </a:solidFill>
                   </a:tcPr>
                 </a:tc>
@@ -34157,415 +33409,7 @@
                       <a:tailEnd type="none" w="med" len="med"/>
                     </a:lnB>
                     <a:solidFill>
-                      <a:srgbClr val="FFFFFF"/>
-                    </a:solidFill>
-                  </a:tcPr>
-                </a:tc>
-                <a:tc>
-                  <a:txBody>
-                    <a:bodyPr/>
-                    <a:lstStyle/>
-                    <a:p>
-                      <a:pPr algn="r" indent="0" marL="0">
-                        <a:buNone/>
-                      </a:pPr>
-                      <a:r>
-                        <a:rPr lang="en-US" sz="1000" b="1" dirty="0">
-                          <a:solidFill>
-                            <a:srgbClr val="55636E"/>
-                          </a:solidFill>
-                          <a:latin typeface="Calibri" pitchFamily="34" charset="0"/>
-                          <a:ea typeface="Calibri" pitchFamily="34" charset="-122"/>
-                          <a:cs typeface="Calibri" pitchFamily="34" charset="-120"/>
-                        </a:rPr>
-                        <a:t>1.86</a:t>
-                      </a:r>
-                      <a:endParaRPr lang="en-US" sz="1000" dirty="0">
-                        <a:latin typeface="Calibri" charset="0"/>
-                        <a:ea typeface="Calibri" charset="0"/>
-                        <a:cs typeface="Calibri" charset="0"/>
-                      </a:endParaRPr>
-                    </a:p>
-                  </a:txBody>
-                  <a:tcPr marL="91440" marR="91440" marT="45720" marB="45720" anchor="ctr">
-                    <a:lnL w="12700" cap="flat" cmpd="sng" algn="ctr">
-                      <a:solidFill>
-                        <a:srgbClr val="E3E9EC"/>
-                      </a:solidFill>
-                      <a:prstDash val="solid"/>
-                      <a:round/>
-                      <a:headEnd type="none" w="med" len="med"/>
-                      <a:tailEnd type="none" w="med" len="med"/>
-                    </a:lnL>
-                    <a:lnR w="12700" cap="flat" cmpd="sng" algn="ctr">
-                      <a:solidFill>
-                        <a:srgbClr val="E3E9EC"/>
-                      </a:solidFill>
-                      <a:prstDash val="solid"/>
-                      <a:round/>
-                      <a:headEnd type="none" w="med" len="med"/>
-                      <a:tailEnd type="none" w="med" len="med"/>
-                    </a:lnR>
-                    <a:lnT w="12700" cap="flat" cmpd="sng" algn="ctr">
-                      <a:solidFill>
-                        <a:srgbClr val="E3E9EC"/>
-                      </a:solidFill>
-                      <a:prstDash val="solid"/>
-                      <a:round/>
-                      <a:headEnd type="none" w="med" len="med"/>
-                      <a:tailEnd type="none" w="med" len="med"/>
-                    </a:lnT>
-                    <a:lnB w="12700" cap="flat" cmpd="sng" algn="ctr">
-                      <a:solidFill>
-                        <a:srgbClr val="E3E9EC"/>
-                      </a:solidFill>
-                      <a:prstDash val="solid"/>
-                      <a:round/>
-                      <a:headEnd type="none" w="med" len="med"/>
-                      <a:tailEnd type="none" w="med" len="med"/>
-                    </a:lnB>
-                    <a:solidFill>
-                      <a:srgbClr val="FFFFFF"/>
-                    </a:solidFill>
-                  </a:tcPr>
-                </a:tc>
-                <a:tc>
-                  <a:txBody>
-                    <a:bodyPr/>
-                    <a:lstStyle/>
-                    <a:p>
-                      <a:pPr algn="r" indent="0" marL="0">
-                        <a:buNone/>
-                      </a:pPr>
-                      <a:r>
-                        <a:rPr lang="en-US" sz="1000" b="1" dirty="0">
-                          <a:solidFill>
-                            <a:srgbClr val="55636E"/>
-                          </a:solidFill>
-                          <a:latin typeface="Calibri" pitchFamily="34" charset="0"/>
-                          <a:ea typeface="Calibri" pitchFamily="34" charset="-122"/>
-                          <a:cs typeface="Calibri" pitchFamily="34" charset="-120"/>
-                        </a:rPr>
-                        <a:t>11.49</a:t>
-                      </a:r>
-                      <a:endParaRPr lang="en-US" sz="1000" dirty="0">
-                        <a:latin typeface="Calibri" charset="0"/>
-                        <a:ea typeface="Calibri" charset="0"/>
-                        <a:cs typeface="Calibri" charset="0"/>
-                      </a:endParaRPr>
-                    </a:p>
-                  </a:txBody>
-                  <a:tcPr marL="91440" marR="91440" marT="45720" marB="45720" anchor="ctr">
-                    <a:lnL w="12700" cap="flat" cmpd="sng" algn="ctr">
-                      <a:solidFill>
-                        <a:srgbClr val="E3E9EC"/>
-                      </a:solidFill>
-                      <a:prstDash val="solid"/>
-                      <a:round/>
-                      <a:headEnd type="none" w="med" len="med"/>
-                      <a:tailEnd type="none" w="med" len="med"/>
-                    </a:lnL>
-                    <a:lnR w="12700" cap="flat" cmpd="sng" algn="ctr">
-                      <a:solidFill>
-                        <a:srgbClr val="E3E9EC"/>
-                      </a:solidFill>
-                      <a:prstDash val="solid"/>
-                      <a:round/>
-                      <a:headEnd type="none" w="med" len="med"/>
-                      <a:tailEnd type="none" w="med" len="med"/>
-                    </a:lnR>
-                    <a:lnT w="12700" cap="flat" cmpd="sng" algn="ctr">
-                      <a:solidFill>
-                        <a:srgbClr val="E3E9EC"/>
-                      </a:solidFill>
-                      <a:prstDash val="solid"/>
-                      <a:round/>
-                      <a:headEnd type="none" w="med" len="med"/>
-                      <a:tailEnd type="none" w="med" len="med"/>
-                    </a:lnT>
-                    <a:lnB w="12700" cap="flat" cmpd="sng" algn="ctr">
-                      <a:solidFill>
-                        <a:srgbClr val="E3E9EC"/>
-                      </a:solidFill>
-                      <a:prstDash val="solid"/>
-                      <a:round/>
-                      <a:headEnd type="none" w="med" len="med"/>
-                      <a:tailEnd type="none" w="med" len="med"/>
-                    </a:lnB>
-                    <a:solidFill>
-                      <a:srgbClr val="FFFFFF"/>
-                    </a:solidFill>
-                  </a:tcPr>
-                </a:tc>
-                <a:tc>
-                  <a:txBody>
-                    <a:bodyPr/>
-                    <a:lstStyle/>
-                    <a:p>
-                      <a:pPr algn="r" indent="0" marL="0">
-                        <a:buNone/>
-                      </a:pPr>
-                      <a:r>
-                        <a:rPr lang="en-US" sz="1000" b="1" dirty="0">
-                          <a:solidFill>
-                            <a:srgbClr val="55636E"/>
-                          </a:solidFill>
-                          <a:latin typeface="Calibri" pitchFamily="34" charset="0"/>
-                          <a:ea typeface="Calibri" pitchFamily="34" charset="-122"/>
-                          <a:cs typeface="Calibri" pitchFamily="34" charset="-120"/>
-                        </a:rPr>
-                        <a:t>0.01</a:t>
-                      </a:r>
-                      <a:endParaRPr lang="en-US" sz="1000" dirty="0">
-                        <a:latin typeface="Calibri" charset="0"/>
-                        <a:ea typeface="Calibri" charset="0"/>
-                        <a:cs typeface="Calibri" charset="0"/>
-                      </a:endParaRPr>
-                    </a:p>
-                  </a:txBody>
-                  <a:tcPr marL="91440" marR="91440" marT="45720" marB="45720" anchor="ctr">
-                    <a:lnL w="12700" cap="flat" cmpd="sng" algn="ctr">
-                      <a:solidFill>
-                        <a:srgbClr val="E3E9EC"/>
-                      </a:solidFill>
-                      <a:prstDash val="solid"/>
-                      <a:round/>
-                      <a:headEnd type="none" w="med" len="med"/>
-                      <a:tailEnd type="none" w="med" len="med"/>
-                    </a:lnL>
-                    <a:lnR w="12700" cap="flat" cmpd="sng" algn="ctr">
-                      <a:solidFill>
-                        <a:srgbClr val="E3E9EC"/>
-                      </a:solidFill>
-                      <a:prstDash val="solid"/>
-                      <a:round/>
-                      <a:headEnd type="none" w="med" len="med"/>
-                      <a:tailEnd type="none" w="med" len="med"/>
-                    </a:lnR>
-                    <a:lnT w="12700" cap="flat" cmpd="sng" algn="ctr">
-                      <a:solidFill>
-                        <a:srgbClr val="E3E9EC"/>
-                      </a:solidFill>
-                      <a:prstDash val="solid"/>
-                      <a:round/>
-                      <a:headEnd type="none" w="med" len="med"/>
-                      <a:tailEnd type="none" w="med" len="med"/>
-                    </a:lnT>
-                    <a:lnB w="12700" cap="flat" cmpd="sng" algn="ctr">
-                      <a:solidFill>
-                        <a:srgbClr val="E3E9EC"/>
-                      </a:solidFill>
-                      <a:prstDash val="solid"/>
-                      <a:round/>
-                      <a:headEnd type="none" w="med" len="med"/>
-                      <a:tailEnd type="none" w="med" len="med"/>
-                    </a:lnB>
-                    <a:solidFill>
-                      <a:srgbClr val="FFFFFF"/>
-                    </a:solidFill>
-                  </a:tcPr>
-                </a:tc>
-                <a:tc>
-                  <a:txBody>
-                    <a:bodyPr/>
-                    <a:lstStyle/>
-                    <a:p>
-                      <a:pPr algn="r" indent="0" marL="0">
-                        <a:buNone/>
-                      </a:pPr>
-                      <a:r>
-                        <a:rPr lang="en-US" sz="1000" b="1" dirty="0">
-                          <a:solidFill>
-                            <a:srgbClr val="55636E"/>
-                          </a:solidFill>
-                          <a:latin typeface="Calibri" pitchFamily="34" charset="0"/>
-                          <a:ea typeface="Calibri" pitchFamily="34" charset="-122"/>
-                          <a:cs typeface="Calibri" pitchFamily="34" charset="-120"/>
-                        </a:rPr>
-                        <a:t>0.50</a:t>
-                      </a:r>
-                      <a:endParaRPr lang="en-US" sz="1000" dirty="0">
-                        <a:latin typeface="Calibri" charset="0"/>
-                        <a:ea typeface="Calibri" charset="0"/>
-                        <a:cs typeface="Calibri" charset="0"/>
-                      </a:endParaRPr>
-                    </a:p>
-                  </a:txBody>
-                  <a:tcPr marL="91440" marR="91440" marT="45720" marB="45720" anchor="ctr">
-                    <a:lnL w="12700" cap="flat" cmpd="sng" algn="ctr">
-                      <a:solidFill>
-                        <a:srgbClr val="E3E9EC"/>
-                      </a:solidFill>
-                      <a:prstDash val="solid"/>
-                      <a:round/>
-                      <a:headEnd type="none" w="med" len="med"/>
-                      <a:tailEnd type="none" w="med" len="med"/>
-                    </a:lnL>
-                    <a:lnR w="12700" cap="flat" cmpd="sng" algn="ctr">
-                      <a:solidFill>
-                        <a:srgbClr val="E3E9EC"/>
-                      </a:solidFill>
-                      <a:prstDash val="solid"/>
-                      <a:round/>
-                      <a:headEnd type="none" w="med" len="med"/>
-                      <a:tailEnd type="none" w="med" len="med"/>
-                    </a:lnR>
-                    <a:lnT w="12700" cap="flat" cmpd="sng" algn="ctr">
-                      <a:solidFill>
-                        <a:srgbClr val="E3E9EC"/>
-                      </a:solidFill>
-                      <a:prstDash val="solid"/>
-                      <a:round/>
-                      <a:headEnd type="none" w="med" len="med"/>
-                      <a:tailEnd type="none" w="med" len="med"/>
-                    </a:lnT>
-                    <a:lnB w="12700" cap="flat" cmpd="sng" algn="ctr">
-                      <a:solidFill>
-                        <a:srgbClr val="E3E9EC"/>
-                      </a:solidFill>
-                      <a:prstDash val="solid"/>
-                      <a:round/>
-                      <a:headEnd type="none" w="med" len="med"/>
-                      <a:tailEnd type="none" w="med" len="med"/>
-                    </a:lnB>
-                    <a:solidFill>
-                      <a:srgbClr val="FFFFFF"/>
-                    </a:solidFill>
-                  </a:tcPr>
-                </a:tc>
-                <a:tc>
-                  <a:txBody>
-                    <a:bodyPr/>
-                    <a:lstStyle/>
-                    <a:p>
-                      <a:pPr algn="r" indent="0" marL="0">
-                        <a:buNone/>
-                      </a:pPr>
-                      <a:r>
-                        <a:rPr lang="en-US" sz="1000" b="1" dirty="0">
-                          <a:solidFill>
-                            <a:srgbClr val="55636E"/>
-                          </a:solidFill>
-                          <a:latin typeface="Calibri" pitchFamily="34" charset="0"/>
-                          <a:ea typeface="Calibri" pitchFamily="34" charset="-122"/>
-                          <a:cs typeface="Calibri" pitchFamily="34" charset="-120"/>
-                        </a:rPr>
-                        <a:t>0.91</a:t>
-                      </a:r>
-                      <a:endParaRPr lang="en-US" sz="1000" dirty="0">
-                        <a:latin typeface="Calibri" charset="0"/>
-                        <a:ea typeface="Calibri" charset="0"/>
-                        <a:cs typeface="Calibri" charset="0"/>
-                      </a:endParaRPr>
-                    </a:p>
-                  </a:txBody>
-                  <a:tcPr marL="91440" marR="91440" marT="45720" marB="45720" anchor="ctr">
-                    <a:lnL w="12700" cap="flat" cmpd="sng" algn="ctr">
-                      <a:solidFill>
-                        <a:srgbClr val="E3E9EC"/>
-                      </a:solidFill>
-                      <a:prstDash val="solid"/>
-                      <a:round/>
-                      <a:headEnd type="none" w="med" len="med"/>
-                      <a:tailEnd type="none" w="med" len="med"/>
-                    </a:lnL>
-                    <a:lnR w="12700" cap="flat" cmpd="sng" algn="ctr">
-                      <a:solidFill>
-                        <a:srgbClr val="E3E9EC"/>
-                      </a:solidFill>
-                      <a:prstDash val="solid"/>
-                      <a:round/>
-                      <a:headEnd type="none" w="med" len="med"/>
-                      <a:tailEnd type="none" w="med" len="med"/>
-                    </a:lnR>
-                    <a:lnT w="12700" cap="flat" cmpd="sng" algn="ctr">
-                      <a:solidFill>
-                        <a:srgbClr val="E3E9EC"/>
-                      </a:solidFill>
-                      <a:prstDash val="solid"/>
-                      <a:round/>
-                      <a:headEnd type="none" w="med" len="med"/>
-                      <a:tailEnd type="none" w="med" len="med"/>
-                    </a:lnT>
-                    <a:lnB w="12700" cap="flat" cmpd="sng" algn="ctr">
-                      <a:solidFill>
-                        <a:srgbClr val="E3E9EC"/>
-                      </a:solidFill>
-                      <a:prstDash val="solid"/>
-                      <a:round/>
-                      <a:headEnd type="none" w="med" len="med"/>
-                      <a:tailEnd type="none" w="med" len="med"/>
-                    </a:lnB>
-                    <a:solidFill>
-                      <a:srgbClr val="FFFFFF"/>
-                    </a:solidFill>
-                  </a:tcPr>
-                </a:tc>
-                <a:tc>
-                  <a:txBody>
-                    <a:bodyPr/>
-                    <a:lstStyle/>
-                    <a:p>
-                      <a:pPr algn="r" indent="0" marL="0">
-                        <a:buNone/>
-                      </a:pPr>
-                      <a:r>
-                        <a:rPr lang="en-US" sz="1000" b="1" dirty="0">
-                          <a:solidFill>
-                            <a:srgbClr val="55636E"/>
-                          </a:solidFill>
-                          <a:latin typeface="Calibri" pitchFamily="34" charset="0"/>
-                          <a:ea typeface="Calibri" pitchFamily="34" charset="-122"/>
-                          <a:cs typeface="Calibri" pitchFamily="34" charset="-120"/>
-                        </a:rPr>
-                        <a:t>0.78</a:t>
-                      </a:r>
-                      <a:endParaRPr lang="en-US" sz="1000" dirty="0">
-                        <a:latin typeface="Calibri" charset="0"/>
-                        <a:ea typeface="Calibri" charset="0"/>
-                        <a:cs typeface="Calibri" charset="0"/>
-                      </a:endParaRPr>
-                    </a:p>
-                  </a:txBody>
-                  <a:tcPr marL="91440" marR="91440" marT="45720" marB="45720" anchor="ctr">
-                    <a:lnL w="12700" cap="flat" cmpd="sng" algn="ctr">
-                      <a:solidFill>
-                        <a:srgbClr val="E3E9EC"/>
-                      </a:solidFill>
-                      <a:prstDash val="solid"/>
-                      <a:round/>
-                      <a:headEnd type="none" w="med" len="med"/>
-                      <a:tailEnd type="none" w="med" len="med"/>
-                    </a:lnL>
-                    <a:lnR w="12700" cap="flat" cmpd="sng" algn="ctr">
-                      <a:solidFill>
-                        <a:srgbClr val="E3E9EC"/>
-                      </a:solidFill>
-                      <a:prstDash val="solid"/>
-                      <a:round/>
-                      <a:headEnd type="none" w="med" len="med"/>
-                      <a:tailEnd type="none" w="med" len="med"/>
-                    </a:lnR>
-                    <a:lnT w="12700" cap="flat" cmpd="sng" algn="ctr">
-                      <a:solidFill>
-                        <a:srgbClr val="E3E9EC"/>
-                      </a:solidFill>
-                      <a:prstDash val="solid"/>
-                      <a:round/>
-                      <a:headEnd type="none" w="med" len="med"/>
-                      <a:tailEnd type="none" w="med" len="med"/>
-                    </a:lnT>
-                    <a:lnB w="12700" cap="flat" cmpd="sng" algn="ctr">
-                      <a:solidFill>
-                        <a:srgbClr val="E3E9EC"/>
-                      </a:solidFill>
-                      <a:prstDash val="solid"/>
-                      <a:round/>
-                      <a:headEnd type="none" w="med" len="med"/>
-                      <a:tailEnd type="none" w="med" len="med"/>
-                    </a:lnB>
-                    <a:solidFill>
-                      <a:srgbClr val="FFFFFF"/>
+                      <a:srgbClr val="FAFCFD"/>
                     </a:solidFill>
                   </a:tcPr>
                 </a:tc>
@@ -34586,7 +33430,7 @@
                           <a:ea typeface="Calibri" pitchFamily="34" charset="-122"/>
                           <a:cs typeface="Calibri" pitchFamily="34" charset="-120"/>
                         </a:rPr>
-                        <a:t>✓</a:t>
+                        <a:t>1.86</a:t>
                       </a:r>
                       <a:endParaRPr lang="en-US" sz="1000" dirty="0">
                         <a:latin typeface="Calibri" charset="0"/>
@@ -34633,7 +33477,7 @@
                       <a:tailEnd type="none" w="med" len="med"/>
                     </a:lnB>
                     <a:solidFill>
-                      <a:srgbClr val="FFFFFF"/>
+                      <a:srgbClr val="FAFCFD"/>
                     </a:solidFill>
                   </a:tcPr>
                 </a:tc>
@@ -34650,16 +33494,16 @@
                           <a:solidFill>
                             <a:srgbClr val="55636E"/>
                           </a:solidFill>
-                          <a:latin typeface="맑은 고딕" pitchFamily="34" charset="0"/>
-                          <a:ea typeface="맑은 고딕" pitchFamily="34" charset="-122"/>
-                          <a:cs typeface="맑은 고딕" pitchFamily="34" charset="-120"/>
+                          <a:latin typeface="Calibri" pitchFamily="34" charset="0"/>
+                          <a:ea typeface="Calibri" pitchFamily="34" charset="-122"/>
+                          <a:cs typeface="Calibri" pitchFamily="34" charset="-120"/>
                         </a:rPr>
-                        <a:t>[−20, 20]</a:t>
+                        <a:t>11.49</a:t>
                       </a:r>
                       <a:endParaRPr lang="en-US" sz="1000" dirty="0">
-                        <a:latin typeface="맑은 고딕" charset="0"/>
-                        <a:ea typeface="맑은 고딕" charset="0"/>
-                        <a:cs typeface="맑은 고딕" charset="0"/>
+                        <a:latin typeface="Calibri" charset="0"/>
+                        <a:ea typeface="Calibri" charset="0"/>
+                        <a:cs typeface="Calibri" charset="0"/>
                       </a:endParaRPr>
                     </a:p>
                   </a:txBody>
@@ -34701,7 +33545,279 @@
                       <a:tailEnd type="none" w="med" len="med"/>
                     </a:lnB>
                     <a:solidFill>
-                      <a:srgbClr val="FFFFFF"/>
+                      <a:srgbClr val="FAFCFD"/>
+                    </a:solidFill>
+                  </a:tcPr>
+                </a:tc>
+                <a:tc>
+                  <a:txBody>
+                    <a:bodyPr/>
+                    <a:lstStyle/>
+                    <a:p>
+                      <a:pPr algn="r" indent="0" marL="0">
+                        <a:buNone/>
+                      </a:pPr>
+                      <a:r>
+                        <a:rPr lang="en-US" sz="1000" dirty="0">
+                          <a:solidFill>
+                            <a:srgbClr val="55636E"/>
+                          </a:solidFill>
+                          <a:latin typeface="Calibri" pitchFamily="34" charset="0"/>
+                          <a:ea typeface="Calibri" pitchFamily="34" charset="-122"/>
+                          <a:cs typeface="Calibri" pitchFamily="34" charset="-120"/>
+                        </a:rPr>
+                        <a:t>0.01</a:t>
+                      </a:r>
+                      <a:endParaRPr lang="en-US" sz="1000" dirty="0">
+                        <a:latin typeface="Calibri" charset="0"/>
+                        <a:ea typeface="Calibri" charset="0"/>
+                        <a:cs typeface="Calibri" charset="0"/>
+                      </a:endParaRPr>
+                    </a:p>
+                  </a:txBody>
+                  <a:tcPr marL="91440" marR="91440" marT="45720" marB="45720" anchor="ctr">
+                    <a:lnL w="12700" cap="flat" cmpd="sng" algn="ctr">
+                      <a:solidFill>
+                        <a:srgbClr val="E3E9EC"/>
+                      </a:solidFill>
+                      <a:prstDash val="solid"/>
+                      <a:round/>
+                      <a:headEnd type="none" w="med" len="med"/>
+                      <a:tailEnd type="none" w="med" len="med"/>
+                    </a:lnL>
+                    <a:lnR w="12700" cap="flat" cmpd="sng" algn="ctr">
+                      <a:solidFill>
+                        <a:srgbClr val="E3E9EC"/>
+                      </a:solidFill>
+                      <a:prstDash val="solid"/>
+                      <a:round/>
+                      <a:headEnd type="none" w="med" len="med"/>
+                      <a:tailEnd type="none" w="med" len="med"/>
+                    </a:lnR>
+                    <a:lnT w="12700" cap="flat" cmpd="sng" algn="ctr">
+                      <a:solidFill>
+                        <a:srgbClr val="E3E9EC"/>
+                      </a:solidFill>
+                      <a:prstDash val="solid"/>
+                      <a:round/>
+                      <a:headEnd type="none" w="med" len="med"/>
+                      <a:tailEnd type="none" w="med" len="med"/>
+                    </a:lnT>
+                    <a:lnB w="12700" cap="flat" cmpd="sng" algn="ctr">
+                      <a:solidFill>
+                        <a:srgbClr val="E3E9EC"/>
+                      </a:solidFill>
+                      <a:prstDash val="solid"/>
+                      <a:round/>
+                      <a:headEnd type="none" w="med" len="med"/>
+                      <a:tailEnd type="none" w="med" len="med"/>
+                    </a:lnB>
+                    <a:solidFill>
+                      <a:srgbClr val="FAFCFD"/>
+                    </a:solidFill>
+                  </a:tcPr>
+                </a:tc>
+                <a:tc>
+                  <a:txBody>
+                    <a:bodyPr/>
+                    <a:lstStyle/>
+                    <a:p>
+                      <a:pPr algn="r" indent="0" marL="0">
+                        <a:buNone/>
+                      </a:pPr>
+                      <a:r>
+                        <a:rPr lang="en-US" sz="1000" dirty="0">
+                          <a:solidFill>
+                            <a:srgbClr val="55636E"/>
+                          </a:solidFill>
+                          <a:latin typeface="Calibri" pitchFamily="34" charset="0"/>
+                          <a:ea typeface="Calibri" pitchFamily="34" charset="-122"/>
+                          <a:cs typeface="Calibri" pitchFamily="34" charset="-120"/>
+                        </a:rPr>
+                        <a:t>0.50</a:t>
+                      </a:r>
+                      <a:endParaRPr lang="en-US" sz="1000" dirty="0">
+                        <a:latin typeface="Calibri" charset="0"/>
+                        <a:ea typeface="Calibri" charset="0"/>
+                        <a:cs typeface="Calibri" charset="0"/>
+                      </a:endParaRPr>
+                    </a:p>
+                  </a:txBody>
+                  <a:tcPr marL="91440" marR="91440" marT="45720" marB="45720" anchor="ctr">
+                    <a:lnL w="12700" cap="flat" cmpd="sng" algn="ctr">
+                      <a:solidFill>
+                        <a:srgbClr val="E3E9EC"/>
+                      </a:solidFill>
+                      <a:prstDash val="solid"/>
+                      <a:round/>
+                      <a:headEnd type="none" w="med" len="med"/>
+                      <a:tailEnd type="none" w="med" len="med"/>
+                    </a:lnL>
+                    <a:lnR w="12700" cap="flat" cmpd="sng" algn="ctr">
+                      <a:solidFill>
+                        <a:srgbClr val="E3E9EC"/>
+                      </a:solidFill>
+                      <a:prstDash val="solid"/>
+                      <a:round/>
+                      <a:headEnd type="none" w="med" len="med"/>
+                      <a:tailEnd type="none" w="med" len="med"/>
+                    </a:lnR>
+                    <a:lnT w="12700" cap="flat" cmpd="sng" algn="ctr">
+                      <a:solidFill>
+                        <a:srgbClr val="E3E9EC"/>
+                      </a:solidFill>
+                      <a:prstDash val="solid"/>
+                      <a:round/>
+                      <a:headEnd type="none" w="med" len="med"/>
+                      <a:tailEnd type="none" w="med" len="med"/>
+                    </a:lnT>
+                    <a:lnB w="12700" cap="flat" cmpd="sng" algn="ctr">
+                      <a:solidFill>
+                        <a:srgbClr val="E3E9EC"/>
+                      </a:solidFill>
+                      <a:prstDash val="solid"/>
+                      <a:round/>
+                      <a:headEnd type="none" w="med" len="med"/>
+                      <a:tailEnd type="none" w="med" len="med"/>
+                    </a:lnB>
+                    <a:solidFill>
+                      <a:srgbClr val="FAFCFD"/>
+                    </a:solidFill>
+                  </a:tcPr>
+                </a:tc>
+                <a:tc>
+                  <a:txBody>
+                    <a:bodyPr/>
+                    <a:lstStyle/>
+                    <a:p>
+                      <a:pPr algn="r" indent="0" marL="0">
+                        <a:buNone/>
+                      </a:pPr>
+                      <a:r>
+                        <a:rPr lang="en-US" sz="1000" dirty="0">
+                          <a:solidFill>
+                            <a:srgbClr val="55636E"/>
+                          </a:solidFill>
+                          <a:latin typeface="Calibri" pitchFamily="34" charset="0"/>
+                          <a:ea typeface="Calibri" pitchFamily="34" charset="-122"/>
+                          <a:cs typeface="Calibri" pitchFamily="34" charset="-120"/>
+                        </a:rPr>
+                        <a:t>0.91</a:t>
+                      </a:r>
+                      <a:endParaRPr lang="en-US" sz="1000" dirty="0">
+                        <a:latin typeface="Calibri" charset="0"/>
+                        <a:ea typeface="Calibri" charset="0"/>
+                        <a:cs typeface="Calibri" charset="0"/>
+                      </a:endParaRPr>
+                    </a:p>
+                  </a:txBody>
+                  <a:tcPr marL="91440" marR="91440" marT="45720" marB="45720" anchor="ctr">
+                    <a:lnL w="12700" cap="flat" cmpd="sng" algn="ctr">
+                      <a:solidFill>
+                        <a:srgbClr val="E3E9EC"/>
+                      </a:solidFill>
+                      <a:prstDash val="solid"/>
+                      <a:round/>
+                      <a:headEnd type="none" w="med" len="med"/>
+                      <a:tailEnd type="none" w="med" len="med"/>
+                    </a:lnL>
+                    <a:lnR w="12700" cap="flat" cmpd="sng" algn="ctr">
+                      <a:solidFill>
+                        <a:srgbClr val="E3E9EC"/>
+                      </a:solidFill>
+                      <a:prstDash val="solid"/>
+                      <a:round/>
+                      <a:headEnd type="none" w="med" len="med"/>
+                      <a:tailEnd type="none" w="med" len="med"/>
+                    </a:lnR>
+                    <a:lnT w="12700" cap="flat" cmpd="sng" algn="ctr">
+                      <a:solidFill>
+                        <a:srgbClr val="E3E9EC"/>
+                      </a:solidFill>
+                      <a:prstDash val="solid"/>
+                      <a:round/>
+                      <a:headEnd type="none" w="med" len="med"/>
+                      <a:tailEnd type="none" w="med" len="med"/>
+                    </a:lnT>
+                    <a:lnB w="12700" cap="flat" cmpd="sng" algn="ctr">
+                      <a:solidFill>
+                        <a:srgbClr val="E3E9EC"/>
+                      </a:solidFill>
+                      <a:prstDash val="solid"/>
+                      <a:round/>
+                      <a:headEnd type="none" w="med" len="med"/>
+                      <a:tailEnd type="none" w="med" len="med"/>
+                    </a:lnB>
+                    <a:solidFill>
+                      <a:srgbClr val="FAFCFD"/>
+                    </a:solidFill>
+                  </a:tcPr>
+                </a:tc>
+                <a:tc>
+                  <a:txBody>
+                    <a:bodyPr/>
+                    <a:lstStyle/>
+                    <a:p>
+                      <a:pPr algn="r" indent="0" marL="0">
+                        <a:buNone/>
+                      </a:pPr>
+                      <a:r>
+                        <a:rPr lang="en-US" sz="1000" dirty="0">
+                          <a:solidFill>
+                            <a:srgbClr val="55636E"/>
+                          </a:solidFill>
+                          <a:latin typeface="Calibri" pitchFamily="34" charset="0"/>
+                          <a:ea typeface="Calibri" pitchFamily="34" charset="-122"/>
+                          <a:cs typeface="Calibri" pitchFamily="34" charset="-120"/>
+                        </a:rPr>
+                        <a:t>0.78</a:t>
+                      </a:r>
+                      <a:endParaRPr lang="en-US" sz="1000" dirty="0">
+                        <a:latin typeface="Calibri" charset="0"/>
+                        <a:ea typeface="Calibri" charset="0"/>
+                        <a:cs typeface="Calibri" charset="0"/>
+                      </a:endParaRPr>
+                    </a:p>
+                  </a:txBody>
+                  <a:tcPr marL="91440" marR="91440" marT="45720" marB="45720" anchor="ctr">
+                    <a:lnL w="12700" cap="flat" cmpd="sng" algn="ctr">
+                      <a:solidFill>
+                        <a:srgbClr val="E3E9EC"/>
+                      </a:solidFill>
+                      <a:prstDash val="solid"/>
+                      <a:round/>
+                      <a:headEnd type="none" w="med" len="med"/>
+                      <a:tailEnd type="none" w="med" len="med"/>
+                    </a:lnL>
+                    <a:lnR w="12700" cap="flat" cmpd="sng" algn="ctr">
+                      <a:solidFill>
+                        <a:srgbClr val="E3E9EC"/>
+                      </a:solidFill>
+                      <a:prstDash val="solid"/>
+                      <a:round/>
+                      <a:headEnd type="none" w="med" len="med"/>
+                      <a:tailEnd type="none" w="med" len="med"/>
+                    </a:lnR>
+                    <a:lnT w="12700" cap="flat" cmpd="sng" algn="ctr">
+                      <a:solidFill>
+                        <a:srgbClr val="E3E9EC"/>
+                      </a:solidFill>
+                      <a:prstDash val="solid"/>
+                      <a:round/>
+                      <a:headEnd type="none" w="med" len="med"/>
+                      <a:tailEnd type="none" w="med" len="med"/>
+                    </a:lnT>
+                    <a:lnB w="12700" cap="flat" cmpd="sng" algn="ctr">
+                      <a:solidFill>
+                        <a:srgbClr val="E3E9EC"/>
+                      </a:solidFill>
+                      <a:prstDash val="solid"/>
+                      <a:round/>
+                      <a:headEnd type="none" w="med" len="med"/>
+                      <a:tailEnd type="none" w="med" len="med"/>
+                    </a:lnB>
+                    <a:solidFill>
+                      <a:srgbClr val="FAFCFD"/>
                     </a:solidFill>
                   </a:tcPr>
                 </a:tc>
@@ -34769,7 +33885,7 @@
                       <a:tailEnd type="none" w="med" len="med"/>
                     </a:lnB>
                     <a:solidFill>
-                      <a:srgbClr val="FFFFFF"/>
+                      <a:srgbClr val="FAFCFD"/>
                     </a:solidFill>
                   </a:tcPr>
                 </a:tc>
@@ -34790,7 +33906,7 @@
                           <a:ea typeface="맑은 고딕" pitchFamily="34" charset="-122"/>
                           <a:cs typeface="맑은 고딕" pitchFamily="34" charset="-120"/>
                         </a:rPr>
-                        <a:t>전부 자유</a:t>
+                        <a:t>여섯 값 전부 데이터에 맡긴다</a:t>
                       </a:r>
                       <a:endParaRPr lang="en-US" sz="1000" dirty="0">
                         <a:latin typeface="맑은 고딕" charset="0"/>
@@ -34837,12 +33953,80 @@
                       <a:tailEnd type="none" w="med" len="med"/>
                     </a:lnB>
                     <a:solidFill>
-                      <a:srgbClr val="FFFFFF"/>
+                      <a:srgbClr val="FAFCFD"/>
                     </a:solidFill>
                   </a:tcPr>
                 </a:tc>
               </a:tr>
-              <a:tr h="256032">
+              <a:tr h="246888">
+                <a:tc>
+                  <a:txBody>
+                    <a:bodyPr/>
+                    <a:lstStyle/>
+                    <a:p>
+                      <a:pPr algn="l" indent="0" marL="0">
+                        <a:buNone/>
+                      </a:pPr>
+                      <a:r>
+                        <a:rPr lang="en-US" sz="1000" dirty="0">
+                          <a:solidFill>
+                            <a:srgbClr val="55636E"/>
+                          </a:solidFill>
+                          <a:latin typeface="맑은 고딕" pitchFamily="34" charset="0"/>
+                          <a:ea typeface="맑은 고딕" pitchFamily="34" charset="-122"/>
+                          <a:cs typeface="맑은 고딕" pitchFamily="34" charset="-120"/>
+                        </a:rPr>
+                        <a:t>지시</a:t>
+                      </a:r>
+                      <a:endParaRPr lang="en-US" sz="1000" dirty="0">
+                        <a:latin typeface="맑은 고딕" charset="0"/>
+                        <a:ea typeface="맑은 고딕" charset="0"/>
+                        <a:cs typeface="맑은 고딕" charset="0"/>
+                      </a:endParaRPr>
+                    </a:p>
+                  </a:txBody>
+                  <a:tcPr marL="91440" marR="91440" marT="45720" marB="45720" anchor="ctr">
+                    <a:lnL w="12700" cap="flat" cmpd="sng" algn="ctr">
+                      <a:solidFill>
+                        <a:srgbClr val="E3E9EC"/>
+                      </a:solidFill>
+                      <a:prstDash val="solid"/>
+                      <a:round/>
+                      <a:headEnd type="none" w="med" len="med"/>
+                      <a:tailEnd type="none" w="med" len="med"/>
+                    </a:lnL>
+                    <a:lnR w="12700" cap="flat" cmpd="sng" algn="ctr">
+                      <a:solidFill>
+                        <a:srgbClr val="E3E9EC"/>
+                      </a:solidFill>
+                      <a:prstDash val="solid"/>
+                      <a:round/>
+                      <a:headEnd type="none" w="med" len="med"/>
+                      <a:tailEnd type="none" w="med" len="med"/>
+                    </a:lnR>
+                    <a:lnT w="12700" cap="flat" cmpd="sng" algn="ctr">
+                      <a:solidFill>
+                        <a:srgbClr val="E3E9EC"/>
+                      </a:solidFill>
+                      <a:prstDash val="solid"/>
+                      <a:round/>
+                      <a:headEnd type="none" w="med" len="med"/>
+                      <a:tailEnd type="none" w="med" len="med"/>
+                    </a:lnT>
+                    <a:lnB w="12700" cap="flat" cmpd="sng" algn="ctr">
+                      <a:solidFill>
+                        <a:srgbClr val="E3E9EC"/>
+                      </a:solidFill>
+                      <a:prstDash val="solid"/>
+                      <a:round/>
+                      <a:headEnd type="none" w="med" len="med"/>
+                      <a:tailEnd type="none" w="med" len="med"/>
+                    </a:lnB>
+                    <a:solidFill>
+                      <a:srgbClr val="FAFCFD"/>
+                    </a:solidFill>
+                  </a:tcPr>
+                </a:tc>
                 <a:tc>
                   <a:txBody>
                     <a:bodyPr/>
@@ -34907,7 +34091,7 @@
                       <a:tailEnd type="none" w="med" len="med"/>
                     </a:lnB>
                     <a:solidFill>
-                      <a:srgbClr val="FFFFFF"/>
+                      <a:srgbClr val="FAFCFD"/>
                     </a:solidFill>
                   </a:tcPr>
                 </a:tc>
@@ -34975,7 +34159,7 @@
                       <a:tailEnd type="none" w="med" len="med"/>
                     </a:lnB>
                     <a:solidFill>
-                      <a:srgbClr val="FFFFFF"/>
+                      <a:srgbClr val="FAFCFD"/>
                     </a:solidFill>
                   </a:tcPr>
                 </a:tc>
@@ -35043,7 +34227,7 @@
                       <a:tailEnd type="none" w="med" len="med"/>
                     </a:lnB>
                     <a:solidFill>
-                      <a:srgbClr val="FFFFFF"/>
+                      <a:srgbClr val="FAFCFD"/>
                     </a:solidFill>
                   </a:tcPr>
                 </a:tc>
@@ -35111,7 +34295,7 @@
                       <a:tailEnd type="none" w="med" len="med"/>
                     </a:lnB>
                     <a:solidFill>
-                      <a:srgbClr val="FFFFFF"/>
+                      <a:srgbClr val="FAFCFD"/>
                     </a:solidFill>
                   </a:tcPr>
                 </a:tc>
@@ -35179,7 +34363,7 @@
                       <a:tailEnd type="none" w="med" len="med"/>
                     </a:lnB>
                     <a:solidFill>
-                      <a:srgbClr val="FFFFFF"/>
+                      <a:srgbClr val="FAFCFD"/>
                     </a:solidFill>
                   </a:tcPr>
                 </a:tc>
@@ -35247,7 +34431,7 @@
                       <a:tailEnd type="none" w="med" len="med"/>
                     </a:lnB>
                     <a:solidFill>
-                      <a:srgbClr val="FFFFFF"/>
+                      <a:srgbClr val="FAFCFD"/>
                     </a:solidFill>
                   </a:tcPr>
                 </a:tc>
@@ -35315,7 +34499,7 @@
                       <a:tailEnd type="none" w="med" len="med"/>
                     </a:lnB>
                     <a:solidFill>
-                      <a:srgbClr val="FFFFFF"/>
+                      <a:srgbClr val="FAFCFD"/>
                     </a:solidFill>
                   </a:tcPr>
                 </a:tc>
@@ -35383,143 +34567,7 @@
                       <a:tailEnd type="none" w="med" len="med"/>
                     </a:lnB>
                     <a:solidFill>
-                      <a:srgbClr val="FFFFFF"/>
-                    </a:solidFill>
-                  </a:tcPr>
-                </a:tc>
-                <a:tc>
-                  <a:txBody>
-                    <a:bodyPr/>
-                    <a:lstStyle/>
-                    <a:p>
-                      <a:pPr algn="r" indent="0" marL="0">
-                        <a:buNone/>
-                      </a:pPr>
-                      <a:r>
-                        <a:rPr lang="en-US" sz="1000" dirty="0">
-                          <a:solidFill>
-                            <a:srgbClr val="55636E"/>
-                          </a:solidFill>
-                          <a:latin typeface="Calibri" pitchFamily="34" charset="0"/>
-                          <a:ea typeface="Calibri" pitchFamily="34" charset="-122"/>
-                          <a:cs typeface="Calibri" pitchFamily="34" charset="-120"/>
-                        </a:rPr>
-                        <a:t>✗</a:t>
-                      </a:r>
-                      <a:endParaRPr lang="en-US" sz="1000" dirty="0">
-                        <a:latin typeface="Calibri" charset="0"/>
-                        <a:ea typeface="Calibri" charset="0"/>
-                        <a:cs typeface="Calibri" charset="0"/>
-                      </a:endParaRPr>
-                    </a:p>
-                  </a:txBody>
-                  <a:tcPr marL="91440" marR="91440" marT="45720" marB="45720" anchor="ctr">
-                    <a:lnL w="12700" cap="flat" cmpd="sng" algn="ctr">
-                      <a:solidFill>
-                        <a:srgbClr val="E3E9EC"/>
-                      </a:solidFill>
-                      <a:prstDash val="solid"/>
-                      <a:round/>
-                      <a:headEnd type="none" w="med" len="med"/>
-                      <a:tailEnd type="none" w="med" len="med"/>
-                    </a:lnL>
-                    <a:lnR w="12700" cap="flat" cmpd="sng" algn="ctr">
-                      <a:solidFill>
-                        <a:srgbClr val="E3E9EC"/>
-                      </a:solidFill>
-                      <a:prstDash val="solid"/>
-                      <a:round/>
-                      <a:headEnd type="none" w="med" len="med"/>
-                      <a:tailEnd type="none" w="med" len="med"/>
-                    </a:lnR>
-                    <a:lnT w="12700" cap="flat" cmpd="sng" algn="ctr">
-                      <a:solidFill>
-                        <a:srgbClr val="E3E9EC"/>
-                      </a:solidFill>
-                      <a:prstDash val="solid"/>
-                      <a:round/>
-                      <a:headEnd type="none" w="med" len="med"/>
-                      <a:tailEnd type="none" w="med" len="med"/>
-                    </a:lnT>
-                    <a:lnB w="12700" cap="flat" cmpd="sng" algn="ctr">
-                      <a:solidFill>
-                        <a:srgbClr val="E3E9EC"/>
-                      </a:solidFill>
-                      <a:prstDash val="solid"/>
-                      <a:round/>
-                      <a:headEnd type="none" w="med" len="med"/>
-                      <a:tailEnd type="none" w="med" len="med"/>
-                    </a:lnB>
-                    <a:solidFill>
-                      <a:srgbClr val="FFFFFF"/>
-                    </a:solidFill>
-                  </a:tcPr>
-                </a:tc>
-                <a:tc>
-                  <a:txBody>
-                    <a:bodyPr/>
-                    <a:lstStyle/>
-                    <a:p>
-                      <a:pPr algn="r" indent="0" marL="0">
-                        <a:buNone/>
-                      </a:pPr>
-                      <a:r>
-                        <a:rPr lang="en-US" sz="1000" dirty="0">
-                          <a:solidFill>
-                            <a:srgbClr val="55636E"/>
-                          </a:solidFill>
-                          <a:latin typeface="맑은 고딕" pitchFamily="34" charset="0"/>
-                          <a:ea typeface="맑은 고딕" pitchFamily="34" charset="-122"/>
-                          <a:cs typeface="맑은 고딕" pitchFamily="34" charset="-120"/>
-                        </a:rPr>
-                        <a:t>[−2, 4]</a:t>
-                      </a:r>
-                      <a:endParaRPr lang="en-US" sz="1000" dirty="0">
-                        <a:latin typeface="맑은 고딕" charset="0"/>
-                        <a:ea typeface="맑은 고딕" charset="0"/>
-                        <a:cs typeface="맑은 고딕" charset="0"/>
-                      </a:endParaRPr>
-                    </a:p>
-                  </a:txBody>
-                  <a:tcPr marL="91440" marR="91440" marT="45720" marB="45720" anchor="ctr">
-                    <a:lnL w="12700" cap="flat" cmpd="sng" algn="ctr">
-                      <a:solidFill>
-                        <a:srgbClr val="E3E9EC"/>
-                      </a:solidFill>
-                      <a:prstDash val="solid"/>
-                      <a:round/>
-                      <a:headEnd type="none" w="med" len="med"/>
-                      <a:tailEnd type="none" w="med" len="med"/>
-                    </a:lnL>
-                    <a:lnR w="12700" cap="flat" cmpd="sng" algn="ctr">
-                      <a:solidFill>
-                        <a:srgbClr val="E3E9EC"/>
-                      </a:solidFill>
-                      <a:prstDash val="solid"/>
-                      <a:round/>
-                      <a:headEnd type="none" w="med" len="med"/>
-                      <a:tailEnd type="none" w="med" len="med"/>
-                    </a:lnR>
-                    <a:lnT w="12700" cap="flat" cmpd="sng" algn="ctr">
-                      <a:solidFill>
-                        <a:srgbClr val="E3E9EC"/>
-                      </a:solidFill>
-                      <a:prstDash val="solid"/>
-                      <a:round/>
-                      <a:headEnd type="none" w="med" len="med"/>
-                      <a:tailEnd type="none" w="med" len="med"/>
-                    </a:lnT>
-                    <a:lnB w="12700" cap="flat" cmpd="sng" algn="ctr">
-                      <a:solidFill>
-                        <a:srgbClr val="E3E9EC"/>
-                      </a:solidFill>
-                      <a:prstDash val="solid"/>
-                      <a:round/>
-                      <a:headEnd type="none" w="med" len="med"/>
-                      <a:tailEnd type="none" w="med" len="med"/>
-                    </a:lnB>
-                    <a:solidFill>
-                      <a:srgbClr val="FFFFFF"/>
+                      <a:srgbClr val="FAFCFD"/>
                     </a:solidFill>
                   </a:tcPr>
                 </a:tc>
@@ -35587,7 +34635,7 @@
                       <a:tailEnd type="none" w="med" len="med"/>
                     </a:lnB>
                     <a:solidFill>
-                      <a:srgbClr val="FFFFFF"/>
+                      <a:srgbClr val="FAFCFD"/>
                     </a:solidFill>
                   </a:tcPr>
                 </a:tc>
@@ -35608,7 +34656,7 @@
                           <a:ea typeface="맑은 고딕" pitchFamily="34" charset="-122"/>
                           <a:cs typeface="맑은 고딕" pitchFamily="34" charset="-120"/>
                         </a:rPr>
-                        <a:t>면적 효과 절반</a:t>
+                        <a:t>면적의 영향을 절반으로 줄여 고정</a:t>
                       </a:r>
                       <a:endParaRPr lang="en-US" sz="1000" dirty="0">
                         <a:latin typeface="맑은 고딕" charset="0"/>
@@ -35655,12 +34703,80 @@
                       <a:tailEnd type="none" w="med" len="med"/>
                     </a:lnB>
                     <a:solidFill>
-                      <a:srgbClr val="FFFFFF"/>
+                      <a:srgbClr val="FAFCFD"/>
                     </a:solidFill>
                   </a:tcPr>
                 </a:tc>
               </a:tr>
-              <a:tr h="256032">
+              <a:tr h="246888">
+                <a:tc>
+                  <a:txBody>
+                    <a:bodyPr/>
+                    <a:lstStyle/>
+                    <a:p>
+                      <a:pPr algn="l" indent="0" marL="0">
+                        <a:buNone/>
+                      </a:pPr>
+                      <a:r>
+                        <a:rPr lang="en-US" sz="1000" dirty="0">
+                          <a:solidFill>
+                            <a:srgbClr val="55636E"/>
+                          </a:solidFill>
+                          <a:latin typeface="맑은 고딕" pitchFamily="34" charset="0"/>
+                          <a:ea typeface="맑은 고딕" pitchFamily="34" charset="-122"/>
+                          <a:cs typeface="맑은 고딕" pitchFamily="34" charset="-120"/>
+                        </a:rPr>
+                        <a:t>지시</a:t>
+                      </a:r>
+                      <a:endParaRPr lang="en-US" sz="1000" dirty="0">
+                        <a:latin typeface="맑은 고딕" charset="0"/>
+                        <a:ea typeface="맑은 고딕" charset="0"/>
+                        <a:cs typeface="맑은 고딕" charset="0"/>
+                      </a:endParaRPr>
+                    </a:p>
+                  </a:txBody>
+                  <a:tcPr marL="91440" marR="91440" marT="45720" marB="45720" anchor="ctr">
+                    <a:lnL w="12700" cap="flat" cmpd="sng" algn="ctr">
+                      <a:solidFill>
+                        <a:srgbClr val="E3E9EC"/>
+                      </a:solidFill>
+                      <a:prstDash val="solid"/>
+                      <a:round/>
+                      <a:headEnd type="none" w="med" len="med"/>
+                      <a:tailEnd type="none" w="med" len="med"/>
+                    </a:lnL>
+                    <a:lnR w="12700" cap="flat" cmpd="sng" algn="ctr">
+                      <a:solidFill>
+                        <a:srgbClr val="E3E9EC"/>
+                      </a:solidFill>
+                      <a:prstDash val="solid"/>
+                      <a:round/>
+                      <a:headEnd type="none" w="med" len="med"/>
+                      <a:tailEnd type="none" w="med" len="med"/>
+                    </a:lnR>
+                    <a:lnT w="12700" cap="flat" cmpd="sng" algn="ctr">
+                      <a:solidFill>
+                        <a:srgbClr val="E3E9EC"/>
+                      </a:solidFill>
+                      <a:prstDash val="solid"/>
+                      <a:round/>
+                      <a:headEnd type="none" w="med" len="med"/>
+                      <a:tailEnd type="none" w="med" len="med"/>
+                    </a:lnT>
+                    <a:lnB w="12700" cap="flat" cmpd="sng" algn="ctr">
+                      <a:solidFill>
+                        <a:srgbClr val="E3E9EC"/>
+                      </a:solidFill>
+                      <a:prstDash val="solid"/>
+                      <a:round/>
+                      <a:headEnd type="none" w="med" len="med"/>
+                      <a:tailEnd type="none" w="med" len="med"/>
+                    </a:lnB>
+                    <a:solidFill>
+                      <a:srgbClr val="FAFCFD"/>
+                    </a:solidFill>
+                  </a:tcPr>
+                </a:tc>
                 <a:tc>
                   <a:txBody>
                     <a:bodyPr/>
@@ -35725,7 +34841,7 @@
                       <a:tailEnd type="none" w="med" len="med"/>
                     </a:lnB>
                     <a:solidFill>
-                      <a:srgbClr val="FFFFFF"/>
+                      <a:srgbClr val="FAFCFD"/>
                     </a:solidFill>
                   </a:tcPr>
                 </a:tc>
@@ -35793,7 +34909,7 @@
                       <a:tailEnd type="none" w="med" len="med"/>
                     </a:lnB>
                     <a:solidFill>
-                      <a:srgbClr val="FFFFFF"/>
+                      <a:srgbClr val="FAFCFD"/>
                     </a:solidFill>
                   </a:tcPr>
                 </a:tc>
@@ -35861,7 +34977,7 @@
                       <a:tailEnd type="none" w="med" len="med"/>
                     </a:lnB>
                     <a:solidFill>
-                      <a:srgbClr val="FFFFFF"/>
+                      <a:srgbClr val="FAFCFD"/>
                     </a:solidFill>
                   </a:tcPr>
                 </a:tc>
@@ -35929,7 +35045,7 @@
                       <a:tailEnd type="none" w="med" len="med"/>
                     </a:lnB>
                     <a:solidFill>
-                      <a:srgbClr val="FFFFFF"/>
+                      <a:srgbClr val="FAFCFD"/>
                     </a:solidFill>
                   </a:tcPr>
                 </a:tc>
@@ -35997,7 +35113,7 @@
                       <a:tailEnd type="none" w="med" len="med"/>
                     </a:lnB>
                     <a:solidFill>
-                      <a:srgbClr val="FFFFFF"/>
+                      <a:srgbClr val="FAFCFD"/>
                     </a:solidFill>
                   </a:tcPr>
                 </a:tc>
@@ -36065,7 +35181,7 @@
                       <a:tailEnd type="none" w="med" len="med"/>
                     </a:lnB>
                     <a:solidFill>
-                      <a:srgbClr val="FFFFFF"/>
+                      <a:srgbClr val="FAFCFD"/>
                     </a:solidFill>
                   </a:tcPr>
                 </a:tc>
@@ -36133,7 +35249,7 @@
                       <a:tailEnd type="none" w="med" len="med"/>
                     </a:lnB>
                     <a:solidFill>
-                      <a:srgbClr val="FFFFFF"/>
+                      <a:srgbClr val="FAFCFD"/>
                     </a:solidFill>
                   </a:tcPr>
                 </a:tc>
@@ -36201,143 +35317,7 @@
                       <a:tailEnd type="none" w="med" len="med"/>
                     </a:lnB>
                     <a:solidFill>
-                      <a:srgbClr val="FFFFFF"/>
-                    </a:solidFill>
-                  </a:tcPr>
-                </a:tc>
-                <a:tc>
-                  <a:txBody>
-                    <a:bodyPr/>
-                    <a:lstStyle/>
-                    <a:p>
-                      <a:pPr algn="r" indent="0" marL="0">
-                        <a:buNone/>
-                      </a:pPr>
-                      <a:r>
-                        <a:rPr lang="en-US" sz="1000" dirty="0">
-                          <a:solidFill>
-                            <a:srgbClr val="55636E"/>
-                          </a:solidFill>
-                          <a:latin typeface="Calibri" pitchFamily="34" charset="0"/>
-                          <a:ea typeface="Calibri" pitchFamily="34" charset="-122"/>
-                          <a:cs typeface="Calibri" pitchFamily="34" charset="-120"/>
-                        </a:rPr>
-                        <a:t>✗</a:t>
-                      </a:r>
-                      <a:endParaRPr lang="en-US" sz="1000" dirty="0">
-                        <a:latin typeface="Calibri" charset="0"/>
-                        <a:ea typeface="Calibri" charset="0"/>
-                        <a:cs typeface="Calibri" charset="0"/>
-                      </a:endParaRPr>
-                    </a:p>
-                  </a:txBody>
-                  <a:tcPr marL="91440" marR="91440" marT="45720" marB="45720" anchor="ctr">
-                    <a:lnL w="12700" cap="flat" cmpd="sng" algn="ctr">
-                      <a:solidFill>
-                        <a:srgbClr val="E3E9EC"/>
-                      </a:solidFill>
-                      <a:prstDash val="solid"/>
-                      <a:round/>
-                      <a:headEnd type="none" w="med" len="med"/>
-                      <a:tailEnd type="none" w="med" len="med"/>
-                    </a:lnL>
-                    <a:lnR w="12700" cap="flat" cmpd="sng" algn="ctr">
-                      <a:solidFill>
-                        <a:srgbClr val="E3E9EC"/>
-                      </a:solidFill>
-                      <a:prstDash val="solid"/>
-                      <a:round/>
-                      <a:headEnd type="none" w="med" len="med"/>
-                      <a:tailEnd type="none" w="med" len="med"/>
-                    </a:lnR>
-                    <a:lnT w="12700" cap="flat" cmpd="sng" algn="ctr">
-                      <a:solidFill>
-                        <a:srgbClr val="E3E9EC"/>
-                      </a:solidFill>
-                      <a:prstDash val="solid"/>
-                      <a:round/>
-                      <a:headEnd type="none" w="med" len="med"/>
-                      <a:tailEnd type="none" w="med" len="med"/>
-                    </a:lnT>
-                    <a:lnB w="12700" cap="flat" cmpd="sng" algn="ctr">
-                      <a:solidFill>
-                        <a:srgbClr val="E3E9EC"/>
-                      </a:solidFill>
-                      <a:prstDash val="solid"/>
-                      <a:round/>
-                      <a:headEnd type="none" w="med" len="med"/>
-                      <a:tailEnd type="none" w="med" len="med"/>
-                    </a:lnB>
-                    <a:solidFill>
-                      <a:srgbClr val="FFFFFF"/>
-                    </a:solidFill>
-                  </a:tcPr>
-                </a:tc>
-                <a:tc>
-                  <a:txBody>
-                    <a:bodyPr/>
-                    <a:lstStyle/>
-                    <a:p>
-                      <a:pPr algn="r" indent="0" marL="0">
-                        <a:buNone/>
-                      </a:pPr>
-                      <a:r>
-                        <a:rPr lang="en-US" sz="1000" dirty="0">
-                          <a:solidFill>
-                            <a:srgbClr val="55636E"/>
-                          </a:solidFill>
-                          <a:latin typeface="맑은 고딕" pitchFamily="34" charset="0"/>
-                          <a:ea typeface="맑은 고딕" pitchFamily="34" charset="-122"/>
-                          <a:cs typeface="맑은 고딕" pitchFamily="34" charset="-120"/>
-                        </a:rPr>
-                        <a:t>[−2, 4]</a:t>
-                      </a:r>
-                      <a:endParaRPr lang="en-US" sz="1000" dirty="0">
-                        <a:latin typeface="맑은 고딕" charset="0"/>
-                        <a:ea typeface="맑은 고딕" charset="0"/>
-                        <a:cs typeface="맑은 고딕" charset="0"/>
-                      </a:endParaRPr>
-                    </a:p>
-                  </a:txBody>
-                  <a:tcPr marL="91440" marR="91440" marT="45720" marB="45720" anchor="ctr">
-                    <a:lnL w="12700" cap="flat" cmpd="sng" algn="ctr">
-                      <a:solidFill>
-                        <a:srgbClr val="E3E9EC"/>
-                      </a:solidFill>
-                      <a:prstDash val="solid"/>
-                      <a:round/>
-                      <a:headEnd type="none" w="med" len="med"/>
-                      <a:tailEnd type="none" w="med" len="med"/>
-                    </a:lnL>
-                    <a:lnR w="12700" cap="flat" cmpd="sng" algn="ctr">
-                      <a:solidFill>
-                        <a:srgbClr val="E3E9EC"/>
-                      </a:solidFill>
-                      <a:prstDash val="solid"/>
-                      <a:round/>
-                      <a:headEnd type="none" w="med" len="med"/>
-                      <a:tailEnd type="none" w="med" len="med"/>
-                    </a:lnR>
-                    <a:lnT w="12700" cap="flat" cmpd="sng" algn="ctr">
-                      <a:solidFill>
-                        <a:srgbClr val="E3E9EC"/>
-                      </a:solidFill>
-                      <a:prstDash val="solid"/>
-                      <a:round/>
-                      <a:headEnd type="none" w="med" len="med"/>
-                      <a:tailEnd type="none" w="med" len="med"/>
-                    </a:lnT>
-                    <a:lnB w="12700" cap="flat" cmpd="sng" algn="ctr">
-                      <a:solidFill>
-                        <a:srgbClr val="E3E9EC"/>
-                      </a:solidFill>
-                      <a:prstDash val="solid"/>
-                      <a:round/>
-                      <a:headEnd type="none" w="med" len="med"/>
-                      <a:tailEnd type="none" w="med" len="med"/>
-                    </a:lnB>
-                    <a:solidFill>
-                      <a:srgbClr val="FFFFFF"/>
+                      <a:srgbClr val="FAFCFD"/>
                     </a:solidFill>
                   </a:tcPr>
                 </a:tc>
@@ -36405,7 +35385,7 @@
                       <a:tailEnd type="none" w="med" len="med"/>
                     </a:lnB>
                     <a:solidFill>
-                      <a:srgbClr val="FFFFFF"/>
+                      <a:srgbClr val="FAFCFD"/>
                     </a:solidFill>
                   </a:tcPr>
                 </a:tc>
@@ -36426,7 +35406,7 @@
                           <a:ea typeface="맑은 고딕" pitchFamily="34" charset="-122"/>
                           <a:cs typeface="맑은 고딕" pitchFamily="34" charset="-120"/>
                         </a:rPr>
-                        <a:t>면적 효과 두 배</a:t>
+                        <a:t>면적의 영향을 두 배로 키워 고정</a:t>
                       </a:r>
                       <a:endParaRPr lang="en-US" sz="1000" dirty="0">
                         <a:latin typeface="맑은 고딕" charset="0"/>
@@ -36473,12 +35453,80 @@
                       <a:tailEnd type="none" w="med" len="med"/>
                     </a:lnB>
                     <a:solidFill>
-                      <a:srgbClr val="FFFFFF"/>
+                      <a:srgbClr val="FAFCFD"/>
                     </a:solidFill>
                   </a:tcPr>
                 </a:tc>
               </a:tr>
-              <a:tr h="256032">
+              <a:tr h="246888">
+                <a:tc>
+                  <a:txBody>
+                    <a:bodyPr/>
+                    <a:lstStyle/>
+                    <a:p>
+                      <a:pPr algn="l" indent="0" marL="0">
+                        <a:buNone/>
+                      </a:pPr>
+                      <a:r>
+                        <a:rPr lang="en-US" sz="1000" dirty="0">
+                          <a:solidFill>
+                            <a:srgbClr val="55636E"/>
+                          </a:solidFill>
+                          <a:latin typeface="맑은 고딕" pitchFamily="34" charset="0"/>
+                          <a:ea typeface="맑은 고딕" pitchFamily="34" charset="-122"/>
+                          <a:cs typeface="맑은 고딕" pitchFamily="34" charset="-120"/>
+                        </a:rPr>
+                        <a:t>추가</a:t>
+                      </a:r>
+                      <a:endParaRPr lang="en-US" sz="1000" dirty="0">
+                        <a:latin typeface="맑은 고딕" charset="0"/>
+                        <a:ea typeface="맑은 고딕" charset="0"/>
+                        <a:cs typeface="맑은 고딕" charset="0"/>
+                      </a:endParaRPr>
+                    </a:p>
+                  </a:txBody>
+                  <a:tcPr marL="91440" marR="91440" marT="45720" marB="45720" anchor="ctr">
+                    <a:lnL w="12700" cap="flat" cmpd="sng" algn="ctr">
+                      <a:solidFill>
+                        <a:srgbClr val="E3E9EC"/>
+                      </a:solidFill>
+                      <a:prstDash val="solid"/>
+                      <a:round/>
+                      <a:headEnd type="none" w="med" len="med"/>
+                      <a:tailEnd type="none" w="med" len="med"/>
+                    </a:lnL>
+                    <a:lnR w="12700" cap="flat" cmpd="sng" algn="ctr">
+                      <a:solidFill>
+                        <a:srgbClr val="E3E9EC"/>
+                      </a:solidFill>
+                      <a:prstDash val="solid"/>
+                      <a:round/>
+                      <a:headEnd type="none" w="med" len="med"/>
+                      <a:tailEnd type="none" w="med" len="med"/>
+                    </a:lnR>
+                    <a:lnT w="12700" cap="flat" cmpd="sng" algn="ctr">
+                      <a:solidFill>
+                        <a:srgbClr val="E3E9EC"/>
+                      </a:solidFill>
+                      <a:prstDash val="solid"/>
+                      <a:round/>
+                      <a:headEnd type="none" w="med" len="med"/>
+                      <a:tailEnd type="none" w="med" len="med"/>
+                    </a:lnT>
+                    <a:lnB w="12700" cap="flat" cmpd="sng" algn="ctr">
+                      <a:solidFill>
+                        <a:srgbClr val="E3E9EC"/>
+                      </a:solidFill>
+                      <a:prstDash val="solid"/>
+                      <a:round/>
+                      <a:headEnd type="none" w="med" len="med"/>
+                      <a:tailEnd type="none" w="med" len="med"/>
+                    </a:lnB>
+                    <a:solidFill>
+                      <a:srgbClr val="FFF6EC"/>
+                    </a:solidFill>
+                  </a:tcPr>
+                </a:tc>
                 <a:tc>
                   <a:txBody>
                     <a:bodyPr/>
@@ -36543,7 +35591,7 @@
                       <a:tailEnd type="none" w="med" len="med"/>
                     </a:lnB>
                     <a:solidFill>
-                      <a:srgbClr val="FFFFFF"/>
+                      <a:srgbClr val="FFF6EC"/>
                     </a:solidFill>
                   </a:tcPr>
                 </a:tc>
@@ -36611,7 +35659,7 @@
                       <a:tailEnd type="none" w="med" len="med"/>
                     </a:lnB>
                     <a:solidFill>
-                      <a:srgbClr val="FFFFFF"/>
+                      <a:srgbClr val="FFF6EC"/>
                     </a:solidFill>
                   </a:tcPr>
                 </a:tc>
@@ -36679,7 +35727,7 @@
                       <a:tailEnd type="none" w="med" len="med"/>
                     </a:lnB>
                     <a:solidFill>
-                      <a:srgbClr val="FFFFFF"/>
+                      <a:srgbClr val="FFF6EC"/>
                     </a:solidFill>
                   </a:tcPr>
                 </a:tc>
@@ -36747,7 +35795,7 @@
                       <a:tailEnd type="none" w="med" len="med"/>
                     </a:lnB>
                     <a:solidFill>
-                      <a:srgbClr val="FFFFFF"/>
+                      <a:srgbClr val="FFF6EC"/>
                     </a:solidFill>
                   </a:tcPr>
                 </a:tc>
@@ -36815,7 +35863,7 @@
                       <a:tailEnd type="none" w="med" len="med"/>
                     </a:lnB>
                     <a:solidFill>
-                      <a:srgbClr val="FFFFFF"/>
+                      <a:srgbClr val="FFF6EC"/>
                     </a:solidFill>
                   </a:tcPr>
                 </a:tc>
@@ -36883,7 +35931,7 @@
                       <a:tailEnd type="none" w="med" len="med"/>
                     </a:lnB>
                     <a:solidFill>
-                      <a:srgbClr val="FFFFFF"/>
+                      <a:srgbClr val="FFF6EC"/>
                     </a:solidFill>
                   </a:tcPr>
                 </a:tc>
@@ -36951,7 +35999,7 @@
                       <a:tailEnd type="none" w="med" len="med"/>
                     </a:lnB>
                     <a:solidFill>
-                      <a:srgbClr val="FFFFFF"/>
+                      <a:srgbClr val="FFF6EC"/>
                     </a:solidFill>
                   </a:tcPr>
                 </a:tc>
@@ -37019,143 +36067,7 @@
                       <a:tailEnd type="none" w="med" len="med"/>
                     </a:lnB>
                     <a:solidFill>
-                      <a:srgbClr val="FFFFFF"/>
-                    </a:solidFill>
-                  </a:tcPr>
-                </a:tc>
-                <a:tc>
-                  <a:txBody>
-                    <a:bodyPr/>
-                    <a:lstStyle/>
-                    <a:p>
-                      <a:pPr algn="r" indent="0" marL="0">
-                        <a:buNone/>
-                      </a:pPr>
-                      <a:r>
-                        <a:rPr lang="en-US" sz="1000" dirty="0">
-                          <a:solidFill>
-                            <a:srgbClr val="55636E"/>
-                          </a:solidFill>
-                          <a:latin typeface="Calibri" pitchFamily="34" charset="0"/>
-                          <a:ea typeface="Calibri" pitchFamily="34" charset="-122"/>
-                          <a:cs typeface="Calibri" pitchFamily="34" charset="-120"/>
-                        </a:rPr>
-                        <a:t>✗</a:t>
-                      </a:r>
-                      <a:endParaRPr lang="en-US" sz="1000" dirty="0">
-                        <a:latin typeface="Calibri" charset="0"/>
-                        <a:ea typeface="Calibri" charset="0"/>
-                        <a:cs typeface="Calibri" charset="0"/>
-                      </a:endParaRPr>
-                    </a:p>
-                  </a:txBody>
-                  <a:tcPr marL="91440" marR="91440" marT="45720" marB="45720" anchor="ctr">
-                    <a:lnL w="12700" cap="flat" cmpd="sng" algn="ctr">
-                      <a:solidFill>
-                        <a:srgbClr val="E3E9EC"/>
-                      </a:solidFill>
-                      <a:prstDash val="solid"/>
-                      <a:round/>
-                      <a:headEnd type="none" w="med" len="med"/>
-                      <a:tailEnd type="none" w="med" len="med"/>
-                    </a:lnL>
-                    <a:lnR w="12700" cap="flat" cmpd="sng" algn="ctr">
-                      <a:solidFill>
-                        <a:srgbClr val="E3E9EC"/>
-                      </a:solidFill>
-                      <a:prstDash val="solid"/>
-                      <a:round/>
-                      <a:headEnd type="none" w="med" len="med"/>
-                      <a:tailEnd type="none" w="med" len="med"/>
-                    </a:lnR>
-                    <a:lnT w="12700" cap="flat" cmpd="sng" algn="ctr">
-                      <a:solidFill>
-                        <a:srgbClr val="E3E9EC"/>
-                      </a:solidFill>
-                      <a:prstDash val="solid"/>
-                      <a:round/>
-                      <a:headEnd type="none" w="med" len="med"/>
-                      <a:tailEnd type="none" w="med" len="med"/>
-                    </a:lnT>
-                    <a:lnB w="12700" cap="flat" cmpd="sng" algn="ctr">
-                      <a:solidFill>
-                        <a:srgbClr val="E3E9EC"/>
-                      </a:solidFill>
-                      <a:prstDash val="solid"/>
-                      <a:round/>
-                      <a:headEnd type="none" w="med" len="med"/>
-                      <a:tailEnd type="none" w="med" len="med"/>
-                    </a:lnB>
-                    <a:solidFill>
-                      <a:srgbClr val="FFFFFF"/>
-                    </a:solidFill>
-                  </a:tcPr>
-                </a:tc>
-                <a:tc>
-                  <a:txBody>
-                    <a:bodyPr/>
-                    <a:lstStyle/>
-                    <a:p>
-                      <a:pPr algn="r" indent="0" marL="0">
-                        <a:buNone/>
-                      </a:pPr>
-                      <a:r>
-                        <a:rPr lang="en-US" sz="1000" dirty="0">
-                          <a:solidFill>
-                            <a:srgbClr val="55636E"/>
-                          </a:solidFill>
-                          <a:latin typeface="맑은 고딕" pitchFamily="34" charset="0"/>
-                          <a:ea typeface="맑은 고딕" pitchFamily="34" charset="-122"/>
-                          <a:cs typeface="맑은 고딕" pitchFamily="34" charset="-120"/>
-                        </a:rPr>
-                        <a:t>[−2, 4]</a:t>
-                      </a:r>
-                      <a:endParaRPr lang="en-US" sz="1000" dirty="0">
-                        <a:latin typeface="맑은 고딕" charset="0"/>
-                        <a:ea typeface="맑은 고딕" charset="0"/>
-                        <a:cs typeface="맑은 고딕" charset="0"/>
-                      </a:endParaRPr>
-                    </a:p>
-                  </a:txBody>
-                  <a:tcPr marL="91440" marR="91440" marT="45720" marB="45720" anchor="ctr">
-                    <a:lnL w="12700" cap="flat" cmpd="sng" algn="ctr">
-                      <a:solidFill>
-                        <a:srgbClr val="E3E9EC"/>
-                      </a:solidFill>
-                      <a:prstDash val="solid"/>
-                      <a:round/>
-                      <a:headEnd type="none" w="med" len="med"/>
-                      <a:tailEnd type="none" w="med" len="med"/>
-                    </a:lnL>
-                    <a:lnR w="12700" cap="flat" cmpd="sng" algn="ctr">
-                      <a:solidFill>
-                        <a:srgbClr val="E3E9EC"/>
-                      </a:solidFill>
-                      <a:prstDash val="solid"/>
-                      <a:round/>
-                      <a:headEnd type="none" w="med" len="med"/>
-                      <a:tailEnd type="none" w="med" len="med"/>
-                    </a:lnR>
-                    <a:lnT w="12700" cap="flat" cmpd="sng" algn="ctr">
-                      <a:solidFill>
-                        <a:srgbClr val="E3E9EC"/>
-                      </a:solidFill>
-                      <a:prstDash val="solid"/>
-                      <a:round/>
-                      <a:headEnd type="none" w="med" len="med"/>
-                      <a:tailEnd type="none" w="med" len="med"/>
-                    </a:lnT>
-                    <a:lnB w="12700" cap="flat" cmpd="sng" algn="ctr">
-                      <a:solidFill>
-                        <a:srgbClr val="E3E9EC"/>
-                      </a:solidFill>
-                      <a:prstDash val="solid"/>
-                      <a:round/>
-                      <a:headEnd type="none" w="med" len="med"/>
-                      <a:tailEnd type="none" w="med" len="med"/>
-                    </a:lnB>
-                    <a:solidFill>
-                      <a:srgbClr val="FFFFFF"/>
+                      <a:srgbClr val="FFF6EC"/>
                     </a:solidFill>
                   </a:tcPr>
                 </a:tc>
@@ -37223,7 +36135,7 @@
                       <a:tailEnd type="none" w="med" len="med"/>
                     </a:lnB>
                     <a:solidFill>
-                      <a:srgbClr val="FFFFFF"/>
+                      <a:srgbClr val="FFF6EC"/>
                     </a:solidFill>
                   </a:tcPr>
                 </a:tc>
@@ -37244,7 +36156,7 @@
                           <a:ea typeface="맑은 고딕" pitchFamily="34" charset="-122"/>
                           <a:cs typeface="맑은 고딕" pitchFamily="34" charset="-120"/>
                         </a:rPr>
-                        <a:t>LQ만 절반</a:t>
+                        <a:t>액상화 쪽 면적 영향만 절반 (LS는 A와 동일)</a:t>
                       </a:r>
                       <a:endParaRPr lang="en-US" sz="1000" dirty="0">
                         <a:latin typeface="맑은 고딕" charset="0"/>
@@ -37291,12 +36203,80 @@
                       <a:tailEnd type="none" w="med" len="med"/>
                     </a:lnB>
                     <a:solidFill>
-                      <a:srgbClr val="FFFFFF"/>
+                      <a:srgbClr val="FFF6EC"/>
                     </a:solidFill>
                   </a:tcPr>
                 </a:tc>
               </a:tr>
-              <a:tr h="256032">
+              <a:tr h="246888">
+                <a:tc>
+                  <a:txBody>
+                    <a:bodyPr/>
+                    <a:lstStyle/>
+                    <a:p>
+                      <a:pPr algn="l" indent="0" marL="0">
+                        <a:buNone/>
+                      </a:pPr>
+                      <a:r>
+                        <a:rPr lang="en-US" sz="1000" dirty="0">
+                          <a:solidFill>
+                            <a:srgbClr val="55636E"/>
+                          </a:solidFill>
+                          <a:latin typeface="맑은 고딕" pitchFamily="34" charset="0"/>
+                          <a:ea typeface="맑은 고딕" pitchFamily="34" charset="-122"/>
+                          <a:cs typeface="맑은 고딕" pitchFamily="34" charset="-120"/>
+                        </a:rPr>
+                        <a:t>추가</a:t>
+                      </a:r>
+                      <a:endParaRPr lang="en-US" sz="1000" dirty="0">
+                        <a:latin typeface="맑은 고딕" charset="0"/>
+                        <a:ea typeface="맑은 고딕" charset="0"/>
+                        <a:cs typeface="맑은 고딕" charset="0"/>
+                      </a:endParaRPr>
+                    </a:p>
+                  </a:txBody>
+                  <a:tcPr marL="91440" marR="91440" marT="45720" marB="45720" anchor="ctr">
+                    <a:lnL w="12700" cap="flat" cmpd="sng" algn="ctr">
+                      <a:solidFill>
+                        <a:srgbClr val="E3E9EC"/>
+                      </a:solidFill>
+                      <a:prstDash val="solid"/>
+                      <a:round/>
+                      <a:headEnd type="none" w="med" len="med"/>
+                      <a:tailEnd type="none" w="med" len="med"/>
+                    </a:lnL>
+                    <a:lnR w="12700" cap="flat" cmpd="sng" algn="ctr">
+                      <a:solidFill>
+                        <a:srgbClr val="E3E9EC"/>
+                      </a:solidFill>
+                      <a:prstDash val="solid"/>
+                      <a:round/>
+                      <a:headEnd type="none" w="med" len="med"/>
+                      <a:tailEnd type="none" w="med" len="med"/>
+                    </a:lnR>
+                    <a:lnT w="12700" cap="flat" cmpd="sng" algn="ctr">
+                      <a:solidFill>
+                        <a:srgbClr val="E3E9EC"/>
+                      </a:solidFill>
+                      <a:prstDash val="solid"/>
+                      <a:round/>
+                      <a:headEnd type="none" w="med" len="med"/>
+                      <a:tailEnd type="none" w="med" len="med"/>
+                    </a:lnT>
+                    <a:lnB w="12700" cap="flat" cmpd="sng" algn="ctr">
+                      <a:solidFill>
+                        <a:srgbClr val="E3E9EC"/>
+                      </a:solidFill>
+                      <a:prstDash val="solid"/>
+                      <a:round/>
+                      <a:headEnd type="none" w="med" len="med"/>
+                      <a:tailEnd type="none" w="med" len="med"/>
+                    </a:lnB>
+                    <a:solidFill>
+                      <a:srgbClr val="FFF6EC"/>
+                    </a:solidFill>
+                  </a:tcPr>
+                </a:tc>
                 <a:tc>
                   <a:txBody>
                     <a:bodyPr/>
@@ -37361,7 +36341,7 @@
                       <a:tailEnd type="none" w="med" len="med"/>
                     </a:lnB>
                     <a:solidFill>
-                      <a:srgbClr val="FFFFFF"/>
+                      <a:srgbClr val="FFF6EC"/>
                     </a:solidFill>
                   </a:tcPr>
                 </a:tc>
@@ -37429,7 +36409,7 @@
                       <a:tailEnd type="none" w="med" len="med"/>
                     </a:lnB>
                     <a:solidFill>
-                      <a:srgbClr val="FFFFFF"/>
+                      <a:srgbClr val="FFF6EC"/>
                     </a:solidFill>
                   </a:tcPr>
                 </a:tc>
@@ -37497,7 +36477,7 @@
                       <a:tailEnd type="none" w="med" len="med"/>
                     </a:lnB>
                     <a:solidFill>
-                      <a:srgbClr val="FFFFFF"/>
+                      <a:srgbClr val="FFF6EC"/>
                     </a:solidFill>
                   </a:tcPr>
                 </a:tc>
@@ -37565,7 +36545,7 @@
                       <a:tailEnd type="none" w="med" len="med"/>
                     </a:lnB>
                     <a:solidFill>
-                      <a:srgbClr val="FFFFFF"/>
+                      <a:srgbClr val="FFF6EC"/>
                     </a:solidFill>
                   </a:tcPr>
                 </a:tc>
@@ -37633,7 +36613,7 @@
                       <a:tailEnd type="none" w="med" len="med"/>
                     </a:lnB>
                     <a:solidFill>
-                      <a:srgbClr val="FFFFFF"/>
+                      <a:srgbClr val="FFF6EC"/>
                     </a:solidFill>
                   </a:tcPr>
                 </a:tc>
@@ -37701,7 +36681,7 @@
                       <a:tailEnd type="none" w="med" len="med"/>
                     </a:lnB>
                     <a:solidFill>
-                      <a:srgbClr val="FFFFFF"/>
+                      <a:srgbClr val="FFF6EC"/>
                     </a:solidFill>
                   </a:tcPr>
                 </a:tc>
@@ -37769,7 +36749,7 @@
                       <a:tailEnd type="none" w="med" len="med"/>
                     </a:lnB>
                     <a:solidFill>
-                      <a:srgbClr val="FFFFFF"/>
+                      <a:srgbClr val="FFF6EC"/>
                     </a:solidFill>
                   </a:tcPr>
                 </a:tc>
@@ -37837,143 +36817,7 @@
                       <a:tailEnd type="none" w="med" len="med"/>
                     </a:lnB>
                     <a:solidFill>
-                      <a:srgbClr val="FFFFFF"/>
-                    </a:solidFill>
-                  </a:tcPr>
-                </a:tc>
-                <a:tc>
-                  <a:txBody>
-                    <a:bodyPr/>
-                    <a:lstStyle/>
-                    <a:p>
-                      <a:pPr algn="r" indent="0" marL="0">
-                        <a:buNone/>
-                      </a:pPr>
-                      <a:r>
-                        <a:rPr lang="en-US" sz="1000" dirty="0">
-                          <a:solidFill>
-                            <a:srgbClr val="55636E"/>
-                          </a:solidFill>
-                          <a:latin typeface="Calibri" pitchFamily="34" charset="0"/>
-                          <a:ea typeface="Calibri" pitchFamily="34" charset="-122"/>
-                          <a:cs typeface="Calibri" pitchFamily="34" charset="-120"/>
-                        </a:rPr>
-                        <a:t>✗</a:t>
-                      </a:r>
-                      <a:endParaRPr lang="en-US" sz="1000" dirty="0">
-                        <a:latin typeface="Calibri" charset="0"/>
-                        <a:ea typeface="Calibri" charset="0"/>
-                        <a:cs typeface="Calibri" charset="0"/>
-                      </a:endParaRPr>
-                    </a:p>
-                  </a:txBody>
-                  <a:tcPr marL="91440" marR="91440" marT="45720" marB="45720" anchor="ctr">
-                    <a:lnL w="12700" cap="flat" cmpd="sng" algn="ctr">
-                      <a:solidFill>
-                        <a:srgbClr val="E3E9EC"/>
-                      </a:solidFill>
-                      <a:prstDash val="solid"/>
-                      <a:round/>
-                      <a:headEnd type="none" w="med" len="med"/>
-                      <a:tailEnd type="none" w="med" len="med"/>
-                    </a:lnL>
-                    <a:lnR w="12700" cap="flat" cmpd="sng" algn="ctr">
-                      <a:solidFill>
-                        <a:srgbClr val="E3E9EC"/>
-                      </a:solidFill>
-                      <a:prstDash val="solid"/>
-                      <a:round/>
-                      <a:headEnd type="none" w="med" len="med"/>
-                      <a:tailEnd type="none" w="med" len="med"/>
-                    </a:lnR>
-                    <a:lnT w="12700" cap="flat" cmpd="sng" algn="ctr">
-                      <a:solidFill>
-                        <a:srgbClr val="E3E9EC"/>
-                      </a:solidFill>
-                      <a:prstDash val="solid"/>
-                      <a:round/>
-                      <a:headEnd type="none" w="med" len="med"/>
-                      <a:tailEnd type="none" w="med" len="med"/>
-                    </a:lnT>
-                    <a:lnB w="12700" cap="flat" cmpd="sng" algn="ctr">
-                      <a:solidFill>
-                        <a:srgbClr val="E3E9EC"/>
-                      </a:solidFill>
-                      <a:prstDash val="solid"/>
-                      <a:round/>
-                      <a:headEnd type="none" w="med" len="med"/>
-                      <a:tailEnd type="none" w="med" len="med"/>
-                    </a:lnB>
-                    <a:solidFill>
-                      <a:srgbClr val="FFFFFF"/>
-                    </a:solidFill>
-                  </a:tcPr>
-                </a:tc>
-                <a:tc>
-                  <a:txBody>
-                    <a:bodyPr/>
-                    <a:lstStyle/>
-                    <a:p>
-                      <a:pPr algn="r" indent="0" marL="0">
-                        <a:buNone/>
-                      </a:pPr>
-                      <a:r>
-                        <a:rPr lang="en-US" sz="1000" dirty="0">
-                          <a:solidFill>
-                            <a:srgbClr val="55636E"/>
-                          </a:solidFill>
-                          <a:latin typeface="맑은 고딕" pitchFamily="34" charset="0"/>
-                          <a:ea typeface="맑은 고딕" pitchFamily="34" charset="-122"/>
-                          <a:cs typeface="맑은 고딕" pitchFamily="34" charset="-120"/>
-                        </a:rPr>
-                        <a:t>[−2, 4]</a:t>
-                      </a:r>
-                      <a:endParaRPr lang="en-US" sz="1000" dirty="0">
-                        <a:latin typeface="맑은 고딕" charset="0"/>
-                        <a:ea typeface="맑은 고딕" charset="0"/>
-                        <a:cs typeface="맑은 고딕" charset="0"/>
-                      </a:endParaRPr>
-                    </a:p>
-                  </a:txBody>
-                  <a:tcPr marL="91440" marR="91440" marT="45720" marB="45720" anchor="ctr">
-                    <a:lnL w="12700" cap="flat" cmpd="sng" algn="ctr">
-                      <a:solidFill>
-                        <a:srgbClr val="E3E9EC"/>
-                      </a:solidFill>
-                      <a:prstDash val="solid"/>
-                      <a:round/>
-                      <a:headEnd type="none" w="med" len="med"/>
-                      <a:tailEnd type="none" w="med" len="med"/>
-                    </a:lnL>
-                    <a:lnR w="12700" cap="flat" cmpd="sng" algn="ctr">
-                      <a:solidFill>
-                        <a:srgbClr val="E3E9EC"/>
-                      </a:solidFill>
-                      <a:prstDash val="solid"/>
-                      <a:round/>
-                      <a:headEnd type="none" w="med" len="med"/>
-                      <a:tailEnd type="none" w="med" len="med"/>
-                    </a:lnR>
-                    <a:lnT w="12700" cap="flat" cmpd="sng" algn="ctr">
-                      <a:solidFill>
-                        <a:srgbClr val="E3E9EC"/>
-                      </a:solidFill>
-                      <a:prstDash val="solid"/>
-                      <a:round/>
-                      <a:headEnd type="none" w="med" len="med"/>
-                      <a:tailEnd type="none" w="med" len="med"/>
-                    </a:lnT>
-                    <a:lnB w="12700" cap="flat" cmpd="sng" algn="ctr">
-                      <a:solidFill>
-                        <a:srgbClr val="E3E9EC"/>
-                      </a:solidFill>
-                      <a:prstDash val="solid"/>
-                      <a:round/>
-                      <a:headEnd type="none" w="med" len="med"/>
-                      <a:tailEnd type="none" w="med" len="med"/>
-                    </a:lnB>
-                    <a:solidFill>
-                      <a:srgbClr val="FFFFFF"/>
+                      <a:srgbClr val="FFF6EC"/>
                     </a:solidFill>
                   </a:tcPr>
                 </a:tc>
@@ -38041,7 +36885,7 @@
                       <a:tailEnd type="none" w="med" len="med"/>
                     </a:lnB>
                     <a:solidFill>
-                      <a:srgbClr val="FFFFFF"/>
+                      <a:srgbClr val="FFF6EC"/>
                     </a:solidFill>
                   </a:tcPr>
                 </a:tc>
@@ -38062,7 +36906,7 @@
                           <a:ea typeface="맑은 고딕" pitchFamily="34" charset="-122"/>
                           <a:cs typeface="맑은 고딕" pitchFamily="34" charset="-120"/>
                         </a:rPr>
-                        <a:t>LQ만 0.75</a:t>
+                        <a:t>액상화 쪽만 0.75 (LS는 A와 동일)</a:t>
                       </a:r>
                       <a:endParaRPr lang="en-US" sz="1000" dirty="0">
                         <a:latin typeface="맑은 고딕" charset="0"/>
@@ -38109,12 +36953,80 @@
                       <a:tailEnd type="none" w="med" len="med"/>
                     </a:lnB>
                     <a:solidFill>
-                      <a:srgbClr val="FFFFFF"/>
+                      <a:srgbClr val="FFF6EC"/>
                     </a:solidFill>
                   </a:tcPr>
                 </a:tc>
               </a:tr>
-              <a:tr h="256032">
+              <a:tr h="246888">
+                <a:tc>
+                  <a:txBody>
+                    <a:bodyPr/>
+                    <a:lstStyle/>
+                    <a:p>
+                      <a:pPr algn="l" indent="0" marL="0">
+                        <a:buNone/>
+                      </a:pPr>
+                      <a:r>
+                        <a:rPr lang="en-US" sz="1000" dirty="0">
+                          <a:solidFill>
+                            <a:srgbClr val="55636E"/>
+                          </a:solidFill>
+                          <a:latin typeface="맑은 고딕" pitchFamily="34" charset="0"/>
+                          <a:ea typeface="맑은 고딕" pitchFamily="34" charset="-122"/>
+                          <a:cs typeface="맑은 고딕" pitchFamily="34" charset="-120"/>
+                        </a:rPr>
+                        <a:t>추가</a:t>
+                      </a:r>
+                      <a:endParaRPr lang="en-US" sz="1000" dirty="0">
+                        <a:latin typeface="맑은 고딕" charset="0"/>
+                        <a:ea typeface="맑은 고딕" charset="0"/>
+                        <a:cs typeface="맑은 고딕" charset="0"/>
+                      </a:endParaRPr>
+                    </a:p>
+                  </a:txBody>
+                  <a:tcPr marL="91440" marR="91440" marT="45720" marB="45720" anchor="ctr">
+                    <a:lnL w="12700" cap="flat" cmpd="sng" algn="ctr">
+                      <a:solidFill>
+                        <a:srgbClr val="E3E9EC"/>
+                      </a:solidFill>
+                      <a:prstDash val="solid"/>
+                      <a:round/>
+                      <a:headEnd type="none" w="med" len="med"/>
+                      <a:tailEnd type="none" w="med" len="med"/>
+                    </a:lnL>
+                    <a:lnR w="12700" cap="flat" cmpd="sng" algn="ctr">
+                      <a:solidFill>
+                        <a:srgbClr val="E3E9EC"/>
+                      </a:solidFill>
+                      <a:prstDash val="solid"/>
+                      <a:round/>
+                      <a:headEnd type="none" w="med" len="med"/>
+                      <a:tailEnd type="none" w="med" len="med"/>
+                    </a:lnR>
+                    <a:lnT w="12700" cap="flat" cmpd="sng" algn="ctr">
+                      <a:solidFill>
+                        <a:srgbClr val="E3E9EC"/>
+                      </a:solidFill>
+                      <a:prstDash val="solid"/>
+                      <a:round/>
+                      <a:headEnd type="none" w="med" len="med"/>
+                      <a:tailEnd type="none" w="med" len="med"/>
+                    </a:lnT>
+                    <a:lnB w="12700" cap="flat" cmpd="sng" algn="ctr">
+                      <a:solidFill>
+                        <a:srgbClr val="E3E9EC"/>
+                      </a:solidFill>
+                      <a:prstDash val="solid"/>
+                      <a:round/>
+                      <a:headEnd type="none" w="med" len="med"/>
+                      <a:tailEnd type="none" w="med" len="med"/>
+                    </a:lnB>
+                    <a:solidFill>
+                      <a:srgbClr val="FFF6EC"/>
+                    </a:solidFill>
+                  </a:tcPr>
+                </a:tc>
                 <a:tc>
                   <a:txBody>
                     <a:bodyPr/>
@@ -38179,7 +37091,7 @@
                       <a:tailEnd type="none" w="med" len="med"/>
                     </a:lnB>
                     <a:solidFill>
-                      <a:srgbClr val="FFFFFF"/>
+                      <a:srgbClr val="FFF6EC"/>
                     </a:solidFill>
                   </a:tcPr>
                 </a:tc>
@@ -38247,7 +37159,7 @@
                       <a:tailEnd type="none" w="med" len="med"/>
                     </a:lnB>
                     <a:solidFill>
-                      <a:srgbClr val="FFFFFF"/>
+                      <a:srgbClr val="FFF6EC"/>
                     </a:solidFill>
                   </a:tcPr>
                 </a:tc>
@@ -38315,7 +37227,7 @@
                       <a:tailEnd type="none" w="med" len="med"/>
                     </a:lnB>
                     <a:solidFill>
-                      <a:srgbClr val="FFFFFF"/>
+                      <a:srgbClr val="FFF6EC"/>
                     </a:solidFill>
                   </a:tcPr>
                 </a:tc>
@@ -38383,7 +37295,7 @@
                       <a:tailEnd type="none" w="med" len="med"/>
                     </a:lnB>
                     <a:solidFill>
-                      <a:srgbClr val="FFFFFF"/>
+                      <a:srgbClr val="FFF6EC"/>
                     </a:solidFill>
                   </a:tcPr>
                 </a:tc>
@@ -38451,7 +37363,7 @@
                       <a:tailEnd type="none" w="med" len="med"/>
                     </a:lnB>
                     <a:solidFill>
-                      <a:srgbClr val="FFFFFF"/>
+                      <a:srgbClr val="FFF6EC"/>
                     </a:solidFill>
                   </a:tcPr>
                 </a:tc>
@@ -38519,7 +37431,7 @@
                       <a:tailEnd type="none" w="med" len="med"/>
                     </a:lnB>
                     <a:solidFill>
-                      <a:srgbClr val="FFFFFF"/>
+                      <a:srgbClr val="FFF6EC"/>
                     </a:solidFill>
                   </a:tcPr>
                 </a:tc>
@@ -38587,75 +37499,7 @@
                       <a:tailEnd type="none" w="med" len="med"/>
                     </a:lnB>
                     <a:solidFill>
-                      <a:srgbClr val="FFFFFF"/>
-                    </a:solidFill>
-                  </a:tcPr>
-                </a:tc>
-                <a:tc>
-                  <a:txBody>
-                    <a:bodyPr/>
-                    <a:lstStyle/>
-                    <a:p>
-                      <a:pPr algn="r" indent="0" marL="0">
-                        <a:buNone/>
-                      </a:pPr>
-                      <a:r>
-                        <a:rPr lang="en-US" sz="1000" b="1" dirty="0">
-                          <a:solidFill>
-                            <a:srgbClr val="55636E"/>
-                          </a:solidFill>
-                          <a:latin typeface="Calibri" pitchFamily="34" charset="0"/>
-                          <a:ea typeface="Calibri" pitchFamily="34" charset="-122"/>
-                          <a:cs typeface="Calibri" pitchFamily="34" charset="-120"/>
-                        </a:rPr>
-                        <a:t>0.43</a:t>
-                      </a:r>
-                      <a:endParaRPr lang="en-US" sz="1000" dirty="0">
-                        <a:latin typeface="Calibri" charset="0"/>
-                        <a:ea typeface="Calibri" charset="0"/>
-                        <a:cs typeface="Calibri" charset="0"/>
-                      </a:endParaRPr>
-                    </a:p>
-                  </a:txBody>
-                  <a:tcPr marL="91440" marR="91440" marT="45720" marB="45720" anchor="ctr">
-                    <a:lnL w="12700" cap="flat" cmpd="sng" algn="ctr">
-                      <a:solidFill>
-                        <a:srgbClr val="E3E9EC"/>
-                      </a:solidFill>
-                      <a:prstDash val="solid"/>
-                      <a:round/>
-                      <a:headEnd type="none" w="med" len="med"/>
-                      <a:tailEnd type="none" w="med" len="med"/>
-                    </a:lnL>
-                    <a:lnR w="12700" cap="flat" cmpd="sng" algn="ctr">
-                      <a:solidFill>
-                        <a:srgbClr val="E3E9EC"/>
-                      </a:solidFill>
-                      <a:prstDash val="solid"/>
-                      <a:round/>
-                      <a:headEnd type="none" w="med" len="med"/>
-                      <a:tailEnd type="none" w="med" len="med"/>
-                    </a:lnR>
-                    <a:lnT w="12700" cap="flat" cmpd="sng" algn="ctr">
-                      <a:solidFill>
-                        <a:srgbClr val="E3E9EC"/>
-                      </a:solidFill>
-                      <a:prstDash val="solid"/>
-                      <a:round/>
-                      <a:headEnd type="none" w="med" len="med"/>
-                      <a:tailEnd type="none" w="med" len="med"/>
-                    </a:lnT>
-                    <a:lnB w="12700" cap="flat" cmpd="sng" algn="ctr">
-                      <a:solidFill>
-                        <a:srgbClr val="E3E9EC"/>
-                      </a:solidFill>
-                      <a:prstDash val="solid"/>
-                      <a:round/>
-                      <a:headEnd type="none" w="med" len="med"/>
-                      <a:tailEnd type="none" w="med" len="med"/>
-                    </a:lnB>
-                    <a:solidFill>
-                      <a:srgbClr val="FFFFFF"/>
+                      <a:srgbClr val="FFF6EC"/>
                     </a:solidFill>
                   </a:tcPr>
                 </a:tc>
@@ -38676,7 +37520,7 @@
                           <a:ea typeface="Calibri" pitchFamily="34" charset="-122"/>
                           <a:cs typeface="Calibri" pitchFamily="34" charset="-120"/>
                         </a:rPr>
-                        <a:t>✗</a:t>
+                        <a:t>0.43</a:t>
                       </a:r>
                       <a:endParaRPr lang="en-US" sz="1000" dirty="0">
                         <a:latin typeface="Calibri" charset="0"/>
@@ -38723,75 +37567,7 @@
                       <a:tailEnd type="none" w="med" len="med"/>
                     </a:lnB>
                     <a:solidFill>
-                      <a:srgbClr val="FFFFFF"/>
-                    </a:solidFill>
-                  </a:tcPr>
-                </a:tc>
-                <a:tc>
-                  <a:txBody>
-                    <a:bodyPr/>
-                    <a:lstStyle/>
-                    <a:p>
-                      <a:pPr algn="r" indent="0" marL="0">
-                        <a:buNone/>
-                      </a:pPr>
-                      <a:r>
-                        <a:rPr lang="en-US" sz="1000" dirty="0">
-                          <a:solidFill>
-                            <a:srgbClr val="55636E"/>
-                          </a:solidFill>
-                          <a:latin typeface="맑은 고딕" pitchFamily="34" charset="0"/>
-                          <a:ea typeface="맑은 고딕" pitchFamily="34" charset="-122"/>
-                          <a:cs typeface="맑은 고딕" pitchFamily="34" charset="-120"/>
-                        </a:rPr>
-                        <a:t>[−2, 4]</a:t>
-                      </a:r>
-                      <a:endParaRPr lang="en-US" sz="1000" dirty="0">
-                        <a:latin typeface="맑은 고딕" charset="0"/>
-                        <a:ea typeface="맑은 고딕" charset="0"/>
-                        <a:cs typeface="맑은 고딕" charset="0"/>
-                      </a:endParaRPr>
-                    </a:p>
-                  </a:txBody>
-                  <a:tcPr marL="91440" marR="91440" marT="45720" marB="45720" anchor="ctr">
-                    <a:lnL w="12700" cap="flat" cmpd="sng" algn="ctr">
-                      <a:solidFill>
-                        <a:srgbClr val="E3E9EC"/>
-                      </a:solidFill>
-                      <a:prstDash val="solid"/>
-                      <a:round/>
-                      <a:headEnd type="none" w="med" len="med"/>
-                      <a:tailEnd type="none" w="med" len="med"/>
-                    </a:lnL>
-                    <a:lnR w="12700" cap="flat" cmpd="sng" algn="ctr">
-                      <a:solidFill>
-                        <a:srgbClr val="E3E9EC"/>
-                      </a:solidFill>
-                      <a:prstDash val="solid"/>
-                      <a:round/>
-                      <a:headEnd type="none" w="med" len="med"/>
-                      <a:tailEnd type="none" w="med" len="med"/>
-                    </a:lnR>
-                    <a:lnT w="12700" cap="flat" cmpd="sng" algn="ctr">
-                      <a:solidFill>
-                        <a:srgbClr val="E3E9EC"/>
-                      </a:solidFill>
-                      <a:prstDash val="solid"/>
-                      <a:round/>
-                      <a:headEnd type="none" w="med" len="med"/>
-                      <a:tailEnd type="none" w="med" len="med"/>
-                    </a:lnT>
-                    <a:lnB w="12700" cap="flat" cmpd="sng" algn="ctr">
-                      <a:solidFill>
-                        <a:srgbClr val="E3E9EC"/>
-                      </a:solidFill>
-                      <a:prstDash val="solid"/>
-                      <a:round/>
-                      <a:headEnd type="none" w="med" len="med"/>
-                      <a:tailEnd type="none" w="med" len="med"/>
-                    </a:lnB>
-                    <a:solidFill>
-                      <a:srgbClr val="FFFFFF"/>
+                      <a:srgbClr val="FFF6EC"/>
                     </a:solidFill>
                   </a:tcPr>
                 </a:tc>
@@ -38859,7 +37635,7 @@
                       <a:tailEnd type="none" w="med" len="med"/>
                     </a:lnB>
                     <a:solidFill>
-                      <a:srgbClr val="FFFFFF"/>
+                      <a:srgbClr val="FFF6EC"/>
                     </a:solidFill>
                   </a:tcPr>
                 </a:tc>
@@ -38880,7 +37656,7 @@
                           <a:ea typeface="맑은 고딕" pitchFamily="34" charset="-122"/>
                           <a:cs typeface="맑은 고딕" pitchFamily="34" charset="-120"/>
                         </a:rPr>
-                        <a:t>LQ의 c만 학습</a:t>
+                        <a:t>액상화 쪽 면적 영향만 데이터가 고른다</a:t>
                       </a:r>
                       <a:endParaRPr lang="en-US" sz="1000" dirty="0">
                         <a:latin typeface="맑은 고딕" charset="0"/>
@@ -38927,12 +37703,80 @@
                       <a:tailEnd type="none" w="med" len="med"/>
                     </a:lnB>
                     <a:solidFill>
-                      <a:srgbClr val="FFFFFF"/>
+                      <a:srgbClr val="FFF6EC"/>
                     </a:solidFill>
                   </a:tcPr>
                 </a:tc>
               </a:tr>
-              <a:tr h="256032">
+              <a:tr h="246888">
+                <a:tc>
+                  <a:txBody>
+                    <a:bodyPr/>
+                    <a:lstStyle/>
+                    <a:p>
+                      <a:pPr algn="l" indent="0" marL="0">
+                        <a:buNone/>
+                      </a:pPr>
+                      <a:r>
+                        <a:rPr lang="en-US" sz="1000" dirty="0">
+                          <a:solidFill>
+                            <a:srgbClr val="55636E"/>
+                          </a:solidFill>
+                          <a:latin typeface="맑은 고딕" pitchFamily="34" charset="0"/>
+                          <a:ea typeface="맑은 고딕" pitchFamily="34" charset="-122"/>
+                          <a:cs typeface="맑은 고딕" pitchFamily="34" charset="-120"/>
+                        </a:rPr>
+                        <a:t>요청</a:t>
+                      </a:r>
+                      <a:endParaRPr lang="en-US" sz="1000" dirty="0">
+                        <a:latin typeface="맑은 고딕" charset="0"/>
+                        <a:ea typeface="맑은 고딕" charset="0"/>
+                        <a:cs typeface="맑은 고딕" charset="0"/>
+                      </a:endParaRPr>
+                    </a:p>
+                  </a:txBody>
+                  <a:tcPr marL="91440" marR="91440" marT="45720" marB="45720" anchor="ctr">
+                    <a:lnL w="12700" cap="flat" cmpd="sng" algn="ctr">
+                      <a:solidFill>
+                        <a:srgbClr val="E3E9EC"/>
+                      </a:solidFill>
+                      <a:prstDash val="solid"/>
+                      <a:round/>
+                      <a:headEnd type="none" w="med" len="med"/>
+                      <a:tailEnd type="none" w="med" len="med"/>
+                    </a:lnL>
+                    <a:lnR w="12700" cap="flat" cmpd="sng" algn="ctr">
+                      <a:solidFill>
+                        <a:srgbClr val="E3E9EC"/>
+                      </a:solidFill>
+                      <a:prstDash val="solid"/>
+                      <a:round/>
+                      <a:headEnd type="none" w="med" len="med"/>
+                      <a:tailEnd type="none" w="med" len="med"/>
+                    </a:lnR>
+                    <a:lnT w="12700" cap="flat" cmpd="sng" algn="ctr">
+                      <a:solidFill>
+                        <a:srgbClr val="E3E9EC"/>
+                      </a:solidFill>
+                      <a:prstDash val="solid"/>
+                      <a:round/>
+                      <a:headEnd type="none" w="med" len="med"/>
+                      <a:tailEnd type="none" w="med" len="med"/>
+                    </a:lnT>
+                    <a:lnB w="12700" cap="flat" cmpd="sng" algn="ctr">
+                      <a:solidFill>
+                        <a:srgbClr val="E3E9EC"/>
+                      </a:solidFill>
+                      <a:prstDash val="solid"/>
+                      <a:round/>
+                      <a:headEnd type="none" w="med" len="med"/>
+                      <a:tailEnd type="none" w="med" len="med"/>
+                    </a:lnB>
+                    <a:solidFill>
+                      <a:srgbClr val="EAF4EE"/>
+                    </a:solidFill>
+                  </a:tcPr>
+                </a:tc>
                 <a:tc>
                   <a:txBody>
                     <a:bodyPr/>
@@ -38997,7 +37841,7 @@
                       <a:tailEnd type="none" w="med" len="med"/>
                     </a:lnB>
                     <a:solidFill>
-                      <a:srgbClr val="FFFFFF"/>
+                      <a:srgbClr val="EAF4EE"/>
                     </a:solidFill>
                   </a:tcPr>
                 </a:tc>
@@ -39065,7 +37909,7 @@
                       <a:tailEnd type="none" w="med" len="med"/>
                     </a:lnB>
                     <a:solidFill>
-                      <a:srgbClr val="FFFFFF"/>
+                      <a:srgbClr val="EAF4EE"/>
                     </a:solidFill>
                   </a:tcPr>
                 </a:tc>
@@ -39133,7 +37977,7 @@
                       <a:tailEnd type="none" w="med" len="med"/>
                     </a:lnB>
                     <a:solidFill>
-                      <a:srgbClr val="FFFFFF"/>
+                      <a:srgbClr val="EAF4EE"/>
                     </a:solidFill>
                   </a:tcPr>
                 </a:tc>
@@ -39146,7 +37990,7 @@
                         <a:buNone/>
                       </a:pPr>
                       <a:r>
-                        <a:rPr lang="en-US" sz="1000" b="1" dirty="0">
+                        <a:rPr lang="en-US" sz="1000" dirty="0">
                           <a:solidFill>
                             <a:srgbClr val="55636E"/>
                           </a:solidFill>
@@ -39201,7 +38045,7 @@
                       <a:tailEnd type="none" w="med" len="med"/>
                     </a:lnB>
                     <a:solidFill>
-                      <a:srgbClr val="FFFFFF"/>
+                      <a:srgbClr val="EAF4EE"/>
                     </a:solidFill>
                   </a:tcPr>
                 </a:tc>
@@ -39269,7 +38113,7 @@
                       <a:tailEnd type="none" w="med" len="med"/>
                     </a:lnB>
                     <a:solidFill>
-                      <a:srgbClr val="FFFFFF"/>
+                      <a:srgbClr val="EAF4EE"/>
                     </a:solidFill>
                   </a:tcPr>
                 </a:tc>
@@ -39337,7 +38181,7 @@
                       <a:tailEnd type="none" w="med" len="med"/>
                     </a:lnB>
                     <a:solidFill>
-                      <a:srgbClr val="FFFFFF"/>
+                      <a:srgbClr val="EAF4EE"/>
                     </a:solidFill>
                   </a:tcPr>
                 </a:tc>
@@ -39350,7 +38194,7 @@
                         <a:buNone/>
                       </a:pPr>
                       <a:r>
-                        <a:rPr lang="en-US" sz="1000" b="1" dirty="0">
+                        <a:rPr lang="en-US" sz="1000" dirty="0">
                           <a:solidFill>
                             <a:srgbClr val="55636E"/>
                           </a:solidFill>
@@ -39405,7 +38249,7 @@
                       <a:tailEnd type="none" w="med" len="med"/>
                     </a:lnB>
                     <a:solidFill>
-                      <a:srgbClr val="FFFFFF"/>
+                      <a:srgbClr val="EAF4EE"/>
                     </a:solidFill>
                   </a:tcPr>
                 </a:tc>
@@ -39473,143 +38317,7 @@
                       <a:tailEnd type="none" w="med" len="med"/>
                     </a:lnB>
                     <a:solidFill>
-                      <a:srgbClr val="FFFFFF"/>
-                    </a:solidFill>
-                  </a:tcPr>
-                </a:tc>
-                <a:tc>
-                  <a:txBody>
-                    <a:bodyPr/>
-                    <a:lstStyle/>
-                    <a:p>
-                      <a:pPr algn="r" indent="0" marL="0">
-                        <a:buNone/>
-                      </a:pPr>
-                      <a:r>
-                        <a:rPr lang="en-US" sz="1000" dirty="0">
-                          <a:solidFill>
-                            <a:srgbClr val="55636E"/>
-                          </a:solidFill>
-                          <a:latin typeface="Calibri" pitchFamily="34" charset="0"/>
-                          <a:ea typeface="Calibri" pitchFamily="34" charset="-122"/>
-                          <a:cs typeface="Calibri" pitchFamily="34" charset="-120"/>
-                        </a:rPr>
-                        <a:t>✓</a:t>
-                      </a:r>
-                      <a:endParaRPr lang="en-US" sz="1000" dirty="0">
-                        <a:latin typeface="Calibri" charset="0"/>
-                        <a:ea typeface="Calibri" charset="0"/>
-                        <a:cs typeface="Calibri" charset="0"/>
-                      </a:endParaRPr>
-                    </a:p>
-                  </a:txBody>
-                  <a:tcPr marL="91440" marR="91440" marT="45720" marB="45720" anchor="ctr">
-                    <a:lnL w="12700" cap="flat" cmpd="sng" algn="ctr">
-                      <a:solidFill>
-                        <a:srgbClr val="E3E9EC"/>
-                      </a:solidFill>
-                      <a:prstDash val="solid"/>
-                      <a:round/>
-                      <a:headEnd type="none" w="med" len="med"/>
-                      <a:tailEnd type="none" w="med" len="med"/>
-                    </a:lnL>
-                    <a:lnR w="12700" cap="flat" cmpd="sng" algn="ctr">
-                      <a:solidFill>
-                        <a:srgbClr val="E3E9EC"/>
-                      </a:solidFill>
-                      <a:prstDash val="solid"/>
-                      <a:round/>
-                      <a:headEnd type="none" w="med" len="med"/>
-                      <a:tailEnd type="none" w="med" len="med"/>
-                    </a:lnR>
-                    <a:lnT w="12700" cap="flat" cmpd="sng" algn="ctr">
-                      <a:solidFill>
-                        <a:srgbClr val="E3E9EC"/>
-                      </a:solidFill>
-                      <a:prstDash val="solid"/>
-                      <a:round/>
-                      <a:headEnd type="none" w="med" len="med"/>
-                      <a:tailEnd type="none" w="med" len="med"/>
-                    </a:lnT>
-                    <a:lnB w="12700" cap="flat" cmpd="sng" algn="ctr">
-                      <a:solidFill>
-                        <a:srgbClr val="E3E9EC"/>
-                      </a:solidFill>
-                      <a:prstDash val="solid"/>
-                      <a:round/>
-                      <a:headEnd type="none" w="med" len="med"/>
-                      <a:tailEnd type="none" w="med" len="med"/>
-                    </a:lnB>
-                    <a:solidFill>
-                      <a:srgbClr val="FFFFFF"/>
-                    </a:solidFill>
-                  </a:tcPr>
-                </a:tc>
-                <a:tc>
-                  <a:txBody>
-                    <a:bodyPr/>
-                    <a:lstStyle/>
-                    <a:p>
-                      <a:pPr algn="r" indent="0" marL="0">
-                        <a:buNone/>
-                      </a:pPr>
-                      <a:r>
-                        <a:rPr lang="en-US" sz="1000" dirty="0">
-                          <a:solidFill>
-                            <a:srgbClr val="55636E"/>
-                          </a:solidFill>
-                          <a:latin typeface="맑은 고딕" pitchFamily="34" charset="0"/>
-                          <a:ea typeface="맑은 고딕" pitchFamily="34" charset="-122"/>
-                          <a:cs typeface="맑은 고딕" pitchFamily="34" charset="-120"/>
-                        </a:rPr>
-                        <a:t>[−20, 20]</a:t>
-                      </a:r>
-                      <a:endParaRPr lang="en-US" sz="1000" dirty="0">
-                        <a:latin typeface="맑은 고딕" charset="0"/>
-                        <a:ea typeface="맑은 고딕" charset="0"/>
-                        <a:cs typeface="맑은 고딕" charset="0"/>
-                      </a:endParaRPr>
-                    </a:p>
-                  </a:txBody>
-                  <a:tcPr marL="91440" marR="91440" marT="45720" marB="45720" anchor="ctr">
-                    <a:lnL w="12700" cap="flat" cmpd="sng" algn="ctr">
-                      <a:solidFill>
-                        <a:srgbClr val="E3E9EC"/>
-                      </a:solidFill>
-                      <a:prstDash val="solid"/>
-                      <a:round/>
-                      <a:headEnd type="none" w="med" len="med"/>
-                      <a:tailEnd type="none" w="med" len="med"/>
-                    </a:lnL>
-                    <a:lnR w="12700" cap="flat" cmpd="sng" algn="ctr">
-                      <a:solidFill>
-                        <a:srgbClr val="E3E9EC"/>
-                      </a:solidFill>
-                      <a:prstDash val="solid"/>
-                      <a:round/>
-                      <a:headEnd type="none" w="med" len="med"/>
-                      <a:tailEnd type="none" w="med" len="med"/>
-                    </a:lnR>
-                    <a:lnT w="12700" cap="flat" cmpd="sng" algn="ctr">
-                      <a:solidFill>
-                        <a:srgbClr val="E3E9EC"/>
-                      </a:solidFill>
-                      <a:prstDash val="solid"/>
-                      <a:round/>
-                      <a:headEnd type="none" w="med" len="med"/>
-                      <a:tailEnd type="none" w="med" len="med"/>
-                    </a:lnT>
-                    <a:lnB w="12700" cap="flat" cmpd="sng" algn="ctr">
-                      <a:solidFill>
-                        <a:srgbClr val="E3E9EC"/>
-                      </a:solidFill>
-                      <a:prstDash val="solid"/>
-                      <a:round/>
-                      <a:headEnd type="none" w="med" len="med"/>
-                      <a:tailEnd type="none" w="med" len="med"/>
-                    </a:lnB>
-                    <a:solidFill>
-                      <a:srgbClr val="FFFFFF"/>
+                      <a:srgbClr val="EAF4EE"/>
                     </a:solidFill>
                   </a:tcPr>
                 </a:tc>
@@ -39677,7 +38385,7 @@
                       <a:tailEnd type="none" w="med" len="med"/>
                     </a:lnB>
                     <a:solidFill>
-                      <a:srgbClr val="FFFFFF"/>
+                      <a:srgbClr val="EAF4EE"/>
                     </a:solidFill>
                   </a:tcPr>
                 </a:tc>
@@ -39698,7 +38406,7 @@
                           <a:ea typeface="맑은 고딕" pitchFamily="34" charset="-122"/>
                           <a:cs typeface="맑은 고딕" pitchFamily="34" charset="-120"/>
                         </a:rPr>
-                        <a:t>높이만 보정</a:t>
+                        <a:t>순위는 유도식 그대로, 확률 높이만 학습</a:t>
                       </a:r>
                       <a:endParaRPr lang="en-US" sz="1000" dirty="0">
                         <a:latin typeface="맑은 고딕" charset="0"/>
@@ -39745,7 +38453,7 @@
                       <a:tailEnd type="none" w="med" len="med"/>
                     </a:lnB>
                     <a:solidFill>
-                      <a:srgbClr val="FFFFFF"/>
+                      <a:srgbClr val="EAF4EE"/>
                     </a:solidFill>
                   </a:tcPr>
                 </a:tc>
@@ -39756,41 +38464,14 @@
       </p:graphicFrame>
       <p:sp>
         <p:nvSpPr>
-          <p:cNvPr id="6" name="Shape 3"/>
-          <p:cNvSpPr/>
-          <p:nvPr/>
-        </p:nvSpPr>
-        <p:spPr>
-          <a:xfrm>
-            <a:off x="566928" y="5047488"/>
-            <a:ext cx="5394960" cy="1389888"/>
-          </a:xfrm>
-          <a:prstGeom prst="roundRect">
-            <a:avLst>
-              <a:gd name="adj" fmla="val 3947"/>
-            </a:avLst>
-          </a:prstGeom>
-          <a:solidFill>
-            <a:srgbClr val="F1F5F7"/>
-          </a:solidFill>
-          <a:ln w="12700">
-            <a:solidFill>
-              <a:srgbClr val="F1F5F7"/>
-            </a:solidFill>
-            <a:prstDash val="solid"/>
-          </a:ln>
-        </p:spPr>
-      </p:sp>
-      <p:sp>
-        <p:nvSpPr>
           <p:cNvPr id="7" name="Text 4"/>
           <p:cNvSpPr txBox="1"/>
           <p:nvPr/>
         </p:nvSpPr>
         <p:spPr>
           <a:xfrm>
-            <a:off x="841248" y="5230368"/>
-            <a:ext cx="4846320" cy="310896"/>
+            <a:off x="566928" y="5468112"/>
+            <a:ext cx="11064240" cy="274320"/>
           </a:xfrm>
           <a:prstGeom prst="rect">
             <a:avLst/>
@@ -39806,17 +38487,17 @@
               <a:buNone/>
             </a:pPr>
             <a:r>
-              <a:rPr lang="en-US" sz="1450" b="1" dirty="0">
+              <a:rPr lang="en-US" sz="1150" dirty="0">
                 <a:solidFill>
-                  <a:srgbClr val="1C2A33"/>
+                  <a:srgbClr val="55636E"/>
                 </a:solidFill>
                 <a:latin typeface="맑은 고딕" pitchFamily="34" charset="0"/>
                 <a:ea typeface="맑은 고딕" pitchFamily="34" charset="-122"/>
                 <a:cs typeface="맑은 고딕" pitchFamily="34" charset="-120"/>
               </a:rPr>
-              <a:t>중심화는 이름이 아니라 규칙이다</a:t>
+              <a:t>a = USGS 값을 얼마나 믿을지(기울기)     b = 확률 수준을 위아래로 옮기는 값(높이)     c = 시정촌 면적을 얼마나 반영할지</a:t>
             </a:r>
-            <a:endParaRPr lang="en-US" sz="1450" dirty="0"/>
+            <a:endParaRPr lang="en-US" sz="1150" dirty="0"/>
           </a:p>
         </p:txBody>
       </p:sp>
@@ -39828,77 +38509,8 @@
         </p:nvSpPr>
         <p:spPr>
           <a:xfrm>
-            <a:off x="841248" y="5577840"/>
-            <a:ext cx="4846320" cy="676656"/>
-          </a:xfrm>
-          <a:prstGeom prst="rect">
-            <a:avLst/>
-          </a:prstGeom>
-          <a:noFill/>
-          <a:ln/>
-        </p:spPr>
-        <p:txBody>
-          <a:bodyPr wrap="square" lIns="0" tIns="0" rIns="0" bIns="0" rtlCol="0" anchor="ctr"/>
-          <a:lstStyle/>
-          <a:p>
-            <a:pPr indent="0" marL="0">
-              <a:lnSpc>
-                <a:spcPts val="1700"/>
-              </a:lnSpc>
-              <a:buNone/>
-            </a:pPr>
-            <a:r>
-              <a:rPr lang="en-US" sz="1200" dirty="0">
-                <a:solidFill>
-                  <a:srgbClr val="55636E"/>
-                </a:solidFill>
-                <a:latin typeface="맑은 고딕" pitchFamily="34" charset="0"/>
-                <a:ea typeface="맑은 고딕" pitchFamily="34" charset="-122"/>
-                <a:cs typeface="맑은 고딕" pitchFamily="34" charset="-120"/>
-              </a:rPr>
-              <a:t>m은 log k 평균(LS 8.042 / LQ 6.656)이다. b에 흡수되는 재매개변수화라 b를 학습하는 조건에서만 켠다. b=0 고정 조건은 빼면 유도식이 깨진다.</a:t>
-            </a:r>
-            <a:endParaRPr lang="en-US" sz="1200" dirty="0"/>
-          </a:p>
-        </p:txBody>
-      </p:sp>
-      <p:sp>
-        <p:nvSpPr>
-          <p:cNvPr id="9" name="Shape 6"/>
-          <p:cNvSpPr/>
-          <p:nvPr/>
-        </p:nvSpPr>
-        <p:spPr>
-          <a:xfrm>
-            <a:off x="6236208" y="5047488"/>
-            <a:ext cx="5394960" cy="1389888"/>
-          </a:xfrm>
-          <a:prstGeom prst="roundRect">
-            <a:avLst>
-              <a:gd name="adj" fmla="val 3947"/>
-            </a:avLst>
-          </a:prstGeom>
-          <a:solidFill>
-            <a:srgbClr val="F1F5F7"/>
-          </a:solidFill>
-          <a:ln w="12700">
-            <a:solidFill>
-              <a:srgbClr val="F1F5F7"/>
-            </a:solidFill>
-            <a:prstDash val="solid"/>
-          </a:ln>
-        </p:spPr>
-      </p:sp>
-      <p:sp>
-        <p:nvSpPr>
-          <p:cNvPr id="10" name="Text 7"/>
-          <p:cNvSpPr txBox="1"/>
-          <p:nvPr/>
-        </p:nvSpPr>
-        <p:spPr>
-          <a:xfrm>
-            <a:off x="6510528" y="5230368"/>
-            <a:ext cx="4846320" cy="310896"/>
+            <a:off x="566928" y="5797296"/>
+            <a:ext cx="11064240" cy="274320"/>
           </a:xfrm>
           <a:prstGeom prst="rect">
             <a:avLst/>
@@ -39914,7 +38526,7 @@
               <a:buNone/>
             </a:pPr>
             <a:r>
-              <a:rPr lang="en-US" sz="1450" b="1" dirty="0">
+              <a:rPr lang="en-US" sz="1150" b="1" dirty="0">
                 <a:solidFill>
                   <a:srgbClr val="C9772F"/>
                 </a:solidFill>
@@ -39922,22 +38534,22 @@
                 <a:ea typeface="맑은 고딕" pitchFamily="34" charset="-122"/>
                 <a:cs typeface="맑은 고딕" pitchFamily="34" charset="-120"/>
               </a:rPr>
-              <a:t>자기 prior 순위는 c/a 하나로 정해진다</a:t>
+              <a:t>출처 —  회색: 교수님이 지시하신 A~F     주황: 실험 도중 우리가 만든 G·H·I     초록: 민지님이 요청한 J</a:t>
             </a:r>
-            <a:endParaRPr lang="en-US" sz="1450" dirty="0"/>
+            <a:endParaRPr lang="en-US" sz="1150" dirty="0"/>
           </a:p>
         </p:txBody>
       </p:sp>
       <p:sp>
         <p:nvSpPr>
-          <p:cNvPr id="11" name="Text 8"/>
+          <p:cNvPr id="9" name="Text 6"/>
           <p:cNvSpPr txBox="1"/>
           <p:nvPr/>
         </p:nvSpPr>
         <p:spPr>
           <a:xfrm>
-            <a:off x="6510528" y="5577840"/>
-            <a:ext cx="4846320" cy="676656"/>
+            <a:off x="566928" y="6108192"/>
+            <a:ext cx="11064240" cy="274320"/>
           </a:xfrm>
           <a:prstGeom prst="rect">
             <a:avLst/>
@@ -39950,23 +38562,20 @@
           <a:lstStyle/>
           <a:p>
             <a:pPr indent="0" marL="0">
-              <a:lnSpc>
-                <a:spcPts val="1700"/>
-              </a:lnSpc>
               <a:buNone/>
             </a:pPr>
             <a:r>
-              <a:rPr lang="en-US" sz="1200" dirty="0">
+              <a:rPr lang="en-US" sz="1050" dirty="0">
                 <a:solidFill>
-                  <a:srgbClr val="55636E"/>
+                  <a:srgbClr val="8A9BA8"/>
                 </a:solidFill>
                 <a:latin typeface="맑은 고딕" pitchFamily="34" charset="0"/>
                 <a:ea typeface="맑은 고딕" pitchFamily="34" charset="-122"/>
                 <a:cs typeface="맑은 고딕" pitchFamily="34" charset="-120"/>
               </a:rPr>
-              <a:t>b와 m은 전 행에 더해지는 상수라 순위를 못 바꾸고, a와 c가 같은 배율이면 스케일만 변한다. 그래서 A·B·G·H·I·J의 prior AUC가 0.8850으로 전부 같다.</a:t>
+              <a:t>b를 학습하는 B·C·D·J는 b 범위가 [−20, 20]이고 log k를 평균 중심화한다(m = LS 8.042 / LQ 6.656). 나머지는 b=0 고정이라 중심화하지 않는다 — 빼면 유도식이 깨진다.</a:t>
             </a:r>
-            <a:endParaRPr lang="en-US" sz="1200" dirty="0"/>
+            <a:endParaRPr lang="en-US" sz="1050" dirty="0"/>
           </a:p>
         </p:txBody>
       </p:sp>

--- a/docs/후속실험3_발표.pptx
+++ b/docs/후속실험3_발표.pptx
@@ -20,9 +20,11 @@
     <p:sldId id="268" r:id="rId14"/>
     <p:sldId id="269" r:id="rId15"/>
     <p:sldId id="270" r:id="rId16"/>
+    <p:sldId id="271" r:id="rId17"/>
+    <p:sldId id="272" r:id="rId18"/>
   </p:sldIdLst>
   <p:notesMasterIdLst>
-    <p:notesMasterId r:id="rId17"/>
+    <p:notesMasterId r:id="rId19"/>
   </p:notesMasterIdLst>
   <p:sldSz cx="12192000" cy="6858000"/>
   <p:notesSz cx="6858000" cy="12192000"/>
@@ -2722,6 +2724,902 @@
 </c:chartSpace>
 </file>
 
+<file path=ppt/charts/chart8.xml><?xml version="1.0" encoding="utf-8"?>
+<c:chartSpace xmlns:c="http://schemas.openxmlformats.org/drawingml/2006/chart" xmlns:a="http://schemas.openxmlformats.org/drawingml/2006/main" xmlns:r="http://schemas.openxmlformats.org/officeDocument/2006/relationships">
+  <c:date1904 val="0"/>
+  <c:roundedCorners val="1"/>
+  <c:chart>
+    <c:autoTitleDeleted val="1"/>
+    <c:plotArea>
+      <c:layout/>
+      <c:lineChart>
+        <c:varyColors val="0"/>
+        <c:ser>
+          <c:idx val="0"/>
+          <c:order val="0"/>
+          <c:tx>
+            <c:strRef>
+              <c:f>Sheet1!$B$1</c:f>
+              <c:strCache>
+                <c:ptCount val="1"/>
+                <c:pt idx="0">
+                  <c:v>산사태 LS</c:v>
+                </c:pt>
+              </c:strCache>
+            </c:strRef>
+          </c:tx>
+          <c:spPr>
+            <a:solidFill>
+              <a:srgbClr val="B85042"/>
+            </a:solidFill>
+            <a:ln w="38100" cap="flat">
+              <a:solidFill>
+                <a:srgbClr val="B85042"/>
+              </a:solidFill>
+              <a:prstDash val="solid"/>
+              <a:round/>
+            </a:ln>
+            <a:effectLst/>
+          </c:spPr>
+          <c:invertIfNegative val="0"/>
+          <c:dLbls>
+            <c:numFmt formatCode="#,##0" sourceLinked="0"/>
+            <c:txPr>
+              <a:bodyPr/>
+              <a:lstStyle/>
+              <a:p>
+                <a:pPr>
+                  <a:defRPr b="0" i="0" strike="noStrike" sz="900" u="none">
+                    <a:solidFill>
+                      <a:srgbClr val="55636E"/>
+                    </a:solidFill>
+                    <a:latin typeface="Calibri"/>
+                  </a:defRPr>
+                </a:pPr>
+              </a:p>
+            </c:txPr>
+            <c:showLegendKey val="0"/>
+            <c:showVal val="0"/>
+            <c:showCatName val="0"/>
+            <c:showSerName val="0"/>
+            <c:showPercent val="0"/>
+            <c:showBubbleSize val="0"/>
+            <c:showLeaderLines val="0"/>
+          </c:dLbls>
+          <c:marker>
+            <c:symbol val="circle"/>
+            <c:size val="6"/>
+            <c:spPr>
+              <a:solidFill>
+                <a:srgbClr val="B85042"/>
+              </a:solidFill>
+              <a:ln w="9525" cap="flat">
+                <a:solidFill>
+                  <a:srgbClr val="B85042"/>
+                </a:solidFill>
+                <a:prstDash val="solid"/>
+                <a:round/>
+              </a:ln>
+              <a:effectLst/>
+            </c:spPr>
+          </c:marker>
+          <c:cat>
+            <c:multiLvlStrRef>
+              <c:f>Sheet1!$A$2:$A$9</c:f>
+              <c:multiLvlStrCache>
+                <c:ptCount val="8"/>
+                <c:lvl>
+                  <c:pt idx="0">
+                    <c:v>0.3</c:v>
+                  </c:pt>
+                  <c:pt idx="1">
+                    <c:v>0.4</c:v>
+                  </c:pt>
+                  <c:pt idx="2">
+                    <c:v>0.5</c:v>
+                  </c:pt>
+                  <c:pt idx="3">
+                    <c:v>0.6</c:v>
+                  </c:pt>
+                  <c:pt idx="4">
+                    <c:v>0.7</c:v>
+                  </c:pt>
+                  <c:pt idx="5">
+                    <c:v>0.8</c:v>
+                  </c:pt>
+                  <c:pt idx="6">
+                    <c:v>0.9</c:v>
+                  </c:pt>
+                  <c:pt idx="7">
+                    <c:v>1.0</c:v>
+                  </c:pt>
+                </c:lvl>
+              </c:multiLvlStrCache>
+            </c:multiLvlStrRef>
+          </c:cat>
+          <c:val>
+            <c:numRef>
+              <c:f>Sheet1!$B$2:$B$9</c:f>
+              <c:numCache>
+                <c:formatCode>General</c:formatCode>
+                <c:ptCount val="8"/>
+                <c:pt idx="0">
+                  <c:v>-0.2002</c:v>
+                </c:pt>
+                <c:pt idx="1">
+                  <c:v>-0.1562</c:v>
+                </c:pt>
+                <c:pt idx="2">
+                  <c:v>-0.0964</c:v>
+                </c:pt>
+                <c:pt idx="3">
+                  <c:v>-0.0216</c:v>
+                </c:pt>
+                <c:pt idx="4">
+                  <c:v>0.0773</c:v>
+                </c:pt>
+                <c:pt idx="5">
+                  <c:v>0.1982</c:v>
+                </c:pt>
+                <c:pt idx="6">
+                  <c:v>0.3248</c:v>
+                </c:pt>
+                <c:pt idx="7">
+                  <c:v>0.4362</c:v>
+                </c:pt>
+              </c:numCache>
+            </c:numRef>
+          </c:val>
+          <c:smooth val="0"/>
+        </c:ser>
+        <c:ser>
+          <c:idx val="1"/>
+          <c:order val="1"/>
+          <c:tx>
+            <c:strRef>
+              <c:f>Sheet1!$C$1</c:f>
+              <c:strCache>
+                <c:ptCount val="1"/>
+                <c:pt idx="0">
+                  <c:v>액상화 LQ</c:v>
+                </c:pt>
+              </c:strCache>
+            </c:strRef>
+          </c:tx>
+          <c:spPr>
+            <a:solidFill>
+              <a:srgbClr val="1C7293"/>
+            </a:solidFill>
+            <a:ln w="38100" cap="flat">
+              <a:solidFill>
+                <a:srgbClr val="1C7293"/>
+              </a:solidFill>
+              <a:prstDash val="solid"/>
+              <a:round/>
+            </a:ln>
+            <a:effectLst/>
+          </c:spPr>
+          <c:invertIfNegative val="0"/>
+          <c:dLbls>
+            <c:numFmt formatCode="#,##0" sourceLinked="0"/>
+            <c:txPr>
+              <a:bodyPr/>
+              <a:lstStyle/>
+              <a:p>
+                <a:pPr>
+                  <a:defRPr b="0" i="0" strike="noStrike" sz="900" u="none">
+                    <a:solidFill>
+                      <a:srgbClr val="55636E"/>
+                    </a:solidFill>
+                    <a:latin typeface="Calibri"/>
+                  </a:defRPr>
+                </a:pPr>
+              </a:p>
+            </c:txPr>
+            <c:showLegendKey val="0"/>
+            <c:showVal val="0"/>
+            <c:showCatName val="0"/>
+            <c:showSerName val="0"/>
+            <c:showPercent val="0"/>
+            <c:showBubbleSize val="0"/>
+            <c:showLeaderLines val="0"/>
+          </c:dLbls>
+          <c:marker>
+            <c:symbol val="circle"/>
+            <c:size val="6"/>
+            <c:spPr>
+              <a:solidFill>
+                <a:srgbClr val="1C7293"/>
+              </a:solidFill>
+              <a:ln w="9525" cap="flat">
+                <a:solidFill>
+                  <a:srgbClr val="1C7293"/>
+                </a:solidFill>
+                <a:prstDash val="solid"/>
+                <a:round/>
+              </a:ln>
+              <a:effectLst/>
+            </c:spPr>
+          </c:marker>
+          <c:cat>
+            <c:multiLvlStrRef>
+              <c:f>Sheet1!$A$2:$A$9</c:f>
+              <c:multiLvlStrCache>
+                <c:ptCount val="8"/>
+                <c:lvl>
+                  <c:pt idx="0">
+                    <c:v>0.3</c:v>
+                  </c:pt>
+                  <c:pt idx="1">
+                    <c:v>0.4</c:v>
+                  </c:pt>
+                  <c:pt idx="2">
+                    <c:v>0.5</c:v>
+                  </c:pt>
+                  <c:pt idx="3">
+                    <c:v>0.6</c:v>
+                  </c:pt>
+                  <c:pt idx="4">
+                    <c:v>0.7</c:v>
+                  </c:pt>
+                  <c:pt idx="5">
+                    <c:v>0.8</c:v>
+                  </c:pt>
+                  <c:pt idx="6">
+                    <c:v>0.9</c:v>
+                  </c:pt>
+                  <c:pt idx="7">
+                    <c:v>1.0</c:v>
+                  </c:pt>
+                </c:lvl>
+              </c:multiLvlStrCache>
+            </c:multiLvlStrRef>
+          </c:cat>
+          <c:val>
+            <c:numRef>
+              <c:f>Sheet1!$C$2:$C$9</c:f>
+              <c:numCache>
+                <c:formatCode>General</c:formatCode>
+                <c:ptCount val="8"/>
+                <c:pt idx="0">
+                  <c:v>-0.2755</c:v>
+                </c:pt>
+                <c:pt idx="1">
+                  <c:v>-0.194</c:v>
+                </c:pt>
+                <c:pt idx="2">
+                  <c:v>-0.1042</c:v>
+                </c:pt>
+                <c:pt idx="3">
+                  <c:v>-0.0147</c:v>
+                </c:pt>
+                <c:pt idx="4">
+                  <c:v>0.0673</c:v>
+                </c:pt>
+                <c:pt idx="5">
+                  <c:v>0.1396</c:v>
+                </c:pt>
+                <c:pt idx="6">
+                  <c:v>0.2023</c:v>
+                </c:pt>
+                <c:pt idx="7">
+                  <c:v>0.2566</c:v>
+                </c:pt>
+              </c:numCache>
+            </c:numRef>
+          </c:val>
+          <c:smooth val="0"/>
+        </c:ser>
+        <c:dLbls>
+          <c:numFmt formatCode="#,##0" sourceLinked="0"/>
+          <c:txPr>
+            <a:bodyPr/>
+            <a:lstStyle/>
+            <a:p>
+              <a:pPr>
+                <a:defRPr b="0" i="0" strike="noStrike" sz="900" u="none">
+                  <a:solidFill>
+                    <a:srgbClr val="55636E"/>
+                  </a:solidFill>
+                  <a:latin typeface="Calibri"/>
+                </a:defRPr>
+              </a:pPr>
+            </a:p>
+          </c:txPr>
+          <c:showLegendKey val="0"/>
+          <c:showVal val="0"/>
+          <c:showCatName val="0"/>
+          <c:showSerName val="0"/>
+          <c:showPercent val="0"/>
+          <c:showBubbleSize val="0"/>
+          <c:showLeaderLines val="0"/>
+        </c:dLbls>
+        <c:marker val="1"/>
+        <c:axId val="2094734554"/>
+        <c:axId val="2094734552"/>
+        <c:axId val="2094734556"/>
+      </c:lineChart>
+      <c:catAx>
+        <c:axId val="2094734554"/>
+        <c:scaling>
+          <c:orientation val="minMax"/>
+        </c:scaling>
+        <c:delete val="0"/>
+        <c:axPos val="b"/>
+        <c:numFmt formatCode="General" sourceLinked="1"/>
+        <c:majorTickMark val="out"/>
+        <c:minorTickMark val="none"/>
+        <c:tickLblPos val="low"/>
+        <c:spPr>
+          <a:ln w="12700" cap="flat">
+            <a:noFill/>
+            <a:prstDash val="solid"/>
+            <a:round/>
+          </a:ln>
+        </c:spPr>
+        <c:txPr>
+          <a:bodyPr/>
+          <a:lstStyle/>
+          <a:p>
+            <a:pPr>
+              <a:defRPr sz="900" b="0" i="0" u="none" strike="noStrike">
+                <a:solidFill>
+                  <a:srgbClr val="55636E"/>
+                </a:solidFill>
+                <a:latin typeface="맑은 고딕"/>
+              </a:defRPr>
+            </a:pPr>
+            <a:endParaRPr lang="en-US"/>
+          </a:p>
+        </c:txPr>
+        <c:crossAx val="2094734552"/>
+        <c:crosses val="autoZero"/>
+        <c:auto val="1"/>
+        <c:lblAlgn val="ctr"/>
+        <c:noMultiLvlLbl val="1"/>
+      </c:catAx>
+      <c:valAx>
+        <c:axId val="2094734552"/>
+        <c:scaling>
+          <c:orientation val="minMax"/>
+          <c:max val="0.5"/>
+          <c:min val="-0.35"/>
+        </c:scaling>
+        <c:delete val="0"/>
+        <c:axPos val="l"/>
+        <c:majorGridlines>
+          <c:spPr>
+            <a:ln w="12700" cap="flat">
+              <a:solidFill>
+                <a:srgbClr val="E3E9EC"/>
+              </a:solidFill>
+              <a:prstDash val="solid"/>
+              <a:round/>
+            </a:ln>
+          </c:spPr>
+        </c:majorGridlines>
+        <c:numFmt formatCode="0.0" sourceLinked="0"/>
+        <c:majorTickMark val="out"/>
+        <c:minorTickMark val="none"/>
+        <c:tickLblPos val="nextTo"/>
+        <c:spPr>
+          <a:ln w="12700" cap="flat">
+            <a:noFill/>
+            <a:prstDash val="solid"/>
+            <a:round/>
+          </a:ln>
+        </c:spPr>
+        <c:txPr>
+          <a:bodyPr/>
+          <a:lstStyle/>
+          <a:p>
+            <a:pPr>
+              <a:defRPr sz="900" b="0" i="0" u="none" strike="noStrike">
+                <a:solidFill>
+                  <a:srgbClr val="8A9BA8"/>
+                </a:solidFill>
+                <a:latin typeface="Calibri"/>
+              </a:defRPr>
+            </a:pPr>
+            <a:endParaRPr lang="en-US"/>
+          </a:p>
+        </c:txPr>
+        <c:crossAx val="2094734554"/>
+        <c:crosses val="autoZero"/>
+        <c:crossBetween val="between"/>
+      </c:valAx>
+      <c:spPr>
+        <a:noFill/>
+        <a:ln>
+          <a:noFill/>
+        </a:ln>
+        <a:effectLst/>
+      </c:spPr>
+    </c:plotArea>
+    <c:legend>
+      <c:legendPos val="t"/>
+      <c:overlay val="0"/>
+      <c:txPr>
+        <a:bodyPr/>
+        <a:lstStyle/>
+        <a:p>
+          <a:pPr>
+            <a:defRPr sz="1100">
+              <a:solidFill>
+                <a:srgbClr val="55636E"/>
+              </a:solidFill>
+              <a:latin typeface="맑은 고딕"/>
+              <a:cs typeface="맑은 고딕"/>
+            </a:defRPr>
+          </a:pPr>
+          <a:endParaRPr lang="en-US"/>
+        </a:p>
+      </c:txPr>
+    </c:legend>
+    <c:plotVisOnly val="1"/>
+    <c:dispBlanksAs val="span"/>
+  </c:chart>
+  <c:spPr>
+    <a:noFill/>
+    <a:ln>
+      <a:noFill/>
+    </a:ln>
+    <a:effectLst/>
+  </c:spPr>
+  <c:externalData r:id="rId1">
+    <c:autoUpdate val="0"/>
+  </c:externalData>
+</c:chartSpace>
+</file>
+
+<file path=ppt/charts/chart9.xml><?xml version="1.0" encoding="utf-8"?>
+<c:chartSpace xmlns:c="http://schemas.openxmlformats.org/drawingml/2006/chart" xmlns:a="http://schemas.openxmlformats.org/drawingml/2006/main" xmlns:r="http://schemas.openxmlformats.org/officeDocument/2006/relationships">
+  <c:date1904 val="0"/>
+  <c:roundedCorners val="1"/>
+  <c:chart>
+    <c:autoTitleDeleted val="1"/>
+    <c:plotArea>
+      <c:layout/>
+      <c:lineChart>
+        <c:varyColors val="0"/>
+        <c:ser>
+          <c:idx val="0"/>
+          <c:order val="0"/>
+          <c:tx>
+            <c:strRef>
+              <c:f>Sheet1!$B$1</c:f>
+              <c:strCache>
+                <c:ptCount val="1"/>
+                <c:pt idx="0">
+                  <c:v>산사태 LS</c:v>
+                </c:pt>
+              </c:strCache>
+            </c:strRef>
+          </c:tx>
+          <c:spPr>
+            <a:solidFill>
+              <a:srgbClr val="B85042"/>
+            </a:solidFill>
+            <a:ln w="38100" cap="flat">
+              <a:solidFill>
+                <a:srgbClr val="B85042"/>
+              </a:solidFill>
+              <a:prstDash val="solid"/>
+              <a:round/>
+            </a:ln>
+            <a:effectLst/>
+          </c:spPr>
+          <c:invertIfNegative val="0"/>
+          <c:dLbls>
+            <c:numFmt formatCode="#,##0" sourceLinked="0"/>
+            <c:txPr>
+              <a:bodyPr/>
+              <a:lstStyle/>
+              <a:p>
+                <a:pPr>
+                  <a:defRPr b="0" i="0" strike="noStrike" sz="900" u="none">
+                    <a:solidFill>
+                      <a:srgbClr val="55636E"/>
+                    </a:solidFill>
+                    <a:latin typeface="Calibri"/>
+                  </a:defRPr>
+                </a:pPr>
+              </a:p>
+            </c:txPr>
+            <c:showLegendKey val="0"/>
+            <c:showVal val="0"/>
+            <c:showCatName val="0"/>
+            <c:showSerName val="0"/>
+            <c:showPercent val="0"/>
+            <c:showBubbleSize val="0"/>
+            <c:showLeaderLines val="0"/>
+          </c:dLbls>
+          <c:marker>
+            <c:symbol val="circle"/>
+            <c:size val="6"/>
+            <c:spPr>
+              <a:solidFill>
+                <a:srgbClr val="B85042"/>
+              </a:solidFill>
+              <a:ln w="9525" cap="flat">
+                <a:solidFill>
+                  <a:srgbClr val="B85042"/>
+                </a:solidFill>
+                <a:prstDash val="solid"/>
+                <a:round/>
+              </a:ln>
+              <a:effectLst/>
+            </c:spPr>
+          </c:marker>
+          <c:cat>
+            <c:multiLvlStrRef>
+              <c:f>Sheet1!$A$2:$A$9</c:f>
+              <c:multiLvlStrCache>
+                <c:ptCount val="8"/>
+                <c:lvl>
+                  <c:pt idx="0">
+                    <c:v>0.3</c:v>
+                  </c:pt>
+                  <c:pt idx="1">
+                    <c:v>0.4</c:v>
+                  </c:pt>
+                  <c:pt idx="2">
+                    <c:v>0.5</c:v>
+                  </c:pt>
+                  <c:pt idx="3">
+                    <c:v>0.6</c:v>
+                  </c:pt>
+                  <c:pt idx="4">
+                    <c:v>0.7</c:v>
+                  </c:pt>
+                  <c:pt idx="5">
+                    <c:v>0.8</c:v>
+                  </c:pt>
+                  <c:pt idx="6">
+                    <c:v>0.9</c:v>
+                  </c:pt>
+                  <c:pt idx="7">
+                    <c:v>1.0</c:v>
+                  </c:pt>
+                </c:lvl>
+              </c:multiLvlStrCache>
+            </c:multiLvlStrRef>
+          </c:cat>
+          <c:val>
+            <c:numRef>
+              <c:f>Sheet1!$B$2:$B$9</c:f>
+              <c:numCache>
+                <c:formatCode>General</c:formatCode>
+                <c:ptCount val="8"/>
+                <c:pt idx="0">
+                  <c:v>0.1912</c:v>
+                </c:pt>
+                <c:pt idx="1">
+                  <c:v>0.1656</c:v>
+                </c:pt>
+                <c:pt idx="2">
+                  <c:v>0.1448</c:v>
+                </c:pt>
+                <c:pt idx="3">
+                  <c:v>0.1336</c:v>
+                </c:pt>
+                <c:pt idx="4">
+                  <c:v>0.1457</c:v>
+                </c:pt>
+                <c:pt idx="5">
+                  <c:v>0.1931</c:v>
+                </c:pt>
+                <c:pt idx="6">
+                  <c:v>0.2735</c:v>
+                </c:pt>
+                <c:pt idx="7">
+                  <c:v>0.3684</c:v>
+                </c:pt>
+              </c:numCache>
+            </c:numRef>
+          </c:val>
+          <c:smooth val="0"/>
+        </c:ser>
+        <c:ser>
+          <c:idx val="1"/>
+          <c:order val="1"/>
+          <c:tx>
+            <c:strRef>
+              <c:f>Sheet1!$C$1</c:f>
+              <c:strCache>
+                <c:ptCount val="1"/>
+                <c:pt idx="0">
+                  <c:v>액상화 LQ</c:v>
+                </c:pt>
+              </c:strCache>
+            </c:strRef>
+          </c:tx>
+          <c:spPr>
+            <a:solidFill>
+              <a:srgbClr val="1C7293"/>
+            </a:solidFill>
+            <a:ln w="38100" cap="flat">
+              <a:solidFill>
+                <a:srgbClr val="1C7293"/>
+              </a:solidFill>
+              <a:prstDash val="solid"/>
+              <a:round/>
+            </a:ln>
+            <a:effectLst/>
+          </c:spPr>
+          <c:invertIfNegative val="0"/>
+          <c:dLbls>
+            <c:numFmt formatCode="#,##0" sourceLinked="0"/>
+            <c:txPr>
+              <a:bodyPr/>
+              <a:lstStyle/>
+              <a:p>
+                <a:pPr>
+                  <a:defRPr b="0" i="0" strike="noStrike" sz="900" u="none">
+                    <a:solidFill>
+                      <a:srgbClr val="55636E"/>
+                    </a:solidFill>
+                    <a:latin typeface="Calibri"/>
+                  </a:defRPr>
+                </a:pPr>
+              </a:p>
+            </c:txPr>
+            <c:showLegendKey val="0"/>
+            <c:showVal val="0"/>
+            <c:showCatName val="0"/>
+            <c:showSerName val="0"/>
+            <c:showPercent val="0"/>
+            <c:showBubbleSize val="0"/>
+            <c:showLeaderLines val="0"/>
+          </c:dLbls>
+          <c:marker>
+            <c:symbol val="circle"/>
+            <c:size val="6"/>
+            <c:spPr>
+              <a:solidFill>
+                <a:srgbClr val="1C7293"/>
+              </a:solidFill>
+              <a:ln w="9525" cap="flat">
+                <a:solidFill>
+                  <a:srgbClr val="1C7293"/>
+                </a:solidFill>
+                <a:prstDash val="solid"/>
+                <a:round/>
+              </a:ln>
+              <a:effectLst/>
+            </c:spPr>
+          </c:marker>
+          <c:cat>
+            <c:multiLvlStrRef>
+              <c:f>Sheet1!$A$2:$A$9</c:f>
+              <c:multiLvlStrCache>
+                <c:ptCount val="8"/>
+                <c:lvl>
+                  <c:pt idx="0">
+                    <c:v>0.3</c:v>
+                  </c:pt>
+                  <c:pt idx="1">
+                    <c:v>0.4</c:v>
+                  </c:pt>
+                  <c:pt idx="2">
+                    <c:v>0.5</c:v>
+                  </c:pt>
+                  <c:pt idx="3">
+                    <c:v>0.6</c:v>
+                  </c:pt>
+                  <c:pt idx="4">
+                    <c:v>0.7</c:v>
+                  </c:pt>
+                  <c:pt idx="5">
+                    <c:v>0.8</c:v>
+                  </c:pt>
+                  <c:pt idx="6">
+                    <c:v>0.9</c:v>
+                  </c:pt>
+                  <c:pt idx="7">
+                    <c:v>1.0</c:v>
+                  </c:pt>
+                </c:lvl>
+              </c:multiLvlStrCache>
+            </c:multiLvlStrRef>
+          </c:cat>
+          <c:val>
+            <c:numRef>
+              <c:f>Sheet1!$C$2:$C$9</c:f>
+              <c:numCache>
+                <c:formatCode>General</c:formatCode>
+                <c:ptCount val="8"/>
+                <c:pt idx="0">
+                  <c:v>0.2767</c:v>
+                </c:pt>
+                <c:pt idx="1">
+                  <c:v>0.2282</c:v>
+                </c:pt>
+                <c:pt idx="2">
+                  <c:v>0.1927</c:v>
+                </c:pt>
+                <c:pt idx="3">
+                  <c:v>0.1776</c:v>
+                </c:pt>
+                <c:pt idx="4">
+                  <c:v>0.1806</c:v>
+                </c:pt>
+                <c:pt idx="5">
+                  <c:v>0.1962</c:v>
+                </c:pt>
+                <c:pt idx="6">
+                  <c:v>0.2203</c:v>
+                </c:pt>
+                <c:pt idx="7">
+                  <c:v>0.2499</c:v>
+                </c:pt>
+              </c:numCache>
+            </c:numRef>
+          </c:val>
+          <c:smooth val="0"/>
+        </c:ser>
+        <c:dLbls>
+          <c:numFmt formatCode="#,##0" sourceLinked="0"/>
+          <c:txPr>
+            <a:bodyPr/>
+            <a:lstStyle/>
+            <a:p>
+              <a:pPr>
+                <a:defRPr b="0" i="0" strike="noStrike" sz="900" u="none">
+                  <a:solidFill>
+                    <a:srgbClr val="55636E"/>
+                  </a:solidFill>
+                  <a:latin typeface="Calibri"/>
+                </a:defRPr>
+              </a:pPr>
+            </a:p>
+          </c:txPr>
+          <c:showLegendKey val="0"/>
+          <c:showVal val="0"/>
+          <c:showCatName val="0"/>
+          <c:showSerName val="0"/>
+          <c:showPercent val="0"/>
+          <c:showBubbleSize val="0"/>
+          <c:showLeaderLines val="0"/>
+        </c:dLbls>
+        <c:marker val="1"/>
+        <c:axId val="2094734554"/>
+        <c:axId val="2094734552"/>
+        <c:axId val="2094734556"/>
+      </c:lineChart>
+      <c:catAx>
+        <c:axId val="2094734554"/>
+        <c:scaling>
+          <c:orientation val="minMax"/>
+        </c:scaling>
+        <c:delete val="0"/>
+        <c:axPos val="b"/>
+        <c:numFmt formatCode="General" sourceLinked="1"/>
+        <c:majorTickMark val="out"/>
+        <c:minorTickMark val="none"/>
+        <c:tickLblPos val="low"/>
+        <c:spPr>
+          <a:ln w="12700" cap="flat">
+            <a:noFill/>
+            <a:prstDash val="solid"/>
+            <a:round/>
+          </a:ln>
+        </c:spPr>
+        <c:txPr>
+          <a:bodyPr/>
+          <a:lstStyle/>
+          <a:p>
+            <a:pPr>
+              <a:defRPr sz="900" b="0" i="0" u="none" strike="noStrike">
+                <a:solidFill>
+                  <a:srgbClr val="55636E"/>
+                </a:solidFill>
+                <a:latin typeface="맑은 고딕"/>
+              </a:defRPr>
+            </a:pPr>
+            <a:endParaRPr lang="en-US"/>
+          </a:p>
+        </c:txPr>
+        <c:crossAx val="2094734552"/>
+        <c:crosses val="autoZero"/>
+        <c:auto val="1"/>
+        <c:lblAlgn val="ctr"/>
+        <c:noMultiLvlLbl val="1"/>
+      </c:catAx>
+      <c:valAx>
+        <c:axId val="2094734552"/>
+        <c:scaling>
+          <c:orientation val="minMax"/>
+          <c:max val="0.4"/>
+          <c:min val="0.1"/>
+        </c:scaling>
+        <c:delete val="0"/>
+        <c:axPos val="l"/>
+        <c:majorGridlines>
+          <c:spPr>
+            <a:ln w="12700" cap="flat">
+              <a:solidFill>
+                <a:srgbClr val="E3E9EC"/>
+              </a:solidFill>
+              <a:prstDash val="solid"/>
+              <a:round/>
+            </a:ln>
+          </c:spPr>
+        </c:majorGridlines>
+        <c:numFmt formatCode="0.0" sourceLinked="0"/>
+        <c:majorTickMark val="out"/>
+        <c:minorTickMark val="none"/>
+        <c:tickLblPos val="nextTo"/>
+        <c:spPr>
+          <a:ln w="12700" cap="flat">
+            <a:noFill/>
+            <a:prstDash val="solid"/>
+            <a:round/>
+          </a:ln>
+        </c:spPr>
+        <c:txPr>
+          <a:bodyPr/>
+          <a:lstStyle/>
+          <a:p>
+            <a:pPr>
+              <a:defRPr sz="900" b="0" i="0" u="none" strike="noStrike">
+                <a:solidFill>
+                  <a:srgbClr val="8A9BA8"/>
+                </a:solidFill>
+                <a:latin typeface="Calibri"/>
+              </a:defRPr>
+            </a:pPr>
+            <a:endParaRPr lang="en-US"/>
+          </a:p>
+        </c:txPr>
+        <c:crossAx val="2094734554"/>
+        <c:crosses val="autoZero"/>
+        <c:crossBetween val="between"/>
+      </c:valAx>
+      <c:spPr>
+        <a:noFill/>
+        <a:ln>
+          <a:noFill/>
+        </a:ln>
+        <a:effectLst/>
+      </c:spPr>
+    </c:plotArea>
+    <c:legend>
+      <c:legendPos val="t"/>
+      <c:overlay val="0"/>
+      <c:txPr>
+        <a:bodyPr/>
+        <a:lstStyle/>
+        <a:p>
+          <a:pPr>
+            <a:defRPr sz="1100">
+              <a:solidFill>
+                <a:srgbClr val="55636E"/>
+              </a:solidFill>
+              <a:latin typeface="맑은 고딕"/>
+              <a:cs typeface="맑은 고딕"/>
+            </a:defRPr>
+          </a:pPr>
+          <a:endParaRPr lang="en-US"/>
+        </a:p>
+      </c:txPr>
+    </c:legend>
+    <c:plotVisOnly val="1"/>
+    <c:dispBlanksAs val="span"/>
+  </c:chart>
+  <c:spPr>
+    <a:noFill/>
+    <a:ln>
+      <a:noFill/>
+    </a:ln>
+    <a:effectLst/>
+  </c:spPr>
+  <c:externalData r:id="rId1">
+    <c:autoUpdate val="0"/>
+  </c:externalData>
+</c:chartSpace>
+</file>
+
 <file path=ppt/notesMasters/notesMaster1.xml><?xml version="1.0" encoding="utf-8"?>
 <p:notesMaster xmlns:a="http://schemas.openxmlformats.org/drawingml/2006/main" xmlns:r="http://schemas.openxmlformats.org/officeDocument/2006/relationships" xmlns:p="http://schemas.openxmlformats.org/presentationml/2006/main">
   <p:cSld>
@@ -3669,6 +4567,182 @@
             <a:fld id="{F7021451-1387-4CA6-816F-3879F97B5CBC}" type="slidenum">
               <a:rPr lang="en-US"/>
               <a:t>15</a:t>
+            </a:fld>
+            <a:endParaRPr lang="en-US"/>
+          </a:p>
+        </p:txBody>
+      </p:sp>
+    </p:spTree>
+    <p:extLst>
+      <p:ext uri="{BB962C8B-B14F-4D97-AF65-F5344CB8AC3E}">
+        <p14:creationId xmlns:p14="http://schemas.microsoft.com/office/powerpoint/2010/main" val="1024086991"/>
+      </p:ext>
+    </p:extLst>
+  </p:cSld>
+  <p:clrMapOvr>
+    <a:masterClrMapping/>
+  </p:clrMapOvr>
+</p:notes>
+</file>
+
+<file path=ppt/notesSlides/notesSlide16.xml><?xml version="1.0" encoding="utf-8"?>
+<p:notes xmlns:a="http://schemas.openxmlformats.org/drawingml/2006/main" xmlns:r="http://schemas.openxmlformats.org/officeDocument/2006/relationships" xmlns:p="http://schemas.openxmlformats.org/presentationml/2006/main">
+  <p:cSld>
+    <p:spTree>
+      <p:nvGrpSpPr>
+        <p:cNvPr id="1" name=""/>
+        <p:cNvGrpSpPr/>
+        <p:nvPr/>
+      </p:nvGrpSpPr>
+      <p:grpSpPr>
+        <a:xfrm>
+          <a:off x="0" y="0"/>
+          <a:ext cx="0" cy="0"/>
+          <a:chOff x="0" y="0"/>
+          <a:chExt cx="0" cy="0"/>
+        </a:xfrm>
+      </p:grpSpPr>
+      <p:sp>
+        <p:nvSpPr>
+          <p:cNvPr id="2" name="Slide Image Placeholder 1"/>
+          <p:cNvSpPr>
+            <a:spLocks noGrp="1" noRot="1" noChangeAspect="1"/>
+          </p:cNvSpPr>
+          <p:nvPr>
+            <p:ph type="sldImg"/>
+          </p:nvPr>
+        </p:nvSpPr>
+        <p:spPr/>
+      </p:sp>
+      <p:sp>
+        <p:nvSpPr>
+          <p:cNvPr id="3" name="Notes Placeholder 2"/>
+          <p:cNvSpPr>
+            <a:spLocks noGrp="1"/>
+          </p:cNvSpPr>
+          <p:nvPr>
+            <p:ph type="body" idx="1"/>
+          </p:nvPr>
+        </p:nvSpPr>
+        <p:spPr/>
+        <p:txBody>
+          <a:bodyPr/>
+          <a:lstStyle/>
+          <a:p>
+            <a:r>
+              <a:rPr lang="en-US" dirty="0"/>
+              <a:t/>
+            </a:r>
+            <a:endParaRPr lang="en-US" dirty="0"/>
+          </a:p>
+        </p:txBody>
+      </p:sp>
+      <p:sp>
+        <p:nvSpPr>
+          <p:cNvPr id="4" name="Slide Number Placeholder 3"/>
+          <p:cNvSpPr>
+            <a:spLocks noGrp="1"/>
+          </p:cNvSpPr>
+          <p:nvPr>
+            <p:ph type="sldNum" sz="quarter" idx="10"/>
+          </p:nvPr>
+        </p:nvSpPr>
+        <p:spPr/>
+        <p:txBody>
+          <a:bodyPr/>
+          <a:lstStyle/>
+          <a:p>
+            <a:fld id="{F7021451-1387-4CA6-816F-3879F97B5CBC}" type="slidenum">
+              <a:rPr lang="en-US"/>
+              <a:t>16</a:t>
+            </a:fld>
+            <a:endParaRPr lang="en-US"/>
+          </a:p>
+        </p:txBody>
+      </p:sp>
+    </p:spTree>
+    <p:extLst>
+      <p:ext uri="{BB962C8B-B14F-4D97-AF65-F5344CB8AC3E}">
+        <p14:creationId xmlns:p14="http://schemas.microsoft.com/office/powerpoint/2010/main" val="1024086991"/>
+      </p:ext>
+    </p:extLst>
+  </p:cSld>
+  <p:clrMapOvr>
+    <a:masterClrMapping/>
+  </p:clrMapOvr>
+</p:notes>
+</file>
+
+<file path=ppt/notesSlides/notesSlide17.xml><?xml version="1.0" encoding="utf-8"?>
+<p:notes xmlns:a="http://schemas.openxmlformats.org/drawingml/2006/main" xmlns:r="http://schemas.openxmlformats.org/officeDocument/2006/relationships" xmlns:p="http://schemas.openxmlformats.org/presentationml/2006/main">
+  <p:cSld>
+    <p:spTree>
+      <p:nvGrpSpPr>
+        <p:cNvPr id="1" name=""/>
+        <p:cNvGrpSpPr/>
+        <p:nvPr/>
+      </p:nvGrpSpPr>
+      <p:grpSpPr>
+        <a:xfrm>
+          <a:off x="0" y="0"/>
+          <a:ext cx="0" cy="0"/>
+          <a:chOff x="0" y="0"/>
+          <a:chExt cx="0" cy="0"/>
+        </a:xfrm>
+      </p:grpSpPr>
+      <p:sp>
+        <p:nvSpPr>
+          <p:cNvPr id="2" name="Slide Image Placeholder 1"/>
+          <p:cNvSpPr>
+            <a:spLocks noGrp="1" noRot="1" noChangeAspect="1"/>
+          </p:cNvSpPr>
+          <p:nvPr>
+            <p:ph type="sldImg"/>
+          </p:nvPr>
+        </p:nvSpPr>
+        <p:spPr/>
+      </p:sp>
+      <p:sp>
+        <p:nvSpPr>
+          <p:cNvPr id="3" name="Notes Placeholder 2"/>
+          <p:cNvSpPr>
+            <a:spLocks noGrp="1"/>
+          </p:cNvSpPr>
+          <p:nvPr>
+            <p:ph type="body" idx="1"/>
+          </p:nvPr>
+        </p:nvSpPr>
+        <p:spPr/>
+        <p:txBody>
+          <a:bodyPr/>
+          <a:lstStyle/>
+          <a:p>
+            <a:r>
+              <a:rPr lang="en-US" dirty="0"/>
+              <a:t/>
+            </a:r>
+            <a:endParaRPr lang="en-US" dirty="0"/>
+          </a:p>
+        </p:txBody>
+      </p:sp>
+      <p:sp>
+        <p:nvSpPr>
+          <p:cNvPr id="4" name="Slide Number Placeholder 3"/>
+          <p:cNvSpPr>
+            <a:spLocks noGrp="1"/>
+          </p:cNvSpPr>
+          <p:nvPr>
+            <p:ph type="sldNum" sz="quarter" idx="10"/>
+          </p:nvPr>
+        </p:nvSpPr>
+        <p:spPr/>
+        <p:txBody>
+          <a:bodyPr/>
+          <a:lstStyle/>
+          <a:p>
+            <a:fld id="{F7021451-1387-4CA6-816F-3879F97B5CBC}" type="slidenum">
+              <a:rPr lang="en-US"/>
+              <a:t>17</a:t>
             </a:fld>
             <a:endParaRPr lang="en-US"/>
           </a:p>
@@ -21968,6 +23042,5053 @@
     <p:bg>
       <p:bgPr>
         <a:solidFill>
+          <a:srgbClr val="FFFFFF"/>
+        </a:solidFill>
+      </p:bgPr>
+    </p:bg>
+    <p:spTree>
+      <p:nvGrpSpPr>
+        <p:cNvPr id="1" name=""/>
+        <p:cNvGrpSpPr/>
+        <p:nvPr/>
+      </p:nvGrpSpPr>
+      <p:grpSpPr>
+        <a:xfrm>
+          <a:off x="0" y="0"/>
+          <a:ext cx="0" cy="0"/>
+          <a:chOff x="0" y="0"/>
+          <a:chExt cx="0" cy="0"/>
+        </a:xfrm>
+      </p:grpSpPr>
+      <p:sp>
+        <p:nvSpPr>
+          <p:cNvPr id="2" name="Text 0"/>
+          <p:cNvSpPr txBox="1"/>
+          <p:nvPr/>
+        </p:nvSpPr>
+        <p:spPr>
+          <a:xfrm>
+            <a:off x="566928" y="402336"/>
+            <a:ext cx="7772400" cy="237744"/>
+          </a:xfrm>
+          <a:prstGeom prst="rect">
+            <a:avLst/>
+          </a:prstGeom>
+          <a:noFill/>
+          <a:ln/>
+        </p:spPr>
+        <p:txBody>
+          <a:bodyPr wrap="square" lIns="0" tIns="0" rIns="0" bIns="0" rtlCol="0" anchor="ctr"/>
+          <a:lstStyle/>
+          <a:p>
+            <a:pPr indent="0" marL="0">
+              <a:buNone/>
+            </a:pPr>
+            <a:r>
+              <a:rPr lang="en-US" sz="1100" b="1" spc="200" kern="0" dirty="0">
+                <a:solidFill>
+                  <a:srgbClr val="8A9BA8"/>
+                </a:solidFill>
+                <a:latin typeface="Calibri" pitchFamily="34" charset="0"/>
+                <a:ea typeface="Calibri" pitchFamily="34" charset="-122"/>
+                <a:cs typeface="Calibri" pitchFamily="34" charset="-120"/>
+              </a:rPr>
+              <a:t>10</a:t>
+            </a:r>
+            <a:endParaRPr lang="en-US" sz="1100" dirty="0"/>
+          </a:p>
+        </p:txBody>
+      </p:sp>
+      <p:sp>
+        <p:nvSpPr>
+          <p:cNvPr id="3" name="Text 1"/>
+          <p:cNvSpPr txBox="1"/>
+          <p:nvPr/>
+        </p:nvSpPr>
+        <p:spPr>
+          <a:xfrm>
+            <a:off x="566928" y="694944"/>
+            <a:ext cx="11057839" cy="868680"/>
+          </a:xfrm>
+          <a:prstGeom prst="rect">
+            <a:avLst/>
+          </a:prstGeom>
+          <a:noFill/>
+          <a:ln/>
+        </p:spPr>
+        <p:txBody>
+          <a:bodyPr wrap="square" lIns="0" tIns="0" rIns="0" bIns="0" rtlCol="0" anchor="t"/>
+          <a:lstStyle/>
+          <a:p>
+            <a:pPr indent="0" marL="0">
+              <a:lnSpc>
+                <a:spcPts val="3500"/>
+              </a:lnSpc>
+              <a:buNone/>
+            </a:pPr>
+            <a:r>
+              <a:rPr lang="en-US" sz="2900" b="1" dirty="0">
+                <a:solidFill>
+                  <a:srgbClr val="1C2A33"/>
+                </a:solidFill>
+                <a:latin typeface="맑은 고딕" pitchFamily="34" charset="0"/>
+                <a:ea typeface="맑은 고딕" pitchFamily="34" charset="-122"/>
+                <a:cs typeface="맑은 고딕" pitchFamily="34" charset="-120"/>
+              </a:rPr>
+              <a:t>⑤ 면적 계수 c 를 훑었다 — 유도값 1은 틀렸다</a:t>
+            </a:r>
+            <a:endParaRPr lang="en-US" sz="2900" dirty="0"/>
+          </a:p>
+        </p:txBody>
+      </p:sp>
+      <p:sp>
+        <p:nvSpPr>
+          <p:cNvPr id="4" name="Text 2"/>
+          <p:cNvSpPr txBox="1"/>
+          <p:nvPr/>
+        </p:nvSpPr>
+        <p:spPr>
+          <a:xfrm>
+            <a:off x="566928" y="1627632"/>
+            <a:ext cx="11064240" cy="566928"/>
+          </a:xfrm>
+          <a:prstGeom prst="rect">
+            <a:avLst/>
+          </a:prstGeom>
+          <a:noFill/>
+          <a:ln/>
+        </p:spPr>
+        <p:txBody>
+          <a:bodyPr wrap="square" lIns="0" tIns="0" rIns="0" bIns="0" rtlCol="0" anchor="ctr"/>
+          <a:lstStyle/>
+          <a:p>
+            <a:pPr indent="0" marL="0">
+              <a:lnSpc>
+                <a:spcPts val="1700"/>
+              </a:lnSpc>
+              <a:buNone/>
+            </a:pPr>
+            <a:r>
+              <a:rPr lang="en-US" sz="1250" dirty="0">
+                <a:solidFill>
+                  <a:srgbClr val="55636E"/>
+                </a:solidFill>
+                <a:latin typeface="맑은 고딕" pitchFamily="34" charset="0"/>
+                <a:ea typeface="맑은 고딕" pitchFamily="34" charset="-122"/>
+                <a:cs typeface="맑은 고딕" pitchFamily="34" charset="-120"/>
+              </a:rPr>
+              <a:t>④에서 c = 1이 두 hazard 모두 확률을 크게 부풀리는 것이 드러났다(LS +0.436 / LQ +0.256). c를 0.5로 내리면 부호가 뒤집히니 그 사이 어딘가가 정답이다. 그래서 c를 0.3부터 1.0까지 직접 돌려 봤다 — a=1, b=0 고정이라 prior에서 학습하는 값이 하나도 없는, 순수하게 c만 다른 100번의 학습이다.</a:t>
+            </a:r>
+            <a:endParaRPr lang="en-US" sz="1250" dirty="0"/>
+          </a:p>
+        </p:txBody>
+      </p:sp>
+      <p:graphicFrame>
+        <p:nvGraphicFramePr>
+          <p:cNvPr id="5" name="Chart 0" descr=""/>
+          <p:cNvGraphicFramePr/>
+          <p:nvPr/>
+        </p:nvGraphicFramePr>
+        <p:xfrm>
+          <a:off x="566928" y="2304288"/>
+          <a:ext cx="5394960" cy="2743200"/>
+        </p:xfrm>
+        <a:graphic xmlns:a="http://schemas.openxmlformats.org/drawingml/2006/main">
+          <a:graphicData uri="http://schemas.openxmlformats.org/drawingml/2006/chart">
+            <c:chart xmlns:c="http://schemas.openxmlformats.org/drawingml/2006/chart" r:id="rId1"/>
+          </a:graphicData>
+        </a:graphic>
+      </p:graphicFrame>
+      <p:sp>
+        <p:nvSpPr>
+          <p:cNvPr id="6" name="Text 3"/>
+          <p:cNvSpPr txBox="1"/>
+          <p:nvPr/>
+        </p:nvSpPr>
+        <p:spPr>
+          <a:xfrm>
+            <a:off x="566928" y="5084064"/>
+            <a:ext cx="5394960" cy="256032"/>
+          </a:xfrm>
+          <a:prstGeom prst="rect">
+            <a:avLst/>
+          </a:prstGeom>
+          <a:noFill/>
+          <a:ln/>
+        </p:spPr>
+        <p:txBody>
+          <a:bodyPr wrap="square" lIns="0" tIns="0" rIns="0" bIns="0" rtlCol="0" anchor="ctr"/>
+          <a:lstStyle/>
+          <a:p>
+            <a:pPr algn="ctr" indent="0" marL="0">
+              <a:buNone/>
+            </a:pPr>
+            <a:r>
+              <a:rPr lang="en-US" sz="1050" dirty="0">
+                <a:solidFill>
+                  <a:srgbClr val="8A9BA8"/>
+                </a:solidFill>
+                <a:latin typeface="맑은 고딕" pitchFamily="34" charset="0"/>
+                <a:ea typeface="맑은 고딕" pitchFamily="34" charset="-122"/>
+                <a:cs typeface="맑은 고딕" pitchFamily="34" charset="-120"/>
+              </a:rPr>
+              <a:t>예측 편향 = 평균 예측확률 − 실제 양성률.  가로축 c.  0이 정답이다.</a:t>
+            </a:r>
+            <a:endParaRPr lang="en-US" sz="1050" dirty="0"/>
+          </a:p>
+        </p:txBody>
+      </p:sp>
+      <p:graphicFrame>
+        <p:nvGraphicFramePr>
+          <p:cNvPr id="7" name="Chart 1" descr=""/>
+          <p:cNvGraphicFramePr/>
+          <p:nvPr/>
+        </p:nvGraphicFramePr>
+        <p:xfrm>
+          <a:off x="6236208" y="2304288"/>
+          <a:ext cx="5394960" cy="2743200"/>
+        </p:xfrm>
+        <a:graphic xmlns:a="http://schemas.openxmlformats.org/drawingml/2006/main">
+          <a:graphicData uri="http://schemas.openxmlformats.org/drawingml/2006/chart">
+            <c:chart xmlns:c="http://schemas.openxmlformats.org/drawingml/2006/chart" r:id="rId2"/>
+          </a:graphicData>
+        </a:graphic>
+      </p:graphicFrame>
+      <p:sp>
+        <p:nvSpPr>
+          <p:cNvPr id="8" name="Text 4"/>
+          <p:cNvSpPr txBox="1"/>
+          <p:nvPr/>
+        </p:nvSpPr>
+        <p:spPr>
+          <a:xfrm>
+            <a:off x="6236208" y="5084064"/>
+            <a:ext cx="5394960" cy="256032"/>
+          </a:xfrm>
+          <a:prstGeom prst="rect">
+            <a:avLst/>
+          </a:prstGeom>
+          <a:noFill/>
+          <a:ln/>
+        </p:spPr>
+        <p:txBody>
+          <a:bodyPr wrap="square" lIns="0" tIns="0" rIns="0" bIns="0" rtlCol="0" anchor="ctr"/>
+          <a:lstStyle/>
+          <a:p>
+            <a:pPr algn="ctr" indent="0" marL="0">
+              <a:buNone/>
+            </a:pPr>
+            <a:r>
+              <a:rPr lang="en-US" sz="1050" dirty="0">
+                <a:solidFill>
+                  <a:srgbClr val="8A9BA8"/>
+                </a:solidFill>
+                <a:latin typeface="맑은 고딕" pitchFamily="34" charset="0"/>
+                <a:ea typeface="맑은 고딕" pitchFamily="34" charset="-122"/>
+                <a:cs typeface="맑은 고딕" pitchFamily="34" charset="-120"/>
+              </a:rPr>
+              <a:t>MSE (낮을수록 좋음).  기저확률은 LS 0.1881 / LQ 0.2494 — 이보다 낮아야 의미가 있다.</a:t>
+            </a:r>
+            <a:endParaRPr lang="en-US" sz="1050" dirty="0"/>
+          </a:p>
+        </p:txBody>
+      </p:sp>
+      <p:sp>
+        <p:nvSpPr>
+          <p:cNvPr id="9" name="Shape 5"/>
+          <p:cNvSpPr/>
+          <p:nvPr/>
+        </p:nvSpPr>
+        <p:spPr>
+          <a:xfrm>
+            <a:off x="566928" y="5394960"/>
+            <a:ext cx="5394960" cy="1188720"/>
+          </a:xfrm>
+          <a:prstGeom prst="roundRect">
+            <a:avLst>
+              <a:gd name="adj" fmla="val 4615"/>
+            </a:avLst>
+          </a:prstGeom>
+          <a:solidFill>
+            <a:srgbClr val="F1F5F7"/>
+          </a:solidFill>
+          <a:ln w="12700">
+            <a:solidFill>
+              <a:srgbClr val="F1F5F7"/>
+            </a:solidFill>
+            <a:prstDash val="solid"/>
+          </a:ln>
+        </p:spPr>
+      </p:sp>
+      <p:sp>
+        <p:nvSpPr>
+          <p:cNvPr id="10" name="Text 6"/>
+          <p:cNvSpPr txBox="1"/>
+          <p:nvPr/>
+        </p:nvSpPr>
+        <p:spPr>
+          <a:xfrm>
+            <a:off x="841248" y="5577840"/>
+            <a:ext cx="4846320" cy="310896"/>
+          </a:xfrm>
+          <a:prstGeom prst="rect">
+            <a:avLst/>
+          </a:prstGeom>
+          <a:noFill/>
+          <a:ln/>
+        </p:spPr>
+        <p:txBody>
+          <a:bodyPr wrap="square" lIns="0" tIns="0" rIns="0" bIns="0" rtlCol="0" anchor="ctr"/>
+          <a:lstStyle/>
+          <a:p>
+            <a:pPr indent="0" marL="0">
+              <a:buNone/>
+            </a:pPr>
+            <a:r>
+              <a:rPr lang="en-US" sz="1450" b="1" dirty="0">
+                <a:solidFill>
+                  <a:srgbClr val="1C2A33"/>
+                </a:solidFill>
+                <a:latin typeface="맑은 고딕" pitchFamily="34" charset="0"/>
+                <a:ea typeface="맑은 고딕" pitchFamily="34" charset="-122"/>
+                <a:cs typeface="맑은 고딕" pitchFamily="34" charset="-120"/>
+              </a:rPr>
+              <a:t>두 hazard의 c는 서로 간섭하지 않는다</a:t>
+            </a:r>
+            <a:endParaRPr lang="en-US" sz="1450" dirty="0"/>
+          </a:p>
+        </p:txBody>
+      </p:sp>
+      <p:sp>
+        <p:nvSpPr>
+          <p:cNvPr id="11" name="Text 7"/>
+          <p:cNvSpPr txBox="1"/>
+          <p:nvPr/>
+        </p:nvSpPr>
+        <p:spPr>
+          <a:xfrm>
+            <a:off x="841248" y="5925312"/>
+            <a:ext cx="4846320" cy="475488"/>
+          </a:xfrm>
+          <a:prstGeom prst="rect">
+            <a:avLst/>
+          </a:prstGeom>
+          <a:noFill/>
+          <a:ln/>
+        </p:spPr>
+        <p:txBody>
+          <a:bodyPr wrap="square" lIns="0" tIns="0" rIns="0" bIns="0" rtlCol="0" anchor="ctr"/>
+          <a:lstStyle/>
+          <a:p>
+            <a:pPr indent="0" marL="0">
+              <a:lnSpc>
+                <a:spcPts val="1700"/>
+              </a:lnSpc>
+              <a:buNone/>
+            </a:pPr>
+            <a:r>
+              <a:rPr lang="en-US" sz="1200" dirty="0">
+                <a:solidFill>
+                  <a:srgbClr val="55636E"/>
+                </a:solidFill>
+                <a:latin typeface="맑은 고딕" pitchFamily="34" charset="0"/>
+                <a:ea typeface="맑은 고딕" pitchFamily="34" charset="-122"/>
+                <a:cs typeface="맑은 고딕" pitchFamily="34" charset="-120"/>
+              </a:rPr>
+              <a:t>한쪽 c를 0.3~1.0으로 바꿔도 다른 쪽 편향은 0.003 안에서만 움직인다. 따로 골라도 된다.</a:t>
+            </a:r>
+            <a:endParaRPr lang="en-US" sz="1200" dirty="0"/>
+          </a:p>
+        </p:txBody>
+      </p:sp>
+      <p:sp>
+        <p:nvSpPr>
+          <p:cNvPr id="12" name="Shape 8"/>
+          <p:cNvSpPr/>
+          <p:nvPr/>
+        </p:nvSpPr>
+        <p:spPr>
+          <a:xfrm>
+            <a:off x="6236208" y="5394960"/>
+            <a:ext cx="5394960" cy="1188720"/>
+          </a:xfrm>
+          <a:prstGeom prst="roundRect">
+            <a:avLst>
+              <a:gd name="adj" fmla="val 4615"/>
+            </a:avLst>
+          </a:prstGeom>
+          <a:solidFill>
+            <a:srgbClr val="EAF4EE"/>
+          </a:solidFill>
+          <a:ln w="12700">
+            <a:solidFill>
+              <a:srgbClr val="EAF4EE"/>
+            </a:solidFill>
+            <a:prstDash val="solid"/>
+          </a:ln>
+        </p:spPr>
+      </p:sp>
+      <p:sp>
+        <p:nvSpPr>
+          <p:cNvPr id="13" name="Text 9"/>
+          <p:cNvSpPr txBox="1"/>
+          <p:nvPr/>
+        </p:nvSpPr>
+        <p:spPr>
+          <a:xfrm>
+            <a:off x="6510528" y="5577840"/>
+            <a:ext cx="4846320" cy="310896"/>
+          </a:xfrm>
+          <a:prstGeom prst="rect">
+            <a:avLst/>
+          </a:prstGeom>
+          <a:noFill/>
+          <a:ln/>
+        </p:spPr>
+        <p:txBody>
+          <a:bodyPr wrap="square" lIns="0" tIns="0" rIns="0" bIns="0" rtlCol="0" anchor="ctr"/>
+          <a:lstStyle/>
+          <a:p>
+            <a:pPr indent="0" marL="0">
+              <a:buNone/>
+            </a:pPr>
+            <a:r>
+              <a:rPr lang="en-US" sz="1450" b="1" dirty="0">
+                <a:solidFill>
+                  <a:srgbClr val="2C7A5A"/>
+                </a:solidFill>
+                <a:latin typeface="맑은 고딕" pitchFamily="34" charset="0"/>
+                <a:ea typeface="맑은 고딕" pitchFamily="34" charset="-122"/>
+                <a:cs typeface="맑은 고딕" pitchFamily="34" charset="-120"/>
+              </a:rPr>
+              <a:t>편향이 0을 지나는 곳은 둘 다 0.62 근처</a:t>
+            </a:r>
+            <a:endParaRPr lang="en-US" sz="1450" dirty="0"/>
+          </a:p>
+        </p:txBody>
+      </p:sp>
+      <p:sp>
+        <p:nvSpPr>
+          <p:cNvPr id="14" name="Text 10"/>
+          <p:cNvSpPr txBox="1"/>
+          <p:nvPr/>
+        </p:nvSpPr>
+        <p:spPr>
+          <a:xfrm>
+            <a:off x="6510528" y="5925312"/>
+            <a:ext cx="4846320" cy="475488"/>
+          </a:xfrm>
+          <a:prstGeom prst="rect">
+            <a:avLst/>
+          </a:prstGeom>
+          <a:noFill/>
+          <a:ln/>
+        </p:spPr>
+        <p:txBody>
+          <a:bodyPr wrap="square" lIns="0" tIns="0" rIns="0" bIns="0" rtlCol="0" anchor="ctr"/>
+          <a:lstStyle/>
+          <a:p>
+            <a:pPr indent="0" marL="0">
+              <a:lnSpc>
+                <a:spcPts val="1700"/>
+              </a:lnSpc>
+              <a:buNone/>
+            </a:pPr>
+            <a:r>
+              <a:rPr lang="en-US" sz="1200" dirty="0">
+                <a:solidFill>
+                  <a:srgbClr val="55636E"/>
+                </a:solidFill>
+                <a:latin typeface="맑은 고딕" pitchFamily="34" charset="0"/>
+                <a:ea typeface="맑은 고딕" pitchFamily="34" charset="-122"/>
+                <a:cs typeface="맑은 고딕" pitchFamily="34" charset="-120"/>
+              </a:rPr>
+              <a:t>c_LS ≈ 0.624, c_LQ ≈ 0.616 (0.58~0.68을 0.02 간격으로 다시 확인). MSE 최소도 같은 자리다.</a:t>
+            </a:r>
+            <a:endParaRPr lang="en-US" sz="1200" dirty="0"/>
+          </a:p>
+        </p:txBody>
+      </p:sp>
+    </p:spTree>
+  </p:cSld>
+  <p:clrMapOvr>
+    <a:masterClrMapping/>
+  </p:clrMapOvr>
+</p:sld>
+</file>
+
+<file path=ppt/slides/slide16.xml><?xml version="1.0" encoding="utf-8"?>
+<p:sld xmlns:a="http://schemas.openxmlformats.org/drawingml/2006/main" xmlns:r="http://schemas.openxmlformats.org/officeDocument/2006/relationships" xmlns:p="http://schemas.openxmlformats.org/presentationml/2006/main">
+  <p:cSld name="Slide 16">
+    <p:bg>
+      <p:bgPr>
+        <a:solidFill>
+          <a:srgbClr val="FFFFFF"/>
+        </a:solidFill>
+      </p:bgPr>
+    </p:bg>
+    <p:spTree>
+      <p:nvGrpSpPr>
+        <p:cNvPr id="1" name=""/>
+        <p:cNvGrpSpPr/>
+        <p:nvPr/>
+      </p:nvGrpSpPr>
+      <p:grpSpPr>
+        <a:xfrm>
+          <a:off x="0" y="0"/>
+          <a:ext cx="0" cy="0"/>
+          <a:chOff x="0" y="0"/>
+          <a:chExt cx="0" cy="0"/>
+        </a:xfrm>
+      </p:grpSpPr>
+      <p:sp>
+        <p:nvSpPr>
+          <p:cNvPr id="2" name="Text 0"/>
+          <p:cNvSpPr txBox="1"/>
+          <p:nvPr/>
+        </p:nvSpPr>
+        <p:spPr>
+          <a:xfrm>
+            <a:off x="566928" y="402336"/>
+            <a:ext cx="7772400" cy="237744"/>
+          </a:xfrm>
+          <a:prstGeom prst="rect">
+            <a:avLst/>
+          </a:prstGeom>
+          <a:noFill/>
+          <a:ln/>
+        </p:spPr>
+        <p:txBody>
+          <a:bodyPr wrap="square" lIns="0" tIns="0" rIns="0" bIns="0" rtlCol="0" anchor="ctr"/>
+          <a:lstStyle/>
+          <a:p>
+            <a:pPr indent="0" marL="0">
+              <a:buNone/>
+            </a:pPr>
+            <a:r>
+              <a:rPr lang="en-US" sz="1100" b="1" spc="200" kern="0" dirty="0">
+                <a:solidFill>
+                  <a:srgbClr val="8A9BA8"/>
+                </a:solidFill>
+                <a:latin typeface="Calibri" pitchFamily="34" charset="0"/>
+                <a:ea typeface="Calibri" pitchFamily="34" charset="-122"/>
+                <a:cs typeface="Calibri" pitchFamily="34" charset="-120"/>
+              </a:rPr>
+              <a:t>10</a:t>
+            </a:r>
+            <a:endParaRPr lang="en-US" sz="1100" dirty="0"/>
+          </a:p>
+        </p:txBody>
+      </p:sp>
+      <p:sp>
+        <p:nvSpPr>
+          <p:cNvPr id="3" name="Text 1"/>
+          <p:cNvSpPr txBox="1"/>
+          <p:nvPr/>
+        </p:nvSpPr>
+        <p:spPr>
+          <a:xfrm>
+            <a:off x="566928" y="694944"/>
+            <a:ext cx="11057839" cy="868680"/>
+          </a:xfrm>
+          <a:prstGeom prst="rect">
+            <a:avLst/>
+          </a:prstGeom>
+          <a:noFill/>
+          <a:ln/>
+        </p:spPr>
+        <p:txBody>
+          <a:bodyPr wrap="square" lIns="0" tIns="0" rIns="0" bIns="0" rtlCol="0" anchor="t"/>
+          <a:lstStyle/>
+          <a:p>
+            <a:pPr indent="0" marL="0">
+              <a:lnSpc>
+                <a:spcPts val="3500"/>
+              </a:lnSpc>
+              <a:buNone/>
+            </a:pPr>
+            <a:r>
+              <a:rPr lang="en-US" sz="2900" b="1" dirty="0">
+                <a:solidFill>
+                  <a:srgbClr val="1C2A33"/>
+                </a:solidFill>
+                <a:latin typeface="맑은 고딕" pitchFamily="34" charset="0"/>
+                <a:ea typeface="맑은 고딕" pitchFamily="34" charset="-122"/>
+                <a:cs typeface="맑은 고딕" pitchFamily="34" charset="-120"/>
+              </a:rPr>
+              <a:t>⑤ 결과 — 두 hazard를 동시에 만족하는 조건이 처음 나왔다</a:t>
+            </a:r>
+            <a:endParaRPr lang="en-US" sz="2900" dirty="0"/>
+          </a:p>
+        </p:txBody>
+      </p:sp>
+      <p:sp>
+        <p:nvSpPr>
+          <p:cNvPr id="4" name="Text 2"/>
+          <p:cNvSpPr txBox="1"/>
+          <p:nvPr/>
+        </p:nvSpPr>
+        <p:spPr>
+          <a:xfrm>
+            <a:off x="566928" y="1627632"/>
+            <a:ext cx="11064240" cy="292608"/>
+          </a:xfrm>
+          <a:prstGeom prst="rect">
+            <a:avLst/>
+          </a:prstGeom>
+          <a:noFill/>
+          <a:ln/>
+        </p:spPr>
+        <p:txBody>
+          <a:bodyPr wrap="square" lIns="0" tIns="0" rIns="0" bIns="0" rtlCol="0" anchor="ctr"/>
+          <a:lstStyle/>
+          <a:p>
+            <a:pPr indent="0" marL="0">
+              <a:buNone/>
+            </a:pPr>
+            <a:r>
+              <a:rPr lang="en-US" sz="1250" dirty="0">
+                <a:solidFill>
+                  <a:srgbClr val="55636E"/>
+                </a:solidFill>
+                <a:latin typeface="맑은 고딕" pitchFamily="34" charset="0"/>
+                <a:ea typeface="맑은 고딕" pitchFamily="34" charset="-122"/>
+                <a:cs typeface="맑은 고딕" pitchFamily="34" charset="-120"/>
+              </a:rPr>
+              <a:t>c_LS = c_LQ = 0.62 로 묶은 것을 조건 K라 부른다. 기존 15개 조건과 나란히 놓으면 이렇다.</a:t>
+            </a:r>
+            <a:endParaRPr lang="en-US" sz="1250" dirty="0"/>
+          </a:p>
+        </p:txBody>
+      </p:sp>
+      <p:graphicFrame>
+        <p:nvGraphicFramePr>
+          <p:cNvPr id="17" name="Table 0"/>
+          <p:cNvGraphicFramePr>
+            <a:graphicFrameLocks noGrp="1"/>
+          </p:cNvGraphicFramePr>
+          <p:nvPr>
+            <p:extLst>
+              <p:ext uri="{D42A27DB-BD31-4B8C-83A1-F6EECF244321}">
+                <p14:modId xmlns:p14="http://schemas.microsoft.com/office/powerpoint/2010/main" val="1579011935"/>
+              </p:ext>
+            </p:extLst>
+          </p:nvPr>
+        </p:nvGraphicFramePr>
+        <p:xfrm>
+          <a:off x="566928" y="2057400"/>
+          <a:ext cx="11064240" cy="914400"/>
+        </p:xfrm>
+        <a:graphic>
+          <a:graphicData uri="http://schemas.openxmlformats.org/drawingml/2006/table">
+            <a:tbl>
+              <a:tblPr/>
+              <a:tblGrid>
+                <a:gridCol w="384048"/>
+                <a:gridCol w="1234440"/>
+                <a:gridCol w="603504"/>
+                <a:gridCol w="960120"/>
+                <a:gridCol w="1024128"/>
+                <a:gridCol w="960120"/>
+                <a:gridCol w="960120"/>
+                <a:gridCol w="1024128"/>
+                <a:gridCol w="960120"/>
+                <a:gridCol w="2953512"/>
+              </a:tblGrid>
+              <a:tr h="329184">
+                <a:tc>
+                  <a:txBody>
+                    <a:bodyPr/>
+                    <a:lstStyle/>
+                    <a:p>
+                      <a:pPr algn="l" indent="0" marL="0">
+                        <a:buNone/>
+                      </a:pPr>
+                      <a:endParaRPr lang="en-US" sz="1050" dirty="0">
+                        <a:latin typeface="맑은 고딕" charset="0"/>
+                        <a:ea typeface="맑은 고딕" charset="0"/>
+                        <a:cs typeface="맑은 고딕" charset="0"/>
+                      </a:endParaRPr>
+                    </a:p>
+                  </a:txBody>
+                  <a:tcPr marL="91440" marR="91440" marT="45720" marB="45720" anchor="ctr">
+                    <a:lnL w="12700" cap="flat" cmpd="sng" algn="ctr">
+                      <a:solidFill>
+                        <a:srgbClr val="E3E9EC"/>
+                      </a:solidFill>
+                      <a:prstDash val="solid"/>
+                      <a:round/>
+                      <a:headEnd type="none" w="med" len="med"/>
+                      <a:tailEnd type="none" w="med" len="med"/>
+                    </a:lnL>
+                    <a:lnR w="12700" cap="flat" cmpd="sng" algn="ctr">
+                      <a:solidFill>
+                        <a:srgbClr val="E3E9EC"/>
+                      </a:solidFill>
+                      <a:prstDash val="solid"/>
+                      <a:round/>
+                      <a:headEnd type="none" w="med" len="med"/>
+                      <a:tailEnd type="none" w="med" len="med"/>
+                    </a:lnR>
+                    <a:lnT w="12700" cap="flat" cmpd="sng" algn="ctr">
+                      <a:solidFill>
+                        <a:srgbClr val="E3E9EC"/>
+                      </a:solidFill>
+                      <a:prstDash val="solid"/>
+                      <a:round/>
+                      <a:headEnd type="none" w="med" len="med"/>
+                      <a:tailEnd type="none" w="med" len="med"/>
+                    </a:lnT>
+                    <a:lnB w="12700" cap="flat" cmpd="sng" algn="ctr">
+                      <a:solidFill>
+                        <a:srgbClr val="E3E9EC"/>
+                      </a:solidFill>
+                      <a:prstDash val="solid"/>
+                      <a:round/>
+                      <a:headEnd type="none" w="med" len="med"/>
+                      <a:tailEnd type="none" w="med" len="med"/>
+                    </a:lnB>
+                    <a:solidFill>
+                      <a:srgbClr val="F1F5F7"/>
+                    </a:solidFill>
+                  </a:tcPr>
+                </a:tc>
+                <a:tc>
+                  <a:txBody>
+                    <a:bodyPr/>
+                    <a:lstStyle/>
+                    <a:p>
+                      <a:pPr algn="l" indent="0" marL="0">
+                        <a:buNone/>
+                      </a:pPr>
+                      <a:r>
+                        <a:rPr lang="en-US" sz="1050" b="1" dirty="0">
+                          <a:solidFill>
+                            <a:srgbClr val="1C2A33"/>
+                          </a:solidFill>
+                          <a:latin typeface="맑은 고딕" pitchFamily="34" charset="0"/>
+                          <a:ea typeface="맑은 고딕" pitchFamily="34" charset="-122"/>
+                          <a:cs typeface="맑은 고딕" pitchFamily="34" charset="-120"/>
+                        </a:rPr>
+                        <a:t>조건</a:t>
+                      </a:r>
+                      <a:endParaRPr lang="en-US" sz="1050" dirty="0">
+                        <a:latin typeface="맑은 고딕" charset="0"/>
+                        <a:ea typeface="맑은 고딕" charset="0"/>
+                        <a:cs typeface="맑은 고딕" charset="0"/>
+                      </a:endParaRPr>
+                    </a:p>
+                  </a:txBody>
+                  <a:tcPr marL="91440" marR="91440" marT="45720" marB="45720" anchor="ctr">
+                    <a:lnL w="12700" cap="flat" cmpd="sng" algn="ctr">
+                      <a:solidFill>
+                        <a:srgbClr val="E3E9EC"/>
+                      </a:solidFill>
+                      <a:prstDash val="solid"/>
+                      <a:round/>
+                      <a:headEnd type="none" w="med" len="med"/>
+                      <a:tailEnd type="none" w="med" len="med"/>
+                    </a:lnL>
+                    <a:lnR w="12700" cap="flat" cmpd="sng" algn="ctr">
+                      <a:solidFill>
+                        <a:srgbClr val="E3E9EC"/>
+                      </a:solidFill>
+                      <a:prstDash val="solid"/>
+                      <a:round/>
+                      <a:headEnd type="none" w="med" len="med"/>
+                      <a:tailEnd type="none" w="med" len="med"/>
+                    </a:lnR>
+                    <a:lnT w="12700" cap="flat" cmpd="sng" algn="ctr">
+                      <a:solidFill>
+                        <a:srgbClr val="E3E9EC"/>
+                      </a:solidFill>
+                      <a:prstDash val="solid"/>
+                      <a:round/>
+                      <a:headEnd type="none" w="med" len="med"/>
+                      <a:tailEnd type="none" w="med" len="med"/>
+                    </a:lnT>
+                    <a:lnB w="12700" cap="flat" cmpd="sng" algn="ctr">
+                      <a:solidFill>
+                        <a:srgbClr val="E3E9EC"/>
+                      </a:solidFill>
+                      <a:prstDash val="solid"/>
+                      <a:round/>
+                      <a:headEnd type="none" w="med" len="med"/>
+                      <a:tailEnd type="none" w="med" len="med"/>
+                    </a:lnB>
+                    <a:solidFill>
+                      <a:srgbClr val="F1F5F7"/>
+                    </a:solidFill>
+                  </a:tcPr>
+                </a:tc>
+                <a:tc>
+                  <a:txBody>
+                    <a:bodyPr/>
+                    <a:lstStyle/>
+                    <a:p>
+                      <a:pPr algn="r" indent="0" marL="0">
+                        <a:buNone/>
+                      </a:pPr>
+                      <a:r>
+                        <a:rPr lang="en-US" sz="1050" b="1" dirty="0">
+                          <a:solidFill>
+                            <a:srgbClr val="1C2A33"/>
+                          </a:solidFill>
+                          <a:latin typeface="맑은 고딕" pitchFamily="34" charset="0"/>
+                          <a:ea typeface="맑은 고딕" pitchFamily="34" charset="-122"/>
+                          <a:cs typeface="맑은 고딕" pitchFamily="34" charset="-120"/>
+                        </a:rPr>
+                        <a:t>학습</a:t>
+                      </a:r>
+                      <a:endParaRPr lang="en-US" sz="1050" dirty="0">
+                        <a:latin typeface="맑은 고딕" charset="0"/>
+                        <a:ea typeface="맑은 고딕" charset="0"/>
+                        <a:cs typeface="맑은 고딕" charset="0"/>
+                      </a:endParaRPr>
+                    </a:p>
+                  </a:txBody>
+                  <a:tcPr marL="91440" marR="91440" marT="45720" marB="45720" anchor="ctr">
+                    <a:lnL w="12700" cap="flat" cmpd="sng" algn="ctr">
+                      <a:solidFill>
+                        <a:srgbClr val="E3E9EC"/>
+                      </a:solidFill>
+                      <a:prstDash val="solid"/>
+                      <a:round/>
+                      <a:headEnd type="none" w="med" len="med"/>
+                      <a:tailEnd type="none" w="med" len="med"/>
+                    </a:lnL>
+                    <a:lnR w="12700" cap="flat" cmpd="sng" algn="ctr">
+                      <a:solidFill>
+                        <a:srgbClr val="E3E9EC"/>
+                      </a:solidFill>
+                      <a:prstDash val="solid"/>
+                      <a:round/>
+                      <a:headEnd type="none" w="med" len="med"/>
+                      <a:tailEnd type="none" w="med" len="med"/>
+                    </a:lnR>
+                    <a:lnT w="12700" cap="flat" cmpd="sng" algn="ctr">
+                      <a:solidFill>
+                        <a:srgbClr val="E3E9EC"/>
+                      </a:solidFill>
+                      <a:prstDash val="solid"/>
+                      <a:round/>
+                      <a:headEnd type="none" w="med" len="med"/>
+                      <a:tailEnd type="none" w="med" len="med"/>
+                    </a:lnT>
+                    <a:lnB w="12700" cap="flat" cmpd="sng" algn="ctr">
+                      <a:solidFill>
+                        <a:srgbClr val="E3E9EC"/>
+                      </a:solidFill>
+                      <a:prstDash val="solid"/>
+                      <a:round/>
+                      <a:headEnd type="none" w="med" len="med"/>
+                      <a:tailEnd type="none" w="med" len="med"/>
+                    </a:lnB>
+                    <a:solidFill>
+                      <a:srgbClr val="F1F5F7"/>
+                    </a:solidFill>
+                  </a:tcPr>
+                </a:tc>
+                <a:tc>
+                  <a:txBody>
+                    <a:bodyPr/>
+                    <a:lstStyle/>
+                    <a:p>
+                      <a:pPr algn="r" indent="0" marL="0">
+                        <a:buNone/>
+                      </a:pPr>
+                      <a:r>
+                        <a:rPr lang="en-US" sz="1050" b="1" dirty="0">
+                          <a:solidFill>
+                            <a:srgbClr val="1C2A33"/>
+                          </a:solidFill>
+                          <a:latin typeface="맑은 고딕" pitchFamily="34" charset="0"/>
+                          <a:ea typeface="맑은 고딕" pitchFamily="34" charset="-122"/>
+                          <a:cs typeface="맑은 고딕" pitchFamily="34" charset="-120"/>
+                        </a:rPr>
+                        <a:t>LS AUC</a:t>
+                      </a:r>
+                      <a:endParaRPr lang="en-US" sz="1050" dirty="0">
+                        <a:latin typeface="맑은 고딕" charset="0"/>
+                        <a:ea typeface="맑은 고딕" charset="0"/>
+                        <a:cs typeface="맑은 고딕" charset="0"/>
+                      </a:endParaRPr>
+                    </a:p>
+                  </a:txBody>
+                  <a:tcPr marL="91440" marR="91440" marT="45720" marB="45720" anchor="ctr">
+                    <a:lnL w="12700" cap="flat" cmpd="sng" algn="ctr">
+                      <a:solidFill>
+                        <a:srgbClr val="E3E9EC"/>
+                      </a:solidFill>
+                      <a:prstDash val="solid"/>
+                      <a:round/>
+                      <a:headEnd type="none" w="med" len="med"/>
+                      <a:tailEnd type="none" w="med" len="med"/>
+                    </a:lnL>
+                    <a:lnR w="12700" cap="flat" cmpd="sng" algn="ctr">
+                      <a:solidFill>
+                        <a:srgbClr val="E3E9EC"/>
+                      </a:solidFill>
+                      <a:prstDash val="solid"/>
+                      <a:round/>
+                      <a:headEnd type="none" w="med" len="med"/>
+                      <a:tailEnd type="none" w="med" len="med"/>
+                    </a:lnR>
+                    <a:lnT w="12700" cap="flat" cmpd="sng" algn="ctr">
+                      <a:solidFill>
+                        <a:srgbClr val="E3E9EC"/>
+                      </a:solidFill>
+                      <a:prstDash val="solid"/>
+                      <a:round/>
+                      <a:headEnd type="none" w="med" len="med"/>
+                      <a:tailEnd type="none" w="med" len="med"/>
+                    </a:lnT>
+                    <a:lnB w="12700" cap="flat" cmpd="sng" algn="ctr">
+                      <a:solidFill>
+                        <a:srgbClr val="E3E9EC"/>
+                      </a:solidFill>
+                      <a:prstDash val="solid"/>
+                      <a:round/>
+                      <a:headEnd type="none" w="med" len="med"/>
+                      <a:tailEnd type="none" w="med" len="med"/>
+                    </a:lnB>
+                    <a:solidFill>
+                      <a:srgbClr val="F1F5F7"/>
+                    </a:solidFill>
+                  </a:tcPr>
+                </a:tc>
+                <a:tc>
+                  <a:txBody>
+                    <a:bodyPr/>
+                    <a:lstStyle/>
+                    <a:p>
+                      <a:pPr algn="r" indent="0" marL="0">
+                        <a:buNone/>
+                      </a:pPr>
+                      <a:r>
+                        <a:rPr lang="en-US" sz="1050" b="1" dirty="0">
+                          <a:solidFill>
+                            <a:srgbClr val="1C2A33"/>
+                          </a:solidFill>
+                          <a:latin typeface="맑은 고딕" pitchFamily="34" charset="0"/>
+                          <a:ea typeface="맑은 고딕" pitchFamily="34" charset="-122"/>
+                          <a:cs typeface="맑은 고딕" pitchFamily="34" charset="-120"/>
+                        </a:rPr>
+                        <a:t>LS MSE</a:t>
+                      </a:r>
+                      <a:endParaRPr lang="en-US" sz="1050" dirty="0">
+                        <a:latin typeface="맑은 고딕" charset="0"/>
+                        <a:ea typeface="맑은 고딕" charset="0"/>
+                        <a:cs typeface="맑은 고딕" charset="0"/>
+                      </a:endParaRPr>
+                    </a:p>
+                  </a:txBody>
+                  <a:tcPr marL="91440" marR="91440" marT="45720" marB="45720" anchor="ctr">
+                    <a:lnL w="12700" cap="flat" cmpd="sng" algn="ctr">
+                      <a:solidFill>
+                        <a:srgbClr val="E3E9EC"/>
+                      </a:solidFill>
+                      <a:prstDash val="solid"/>
+                      <a:round/>
+                      <a:headEnd type="none" w="med" len="med"/>
+                      <a:tailEnd type="none" w="med" len="med"/>
+                    </a:lnL>
+                    <a:lnR w="12700" cap="flat" cmpd="sng" algn="ctr">
+                      <a:solidFill>
+                        <a:srgbClr val="E3E9EC"/>
+                      </a:solidFill>
+                      <a:prstDash val="solid"/>
+                      <a:round/>
+                      <a:headEnd type="none" w="med" len="med"/>
+                      <a:tailEnd type="none" w="med" len="med"/>
+                    </a:lnR>
+                    <a:lnT w="12700" cap="flat" cmpd="sng" algn="ctr">
+                      <a:solidFill>
+                        <a:srgbClr val="E3E9EC"/>
+                      </a:solidFill>
+                      <a:prstDash val="solid"/>
+                      <a:round/>
+                      <a:headEnd type="none" w="med" len="med"/>
+                      <a:tailEnd type="none" w="med" len="med"/>
+                    </a:lnT>
+                    <a:lnB w="12700" cap="flat" cmpd="sng" algn="ctr">
+                      <a:solidFill>
+                        <a:srgbClr val="E3E9EC"/>
+                      </a:solidFill>
+                      <a:prstDash val="solid"/>
+                      <a:round/>
+                      <a:headEnd type="none" w="med" len="med"/>
+                      <a:tailEnd type="none" w="med" len="med"/>
+                    </a:lnB>
+                    <a:solidFill>
+                      <a:srgbClr val="F1F5F7"/>
+                    </a:solidFill>
+                  </a:tcPr>
+                </a:tc>
+                <a:tc>
+                  <a:txBody>
+                    <a:bodyPr/>
+                    <a:lstStyle/>
+                    <a:p>
+                      <a:pPr algn="r" indent="0" marL="0">
+                        <a:buNone/>
+                      </a:pPr>
+                      <a:r>
+                        <a:rPr lang="en-US" sz="1050" b="1" dirty="0">
+                          <a:solidFill>
+                            <a:srgbClr val="1C2A33"/>
+                          </a:solidFill>
+                          <a:latin typeface="맑은 고딕" pitchFamily="34" charset="0"/>
+                          <a:ea typeface="맑은 고딕" pitchFamily="34" charset="-122"/>
+                          <a:cs typeface="맑은 고딕" pitchFamily="34" charset="-120"/>
+                        </a:rPr>
+                        <a:t>LS 편향</a:t>
+                      </a:r>
+                      <a:endParaRPr lang="en-US" sz="1050" dirty="0">
+                        <a:latin typeface="맑은 고딕" charset="0"/>
+                        <a:ea typeface="맑은 고딕" charset="0"/>
+                        <a:cs typeface="맑은 고딕" charset="0"/>
+                      </a:endParaRPr>
+                    </a:p>
+                  </a:txBody>
+                  <a:tcPr marL="91440" marR="91440" marT="45720" marB="45720" anchor="ctr">
+                    <a:lnL w="12700" cap="flat" cmpd="sng" algn="ctr">
+                      <a:solidFill>
+                        <a:srgbClr val="E3E9EC"/>
+                      </a:solidFill>
+                      <a:prstDash val="solid"/>
+                      <a:round/>
+                      <a:headEnd type="none" w="med" len="med"/>
+                      <a:tailEnd type="none" w="med" len="med"/>
+                    </a:lnL>
+                    <a:lnR w="12700" cap="flat" cmpd="sng" algn="ctr">
+                      <a:solidFill>
+                        <a:srgbClr val="E3E9EC"/>
+                      </a:solidFill>
+                      <a:prstDash val="solid"/>
+                      <a:round/>
+                      <a:headEnd type="none" w="med" len="med"/>
+                      <a:tailEnd type="none" w="med" len="med"/>
+                    </a:lnR>
+                    <a:lnT w="12700" cap="flat" cmpd="sng" algn="ctr">
+                      <a:solidFill>
+                        <a:srgbClr val="E3E9EC"/>
+                      </a:solidFill>
+                      <a:prstDash val="solid"/>
+                      <a:round/>
+                      <a:headEnd type="none" w="med" len="med"/>
+                      <a:tailEnd type="none" w="med" len="med"/>
+                    </a:lnT>
+                    <a:lnB w="12700" cap="flat" cmpd="sng" algn="ctr">
+                      <a:solidFill>
+                        <a:srgbClr val="E3E9EC"/>
+                      </a:solidFill>
+                      <a:prstDash val="solid"/>
+                      <a:round/>
+                      <a:headEnd type="none" w="med" len="med"/>
+                      <a:tailEnd type="none" w="med" len="med"/>
+                    </a:lnB>
+                    <a:solidFill>
+                      <a:srgbClr val="F1F5F7"/>
+                    </a:solidFill>
+                  </a:tcPr>
+                </a:tc>
+                <a:tc>
+                  <a:txBody>
+                    <a:bodyPr/>
+                    <a:lstStyle/>
+                    <a:p>
+                      <a:pPr algn="r" indent="0" marL="0">
+                        <a:buNone/>
+                      </a:pPr>
+                      <a:r>
+                        <a:rPr lang="en-US" sz="1050" b="1" dirty="0">
+                          <a:solidFill>
+                            <a:srgbClr val="1C2A33"/>
+                          </a:solidFill>
+                          <a:latin typeface="맑은 고딕" pitchFamily="34" charset="0"/>
+                          <a:ea typeface="맑은 고딕" pitchFamily="34" charset="-122"/>
+                          <a:cs typeface="맑은 고딕" pitchFamily="34" charset="-120"/>
+                        </a:rPr>
+                        <a:t>LQ AUC</a:t>
+                      </a:r>
+                      <a:endParaRPr lang="en-US" sz="1050" dirty="0">
+                        <a:latin typeface="맑은 고딕" charset="0"/>
+                        <a:ea typeface="맑은 고딕" charset="0"/>
+                        <a:cs typeface="맑은 고딕" charset="0"/>
+                      </a:endParaRPr>
+                    </a:p>
+                  </a:txBody>
+                  <a:tcPr marL="91440" marR="91440" marT="45720" marB="45720" anchor="ctr">
+                    <a:lnL w="12700" cap="flat" cmpd="sng" algn="ctr">
+                      <a:solidFill>
+                        <a:srgbClr val="E3E9EC"/>
+                      </a:solidFill>
+                      <a:prstDash val="solid"/>
+                      <a:round/>
+                      <a:headEnd type="none" w="med" len="med"/>
+                      <a:tailEnd type="none" w="med" len="med"/>
+                    </a:lnL>
+                    <a:lnR w="12700" cap="flat" cmpd="sng" algn="ctr">
+                      <a:solidFill>
+                        <a:srgbClr val="E3E9EC"/>
+                      </a:solidFill>
+                      <a:prstDash val="solid"/>
+                      <a:round/>
+                      <a:headEnd type="none" w="med" len="med"/>
+                      <a:tailEnd type="none" w="med" len="med"/>
+                    </a:lnR>
+                    <a:lnT w="12700" cap="flat" cmpd="sng" algn="ctr">
+                      <a:solidFill>
+                        <a:srgbClr val="E3E9EC"/>
+                      </a:solidFill>
+                      <a:prstDash val="solid"/>
+                      <a:round/>
+                      <a:headEnd type="none" w="med" len="med"/>
+                      <a:tailEnd type="none" w="med" len="med"/>
+                    </a:lnT>
+                    <a:lnB w="12700" cap="flat" cmpd="sng" algn="ctr">
+                      <a:solidFill>
+                        <a:srgbClr val="E3E9EC"/>
+                      </a:solidFill>
+                      <a:prstDash val="solid"/>
+                      <a:round/>
+                      <a:headEnd type="none" w="med" len="med"/>
+                      <a:tailEnd type="none" w="med" len="med"/>
+                    </a:lnB>
+                    <a:solidFill>
+                      <a:srgbClr val="F1F5F7"/>
+                    </a:solidFill>
+                  </a:tcPr>
+                </a:tc>
+                <a:tc>
+                  <a:txBody>
+                    <a:bodyPr/>
+                    <a:lstStyle/>
+                    <a:p>
+                      <a:pPr algn="r" indent="0" marL="0">
+                        <a:buNone/>
+                      </a:pPr>
+                      <a:r>
+                        <a:rPr lang="en-US" sz="1050" b="1" dirty="0">
+                          <a:solidFill>
+                            <a:srgbClr val="1C2A33"/>
+                          </a:solidFill>
+                          <a:latin typeface="맑은 고딕" pitchFamily="34" charset="0"/>
+                          <a:ea typeface="맑은 고딕" pitchFamily="34" charset="-122"/>
+                          <a:cs typeface="맑은 고딕" pitchFamily="34" charset="-120"/>
+                        </a:rPr>
+                        <a:t>LQ MSE</a:t>
+                      </a:r>
+                      <a:endParaRPr lang="en-US" sz="1050" dirty="0">
+                        <a:latin typeface="맑은 고딕" charset="0"/>
+                        <a:ea typeface="맑은 고딕" charset="0"/>
+                        <a:cs typeface="맑은 고딕" charset="0"/>
+                      </a:endParaRPr>
+                    </a:p>
+                  </a:txBody>
+                  <a:tcPr marL="91440" marR="91440" marT="45720" marB="45720" anchor="ctr">
+                    <a:lnL w="12700" cap="flat" cmpd="sng" algn="ctr">
+                      <a:solidFill>
+                        <a:srgbClr val="E3E9EC"/>
+                      </a:solidFill>
+                      <a:prstDash val="solid"/>
+                      <a:round/>
+                      <a:headEnd type="none" w="med" len="med"/>
+                      <a:tailEnd type="none" w="med" len="med"/>
+                    </a:lnL>
+                    <a:lnR w="12700" cap="flat" cmpd="sng" algn="ctr">
+                      <a:solidFill>
+                        <a:srgbClr val="E3E9EC"/>
+                      </a:solidFill>
+                      <a:prstDash val="solid"/>
+                      <a:round/>
+                      <a:headEnd type="none" w="med" len="med"/>
+                      <a:tailEnd type="none" w="med" len="med"/>
+                    </a:lnR>
+                    <a:lnT w="12700" cap="flat" cmpd="sng" algn="ctr">
+                      <a:solidFill>
+                        <a:srgbClr val="E3E9EC"/>
+                      </a:solidFill>
+                      <a:prstDash val="solid"/>
+                      <a:round/>
+                      <a:headEnd type="none" w="med" len="med"/>
+                      <a:tailEnd type="none" w="med" len="med"/>
+                    </a:lnT>
+                    <a:lnB w="12700" cap="flat" cmpd="sng" algn="ctr">
+                      <a:solidFill>
+                        <a:srgbClr val="E3E9EC"/>
+                      </a:solidFill>
+                      <a:prstDash val="solid"/>
+                      <a:round/>
+                      <a:headEnd type="none" w="med" len="med"/>
+                      <a:tailEnd type="none" w="med" len="med"/>
+                    </a:lnB>
+                    <a:solidFill>
+                      <a:srgbClr val="F1F5F7"/>
+                    </a:solidFill>
+                  </a:tcPr>
+                </a:tc>
+                <a:tc>
+                  <a:txBody>
+                    <a:bodyPr/>
+                    <a:lstStyle/>
+                    <a:p>
+                      <a:pPr algn="r" indent="0" marL="0">
+                        <a:buNone/>
+                      </a:pPr>
+                      <a:r>
+                        <a:rPr lang="en-US" sz="1050" b="1" dirty="0">
+                          <a:solidFill>
+                            <a:srgbClr val="1C2A33"/>
+                          </a:solidFill>
+                          <a:latin typeface="맑은 고딕" pitchFamily="34" charset="0"/>
+                          <a:ea typeface="맑은 고딕" pitchFamily="34" charset="-122"/>
+                          <a:cs typeface="맑은 고딕" pitchFamily="34" charset="-120"/>
+                        </a:rPr>
+                        <a:t>LQ 편향</a:t>
+                      </a:r>
+                      <a:endParaRPr lang="en-US" sz="1050" dirty="0">
+                        <a:latin typeface="맑은 고딕" charset="0"/>
+                        <a:ea typeface="맑은 고딕" charset="0"/>
+                        <a:cs typeface="맑은 고딕" charset="0"/>
+                      </a:endParaRPr>
+                    </a:p>
+                  </a:txBody>
+                  <a:tcPr marL="91440" marR="91440" marT="45720" marB="45720" anchor="ctr">
+                    <a:lnL w="12700" cap="flat" cmpd="sng" algn="ctr">
+                      <a:solidFill>
+                        <a:srgbClr val="E3E9EC"/>
+                      </a:solidFill>
+                      <a:prstDash val="solid"/>
+                      <a:round/>
+                      <a:headEnd type="none" w="med" len="med"/>
+                      <a:tailEnd type="none" w="med" len="med"/>
+                    </a:lnL>
+                    <a:lnR w="12700" cap="flat" cmpd="sng" algn="ctr">
+                      <a:solidFill>
+                        <a:srgbClr val="E3E9EC"/>
+                      </a:solidFill>
+                      <a:prstDash val="solid"/>
+                      <a:round/>
+                      <a:headEnd type="none" w="med" len="med"/>
+                      <a:tailEnd type="none" w="med" len="med"/>
+                    </a:lnR>
+                    <a:lnT w="12700" cap="flat" cmpd="sng" algn="ctr">
+                      <a:solidFill>
+                        <a:srgbClr val="E3E9EC"/>
+                      </a:solidFill>
+                      <a:prstDash val="solid"/>
+                      <a:round/>
+                      <a:headEnd type="none" w="med" len="med"/>
+                      <a:tailEnd type="none" w="med" len="med"/>
+                    </a:lnT>
+                    <a:lnB w="12700" cap="flat" cmpd="sng" algn="ctr">
+                      <a:solidFill>
+                        <a:srgbClr val="E3E9EC"/>
+                      </a:solidFill>
+                      <a:prstDash val="solid"/>
+                      <a:round/>
+                      <a:headEnd type="none" w="med" len="med"/>
+                      <a:tailEnd type="none" w="med" len="med"/>
+                    </a:lnB>
+                    <a:solidFill>
+                      <a:srgbClr val="F1F5F7"/>
+                    </a:solidFill>
+                  </a:tcPr>
+                </a:tc>
+                <a:tc>
+                  <a:txBody>
+                    <a:bodyPr/>
+                    <a:lstStyle/>
+                    <a:p>
+                      <a:pPr algn="l" indent="0" marL="0">
+                        <a:buNone/>
+                      </a:pPr>
+                      <a:r>
+                        <a:rPr lang="en-US" sz="1050" b="1" dirty="0">
+                          <a:solidFill>
+                            <a:srgbClr val="1C2A33"/>
+                          </a:solidFill>
+                          <a:latin typeface="맑은 고딕" pitchFamily="34" charset="0"/>
+                          <a:ea typeface="맑은 고딕" pitchFamily="34" charset="-122"/>
+                          <a:cs typeface="맑은 고딕" pitchFamily="34" charset="-120"/>
+                        </a:rPr>
+                        <a:t>한 줄 평</a:t>
+                      </a:r>
+                      <a:endParaRPr lang="en-US" sz="1050" dirty="0">
+                        <a:latin typeface="맑은 고딕" charset="0"/>
+                        <a:ea typeface="맑은 고딕" charset="0"/>
+                        <a:cs typeface="맑은 고딕" charset="0"/>
+                      </a:endParaRPr>
+                    </a:p>
+                  </a:txBody>
+                  <a:tcPr marL="91440" marR="91440" marT="45720" marB="45720" anchor="ctr">
+                    <a:lnL w="12700" cap="flat" cmpd="sng" algn="ctr">
+                      <a:solidFill>
+                        <a:srgbClr val="E3E9EC"/>
+                      </a:solidFill>
+                      <a:prstDash val="solid"/>
+                      <a:round/>
+                      <a:headEnd type="none" w="med" len="med"/>
+                      <a:tailEnd type="none" w="med" len="med"/>
+                    </a:lnL>
+                    <a:lnR w="12700" cap="flat" cmpd="sng" algn="ctr">
+                      <a:solidFill>
+                        <a:srgbClr val="E3E9EC"/>
+                      </a:solidFill>
+                      <a:prstDash val="solid"/>
+                      <a:round/>
+                      <a:headEnd type="none" w="med" len="med"/>
+                      <a:tailEnd type="none" w="med" len="med"/>
+                    </a:lnR>
+                    <a:lnT w="12700" cap="flat" cmpd="sng" algn="ctr">
+                      <a:solidFill>
+                        <a:srgbClr val="E3E9EC"/>
+                      </a:solidFill>
+                      <a:prstDash val="solid"/>
+                      <a:round/>
+                      <a:headEnd type="none" w="med" len="med"/>
+                      <a:tailEnd type="none" w="med" len="med"/>
+                    </a:lnT>
+                    <a:lnB w="12700" cap="flat" cmpd="sng" algn="ctr">
+                      <a:solidFill>
+                        <a:srgbClr val="E3E9EC"/>
+                      </a:solidFill>
+                      <a:prstDash val="solid"/>
+                      <a:round/>
+                      <a:headEnd type="none" w="med" len="med"/>
+                      <a:tailEnd type="none" w="med" len="med"/>
+                    </a:lnB>
+                    <a:solidFill>
+                      <a:srgbClr val="F1F5F7"/>
+                    </a:solidFill>
+                  </a:tcPr>
+                </a:tc>
+              </a:tr>
+              <a:tr h="329184">
+                <a:tc>
+                  <a:txBody>
+                    <a:bodyPr/>
+                    <a:lstStyle/>
+                    <a:p>
+                      <a:pPr algn="l" indent="0" marL="0">
+                        <a:buNone/>
+                      </a:pPr>
+                      <a:r>
+                        <a:rPr lang="en-US" sz="1050" b="1" dirty="0">
+                          <a:solidFill>
+                            <a:srgbClr val="1C2A33"/>
+                          </a:solidFill>
+                          <a:latin typeface="맑은 고딕" pitchFamily="34" charset="0"/>
+                          <a:ea typeface="맑은 고딕" pitchFamily="34" charset="-122"/>
+                          <a:cs typeface="맑은 고딕" pitchFamily="34" charset="-120"/>
+                        </a:rPr>
+                        <a:t>K</a:t>
+                      </a:r>
+                      <a:endParaRPr lang="en-US" sz="1050" dirty="0">
+                        <a:latin typeface="맑은 고딕" charset="0"/>
+                        <a:ea typeface="맑은 고딕" charset="0"/>
+                        <a:cs typeface="맑은 고딕" charset="0"/>
+                      </a:endParaRPr>
+                    </a:p>
+                  </a:txBody>
+                  <a:tcPr marL="91440" marR="91440" marT="45720" marB="45720" anchor="ctr">
+                    <a:lnL w="12700" cap="flat" cmpd="sng" algn="ctr">
+                      <a:solidFill>
+                        <a:srgbClr val="E3E9EC"/>
+                      </a:solidFill>
+                      <a:prstDash val="solid"/>
+                      <a:round/>
+                      <a:headEnd type="none" w="med" len="med"/>
+                      <a:tailEnd type="none" w="med" len="med"/>
+                    </a:lnL>
+                    <a:lnR w="12700" cap="flat" cmpd="sng" algn="ctr">
+                      <a:solidFill>
+                        <a:srgbClr val="E3E9EC"/>
+                      </a:solidFill>
+                      <a:prstDash val="solid"/>
+                      <a:round/>
+                      <a:headEnd type="none" w="med" len="med"/>
+                      <a:tailEnd type="none" w="med" len="med"/>
+                    </a:lnR>
+                    <a:lnT w="12700" cap="flat" cmpd="sng" algn="ctr">
+                      <a:solidFill>
+                        <a:srgbClr val="E3E9EC"/>
+                      </a:solidFill>
+                      <a:prstDash val="solid"/>
+                      <a:round/>
+                      <a:headEnd type="none" w="med" len="med"/>
+                      <a:tailEnd type="none" w="med" len="med"/>
+                    </a:lnT>
+                    <a:lnB w="12700" cap="flat" cmpd="sng" algn="ctr">
+                      <a:solidFill>
+                        <a:srgbClr val="E3E9EC"/>
+                      </a:solidFill>
+                      <a:prstDash val="solid"/>
+                      <a:round/>
+                      <a:headEnd type="none" w="med" len="med"/>
+                      <a:tailEnd type="none" w="med" len="med"/>
+                    </a:lnB>
+                    <a:solidFill>
+                      <a:srgbClr val="EAF4EE"/>
+                    </a:solidFill>
+                  </a:tcPr>
+                </a:tc>
+                <a:tc>
+                  <a:txBody>
+                    <a:bodyPr/>
+                    <a:lstStyle/>
+                    <a:p>
+                      <a:pPr algn="l" indent="0" marL="0">
+                        <a:buNone/>
+                      </a:pPr>
+                      <a:r>
+                        <a:rPr lang="en-US" sz="1050" b="1" dirty="0">
+                          <a:solidFill>
+                            <a:srgbClr val="1C2A33"/>
+                          </a:solidFill>
+                          <a:latin typeface="맑은 고딕" pitchFamily="34" charset="0"/>
+                          <a:ea typeface="맑은 고딕" pitchFamily="34" charset="-122"/>
+                          <a:cs typeface="맑은 고딕" pitchFamily="34" charset="-120"/>
+                        </a:rPr>
+                        <a:t>c = 0.62</a:t>
+                      </a:r>
+                      <a:endParaRPr lang="en-US" sz="1050" dirty="0">
+                        <a:latin typeface="맑은 고딕" charset="0"/>
+                        <a:ea typeface="맑은 고딕" charset="0"/>
+                        <a:cs typeface="맑은 고딕" charset="0"/>
+                      </a:endParaRPr>
+                    </a:p>
+                  </a:txBody>
+                  <a:tcPr marL="91440" marR="91440" marT="45720" marB="45720" anchor="ctr">
+                    <a:lnL w="12700" cap="flat" cmpd="sng" algn="ctr">
+                      <a:solidFill>
+                        <a:srgbClr val="E3E9EC"/>
+                      </a:solidFill>
+                      <a:prstDash val="solid"/>
+                      <a:round/>
+                      <a:headEnd type="none" w="med" len="med"/>
+                      <a:tailEnd type="none" w="med" len="med"/>
+                    </a:lnL>
+                    <a:lnR w="12700" cap="flat" cmpd="sng" algn="ctr">
+                      <a:solidFill>
+                        <a:srgbClr val="E3E9EC"/>
+                      </a:solidFill>
+                      <a:prstDash val="solid"/>
+                      <a:round/>
+                      <a:headEnd type="none" w="med" len="med"/>
+                      <a:tailEnd type="none" w="med" len="med"/>
+                    </a:lnR>
+                    <a:lnT w="12700" cap="flat" cmpd="sng" algn="ctr">
+                      <a:solidFill>
+                        <a:srgbClr val="E3E9EC"/>
+                      </a:solidFill>
+                      <a:prstDash val="solid"/>
+                      <a:round/>
+                      <a:headEnd type="none" w="med" len="med"/>
+                      <a:tailEnd type="none" w="med" len="med"/>
+                    </a:lnT>
+                    <a:lnB w="12700" cap="flat" cmpd="sng" algn="ctr">
+                      <a:solidFill>
+                        <a:srgbClr val="E3E9EC"/>
+                      </a:solidFill>
+                      <a:prstDash val="solid"/>
+                      <a:round/>
+                      <a:headEnd type="none" w="med" len="med"/>
+                      <a:tailEnd type="none" w="med" len="med"/>
+                    </a:lnB>
+                    <a:solidFill>
+                      <a:srgbClr val="EAF4EE"/>
+                    </a:solidFill>
+                  </a:tcPr>
+                </a:tc>
+                <a:tc>
+                  <a:txBody>
+                    <a:bodyPr/>
+                    <a:lstStyle/>
+                    <a:p>
+                      <a:pPr algn="r" indent="0" marL="0">
+                        <a:buNone/>
+                      </a:pPr>
+                      <a:r>
+                        <a:rPr lang="en-US" sz="1050" b="1" dirty="0">
+                          <a:solidFill>
+                            <a:srgbClr val="1C2A33"/>
+                          </a:solidFill>
+                          <a:latin typeface="맑은 고딕" pitchFamily="34" charset="0"/>
+                          <a:ea typeface="맑은 고딕" pitchFamily="34" charset="-122"/>
+                          <a:cs typeface="맑은 고딕" pitchFamily="34" charset="-120"/>
+                        </a:rPr>
+                        <a:t>0</a:t>
+                      </a:r>
+                      <a:endParaRPr lang="en-US" sz="1050" dirty="0">
+                        <a:latin typeface="맑은 고딕" charset="0"/>
+                        <a:ea typeface="맑은 고딕" charset="0"/>
+                        <a:cs typeface="맑은 고딕" charset="0"/>
+                      </a:endParaRPr>
+                    </a:p>
+                  </a:txBody>
+                  <a:tcPr marL="91440" marR="91440" marT="45720" marB="45720" anchor="ctr">
+                    <a:lnL w="12700" cap="flat" cmpd="sng" algn="ctr">
+                      <a:solidFill>
+                        <a:srgbClr val="E3E9EC"/>
+                      </a:solidFill>
+                      <a:prstDash val="solid"/>
+                      <a:round/>
+                      <a:headEnd type="none" w="med" len="med"/>
+                      <a:tailEnd type="none" w="med" len="med"/>
+                    </a:lnL>
+                    <a:lnR w="12700" cap="flat" cmpd="sng" algn="ctr">
+                      <a:solidFill>
+                        <a:srgbClr val="E3E9EC"/>
+                      </a:solidFill>
+                      <a:prstDash val="solid"/>
+                      <a:round/>
+                      <a:headEnd type="none" w="med" len="med"/>
+                      <a:tailEnd type="none" w="med" len="med"/>
+                    </a:lnR>
+                    <a:lnT w="12700" cap="flat" cmpd="sng" algn="ctr">
+                      <a:solidFill>
+                        <a:srgbClr val="E3E9EC"/>
+                      </a:solidFill>
+                      <a:prstDash val="solid"/>
+                      <a:round/>
+                      <a:headEnd type="none" w="med" len="med"/>
+                      <a:tailEnd type="none" w="med" len="med"/>
+                    </a:lnT>
+                    <a:lnB w="12700" cap="flat" cmpd="sng" algn="ctr">
+                      <a:solidFill>
+                        <a:srgbClr val="E3E9EC"/>
+                      </a:solidFill>
+                      <a:prstDash val="solid"/>
+                      <a:round/>
+                      <a:headEnd type="none" w="med" len="med"/>
+                      <a:tailEnd type="none" w="med" len="med"/>
+                    </a:lnB>
+                    <a:solidFill>
+                      <a:srgbClr val="EAF4EE"/>
+                    </a:solidFill>
+                  </a:tcPr>
+                </a:tc>
+                <a:tc>
+                  <a:txBody>
+                    <a:bodyPr/>
+                    <a:lstStyle/>
+                    <a:p>
+                      <a:pPr algn="r" indent="0" marL="0">
+                        <a:buNone/>
+                      </a:pPr>
+                      <a:r>
+                        <a:rPr lang="en-US" sz="1050" b="1" dirty="0">
+                          <a:solidFill>
+                            <a:srgbClr val="1C2A33"/>
+                          </a:solidFill>
+                          <a:latin typeface="Calibri" pitchFamily="34" charset="0"/>
+                          <a:ea typeface="Calibri" pitchFamily="34" charset="-122"/>
+                          <a:cs typeface="Calibri" pitchFamily="34" charset="-120"/>
+                        </a:rPr>
+                        <a:t>0.8352</a:t>
+                      </a:r>
+                      <a:endParaRPr lang="en-US" sz="1050" dirty="0">
+                        <a:latin typeface="Calibri" charset="0"/>
+                        <a:ea typeface="Calibri" charset="0"/>
+                        <a:cs typeface="Calibri" charset="0"/>
+                      </a:endParaRPr>
+                    </a:p>
+                  </a:txBody>
+                  <a:tcPr marL="91440" marR="91440" marT="45720" marB="45720" anchor="ctr">
+                    <a:lnL w="12700" cap="flat" cmpd="sng" algn="ctr">
+                      <a:solidFill>
+                        <a:srgbClr val="E3E9EC"/>
+                      </a:solidFill>
+                      <a:prstDash val="solid"/>
+                      <a:round/>
+                      <a:headEnd type="none" w="med" len="med"/>
+                      <a:tailEnd type="none" w="med" len="med"/>
+                    </a:lnL>
+                    <a:lnR w="12700" cap="flat" cmpd="sng" algn="ctr">
+                      <a:solidFill>
+                        <a:srgbClr val="E3E9EC"/>
+                      </a:solidFill>
+                      <a:prstDash val="solid"/>
+                      <a:round/>
+                      <a:headEnd type="none" w="med" len="med"/>
+                      <a:tailEnd type="none" w="med" len="med"/>
+                    </a:lnR>
+                    <a:lnT w="12700" cap="flat" cmpd="sng" algn="ctr">
+                      <a:solidFill>
+                        <a:srgbClr val="E3E9EC"/>
+                      </a:solidFill>
+                      <a:prstDash val="solid"/>
+                      <a:round/>
+                      <a:headEnd type="none" w="med" len="med"/>
+                      <a:tailEnd type="none" w="med" len="med"/>
+                    </a:lnT>
+                    <a:lnB w="12700" cap="flat" cmpd="sng" algn="ctr">
+                      <a:solidFill>
+                        <a:srgbClr val="E3E9EC"/>
+                      </a:solidFill>
+                      <a:prstDash val="solid"/>
+                      <a:round/>
+                      <a:headEnd type="none" w="med" len="med"/>
+                      <a:tailEnd type="none" w="med" len="med"/>
+                    </a:lnB>
+                    <a:solidFill>
+                      <a:srgbClr val="EAF4EE"/>
+                    </a:solidFill>
+                  </a:tcPr>
+                </a:tc>
+                <a:tc>
+                  <a:txBody>
+                    <a:bodyPr/>
+                    <a:lstStyle/>
+                    <a:p>
+                      <a:pPr algn="r" indent="0" marL="0">
+                        <a:buNone/>
+                      </a:pPr>
+                      <a:r>
+                        <a:rPr lang="en-US" sz="1050" b="1" dirty="0">
+                          <a:solidFill>
+                            <a:srgbClr val="1C2A33"/>
+                          </a:solidFill>
+                          <a:latin typeface="Calibri" pitchFamily="34" charset="0"/>
+                          <a:ea typeface="Calibri" pitchFamily="34" charset="-122"/>
+                          <a:cs typeface="Calibri" pitchFamily="34" charset="-120"/>
+                        </a:rPr>
+                        <a:t>0.1335 ✓</a:t>
+                      </a:r>
+                      <a:endParaRPr lang="en-US" sz="1050" dirty="0">
+                        <a:latin typeface="Calibri" charset="0"/>
+                        <a:ea typeface="Calibri" charset="0"/>
+                        <a:cs typeface="Calibri" charset="0"/>
+                      </a:endParaRPr>
+                    </a:p>
+                  </a:txBody>
+                  <a:tcPr marL="91440" marR="91440" marT="45720" marB="45720" anchor="ctr">
+                    <a:lnL w="12700" cap="flat" cmpd="sng" algn="ctr">
+                      <a:solidFill>
+                        <a:srgbClr val="E3E9EC"/>
+                      </a:solidFill>
+                      <a:prstDash val="solid"/>
+                      <a:round/>
+                      <a:headEnd type="none" w="med" len="med"/>
+                      <a:tailEnd type="none" w="med" len="med"/>
+                    </a:lnL>
+                    <a:lnR w="12700" cap="flat" cmpd="sng" algn="ctr">
+                      <a:solidFill>
+                        <a:srgbClr val="E3E9EC"/>
+                      </a:solidFill>
+                      <a:prstDash val="solid"/>
+                      <a:round/>
+                      <a:headEnd type="none" w="med" len="med"/>
+                      <a:tailEnd type="none" w="med" len="med"/>
+                    </a:lnR>
+                    <a:lnT w="12700" cap="flat" cmpd="sng" algn="ctr">
+                      <a:solidFill>
+                        <a:srgbClr val="E3E9EC"/>
+                      </a:solidFill>
+                      <a:prstDash val="solid"/>
+                      <a:round/>
+                      <a:headEnd type="none" w="med" len="med"/>
+                      <a:tailEnd type="none" w="med" len="med"/>
+                    </a:lnT>
+                    <a:lnB w="12700" cap="flat" cmpd="sng" algn="ctr">
+                      <a:solidFill>
+                        <a:srgbClr val="E3E9EC"/>
+                      </a:solidFill>
+                      <a:prstDash val="solid"/>
+                      <a:round/>
+                      <a:headEnd type="none" w="med" len="med"/>
+                      <a:tailEnd type="none" w="med" len="med"/>
+                    </a:lnB>
+                    <a:solidFill>
+                      <a:srgbClr val="EAF4EE"/>
+                    </a:solidFill>
+                  </a:tcPr>
+                </a:tc>
+                <a:tc>
+                  <a:txBody>
+                    <a:bodyPr/>
+                    <a:lstStyle/>
+                    <a:p>
+                      <a:pPr algn="r" indent="0" marL="0">
+                        <a:buNone/>
+                      </a:pPr>
+                      <a:r>
+                        <a:rPr lang="en-US" sz="1050" b="1" dirty="0">
+                          <a:solidFill>
+                            <a:srgbClr val="1C2A33"/>
+                          </a:solidFill>
+                          <a:latin typeface="Calibri" pitchFamily="34" charset="0"/>
+                          <a:ea typeface="Calibri" pitchFamily="34" charset="-122"/>
+                          <a:cs typeface="Calibri" pitchFamily="34" charset="-120"/>
+                        </a:rPr>
+                        <a:t>−0.004</a:t>
+                      </a:r>
+                      <a:endParaRPr lang="en-US" sz="1050" dirty="0">
+                        <a:latin typeface="Calibri" charset="0"/>
+                        <a:ea typeface="Calibri" charset="0"/>
+                        <a:cs typeface="Calibri" charset="0"/>
+                      </a:endParaRPr>
+                    </a:p>
+                  </a:txBody>
+                  <a:tcPr marL="91440" marR="91440" marT="45720" marB="45720" anchor="ctr">
+                    <a:lnL w="12700" cap="flat" cmpd="sng" algn="ctr">
+                      <a:solidFill>
+                        <a:srgbClr val="E3E9EC"/>
+                      </a:solidFill>
+                      <a:prstDash val="solid"/>
+                      <a:round/>
+                      <a:headEnd type="none" w="med" len="med"/>
+                      <a:tailEnd type="none" w="med" len="med"/>
+                    </a:lnL>
+                    <a:lnR w="12700" cap="flat" cmpd="sng" algn="ctr">
+                      <a:solidFill>
+                        <a:srgbClr val="E3E9EC"/>
+                      </a:solidFill>
+                      <a:prstDash val="solid"/>
+                      <a:round/>
+                      <a:headEnd type="none" w="med" len="med"/>
+                      <a:tailEnd type="none" w="med" len="med"/>
+                    </a:lnR>
+                    <a:lnT w="12700" cap="flat" cmpd="sng" algn="ctr">
+                      <a:solidFill>
+                        <a:srgbClr val="E3E9EC"/>
+                      </a:solidFill>
+                      <a:prstDash val="solid"/>
+                      <a:round/>
+                      <a:headEnd type="none" w="med" len="med"/>
+                      <a:tailEnd type="none" w="med" len="med"/>
+                    </a:lnT>
+                    <a:lnB w="12700" cap="flat" cmpd="sng" algn="ctr">
+                      <a:solidFill>
+                        <a:srgbClr val="E3E9EC"/>
+                      </a:solidFill>
+                      <a:prstDash val="solid"/>
+                      <a:round/>
+                      <a:headEnd type="none" w="med" len="med"/>
+                      <a:tailEnd type="none" w="med" len="med"/>
+                    </a:lnB>
+                    <a:solidFill>
+                      <a:srgbClr val="EAF4EE"/>
+                    </a:solidFill>
+                  </a:tcPr>
+                </a:tc>
+                <a:tc>
+                  <a:txBody>
+                    <a:bodyPr/>
+                    <a:lstStyle/>
+                    <a:p>
+                      <a:pPr algn="r" indent="0" marL="0">
+                        <a:buNone/>
+                      </a:pPr>
+                      <a:r>
+                        <a:rPr lang="en-US" sz="1050" b="1" dirty="0">
+                          <a:solidFill>
+                            <a:srgbClr val="1C2A33"/>
+                          </a:solidFill>
+                          <a:latin typeface="Calibri" pitchFamily="34" charset="0"/>
+                          <a:ea typeface="Calibri" pitchFamily="34" charset="-122"/>
+                          <a:cs typeface="Calibri" pitchFamily="34" charset="-120"/>
+                        </a:rPr>
+                        <a:t>0.7848</a:t>
+                      </a:r>
+                      <a:endParaRPr lang="en-US" sz="1050" dirty="0">
+                        <a:latin typeface="Calibri" charset="0"/>
+                        <a:ea typeface="Calibri" charset="0"/>
+                        <a:cs typeface="Calibri" charset="0"/>
+                      </a:endParaRPr>
+                    </a:p>
+                  </a:txBody>
+                  <a:tcPr marL="91440" marR="91440" marT="45720" marB="45720" anchor="ctr">
+                    <a:lnL w="12700" cap="flat" cmpd="sng" algn="ctr">
+                      <a:solidFill>
+                        <a:srgbClr val="E3E9EC"/>
+                      </a:solidFill>
+                      <a:prstDash val="solid"/>
+                      <a:round/>
+                      <a:headEnd type="none" w="med" len="med"/>
+                      <a:tailEnd type="none" w="med" len="med"/>
+                    </a:lnL>
+                    <a:lnR w="12700" cap="flat" cmpd="sng" algn="ctr">
+                      <a:solidFill>
+                        <a:srgbClr val="E3E9EC"/>
+                      </a:solidFill>
+                      <a:prstDash val="solid"/>
+                      <a:round/>
+                      <a:headEnd type="none" w="med" len="med"/>
+                      <a:tailEnd type="none" w="med" len="med"/>
+                    </a:lnR>
+                    <a:lnT w="12700" cap="flat" cmpd="sng" algn="ctr">
+                      <a:solidFill>
+                        <a:srgbClr val="E3E9EC"/>
+                      </a:solidFill>
+                      <a:prstDash val="solid"/>
+                      <a:round/>
+                      <a:headEnd type="none" w="med" len="med"/>
+                      <a:tailEnd type="none" w="med" len="med"/>
+                    </a:lnT>
+                    <a:lnB w="12700" cap="flat" cmpd="sng" algn="ctr">
+                      <a:solidFill>
+                        <a:srgbClr val="E3E9EC"/>
+                      </a:solidFill>
+                      <a:prstDash val="solid"/>
+                      <a:round/>
+                      <a:headEnd type="none" w="med" len="med"/>
+                      <a:tailEnd type="none" w="med" len="med"/>
+                    </a:lnB>
+                    <a:solidFill>
+                      <a:srgbClr val="EAF4EE"/>
+                    </a:solidFill>
+                  </a:tcPr>
+                </a:tc>
+                <a:tc>
+                  <a:txBody>
+                    <a:bodyPr/>
+                    <a:lstStyle/>
+                    <a:p>
+                      <a:pPr algn="r" indent="0" marL="0">
+                        <a:buNone/>
+                      </a:pPr>
+                      <a:r>
+                        <a:rPr lang="en-US" sz="1050" b="1" dirty="0">
+                          <a:solidFill>
+                            <a:srgbClr val="1C2A33"/>
+                          </a:solidFill>
+                          <a:latin typeface="Calibri" pitchFamily="34" charset="0"/>
+                          <a:ea typeface="Calibri" pitchFamily="34" charset="-122"/>
+                          <a:cs typeface="Calibri" pitchFamily="34" charset="-120"/>
+                        </a:rPr>
+                        <a:t>0.1774 ✓</a:t>
+                      </a:r>
+                      <a:endParaRPr lang="en-US" sz="1050" dirty="0">
+                        <a:latin typeface="Calibri" charset="0"/>
+                        <a:ea typeface="Calibri" charset="0"/>
+                        <a:cs typeface="Calibri" charset="0"/>
+                      </a:endParaRPr>
+                    </a:p>
+                  </a:txBody>
+                  <a:tcPr marL="91440" marR="91440" marT="45720" marB="45720" anchor="ctr">
+                    <a:lnL w="12700" cap="flat" cmpd="sng" algn="ctr">
+                      <a:solidFill>
+                        <a:srgbClr val="E3E9EC"/>
+                      </a:solidFill>
+                      <a:prstDash val="solid"/>
+                      <a:round/>
+                      <a:headEnd type="none" w="med" len="med"/>
+                      <a:tailEnd type="none" w="med" len="med"/>
+                    </a:lnL>
+                    <a:lnR w="12700" cap="flat" cmpd="sng" algn="ctr">
+                      <a:solidFill>
+                        <a:srgbClr val="E3E9EC"/>
+                      </a:solidFill>
+                      <a:prstDash val="solid"/>
+                      <a:round/>
+                      <a:headEnd type="none" w="med" len="med"/>
+                      <a:tailEnd type="none" w="med" len="med"/>
+                    </a:lnR>
+                    <a:lnT w="12700" cap="flat" cmpd="sng" algn="ctr">
+                      <a:solidFill>
+                        <a:srgbClr val="E3E9EC"/>
+                      </a:solidFill>
+                      <a:prstDash val="solid"/>
+                      <a:round/>
+                      <a:headEnd type="none" w="med" len="med"/>
+                      <a:tailEnd type="none" w="med" len="med"/>
+                    </a:lnT>
+                    <a:lnB w="12700" cap="flat" cmpd="sng" algn="ctr">
+                      <a:solidFill>
+                        <a:srgbClr val="E3E9EC"/>
+                      </a:solidFill>
+                      <a:prstDash val="solid"/>
+                      <a:round/>
+                      <a:headEnd type="none" w="med" len="med"/>
+                      <a:tailEnd type="none" w="med" len="med"/>
+                    </a:lnB>
+                    <a:solidFill>
+                      <a:srgbClr val="EAF4EE"/>
+                    </a:solidFill>
+                  </a:tcPr>
+                </a:tc>
+                <a:tc>
+                  <a:txBody>
+                    <a:bodyPr/>
+                    <a:lstStyle/>
+                    <a:p>
+                      <a:pPr algn="r" indent="0" marL="0">
+                        <a:buNone/>
+                      </a:pPr>
+                      <a:r>
+                        <a:rPr lang="en-US" sz="1050" b="1" dirty="0">
+                          <a:solidFill>
+                            <a:srgbClr val="1C2A33"/>
+                          </a:solidFill>
+                          <a:latin typeface="Calibri" pitchFamily="34" charset="0"/>
+                          <a:ea typeface="Calibri" pitchFamily="34" charset="-122"/>
+                          <a:cs typeface="Calibri" pitchFamily="34" charset="-120"/>
+                        </a:rPr>
+                        <a:t>+0.003</a:t>
+                      </a:r>
+                      <a:endParaRPr lang="en-US" sz="1050" dirty="0">
+                        <a:latin typeface="Calibri" charset="0"/>
+                        <a:ea typeface="Calibri" charset="0"/>
+                        <a:cs typeface="Calibri" charset="0"/>
+                      </a:endParaRPr>
+                    </a:p>
+                  </a:txBody>
+                  <a:tcPr marL="91440" marR="91440" marT="45720" marB="45720" anchor="ctr">
+                    <a:lnL w="12700" cap="flat" cmpd="sng" algn="ctr">
+                      <a:solidFill>
+                        <a:srgbClr val="E3E9EC"/>
+                      </a:solidFill>
+                      <a:prstDash val="solid"/>
+                      <a:round/>
+                      <a:headEnd type="none" w="med" len="med"/>
+                      <a:tailEnd type="none" w="med" len="med"/>
+                    </a:lnL>
+                    <a:lnR w="12700" cap="flat" cmpd="sng" algn="ctr">
+                      <a:solidFill>
+                        <a:srgbClr val="E3E9EC"/>
+                      </a:solidFill>
+                      <a:prstDash val="solid"/>
+                      <a:round/>
+                      <a:headEnd type="none" w="med" len="med"/>
+                      <a:tailEnd type="none" w="med" len="med"/>
+                    </a:lnR>
+                    <a:lnT w="12700" cap="flat" cmpd="sng" algn="ctr">
+                      <a:solidFill>
+                        <a:srgbClr val="E3E9EC"/>
+                      </a:solidFill>
+                      <a:prstDash val="solid"/>
+                      <a:round/>
+                      <a:headEnd type="none" w="med" len="med"/>
+                      <a:tailEnd type="none" w="med" len="med"/>
+                    </a:lnT>
+                    <a:lnB w="12700" cap="flat" cmpd="sng" algn="ctr">
+                      <a:solidFill>
+                        <a:srgbClr val="E3E9EC"/>
+                      </a:solidFill>
+                      <a:prstDash val="solid"/>
+                      <a:round/>
+                      <a:headEnd type="none" w="med" len="med"/>
+                      <a:tailEnd type="none" w="med" len="med"/>
+                    </a:lnB>
+                    <a:solidFill>
+                      <a:srgbClr val="EAF4EE"/>
+                    </a:solidFill>
+                  </a:tcPr>
+                </a:tc>
+                <a:tc>
+                  <a:txBody>
+                    <a:bodyPr/>
+                    <a:lstStyle/>
+                    <a:p>
+                      <a:pPr algn="l" indent="0" marL="0">
+                        <a:buNone/>
+                      </a:pPr>
+                      <a:r>
+                        <a:rPr lang="en-US" sz="1050" b="1" dirty="0">
+                          <a:solidFill>
+                            <a:srgbClr val="1C2A33"/>
+                          </a:solidFill>
+                          <a:latin typeface="맑은 고딕" pitchFamily="34" charset="0"/>
+                          <a:ea typeface="맑은 고딕" pitchFamily="34" charset="-122"/>
+                          <a:cs typeface="맑은 고딕" pitchFamily="34" charset="-120"/>
+                        </a:rPr>
+                        <a:t>눈금은 둘 다 완벽, 순위는 중간</a:t>
+                      </a:r>
+                      <a:endParaRPr lang="en-US" sz="1050" dirty="0">
+                        <a:latin typeface="맑은 고딕" charset="0"/>
+                        <a:ea typeface="맑은 고딕" charset="0"/>
+                        <a:cs typeface="맑은 고딕" charset="0"/>
+                      </a:endParaRPr>
+                    </a:p>
+                  </a:txBody>
+                  <a:tcPr marL="91440" marR="91440" marT="45720" marB="45720" anchor="ctr">
+                    <a:lnL w="12700" cap="flat" cmpd="sng" algn="ctr">
+                      <a:solidFill>
+                        <a:srgbClr val="E3E9EC"/>
+                      </a:solidFill>
+                      <a:prstDash val="solid"/>
+                      <a:round/>
+                      <a:headEnd type="none" w="med" len="med"/>
+                      <a:tailEnd type="none" w="med" len="med"/>
+                    </a:lnL>
+                    <a:lnR w="12700" cap="flat" cmpd="sng" algn="ctr">
+                      <a:solidFill>
+                        <a:srgbClr val="E3E9EC"/>
+                      </a:solidFill>
+                      <a:prstDash val="solid"/>
+                      <a:round/>
+                      <a:headEnd type="none" w="med" len="med"/>
+                      <a:tailEnd type="none" w="med" len="med"/>
+                    </a:lnR>
+                    <a:lnT w="12700" cap="flat" cmpd="sng" algn="ctr">
+                      <a:solidFill>
+                        <a:srgbClr val="E3E9EC"/>
+                      </a:solidFill>
+                      <a:prstDash val="solid"/>
+                      <a:round/>
+                      <a:headEnd type="none" w="med" len="med"/>
+                      <a:tailEnd type="none" w="med" len="med"/>
+                    </a:lnT>
+                    <a:lnB w="12700" cap="flat" cmpd="sng" algn="ctr">
+                      <a:solidFill>
+                        <a:srgbClr val="E3E9EC"/>
+                      </a:solidFill>
+                      <a:prstDash val="solid"/>
+                      <a:round/>
+                      <a:headEnd type="none" w="med" len="med"/>
+                      <a:tailEnd type="none" w="med" len="med"/>
+                    </a:lnB>
+                    <a:solidFill>
+                      <a:srgbClr val="EAF4EE"/>
+                    </a:solidFill>
+                  </a:tcPr>
+                </a:tc>
+              </a:tr>
+              <a:tr h="329184">
+                <a:tc>
+                  <a:txBody>
+                    <a:bodyPr/>
+                    <a:lstStyle/>
+                    <a:p>
+                      <a:pPr algn="l" indent="0" marL="0">
+                        <a:buNone/>
+                      </a:pPr>
+                      <a:r>
+                        <a:rPr lang="en-US" sz="1050" dirty="0">
+                          <a:solidFill>
+                            <a:srgbClr val="55636E"/>
+                          </a:solidFill>
+                          <a:latin typeface="맑은 고딕" pitchFamily="34" charset="0"/>
+                          <a:ea typeface="맑은 고딕" pitchFamily="34" charset="-122"/>
+                          <a:cs typeface="맑은 고딕" pitchFamily="34" charset="-120"/>
+                        </a:rPr>
+                        <a:t>C</a:t>
+                      </a:r>
+                      <a:endParaRPr lang="en-US" sz="1050" dirty="0">
+                        <a:latin typeface="맑은 고딕" charset="0"/>
+                        <a:ea typeface="맑은 고딕" charset="0"/>
+                        <a:cs typeface="맑은 고딕" charset="0"/>
+                      </a:endParaRPr>
+                    </a:p>
+                  </a:txBody>
+                  <a:tcPr marL="91440" marR="91440" marT="45720" marB="45720" anchor="ctr">
+                    <a:lnL w="12700" cap="flat" cmpd="sng" algn="ctr">
+                      <a:solidFill>
+                        <a:srgbClr val="E3E9EC"/>
+                      </a:solidFill>
+                      <a:prstDash val="solid"/>
+                      <a:round/>
+                      <a:headEnd type="none" w="med" len="med"/>
+                      <a:tailEnd type="none" w="med" len="med"/>
+                    </a:lnL>
+                    <a:lnR w="12700" cap="flat" cmpd="sng" algn="ctr">
+                      <a:solidFill>
+                        <a:srgbClr val="E3E9EC"/>
+                      </a:solidFill>
+                      <a:prstDash val="solid"/>
+                      <a:round/>
+                      <a:headEnd type="none" w="med" len="med"/>
+                      <a:tailEnd type="none" w="med" len="med"/>
+                    </a:lnR>
+                    <a:lnT w="12700" cap="flat" cmpd="sng" algn="ctr">
+                      <a:solidFill>
+                        <a:srgbClr val="E3E9EC"/>
+                      </a:solidFill>
+                      <a:prstDash val="solid"/>
+                      <a:round/>
+                      <a:headEnd type="none" w="med" len="med"/>
+                      <a:tailEnd type="none" w="med" len="med"/>
+                    </a:lnT>
+                    <a:lnB w="12700" cap="flat" cmpd="sng" algn="ctr">
+                      <a:solidFill>
+                        <a:srgbClr val="E3E9EC"/>
+                      </a:solidFill>
+                      <a:prstDash val="solid"/>
+                      <a:round/>
+                      <a:headEnd type="none" w="med" len="med"/>
+                      <a:tailEnd type="none" w="med" len="med"/>
+                    </a:lnB>
+                    <a:solidFill>
+                      <a:srgbClr val="FFFFFF"/>
+                    </a:solidFill>
+                  </a:tcPr>
+                </a:tc>
+                <a:tc>
+                  <a:txBody>
+                    <a:bodyPr/>
+                    <a:lstStyle/>
+                    <a:p>
+                      <a:pPr algn="l" indent="0" marL="0">
+                        <a:buNone/>
+                      </a:pPr>
+                      <a:r>
+                        <a:rPr lang="en-US" sz="1050" dirty="0">
+                          <a:solidFill>
+                            <a:srgbClr val="55636E"/>
+                          </a:solidFill>
+                          <a:latin typeface="맑은 고딕" pitchFamily="34" charset="0"/>
+                          <a:ea typeface="맑은 고딕" pitchFamily="34" charset="-122"/>
+                          <a:cs typeface="맑은 고딕" pitchFamily="34" charset="-120"/>
+                        </a:rPr>
+                        <a:t>bounded</a:t>
+                      </a:r>
+                      <a:endParaRPr lang="en-US" sz="1050" dirty="0">
+                        <a:latin typeface="맑은 고딕" charset="0"/>
+                        <a:ea typeface="맑은 고딕" charset="0"/>
+                        <a:cs typeface="맑은 고딕" charset="0"/>
+                      </a:endParaRPr>
+                    </a:p>
+                  </a:txBody>
+                  <a:tcPr marL="91440" marR="91440" marT="45720" marB="45720" anchor="ctr">
+                    <a:lnL w="12700" cap="flat" cmpd="sng" algn="ctr">
+                      <a:solidFill>
+                        <a:srgbClr val="E3E9EC"/>
+                      </a:solidFill>
+                      <a:prstDash val="solid"/>
+                      <a:round/>
+                      <a:headEnd type="none" w="med" len="med"/>
+                      <a:tailEnd type="none" w="med" len="med"/>
+                    </a:lnL>
+                    <a:lnR w="12700" cap="flat" cmpd="sng" algn="ctr">
+                      <a:solidFill>
+                        <a:srgbClr val="E3E9EC"/>
+                      </a:solidFill>
+                      <a:prstDash val="solid"/>
+                      <a:round/>
+                      <a:headEnd type="none" w="med" len="med"/>
+                      <a:tailEnd type="none" w="med" len="med"/>
+                    </a:lnR>
+                    <a:lnT w="12700" cap="flat" cmpd="sng" algn="ctr">
+                      <a:solidFill>
+                        <a:srgbClr val="E3E9EC"/>
+                      </a:solidFill>
+                      <a:prstDash val="solid"/>
+                      <a:round/>
+                      <a:headEnd type="none" w="med" len="med"/>
+                      <a:tailEnd type="none" w="med" len="med"/>
+                    </a:lnT>
+                    <a:lnB w="12700" cap="flat" cmpd="sng" algn="ctr">
+                      <a:solidFill>
+                        <a:srgbClr val="E3E9EC"/>
+                      </a:solidFill>
+                      <a:prstDash val="solid"/>
+                      <a:round/>
+                      <a:headEnd type="none" w="med" len="med"/>
+                      <a:tailEnd type="none" w="med" len="med"/>
+                    </a:lnB>
+                    <a:solidFill>
+                      <a:srgbClr val="FFFFFF"/>
+                    </a:solidFill>
+                  </a:tcPr>
+                </a:tc>
+                <a:tc>
+                  <a:txBody>
+                    <a:bodyPr/>
+                    <a:lstStyle/>
+                    <a:p>
+                      <a:pPr algn="r" indent="0" marL="0">
+                        <a:buNone/>
+                      </a:pPr>
+                      <a:r>
+                        <a:rPr lang="en-US" sz="1050" dirty="0">
+                          <a:solidFill>
+                            <a:srgbClr val="55636E"/>
+                          </a:solidFill>
+                          <a:latin typeface="맑은 고딕" pitchFamily="34" charset="0"/>
+                          <a:ea typeface="맑은 고딕" pitchFamily="34" charset="-122"/>
+                          <a:cs typeface="맑은 고딕" pitchFamily="34" charset="-120"/>
+                        </a:rPr>
+                        <a:t>4</a:t>
+                      </a:r>
+                      <a:endParaRPr lang="en-US" sz="1050" dirty="0">
+                        <a:latin typeface="맑은 고딕" charset="0"/>
+                        <a:ea typeface="맑은 고딕" charset="0"/>
+                        <a:cs typeface="맑은 고딕" charset="0"/>
+                      </a:endParaRPr>
+                    </a:p>
+                  </a:txBody>
+                  <a:tcPr marL="91440" marR="91440" marT="45720" marB="45720" anchor="ctr">
+                    <a:lnL w="12700" cap="flat" cmpd="sng" algn="ctr">
+                      <a:solidFill>
+                        <a:srgbClr val="E3E9EC"/>
+                      </a:solidFill>
+                      <a:prstDash val="solid"/>
+                      <a:round/>
+                      <a:headEnd type="none" w="med" len="med"/>
+                      <a:tailEnd type="none" w="med" len="med"/>
+                    </a:lnL>
+                    <a:lnR w="12700" cap="flat" cmpd="sng" algn="ctr">
+                      <a:solidFill>
+                        <a:srgbClr val="E3E9EC"/>
+                      </a:solidFill>
+                      <a:prstDash val="solid"/>
+                      <a:round/>
+                      <a:headEnd type="none" w="med" len="med"/>
+                      <a:tailEnd type="none" w="med" len="med"/>
+                    </a:lnR>
+                    <a:lnT w="12700" cap="flat" cmpd="sng" algn="ctr">
+                      <a:solidFill>
+                        <a:srgbClr val="E3E9EC"/>
+                      </a:solidFill>
+                      <a:prstDash val="solid"/>
+                      <a:round/>
+                      <a:headEnd type="none" w="med" len="med"/>
+                      <a:tailEnd type="none" w="med" len="med"/>
+                    </a:lnT>
+                    <a:lnB w="12700" cap="flat" cmpd="sng" algn="ctr">
+                      <a:solidFill>
+                        <a:srgbClr val="E3E9EC"/>
+                      </a:solidFill>
+                      <a:prstDash val="solid"/>
+                      <a:round/>
+                      <a:headEnd type="none" w="med" len="med"/>
+                      <a:tailEnd type="none" w="med" len="med"/>
+                    </a:lnB>
+                    <a:solidFill>
+                      <a:srgbClr val="FFFFFF"/>
+                    </a:solidFill>
+                  </a:tcPr>
+                </a:tc>
+                <a:tc>
+                  <a:txBody>
+                    <a:bodyPr/>
+                    <a:lstStyle/>
+                    <a:p>
+                      <a:pPr algn="r" indent="0" marL="0">
+                        <a:buNone/>
+                      </a:pPr>
+                      <a:r>
+                        <a:rPr lang="en-US" sz="1050" dirty="0">
+                          <a:solidFill>
+                            <a:srgbClr val="55636E"/>
+                          </a:solidFill>
+                          <a:latin typeface="Calibri" pitchFamily="34" charset="0"/>
+                          <a:ea typeface="Calibri" pitchFamily="34" charset="-122"/>
+                          <a:cs typeface="Calibri" pitchFamily="34" charset="-120"/>
+                        </a:rPr>
+                        <a:t>0.8812</a:t>
+                      </a:r>
+                      <a:endParaRPr lang="en-US" sz="1050" dirty="0">
+                        <a:latin typeface="Calibri" charset="0"/>
+                        <a:ea typeface="Calibri" charset="0"/>
+                        <a:cs typeface="Calibri" charset="0"/>
+                      </a:endParaRPr>
+                    </a:p>
+                  </a:txBody>
+                  <a:tcPr marL="91440" marR="91440" marT="45720" marB="45720" anchor="ctr">
+                    <a:lnL w="12700" cap="flat" cmpd="sng" algn="ctr">
+                      <a:solidFill>
+                        <a:srgbClr val="E3E9EC"/>
+                      </a:solidFill>
+                      <a:prstDash val="solid"/>
+                      <a:round/>
+                      <a:headEnd type="none" w="med" len="med"/>
+                      <a:tailEnd type="none" w="med" len="med"/>
+                    </a:lnL>
+                    <a:lnR w="12700" cap="flat" cmpd="sng" algn="ctr">
+                      <a:solidFill>
+                        <a:srgbClr val="E3E9EC"/>
+                      </a:solidFill>
+                      <a:prstDash val="solid"/>
+                      <a:round/>
+                      <a:headEnd type="none" w="med" len="med"/>
+                      <a:tailEnd type="none" w="med" len="med"/>
+                    </a:lnR>
+                    <a:lnT w="12700" cap="flat" cmpd="sng" algn="ctr">
+                      <a:solidFill>
+                        <a:srgbClr val="E3E9EC"/>
+                      </a:solidFill>
+                      <a:prstDash val="solid"/>
+                      <a:round/>
+                      <a:headEnd type="none" w="med" len="med"/>
+                      <a:tailEnd type="none" w="med" len="med"/>
+                    </a:lnT>
+                    <a:lnB w="12700" cap="flat" cmpd="sng" algn="ctr">
+                      <a:solidFill>
+                        <a:srgbClr val="E3E9EC"/>
+                      </a:solidFill>
+                      <a:prstDash val="solid"/>
+                      <a:round/>
+                      <a:headEnd type="none" w="med" len="med"/>
+                      <a:tailEnd type="none" w="med" len="med"/>
+                    </a:lnB>
+                    <a:solidFill>
+                      <a:srgbClr val="FFFFFF"/>
+                    </a:solidFill>
+                  </a:tcPr>
+                </a:tc>
+                <a:tc>
+                  <a:txBody>
+                    <a:bodyPr/>
+                    <a:lstStyle/>
+                    <a:p>
+                      <a:pPr algn="r" indent="0" marL="0">
+                        <a:buNone/>
+                      </a:pPr>
+                      <a:r>
+                        <a:rPr lang="en-US" sz="1050" dirty="0">
+                          <a:solidFill>
+                            <a:srgbClr val="55636E"/>
+                          </a:solidFill>
+                          <a:latin typeface="Calibri" pitchFamily="34" charset="0"/>
+                          <a:ea typeface="Calibri" pitchFamily="34" charset="-122"/>
+                          <a:cs typeface="Calibri" pitchFamily="34" charset="-120"/>
+                        </a:rPr>
+                        <a:t>0.1148 ✓</a:t>
+                      </a:r>
+                      <a:endParaRPr lang="en-US" sz="1050" dirty="0">
+                        <a:latin typeface="Calibri" charset="0"/>
+                        <a:ea typeface="Calibri" charset="0"/>
+                        <a:cs typeface="Calibri" charset="0"/>
+                      </a:endParaRPr>
+                    </a:p>
+                  </a:txBody>
+                  <a:tcPr marL="91440" marR="91440" marT="45720" marB="45720" anchor="ctr">
+                    <a:lnL w="12700" cap="flat" cmpd="sng" algn="ctr">
+                      <a:solidFill>
+                        <a:srgbClr val="E3E9EC"/>
+                      </a:solidFill>
+                      <a:prstDash val="solid"/>
+                      <a:round/>
+                      <a:headEnd type="none" w="med" len="med"/>
+                      <a:tailEnd type="none" w="med" len="med"/>
+                    </a:lnL>
+                    <a:lnR w="12700" cap="flat" cmpd="sng" algn="ctr">
+                      <a:solidFill>
+                        <a:srgbClr val="E3E9EC"/>
+                      </a:solidFill>
+                      <a:prstDash val="solid"/>
+                      <a:round/>
+                      <a:headEnd type="none" w="med" len="med"/>
+                      <a:tailEnd type="none" w="med" len="med"/>
+                    </a:lnR>
+                    <a:lnT w="12700" cap="flat" cmpd="sng" algn="ctr">
+                      <a:solidFill>
+                        <a:srgbClr val="E3E9EC"/>
+                      </a:solidFill>
+                      <a:prstDash val="solid"/>
+                      <a:round/>
+                      <a:headEnd type="none" w="med" len="med"/>
+                      <a:tailEnd type="none" w="med" len="med"/>
+                    </a:lnT>
+                    <a:lnB w="12700" cap="flat" cmpd="sng" algn="ctr">
+                      <a:solidFill>
+                        <a:srgbClr val="E3E9EC"/>
+                      </a:solidFill>
+                      <a:prstDash val="solid"/>
+                      <a:round/>
+                      <a:headEnd type="none" w="med" len="med"/>
+                      <a:tailEnd type="none" w="med" len="med"/>
+                    </a:lnB>
+                    <a:solidFill>
+                      <a:srgbClr val="FFFFFF"/>
+                    </a:solidFill>
+                  </a:tcPr>
+                </a:tc>
+                <a:tc>
+                  <a:txBody>
+                    <a:bodyPr/>
+                    <a:lstStyle/>
+                    <a:p>
+                      <a:pPr algn="r" indent="0" marL="0">
+                        <a:buNone/>
+                      </a:pPr>
+                      <a:r>
+                        <a:rPr lang="en-US" sz="1050" dirty="0">
+                          <a:solidFill>
+                            <a:srgbClr val="55636E"/>
+                          </a:solidFill>
+                          <a:latin typeface="Calibri" pitchFamily="34" charset="0"/>
+                          <a:ea typeface="Calibri" pitchFamily="34" charset="-122"/>
+                          <a:cs typeface="Calibri" pitchFamily="34" charset="-120"/>
+                        </a:rPr>
+                        <a:t>+0.009</a:t>
+                      </a:r>
+                      <a:endParaRPr lang="en-US" sz="1050" dirty="0">
+                        <a:latin typeface="Calibri" charset="0"/>
+                        <a:ea typeface="Calibri" charset="0"/>
+                        <a:cs typeface="Calibri" charset="0"/>
+                      </a:endParaRPr>
+                    </a:p>
+                  </a:txBody>
+                  <a:tcPr marL="91440" marR="91440" marT="45720" marB="45720" anchor="ctr">
+                    <a:lnL w="12700" cap="flat" cmpd="sng" algn="ctr">
+                      <a:solidFill>
+                        <a:srgbClr val="E3E9EC"/>
+                      </a:solidFill>
+                      <a:prstDash val="solid"/>
+                      <a:round/>
+                      <a:headEnd type="none" w="med" len="med"/>
+                      <a:tailEnd type="none" w="med" len="med"/>
+                    </a:lnL>
+                    <a:lnR w="12700" cap="flat" cmpd="sng" algn="ctr">
+                      <a:solidFill>
+                        <a:srgbClr val="E3E9EC"/>
+                      </a:solidFill>
+                      <a:prstDash val="solid"/>
+                      <a:round/>
+                      <a:headEnd type="none" w="med" len="med"/>
+                      <a:tailEnd type="none" w="med" len="med"/>
+                    </a:lnR>
+                    <a:lnT w="12700" cap="flat" cmpd="sng" algn="ctr">
+                      <a:solidFill>
+                        <a:srgbClr val="E3E9EC"/>
+                      </a:solidFill>
+                      <a:prstDash val="solid"/>
+                      <a:round/>
+                      <a:headEnd type="none" w="med" len="med"/>
+                      <a:tailEnd type="none" w="med" len="med"/>
+                    </a:lnT>
+                    <a:lnB w="12700" cap="flat" cmpd="sng" algn="ctr">
+                      <a:solidFill>
+                        <a:srgbClr val="E3E9EC"/>
+                      </a:solidFill>
+                      <a:prstDash val="solid"/>
+                      <a:round/>
+                      <a:headEnd type="none" w="med" len="med"/>
+                      <a:tailEnd type="none" w="med" len="med"/>
+                    </a:lnB>
+                    <a:solidFill>
+                      <a:srgbClr val="FFFFFF"/>
+                    </a:solidFill>
+                  </a:tcPr>
+                </a:tc>
+                <a:tc>
+                  <a:txBody>
+                    <a:bodyPr/>
+                    <a:lstStyle/>
+                    <a:p>
+                      <a:pPr algn="r" indent="0" marL="0">
+                        <a:buNone/>
+                      </a:pPr>
+                      <a:r>
+                        <a:rPr lang="en-US" sz="1050" dirty="0">
+                          <a:solidFill>
+                            <a:srgbClr val="55636E"/>
+                          </a:solidFill>
+                          <a:latin typeface="Calibri" pitchFamily="34" charset="0"/>
+                          <a:ea typeface="Calibri" pitchFamily="34" charset="-122"/>
+                          <a:cs typeface="Calibri" pitchFamily="34" charset="-120"/>
+                        </a:rPr>
+                        <a:t>0.7813</a:t>
+                      </a:r>
+                      <a:endParaRPr lang="en-US" sz="1050" dirty="0">
+                        <a:latin typeface="Calibri" charset="0"/>
+                        <a:ea typeface="Calibri" charset="0"/>
+                        <a:cs typeface="Calibri" charset="0"/>
+                      </a:endParaRPr>
+                    </a:p>
+                  </a:txBody>
+                  <a:tcPr marL="91440" marR="91440" marT="45720" marB="45720" anchor="ctr">
+                    <a:lnL w="12700" cap="flat" cmpd="sng" algn="ctr">
+                      <a:solidFill>
+                        <a:srgbClr val="E3E9EC"/>
+                      </a:solidFill>
+                      <a:prstDash val="solid"/>
+                      <a:round/>
+                      <a:headEnd type="none" w="med" len="med"/>
+                      <a:tailEnd type="none" w="med" len="med"/>
+                    </a:lnL>
+                    <a:lnR w="12700" cap="flat" cmpd="sng" algn="ctr">
+                      <a:solidFill>
+                        <a:srgbClr val="E3E9EC"/>
+                      </a:solidFill>
+                      <a:prstDash val="solid"/>
+                      <a:round/>
+                      <a:headEnd type="none" w="med" len="med"/>
+                      <a:tailEnd type="none" w="med" len="med"/>
+                    </a:lnR>
+                    <a:lnT w="12700" cap="flat" cmpd="sng" algn="ctr">
+                      <a:solidFill>
+                        <a:srgbClr val="E3E9EC"/>
+                      </a:solidFill>
+                      <a:prstDash val="solid"/>
+                      <a:round/>
+                      <a:headEnd type="none" w="med" len="med"/>
+                      <a:tailEnd type="none" w="med" len="med"/>
+                    </a:lnT>
+                    <a:lnB w="12700" cap="flat" cmpd="sng" algn="ctr">
+                      <a:solidFill>
+                        <a:srgbClr val="E3E9EC"/>
+                      </a:solidFill>
+                      <a:prstDash val="solid"/>
+                      <a:round/>
+                      <a:headEnd type="none" w="med" len="med"/>
+                      <a:tailEnd type="none" w="med" len="med"/>
+                    </a:lnB>
+                    <a:solidFill>
+                      <a:srgbClr val="FFFFFF"/>
+                    </a:solidFill>
+                  </a:tcPr>
+                </a:tc>
+                <a:tc>
+                  <a:txBody>
+                    <a:bodyPr/>
+                    <a:lstStyle/>
+                    <a:p>
+                      <a:pPr algn="r" indent="0" marL="0">
+                        <a:buNone/>
+                      </a:pPr>
+                      <a:r>
+                        <a:rPr lang="en-US" sz="1050" dirty="0">
+                          <a:solidFill>
+                            <a:srgbClr val="55636E"/>
+                          </a:solidFill>
+                          <a:latin typeface="Calibri" pitchFamily="34" charset="0"/>
+                          <a:ea typeface="Calibri" pitchFamily="34" charset="-122"/>
+                          <a:cs typeface="Calibri" pitchFamily="34" charset="-120"/>
+                        </a:rPr>
+                        <a:t>0.2507 ✗</a:t>
+                      </a:r>
+                      <a:endParaRPr lang="en-US" sz="1050" dirty="0">
+                        <a:latin typeface="Calibri" charset="0"/>
+                        <a:ea typeface="Calibri" charset="0"/>
+                        <a:cs typeface="Calibri" charset="0"/>
+                      </a:endParaRPr>
+                    </a:p>
+                  </a:txBody>
+                  <a:tcPr marL="91440" marR="91440" marT="45720" marB="45720" anchor="ctr">
+                    <a:lnL w="12700" cap="flat" cmpd="sng" algn="ctr">
+                      <a:solidFill>
+                        <a:srgbClr val="E3E9EC"/>
+                      </a:solidFill>
+                      <a:prstDash val="solid"/>
+                      <a:round/>
+                      <a:headEnd type="none" w="med" len="med"/>
+                      <a:tailEnd type="none" w="med" len="med"/>
+                    </a:lnL>
+                    <a:lnR w="12700" cap="flat" cmpd="sng" algn="ctr">
+                      <a:solidFill>
+                        <a:srgbClr val="E3E9EC"/>
+                      </a:solidFill>
+                      <a:prstDash val="solid"/>
+                      <a:round/>
+                      <a:headEnd type="none" w="med" len="med"/>
+                      <a:tailEnd type="none" w="med" len="med"/>
+                    </a:lnR>
+                    <a:lnT w="12700" cap="flat" cmpd="sng" algn="ctr">
+                      <a:solidFill>
+                        <a:srgbClr val="E3E9EC"/>
+                      </a:solidFill>
+                      <a:prstDash val="solid"/>
+                      <a:round/>
+                      <a:headEnd type="none" w="med" len="med"/>
+                      <a:tailEnd type="none" w="med" len="med"/>
+                    </a:lnT>
+                    <a:lnB w="12700" cap="flat" cmpd="sng" algn="ctr">
+                      <a:solidFill>
+                        <a:srgbClr val="E3E9EC"/>
+                      </a:solidFill>
+                      <a:prstDash val="solid"/>
+                      <a:round/>
+                      <a:headEnd type="none" w="med" len="med"/>
+                      <a:tailEnd type="none" w="med" len="med"/>
+                    </a:lnB>
+                    <a:solidFill>
+                      <a:srgbClr val="FFFFFF"/>
+                    </a:solidFill>
+                  </a:tcPr>
+                </a:tc>
+                <a:tc>
+                  <a:txBody>
+                    <a:bodyPr/>
+                    <a:lstStyle/>
+                    <a:p>
+                      <a:pPr algn="r" indent="0" marL="0">
+                        <a:buNone/>
+                      </a:pPr>
+                      <a:r>
+                        <a:rPr lang="en-US" sz="1050" dirty="0">
+                          <a:solidFill>
+                            <a:srgbClr val="55636E"/>
+                          </a:solidFill>
+                          <a:latin typeface="Calibri" pitchFamily="34" charset="0"/>
+                          <a:ea typeface="Calibri" pitchFamily="34" charset="-122"/>
+                          <a:cs typeface="Calibri" pitchFamily="34" charset="-120"/>
+                        </a:rPr>
+                        <a:t>−0.214</a:t>
+                      </a:r>
+                      <a:endParaRPr lang="en-US" sz="1050" dirty="0">
+                        <a:latin typeface="Calibri" charset="0"/>
+                        <a:ea typeface="Calibri" charset="0"/>
+                        <a:cs typeface="Calibri" charset="0"/>
+                      </a:endParaRPr>
+                    </a:p>
+                  </a:txBody>
+                  <a:tcPr marL="91440" marR="91440" marT="45720" marB="45720" anchor="ctr">
+                    <a:lnL w="12700" cap="flat" cmpd="sng" algn="ctr">
+                      <a:solidFill>
+                        <a:srgbClr val="E3E9EC"/>
+                      </a:solidFill>
+                      <a:prstDash val="solid"/>
+                      <a:round/>
+                      <a:headEnd type="none" w="med" len="med"/>
+                      <a:tailEnd type="none" w="med" len="med"/>
+                    </a:lnL>
+                    <a:lnR w="12700" cap="flat" cmpd="sng" algn="ctr">
+                      <a:solidFill>
+                        <a:srgbClr val="E3E9EC"/>
+                      </a:solidFill>
+                      <a:prstDash val="solid"/>
+                      <a:round/>
+                      <a:headEnd type="none" w="med" len="med"/>
+                      <a:tailEnd type="none" w="med" len="med"/>
+                    </a:lnR>
+                    <a:lnT w="12700" cap="flat" cmpd="sng" algn="ctr">
+                      <a:solidFill>
+                        <a:srgbClr val="E3E9EC"/>
+                      </a:solidFill>
+                      <a:prstDash val="solid"/>
+                      <a:round/>
+                      <a:headEnd type="none" w="med" len="med"/>
+                      <a:tailEnd type="none" w="med" len="med"/>
+                    </a:lnT>
+                    <a:lnB w="12700" cap="flat" cmpd="sng" algn="ctr">
+                      <a:solidFill>
+                        <a:srgbClr val="E3E9EC"/>
+                      </a:solidFill>
+                      <a:prstDash val="solid"/>
+                      <a:round/>
+                      <a:headEnd type="none" w="med" len="med"/>
+                      <a:tailEnd type="none" w="med" len="med"/>
+                    </a:lnB>
+                    <a:solidFill>
+                      <a:srgbClr val="FFFFFF"/>
+                    </a:solidFill>
+                  </a:tcPr>
+                </a:tc>
+                <a:tc>
+                  <a:txBody>
+                    <a:bodyPr/>
+                    <a:lstStyle/>
+                    <a:p>
+                      <a:pPr algn="l" indent="0" marL="0">
+                        <a:buNone/>
+                      </a:pPr>
+                      <a:r>
+                        <a:rPr lang="en-US" sz="1050" dirty="0">
+                          <a:solidFill>
+                            <a:srgbClr val="55636E"/>
+                          </a:solidFill>
+                          <a:latin typeface="맑은 고딕" pitchFamily="34" charset="0"/>
+                          <a:ea typeface="맑은 고딕" pitchFamily="34" charset="-122"/>
+                          <a:cs typeface="맑은 고딕" pitchFamily="34" charset="-120"/>
+                        </a:rPr>
+                        <a:t>LS 순위 1위, LQ 눈금이 기저 미달</a:t>
+                      </a:r>
+                      <a:endParaRPr lang="en-US" sz="1050" dirty="0">
+                        <a:latin typeface="맑은 고딕" charset="0"/>
+                        <a:ea typeface="맑은 고딕" charset="0"/>
+                        <a:cs typeface="맑은 고딕" charset="0"/>
+                      </a:endParaRPr>
+                    </a:p>
+                  </a:txBody>
+                  <a:tcPr marL="91440" marR="91440" marT="45720" marB="45720" anchor="ctr">
+                    <a:lnL w="12700" cap="flat" cmpd="sng" algn="ctr">
+                      <a:solidFill>
+                        <a:srgbClr val="E3E9EC"/>
+                      </a:solidFill>
+                      <a:prstDash val="solid"/>
+                      <a:round/>
+                      <a:headEnd type="none" w="med" len="med"/>
+                      <a:tailEnd type="none" w="med" len="med"/>
+                    </a:lnL>
+                    <a:lnR w="12700" cap="flat" cmpd="sng" algn="ctr">
+                      <a:solidFill>
+                        <a:srgbClr val="E3E9EC"/>
+                      </a:solidFill>
+                      <a:prstDash val="solid"/>
+                      <a:round/>
+                      <a:headEnd type="none" w="med" len="med"/>
+                      <a:tailEnd type="none" w="med" len="med"/>
+                    </a:lnR>
+                    <a:lnT w="12700" cap="flat" cmpd="sng" algn="ctr">
+                      <a:solidFill>
+                        <a:srgbClr val="E3E9EC"/>
+                      </a:solidFill>
+                      <a:prstDash val="solid"/>
+                      <a:round/>
+                      <a:headEnd type="none" w="med" len="med"/>
+                      <a:tailEnd type="none" w="med" len="med"/>
+                    </a:lnT>
+                    <a:lnB w="12700" cap="flat" cmpd="sng" algn="ctr">
+                      <a:solidFill>
+                        <a:srgbClr val="E3E9EC"/>
+                      </a:solidFill>
+                      <a:prstDash val="solid"/>
+                      <a:round/>
+                      <a:headEnd type="none" w="med" len="med"/>
+                      <a:tailEnd type="none" w="med" len="med"/>
+                    </a:lnB>
+                    <a:solidFill>
+                      <a:srgbClr val="FFFFFF"/>
+                    </a:solidFill>
+                  </a:tcPr>
+                </a:tc>
+              </a:tr>
+              <a:tr h="329184">
+                <a:tc>
+                  <a:txBody>
+                    <a:bodyPr/>
+                    <a:lstStyle/>
+                    <a:p>
+                      <a:pPr algn="l" indent="0" marL="0">
+                        <a:buNone/>
+                      </a:pPr>
+                      <a:r>
+                        <a:rPr lang="en-US" sz="1050" dirty="0">
+                          <a:solidFill>
+                            <a:srgbClr val="55636E"/>
+                          </a:solidFill>
+                          <a:latin typeface="맑은 고딕" pitchFamily="34" charset="0"/>
+                          <a:ea typeface="맑은 고딕" pitchFamily="34" charset="-122"/>
+                          <a:cs typeface="맑은 고딕" pitchFamily="34" charset="-120"/>
+                        </a:rPr>
+                        <a:t>E</a:t>
+                      </a:r>
+                      <a:endParaRPr lang="en-US" sz="1050" dirty="0">
+                        <a:latin typeface="맑은 고딕" charset="0"/>
+                        <a:ea typeface="맑은 고딕" charset="0"/>
+                        <a:cs typeface="맑은 고딕" charset="0"/>
+                      </a:endParaRPr>
+                    </a:p>
+                  </a:txBody>
+                  <a:tcPr marL="91440" marR="91440" marT="45720" marB="45720" anchor="ctr">
+                    <a:lnL w="12700" cap="flat" cmpd="sng" algn="ctr">
+                      <a:solidFill>
+                        <a:srgbClr val="E3E9EC"/>
+                      </a:solidFill>
+                      <a:prstDash val="solid"/>
+                      <a:round/>
+                      <a:headEnd type="none" w="med" len="med"/>
+                      <a:tailEnd type="none" w="med" len="med"/>
+                    </a:lnL>
+                    <a:lnR w="12700" cap="flat" cmpd="sng" algn="ctr">
+                      <a:solidFill>
+                        <a:srgbClr val="E3E9EC"/>
+                      </a:solidFill>
+                      <a:prstDash val="solid"/>
+                      <a:round/>
+                      <a:headEnd type="none" w="med" len="med"/>
+                      <a:tailEnd type="none" w="med" len="med"/>
+                    </a:lnR>
+                    <a:lnT w="12700" cap="flat" cmpd="sng" algn="ctr">
+                      <a:solidFill>
+                        <a:srgbClr val="E3E9EC"/>
+                      </a:solidFill>
+                      <a:prstDash val="solid"/>
+                      <a:round/>
+                      <a:headEnd type="none" w="med" len="med"/>
+                      <a:tailEnd type="none" w="med" len="med"/>
+                    </a:lnT>
+                    <a:lnB w="12700" cap="flat" cmpd="sng" algn="ctr">
+                      <a:solidFill>
+                        <a:srgbClr val="E3E9EC"/>
+                      </a:solidFill>
+                      <a:prstDash val="solid"/>
+                      <a:round/>
+                      <a:headEnd type="none" w="med" len="med"/>
+                      <a:tailEnd type="none" w="med" len="med"/>
+                    </a:lnB>
+                    <a:solidFill>
+                      <a:srgbClr val="FFFFFF"/>
+                    </a:solidFill>
+                  </a:tcPr>
+                </a:tc>
+                <a:tc>
+                  <a:txBody>
+                    <a:bodyPr/>
+                    <a:lstStyle/>
+                    <a:p>
+                      <a:pPr algn="l" indent="0" marL="0">
+                        <a:buNone/>
+                      </a:pPr>
+                      <a:r>
+                        <a:rPr lang="en-US" sz="1050" dirty="0">
+                          <a:solidFill>
+                            <a:srgbClr val="55636E"/>
+                          </a:solidFill>
+                          <a:latin typeface="맑은 고딕" pitchFamily="34" charset="0"/>
+                          <a:ea typeface="맑은 고딕" pitchFamily="34" charset="-122"/>
+                          <a:cs typeface="맑은 고딕" pitchFamily="34" charset="-120"/>
+                        </a:rPr>
+                        <a:t>c = 0.5</a:t>
+                      </a:r>
+                      <a:endParaRPr lang="en-US" sz="1050" dirty="0">
+                        <a:latin typeface="맑은 고딕" charset="0"/>
+                        <a:ea typeface="맑은 고딕" charset="0"/>
+                        <a:cs typeface="맑은 고딕" charset="0"/>
+                      </a:endParaRPr>
+                    </a:p>
+                  </a:txBody>
+                  <a:tcPr marL="91440" marR="91440" marT="45720" marB="45720" anchor="ctr">
+                    <a:lnL w="12700" cap="flat" cmpd="sng" algn="ctr">
+                      <a:solidFill>
+                        <a:srgbClr val="E3E9EC"/>
+                      </a:solidFill>
+                      <a:prstDash val="solid"/>
+                      <a:round/>
+                      <a:headEnd type="none" w="med" len="med"/>
+                      <a:tailEnd type="none" w="med" len="med"/>
+                    </a:lnL>
+                    <a:lnR w="12700" cap="flat" cmpd="sng" algn="ctr">
+                      <a:solidFill>
+                        <a:srgbClr val="E3E9EC"/>
+                      </a:solidFill>
+                      <a:prstDash val="solid"/>
+                      <a:round/>
+                      <a:headEnd type="none" w="med" len="med"/>
+                      <a:tailEnd type="none" w="med" len="med"/>
+                    </a:lnR>
+                    <a:lnT w="12700" cap="flat" cmpd="sng" algn="ctr">
+                      <a:solidFill>
+                        <a:srgbClr val="E3E9EC"/>
+                      </a:solidFill>
+                      <a:prstDash val="solid"/>
+                      <a:round/>
+                      <a:headEnd type="none" w="med" len="med"/>
+                      <a:tailEnd type="none" w="med" len="med"/>
+                    </a:lnT>
+                    <a:lnB w="12700" cap="flat" cmpd="sng" algn="ctr">
+                      <a:solidFill>
+                        <a:srgbClr val="E3E9EC"/>
+                      </a:solidFill>
+                      <a:prstDash val="solid"/>
+                      <a:round/>
+                      <a:headEnd type="none" w="med" len="med"/>
+                      <a:tailEnd type="none" w="med" len="med"/>
+                    </a:lnB>
+                    <a:solidFill>
+                      <a:srgbClr val="FFFFFF"/>
+                    </a:solidFill>
+                  </a:tcPr>
+                </a:tc>
+                <a:tc>
+                  <a:txBody>
+                    <a:bodyPr/>
+                    <a:lstStyle/>
+                    <a:p>
+                      <a:pPr algn="r" indent="0" marL="0">
+                        <a:buNone/>
+                      </a:pPr>
+                      <a:r>
+                        <a:rPr lang="en-US" sz="1050" dirty="0">
+                          <a:solidFill>
+                            <a:srgbClr val="55636E"/>
+                          </a:solidFill>
+                          <a:latin typeface="맑은 고딕" pitchFamily="34" charset="0"/>
+                          <a:ea typeface="맑은 고딕" pitchFamily="34" charset="-122"/>
+                          <a:cs typeface="맑은 고딕" pitchFamily="34" charset="-120"/>
+                        </a:rPr>
+                        <a:t>0</a:t>
+                      </a:r>
+                      <a:endParaRPr lang="en-US" sz="1050" dirty="0">
+                        <a:latin typeface="맑은 고딕" charset="0"/>
+                        <a:ea typeface="맑은 고딕" charset="0"/>
+                        <a:cs typeface="맑은 고딕" charset="0"/>
+                      </a:endParaRPr>
+                    </a:p>
+                  </a:txBody>
+                  <a:tcPr marL="91440" marR="91440" marT="45720" marB="45720" anchor="ctr">
+                    <a:lnL w="12700" cap="flat" cmpd="sng" algn="ctr">
+                      <a:solidFill>
+                        <a:srgbClr val="E3E9EC"/>
+                      </a:solidFill>
+                      <a:prstDash val="solid"/>
+                      <a:round/>
+                      <a:headEnd type="none" w="med" len="med"/>
+                      <a:tailEnd type="none" w="med" len="med"/>
+                    </a:lnL>
+                    <a:lnR w="12700" cap="flat" cmpd="sng" algn="ctr">
+                      <a:solidFill>
+                        <a:srgbClr val="E3E9EC"/>
+                      </a:solidFill>
+                      <a:prstDash val="solid"/>
+                      <a:round/>
+                      <a:headEnd type="none" w="med" len="med"/>
+                      <a:tailEnd type="none" w="med" len="med"/>
+                    </a:lnR>
+                    <a:lnT w="12700" cap="flat" cmpd="sng" algn="ctr">
+                      <a:solidFill>
+                        <a:srgbClr val="E3E9EC"/>
+                      </a:solidFill>
+                      <a:prstDash val="solid"/>
+                      <a:round/>
+                      <a:headEnd type="none" w="med" len="med"/>
+                      <a:tailEnd type="none" w="med" len="med"/>
+                    </a:lnT>
+                    <a:lnB w="12700" cap="flat" cmpd="sng" algn="ctr">
+                      <a:solidFill>
+                        <a:srgbClr val="E3E9EC"/>
+                      </a:solidFill>
+                      <a:prstDash val="solid"/>
+                      <a:round/>
+                      <a:headEnd type="none" w="med" len="med"/>
+                      <a:tailEnd type="none" w="med" len="med"/>
+                    </a:lnB>
+                    <a:solidFill>
+                      <a:srgbClr val="FFFFFF"/>
+                    </a:solidFill>
+                  </a:tcPr>
+                </a:tc>
+                <a:tc>
+                  <a:txBody>
+                    <a:bodyPr/>
+                    <a:lstStyle/>
+                    <a:p>
+                      <a:pPr algn="r" indent="0" marL="0">
+                        <a:buNone/>
+                      </a:pPr>
+                      <a:r>
+                        <a:rPr lang="en-US" sz="1050" dirty="0">
+                          <a:solidFill>
+                            <a:srgbClr val="55636E"/>
+                          </a:solidFill>
+                          <a:latin typeface="Calibri" pitchFamily="34" charset="0"/>
+                          <a:ea typeface="Calibri" pitchFamily="34" charset="-122"/>
+                          <a:cs typeface="Calibri" pitchFamily="34" charset="-120"/>
+                        </a:rPr>
+                        <a:t>0.8435</a:t>
+                      </a:r>
+                      <a:endParaRPr lang="en-US" sz="1050" dirty="0">
+                        <a:latin typeface="Calibri" charset="0"/>
+                        <a:ea typeface="Calibri" charset="0"/>
+                        <a:cs typeface="Calibri" charset="0"/>
+                      </a:endParaRPr>
+                    </a:p>
+                  </a:txBody>
+                  <a:tcPr marL="91440" marR="91440" marT="45720" marB="45720" anchor="ctr">
+                    <a:lnL w="12700" cap="flat" cmpd="sng" algn="ctr">
+                      <a:solidFill>
+                        <a:srgbClr val="E3E9EC"/>
+                      </a:solidFill>
+                      <a:prstDash val="solid"/>
+                      <a:round/>
+                      <a:headEnd type="none" w="med" len="med"/>
+                      <a:tailEnd type="none" w="med" len="med"/>
+                    </a:lnL>
+                    <a:lnR w="12700" cap="flat" cmpd="sng" algn="ctr">
+                      <a:solidFill>
+                        <a:srgbClr val="E3E9EC"/>
+                      </a:solidFill>
+                      <a:prstDash val="solid"/>
+                      <a:round/>
+                      <a:headEnd type="none" w="med" len="med"/>
+                      <a:tailEnd type="none" w="med" len="med"/>
+                    </a:lnR>
+                    <a:lnT w="12700" cap="flat" cmpd="sng" algn="ctr">
+                      <a:solidFill>
+                        <a:srgbClr val="E3E9EC"/>
+                      </a:solidFill>
+                      <a:prstDash val="solid"/>
+                      <a:round/>
+                      <a:headEnd type="none" w="med" len="med"/>
+                      <a:tailEnd type="none" w="med" len="med"/>
+                    </a:lnT>
+                    <a:lnB w="12700" cap="flat" cmpd="sng" algn="ctr">
+                      <a:solidFill>
+                        <a:srgbClr val="E3E9EC"/>
+                      </a:solidFill>
+                      <a:prstDash val="solid"/>
+                      <a:round/>
+                      <a:headEnd type="none" w="med" len="med"/>
+                      <a:tailEnd type="none" w="med" len="med"/>
+                    </a:lnB>
+                    <a:solidFill>
+                      <a:srgbClr val="FFFFFF"/>
+                    </a:solidFill>
+                  </a:tcPr>
+                </a:tc>
+                <a:tc>
+                  <a:txBody>
+                    <a:bodyPr/>
+                    <a:lstStyle/>
+                    <a:p>
+                      <a:pPr algn="r" indent="0" marL="0">
+                        <a:buNone/>
+                      </a:pPr>
+                      <a:r>
+                        <a:rPr lang="en-US" sz="1050" dirty="0">
+                          <a:solidFill>
+                            <a:srgbClr val="55636E"/>
+                          </a:solidFill>
+                          <a:latin typeface="Calibri" pitchFamily="34" charset="0"/>
+                          <a:ea typeface="Calibri" pitchFamily="34" charset="-122"/>
+                          <a:cs typeface="Calibri" pitchFamily="34" charset="-120"/>
+                        </a:rPr>
+                        <a:t>0.1429 ✓</a:t>
+                      </a:r>
+                      <a:endParaRPr lang="en-US" sz="1050" dirty="0">
+                        <a:latin typeface="Calibri" charset="0"/>
+                        <a:ea typeface="Calibri" charset="0"/>
+                        <a:cs typeface="Calibri" charset="0"/>
+                      </a:endParaRPr>
+                    </a:p>
+                  </a:txBody>
+                  <a:tcPr marL="91440" marR="91440" marT="45720" marB="45720" anchor="ctr">
+                    <a:lnL w="12700" cap="flat" cmpd="sng" algn="ctr">
+                      <a:solidFill>
+                        <a:srgbClr val="E3E9EC"/>
+                      </a:solidFill>
+                      <a:prstDash val="solid"/>
+                      <a:round/>
+                      <a:headEnd type="none" w="med" len="med"/>
+                      <a:tailEnd type="none" w="med" len="med"/>
+                    </a:lnL>
+                    <a:lnR w="12700" cap="flat" cmpd="sng" algn="ctr">
+                      <a:solidFill>
+                        <a:srgbClr val="E3E9EC"/>
+                      </a:solidFill>
+                      <a:prstDash val="solid"/>
+                      <a:round/>
+                      <a:headEnd type="none" w="med" len="med"/>
+                      <a:tailEnd type="none" w="med" len="med"/>
+                    </a:lnR>
+                    <a:lnT w="12700" cap="flat" cmpd="sng" algn="ctr">
+                      <a:solidFill>
+                        <a:srgbClr val="E3E9EC"/>
+                      </a:solidFill>
+                      <a:prstDash val="solid"/>
+                      <a:round/>
+                      <a:headEnd type="none" w="med" len="med"/>
+                      <a:tailEnd type="none" w="med" len="med"/>
+                    </a:lnT>
+                    <a:lnB w="12700" cap="flat" cmpd="sng" algn="ctr">
+                      <a:solidFill>
+                        <a:srgbClr val="E3E9EC"/>
+                      </a:solidFill>
+                      <a:prstDash val="solid"/>
+                      <a:round/>
+                      <a:headEnd type="none" w="med" len="med"/>
+                      <a:tailEnd type="none" w="med" len="med"/>
+                    </a:lnB>
+                    <a:solidFill>
+                      <a:srgbClr val="FFFFFF"/>
+                    </a:solidFill>
+                  </a:tcPr>
+                </a:tc>
+                <a:tc>
+                  <a:txBody>
+                    <a:bodyPr/>
+                    <a:lstStyle/>
+                    <a:p>
+                      <a:pPr algn="r" indent="0" marL="0">
+                        <a:buNone/>
+                      </a:pPr>
+                      <a:r>
+                        <a:rPr lang="en-US" sz="1050" dirty="0">
+                          <a:solidFill>
+                            <a:srgbClr val="55636E"/>
+                          </a:solidFill>
+                          <a:latin typeface="Calibri" pitchFamily="34" charset="0"/>
+                          <a:ea typeface="Calibri" pitchFamily="34" charset="-122"/>
+                          <a:cs typeface="Calibri" pitchFamily="34" charset="-120"/>
+                        </a:rPr>
+                        <a:t>−0.097</a:t>
+                      </a:r>
+                      <a:endParaRPr lang="en-US" sz="1050" dirty="0">
+                        <a:latin typeface="Calibri" charset="0"/>
+                        <a:ea typeface="Calibri" charset="0"/>
+                        <a:cs typeface="Calibri" charset="0"/>
+                      </a:endParaRPr>
+                    </a:p>
+                  </a:txBody>
+                  <a:tcPr marL="91440" marR="91440" marT="45720" marB="45720" anchor="ctr">
+                    <a:lnL w="12700" cap="flat" cmpd="sng" algn="ctr">
+                      <a:solidFill>
+                        <a:srgbClr val="E3E9EC"/>
+                      </a:solidFill>
+                      <a:prstDash val="solid"/>
+                      <a:round/>
+                      <a:headEnd type="none" w="med" len="med"/>
+                      <a:tailEnd type="none" w="med" len="med"/>
+                    </a:lnL>
+                    <a:lnR w="12700" cap="flat" cmpd="sng" algn="ctr">
+                      <a:solidFill>
+                        <a:srgbClr val="E3E9EC"/>
+                      </a:solidFill>
+                      <a:prstDash val="solid"/>
+                      <a:round/>
+                      <a:headEnd type="none" w="med" len="med"/>
+                      <a:tailEnd type="none" w="med" len="med"/>
+                    </a:lnR>
+                    <a:lnT w="12700" cap="flat" cmpd="sng" algn="ctr">
+                      <a:solidFill>
+                        <a:srgbClr val="E3E9EC"/>
+                      </a:solidFill>
+                      <a:prstDash val="solid"/>
+                      <a:round/>
+                      <a:headEnd type="none" w="med" len="med"/>
+                      <a:tailEnd type="none" w="med" len="med"/>
+                    </a:lnT>
+                    <a:lnB w="12700" cap="flat" cmpd="sng" algn="ctr">
+                      <a:solidFill>
+                        <a:srgbClr val="E3E9EC"/>
+                      </a:solidFill>
+                      <a:prstDash val="solid"/>
+                      <a:round/>
+                      <a:headEnd type="none" w="med" len="med"/>
+                      <a:tailEnd type="none" w="med" len="med"/>
+                    </a:lnB>
+                    <a:solidFill>
+                      <a:srgbClr val="FFFFFF"/>
+                    </a:solidFill>
+                  </a:tcPr>
+                </a:tc>
+                <a:tc>
+                  <a:txBody>
+                    <a:bodyPr/>
+                    <a:lstStyle/>
+                    <a:p>
+                      <a:pPr algn="r" indent="0" marL="0">
+                        <a:buNone/>
+                      </a:pPr>
+                      <a:r>
+                        <a:rPr lang="en-US" sz="1050" dirty="0">
+                          <a:solidFill>
+                            <a:srgbClr val="55636E"/>
+                          </a:solidFill>
+                          <a:latin typeface="Calibri" pitchFamily="34" charset="0"/>
+                          <a:ea typeface="Calibri" pitchFamily="34" charset="-122"/>
+                          <a:cs typeface="Calibri" pitchFamily="34" charset="-120"/>
+                        </a:rPr>
+                        <a:t>0.7914</a:t>
+                      </a:r>
+                      <a:endParaRPr lang="en-US" sz="1050" dirty="0">
+                        <a:latin typeface="Calibri" charset="0"/>
+                        <a:ea typeface="Calibri" charset="0"/>
+                        <a:cs typeface="Calibri" charset="0"/>
+                      </a:endParaRPr>
+                    </a:p>
+                  </a:txBody>
+                  <a:tcPr marL="91440" marR="91440" marT="45720" marB="45720" anchor="ctr">
+                    <a:lnL w="12700" cap="flat" cmpd="sng" algn="ctr">
+                      <a:solidFill>
+                        <a:srgbClr val="E3E9EC"/>
+                      </a:solidFill>
+                      <a:prstDash val="solid"/>
+                      <a:round/>
+                      <a:headEnd type="none" w="med" len="med"/>
+                      <a:tailEnd type="none" w="med" len="med"/>
+                    </a:lnL>
+                    <a:lnR w="12700" cap="flat" cmpd="sng" algn="ctr">
+                      <a:solidFill>
+                        <a:srgbClr val="E3E9EC"/>
+                      </a:solidFill>
+                      <a:prstDash val="solid"/>
+                      <a:round/>
+                      <a:headEnd type="none" w="med" len="med"/>
+                      <a:tailEnd type="none" w="med" len="med"/>
+                    </a:lnR>
+                    <a:lnT w="12700" cap="flat" cmpd="sng" algn="ctr">
+                      <a:solidFill>
+                        <a:srgbClr val="E3E9EC"/>
+                      </a:solidFill>
+                      <a:prstDash val="solid"/>
+                      <a:round/>
+                      <a:headEnd type="none" w="med" len="med"/>
+                      <a:tailEnd type="none" w="med" len="med"/>
+                    </a:lnT>
+                    <a:lnB w="12700" cap="flat" cmpd="sng" algn="ctr">
+                      <a:solidFill>
+                        <a:srgbClr val="E3E9EC"/>
+                      </a:solidFill>
+                      <a:prstDash val="solid"/>
+                      <a:round/>
+                      <a:headEnd type="none" w="med" len="med"/>
+                      <a:tailEnd type="none" w="med" len="med"/>
+                    </a:lnB>
+                    <a:solidFill>
+                      <a:srgbClr val="FFFFFF"/>
+                    </a:solidFill>
+                  </a:tcPr>
+                </a:tc>
+                <a:tc>
+                  <a:txBody>
+                    <a:bodyPr/>
+                    <a:lstStyle/>
+                    <a:p>
+                      <a:pPr algn="r" indent="0" marL="0">
+                        <a:buNone/>
+                      </a:pPr>
+                      <a:r>
+                        <a:rPr lang="en-US" sz="1050" dirty="0">
+                          <a:solidFill>
+                            <a:srgbClr val="55636E"/>
+                          </a:solidFill>
+                          <a:latin typeface="Calibri" pitchFamily="34" charset="0"/>
+                          <a:ea typeface="Calibri" pitchFamily="34" charset="-122"/>
+                          <a:cs typeface="Calibri" pitchFamily="34" charset="-120"/>
+                        </a:rPr>
+                        <a:t>0.1932 ✓</a:t>
+                      </a:r>
+                      <a:endParaRPr lang="en-US" sz="1050" dirty="0">
+                        <a:latin typeface="Calibri" charset="0"/>
+                        <a:ea typeface="Calibri" charset="0"/>
+                        <a:cs typeface="Calibri" charset="0"/>
+                      </a:endParaRPr>
+                    </a:p>
+                  </a:txBody>
+                  <a:tcPr marL="91440" marR="91440" marT="45720" marB="45720" anchor="ctr">
+                    <a:lnL w="12700" cap="flat" cmpd="sng" algn="ctr">
+                      <a:solidFill>
+                        <a:srgbClr val="E3E9EC"/>
+                      </a:solidFill>
+                      <a:prstDash val="solid"/>
+                      <a:round/>
+                      <a:headEnd type="none" w="med" len="med"/>
+                      <a:tailEnd type="none" w="med" len="med"/>
+                    </a:lnL>
+                    <a:lnR w="12700" cap="flat" cmpd="sng" algn="ctr">
+                      <a:solidFill>
+                        <a:srgbClr val="E3E9EC"/>
+                      </a:solidFill>
+                      <a:prstDash val="solid"/>
+                      <a:round/>
+                      <a:headEnd type="none" w="med" len="med"/>
+                      <a:tailEnd type="none" w="med" len="med"/>
+                    </a:lnR>
+                    <a:lnT w="12700" cap="flat" cmpd="sng" algn="ctr">
+                      <a:solidFill>
+                        <a:srgbClr val="E3E9EC"/>
+                      </a:solidFill>
+                      <a:prstDash val="solid"/>
+                      <a:round/>
+                      <a:headEnd type="none" w="med" len="med"/>
+                      <a:tailEnd type="none" w="med" len="med"/>
+                    </a:lnT>
+                    <a:lnB w="12700" cap="flat" cmpd="sng" algn="ctr">
+                      <a:solidFill>
+                        <a:srgbClr val="E3E9EC"/>
+                      </a:solidFill>
+                      <a:prstDash val="solid"/>
+                      <a:round/>
+                      <a:headEnd type="none" w="med" len="med"/>
+                      <a:tailEnd type="none" w="med" len="med"/>
+                    </a:lnB>
+                    <a:solidFill>
+                      <a:srgbClr val="FFFFFF"/>
+                    </a:solidFill>
+                  </a:tcPr>
+                </a:tc>
+                <a:tc>
+                  <a:txBody>
+                    <a:bodyPr/>
+                    <a:lstStyle/>
+                    <a:p>
+                      <a:pPr algn="r" indent="0" marL="0">
+                        <a:buNone/>
+                      </a:pPr>
+                      <a:r>
+                        <a:rPr lang="en-US" sz="1050" dirty="0">
+                          <a:solidFill>
+                            <a:srgbClr val="55636E"/>
+                          </a:solidFill>
+                          <a:latin typeface="Calibri" pitchFamily="34" charset="0"/>
+                          <a:ea typeface="Calibri" pitchFamily="34" charset="-122"/>
+                          <a:cs typeface="Calibri" pitchFamily="34" charset="-120"/>
+                        </a:rPr>
+                        <a:t>−0.103</a:t>
+                      </a:r>
+                      <a:endParaRPr lang="en-US" sz="1050" dirty="0">
+                        <a:latin typeface="Calibri" charset="0"/>
+                        <a:ea typeface="Calibri" charset="0"/>
+                        <a:cs typeface="Calibri" charset="0"/>
+                      </a:endParaRPr>
+                    </a:p>
+                  </a:txBody>
+                  <a:tcPr marL="91440" marR="91440" marT="45720" marB="45720" anchor="ctr">
+                    <a:lnL w="12700" cap="flat" cmpd="sng" algn="ctr">
+                      <a:solidFill>
+                        <a:srgbClr val="E3E9EC"/>
+                      </a:solidFill>
+                      <a:prstDash val="solid"/>
+                      <a:round/>
+                      <a:headEnd type="none" w="med" len="med"/>
+                      <a:tailEnd type="none" w="med" len="med"/>
+                    </a:lnL>
+                    <a:lnR w="12700" cap="flat" cmpd="sng" algn="ctr">
+                      <a:solidFill>
+                        <a:srgbClr val="E3E9EC"/>
+                      </a:solidFill>
+                      <a:prstDash val="solid"/>
+                      <a:round/>
+                      <a:headEnd type="none" w="med" len="med"/>
+                      <a:tailEnd type="none" w="med" len="med"/>
+                    </a:lnR>
+                    <a:lnT w="12700" cap="flat" cmpd="sng" algn="ctr">
+                      <a:solidFill>
+                        <a:srgbClr val="E3E9EC"/>
+                      </a:solidFill>
+                      <a:prstDash val="solid"/>
+                      <a:round/>
+                      <a:headEnd type="none" w="med" len="med"/>
+                      <a:tailEnd type="none" w="med" len="med"/>
+                    </a:lnT>
+                    <a:lnB w="12700" cap="flat" cmpd="sng" algn="ctr">
+                      <a:solidFill>
+                        <a:srgbClr val="E3E9EC"/>
+                      </a:solidFill>
+                      <a:prstDash val="solid"/>
+                      <a:round/>
+                      <a:headEnd type="none" w="med" len="med"/>
+                      <a:tailEnd type="none" w="med" len="med"/>
+                    </a:lnB>
+                    <a:solidFill>
+                      <a:srgbClr val="FFFFFF"/>
+                    </a:solidFill>
+                  </a:tcPr>
+                </a:tc>
+                <a:tc>
+                  <a:txBody>
+                    <a:bodyPr/>
+                    <a:lstStyle/>
+                    <a:p>
+                      <a:pPr algn="l" indent="0" marL="0">
+                        <a:buNone/>
+                      </a:pPr>
+                      <a:r>
+                        <a:rPr lang="en-US" sz="1050" dirty="0">
+                          <a:solidFill>
+                            <a:srgbClr val="55636E"/>
+                          </a:solidFill>
+                          <a:latin typeface="맑은 고딕" pitchFamily="34" charset="0"/>
+                          <a:ea typeface="맑은 고딕" pitchFamily="34" charset="-122"/>
+                          <a:cs typeface="맑은 고딕" pitchFamily="34" charset="-120"/>
+                        </a:rPr>
+                        <a:t>둘 다 과소예측이 남는다</a:t>
+                      </a:r>
+                      <a:endParaRPr lang="en-US" sz="1050" dirty="0">
+                        <a:latin typeface="맑은 고딕" charset="0"/>
+                        <a:ea typeface="맑은 고딕" charset="0"/>
+                        <a:cs typeface="맑은 고딕" charset="0"/>
+                      </a:endParaRPr>
+                    </a:p>
+                  </a:txBody>
+                  <a:tcPr marL="91440" marR="91440" marT="45720" marB="45720" anchor="ctr">
+                    <a:lnL w="12700" cap="flat" cmpd="sng" algn="ctr">
+                      <a:solidFill>
+                        <a:srgbClr val="E3E9EC"/>
+                      </a:solidFill>
+                      <a:prstDash val="solid"/>
+                      <a:round/>
+                      <a:headEnd type="none" w="med" len="med"/>
+                      <a:tailEnd type="none" w="med" len="med"/>
+                    </a:lnL>
+                    <a:lnR w="12700" cap="flat" cmpd="sng" algn="ctr">
+                      <a:solidFill>
+                        <a:srgbClr val="E3E9EC"/>
+                      </a:solidFill>
+                      <a:prstDash val="solid"/>
+                      <a:round/>
+                      <a:headEnd type="none" w="med" len="med"/>
+                      <a:tailEnd type="none" w="med" len="med"/>
+                    </a:lnR>
+                    <a:lnT w="12700" cap="flat" cmpd="sng" algn="ctr">
+                      <a:solidFill>
+                        <a:srgbClr val="E3E9EC"/>
+                      </a:solidFill>
+                      <a:prstDash val="solid"/>
+                      <a:round/>
+                      <a:headEnd type="none" w="med" len="med"/>
+                      <a:tailEnd type="none" w="med" len="med"/>
+                    </a:lnT>
+                    <a:lnB w="12700" cap="flat" cmpd="sng" algn="ctr">
+                      <a:solidFill>
+                        <a:srgbClr val="E3E9EC"/>
+                      </a:solidFill>
+                      <a:prstDash val="solid"/>
+                      <a:round/>
+                      <a:headEnd type="none" w="med" len="med"/>
+                      <a:tailEnd type="none" w="med" len="med"/>
+                    </a:lnB>
+                    <a:solidFill>
+                      <a:srgbClr val="FFFFFF"/>
+                    </a:solidFill>
+                  </a:tcPr>
+                </a:tc>
+              </a:tr>
+              <a:tr h="329184">
+                <a:tc>
+                  <a:txBody>
+                    <a:bodyPr/>
+                    <a:lstStyle/>
+                    <a:p>
+                      <a:pPr algn="l" indent="0" marL="0">
+                        <a:buNone/>
+                      </a:pPr>
+                      <a:r>
+                        <a:rPr lang="en-US" sz="1050" dirty="0">
+                          <a:solidFill>
+                            <a:srgbClr val="55636E"/>
+                          </a:solidFill>
+                          <a:latin typeface="맑은 고딕" pitchFamily="34" charset="0"/>
+                          <a:ea typeface="맑은 고딕" pitchFamily="34" charset="-122"/>
+                          <a:cs typeface="맑은 고딕" pitchFamily="34" charset="-120"/>
+                        </a:rPr>
+                        <a:t>J</a:t>
+                      </a:r>
+                      <a:endParaRPr lang="en-US" sz="1050" dirty="0">
+                        <a:latin typeface="맑은 고딕" charset="0"/>
+                        <a:ea typeface="맑은 고딕" charset="0"/>
+                        <a:cs typeface="맑은 고딕" charset="0"/>
+                      </a:endParaRPr>
+                    </a:p>
+                  </a:txBody>
+                  <a:tcPr marL="91440" marR="91440" marT="45720" marB="45720" anchor="ctr">
+                    <a:lnL w="12700" cap="flat" cmpd="sng" algn="ctr">
+                      <a:solidFill>
+                        <a:srgbClr val="E3E9EC"/>
+                      </a:solidFill>
+                      <a:prstDash val="solid"/>
+                      <a:round/>
+                      <a:headEnd type="none" w="med" len="med"/>
+                      <a:tailEnd type="none" w="med" len="med"/>
+                    </a:lnL>
+                    <a:lnR w="12700" cap="flat" cmpd="sng" algn="ctr">
+                      <a:solidFill>
+                        <a:srgbClr val="E3E9EC"/>
+                      </a:solidFill>
+                      <a:prstDash val="solid"/>
+                      <a:round/>
+                      <a:headEnd type="none" w="med" len="med"/>
+                      <a:tailEnd type="none" w="med" len="med"/>
+                    </a:lnR>
+                    <a:lnT w="12700" cap="flat" cmpd="sng" algn="ctr">
+                      <a:solidFill>
+                        <a:srgbClr val="E3E9EC"/>
+                      </a:solidFill>
+                      <a:prstDash val="solid"/>
+                      <a:round/>
+                      <a:headEnd type="none" w="med" len="med"/>
+                      <a:tailEnd type="none" w="med" len="med"/>
+                    </a:lnT>
+                    <a:lnB w="12700" cap="flat" cmpd="sng" algn="ctr">
+                      <a:solidFill>
+                        <a:srgbClr val="E3E9EC"/>
+                      </a:solidFill>
+                      <a:prstDash val="solid"/>
+                      <a:round/>
+                      <a:headEnd type="none" w="med" len="med"/>
+                      <a:tailEnd type="none" w="med" len="med"/>
+                    </a:lnB>
+                    <a:solidFill>
+                      <a:srgbClr val="FFFFFF"/>
+                    </a:solidFill>
+                  </a:tcPr>
+                </a:tc>
+                <a:tc>
+                  <a:txBody>
+                    <a:bodyPr/>
+                    <a:lstStyle/>
+                    <a:p>
+                      <a:pPr algn="l" indent="0" marL="0">
+                        <a:buNone/>
+                      </a:pPr>
+                      <a:r>
+                        <a:rPr lang="en-US" sz="1050" dirty="0">
+                          <a:solidFill>
+                            <a:srgbClr val="55636E"/>
+                          </a:solidFill>
+                          <a:latin typeface="맑은 고딕" pitchFamily="34" charset="0"/>
+                          <a:ea typeface="맑은 고딕" pitchFamily="34" charset="-122"/>
+                          <a:cs typeface="맑은 고딕" pitchFamily="34" charset="-120"/>
+                        </a:rPr>
+                        <a:t>b만 학습</a:t>
+                      </a:r>
+                      <a:endParaRPr lang="en-US" sz="1050" dirty="0">
+                        <a:latin typeface="맑은 고딕" charset="0"/>
+                        <a:ea typeface="맑은 고딕" charset="0"/>
+                        <a:cs typeface="맑은 고딕" charset="0"/>
+                      </a:endParaRPr>
+                    </a:p>
+                  </a:txBody>
+                  <a:tcPr marL="91440" marR="91440" marT="45720" marB="45720" anchor="ctr">
+                    <a:lnL w="12700" cap="flat" cmpd="sng" algn="ctr">
+                      <a:solidFill>
+                        <a:srgbClr val="E3E9EC"/>
+                      </a:solidFill>
+                      <a:prstDash val="solid"/>
+                      <a:round/>
+                      <a:headEnd type="none" w="med" len="med"/>
+                      <a:tailEnd type="none" w="med" len="med"/>
+                    </a:lnL>
+                    <a:lnR w="12700" cap="flat" cmpd="sng" algn="ctr">
+                      <a:solidFill>
+                        <a:srgbClr val="E3E9EC"/>
+                      </a:solidFill>
+                      <a:prstDash val="solid"/>
+                      <a:round/>
+                      <a:headEnd type="none" w="med" len="med"/>
+                      <a:tailEnd type="none" w="med" len="med"/>
+                    </a:lnR>
+                    <a:lnT w="12700" cap="flat" cmpd="sng" algn="ctr">
+                      <a:solidFill>
+                        <a:srgbClr val="E3E9EC"/>
+                      </a:solidFill>
+                      <a:prstDash val="solid"/>
+                      <a:round/>
+                      <a:headEnd type="none" w="med" len="med"/>
+                      <a:tailEnd type="none" w="med" len="med"/>
+                    </a:lnT>
+                    <a:lnB w="12700" cap="flat" cmpd="sng" algn="ctr">
+                      <a:solidFill>
+                        <a:srgbClr val="E3E9EC"/>
+                      </a:solidFill>
+                      <a:prstDash val="solid"/>
+                      <a:round/>
+                      <a:headEnd type="none" w="med" len="med"/>
+                      <a:tailEnd type="none" w="med" len="med"/>
+                    </a:lnB>
+                    <a:solidFill>
+                      <a:srgbClr val="FFFFFF"/>
+                    </a:solidFill>
+                  </a:tcPr>
+                </a:tc>
+                <a:tc>
+                  <a:txBody>
+                    <a:bodyPr/>
+                    <a:lstStyle/>
+                    <a:p>
+                      <a:pPr algn="r" indent="0" marL="0">
+                        <a:buNone/>
+                      </a:pPr>
+                      <a:r>
+                        <a:rPr lang="en-US" sz="1050" dirty="0">
+                          <a:solidFill>
+                            <a:srgbClr val="55636E"/>
+                          </a:solidFill>
+                          <a:latin typeface="맑은 고딕" pitchFamily="34" charset="0"/>
+                          <a:ea typeface="맑은 고딕" pitchFamily="34" charset="-122"/>
+                          <a:cs typeface="맑은 고딕" pitchFamily="34" charset="-120"/>
+                        </a:rPr>
+                        <a:t>2</a:t>
+                      </a:r>
+                      <a:endParaRPr lang="en-US" sz="1050" dirty="0">
+                        <a:latin typeface="맑은 고딕" charset="0"/>
+                        <a:ea typeface="맑은 고딕" charset="0"/>
+                        <a:cs typeface="맑은 고딕" charset="0"/>
+                      </a:endParaRPr>
+                    </a:p>
+                  </a:txBody>
+                  <a:tcPr marL="91440" marR="91440" marT="45720" marB="45720" anchor="ctr">
+                    <a:lnL w="12700" cap="flat" cmpd="sng" algn="ctr">
+                      <a:solidFill>
+                        <a:srgbClr val="E3E9EC"/>
+                      </a:solidFill>
+                      <a:prstDash val="solid"/>
+                      <a:round/>
+                      <a:headEnd type="none" w="med" len="med"/>
+                      <a:tailEnd type="none" w="med" len="med"/>
+                    </a:lnL>
+                    <a:lnR w="12700" cap="flat" cmpd="sng" algn="ctr">
+                      <a:solidFill>
+                        <a:srgbClr val="E3E9EC"/>
+                      </a:solidFill>
+                      <a:prstDash val="solid"/>
+                      <a:round/>
+                      <a:headEnd type="none" w="med" len="med"/>
+                      <a:tailEnd type="none" w="med" len="med"/>
+                    </a:lnR>
+                    <a:lnT w="12700" cap="flat" cmpd="sng" algn="ctr">
+                      <a:solidFill>
+                        <a:srgbClr val="E3E9EC"/>
+                      </a:solidFill>
+                      <a:prstDash val="solid"/>
+                      <a:round/>
+                      <a:headEnd type="none" w="med" len="med"/>
+                      <a:tailEnd type="none" w="med" len="med"/>
+                    </a:lnT>
+                    <a:lnB w="12700" cap="flat" cmpd="sng" algn="ctr">
+                      <a:solidFill>
+                        <a:srgbClr val="E3E9EC"/>
+                      </a:solidFill>
+                      <a:prstDash val="solid"/>
+                      <a:round/>
+                      <a:headEnd type="none" w="med" len="med"/>
+                      <a:tailEnd type="none" w="med" len="med"/>
+                    </a:lnB>
+                    <a:solidFill>
+                      <a:srgbClr val="FFFFFF"/>
+                    </a:solidFill>
+                  </a:tcPr>
+                </a:tc>
+                <a:tc>
+                  <a:txBody>
+                    <a:bodyPr/>
+                    <a:lstStyle/>
+                    <a:p>
+                      <a:pPr algn="r" indent="0" marL="0">
+                        <a:buNone/>
+                      </a:pPr>
+                      <a:r>
+                        <a:rPr lang="en-US" sz="1050" dirty="0">
+                          <a:solidFill>
+                            <a:srgbClr val="55636E"/>
+                          </a:solidFill>
+                          <a:latin typeface="Calibri" pitchFamily="34" charset="0"/>
+                          <a:ea typeface="Calibri" pitchFamily="34" charset="-122"/>
+                          <a:cs typeface="Calibri" pitchFamily="34" charset="-120"/>
+                        </a:rPr>
+                        <a:t>0.8466</a:t>
+                      </a:r>
+                      <a:endParaRPr lang="en-US" sz="1050" dirty="0">
+                        <a:latin typeface="Calibri" charset="0"/>
+                        <a:ea typeface="Calibri" charset="0"/>
+                        <a:cs typeface="Calibri" charset="0"/>
+                      </a:endParaRPr>
+                    </a:p>
+                  </a:txBody>
+                  <a:tcPr marL="91440" marR="91440" marT="45720" marB="45720" anchor="ctr">
+                    <a:lnL w="12700" cap="flat" cmpd="sng" algn="ctr">
+                      <a:solidFill>
+                        <a:srgbClr val="E3E9EC"/>
+                      </a:solidFill>
+                      <a:prstDash val="solid"/>
+                      <a:round/>
+                      <a:headEnd type="none" w="med" len="med"/>
+                      <a:tailEnd type="none" w="med" len="med"/>
+                    </a:lnL>
+                    <a:lnR w="12700" cap="flat" cmpd="sng" algn="ctr">
+                      <a:solidFill>
+                        <a:srgbClr val="E3E9EC"/>
+                      </a:solidFill>
+                      <a:prstDash val="solid"/>
+                      <a:round/>
+                      <a:headEnd type="none" w="med" len="med"/>
+                      <a:tailEnd type="none" w="med" len="med"/>
+                    </a:lnR>
+                    <a:lnT w="12700" cap="flat" cmpd="sng" algn="ctr">
+                      <a:solidFill>
+                        <a:srgbClr val="E3E9EC"/>
+                      </a:solidFill>
+                      <a:prstDash val="solid"/>
+                      <a:round/>
+                      <a:headEnd type="none" w="med" len="med"/>
+                      <a:tailEnd type="none" w="med" len="med"/>
+                    </a:lnT>
+                    <a:lnB w="12700" cap="flat" cmpd="sng" algn="ctr">
+                      <a:solidFill>
+                        <a:srgbClr val="E3E9EC"/>
+                      </a:solidFill>
+                      <a:prstDash val="solid"/>
+                      <a:round/>
+                      <a:headEnd type="none" w="med" len="med"/>
+                      <a:tailEnd type="none" w="med" len="med"/>
+                    </a:lnB>
+                    <a:solidFill>
+                      <a:srgbClr val="FFFFFF"/>
+                    </a:solidFill>
+                  </a:tcPr>
+                </a:tc>
+                <a:tc>
+                  <a:txBody>
+                    <a:bodyPr/>
+                    <a:lstStyle/>
+                    <a:p>
+                      <a:pPr algn="r" indent="0" marL="0">
+                        <a:buNone/>
+                      </a:pPr>
+                      <a:r>
+                        <a:rPr lang="en-US" sz="1050" dirty="0">
+                          <a:solidFill>
+                            <a:srgbClr val="55636E"/>
+                          </a:solidFill>
+                          <a:latin typeface="Calibri" pitchFamily="34" charset="0"/>
+                          <a:ea typeface="Calibri" pitchFamily="34" charset="-122"/>
+                          <a:cs typeface="Calibri" pitchFamily="34" charset="-120"/>
+                        </a:rPr>
+                        <a:t>0.1469 ✓</a:t>
+                      </a:r>
+                      <a:endParaRPr lang="en-US" sz="1050" dirty="0">
+                        <a:latin typeface="Calibri" charset="0"/>
+                        <a:ea typeface="Calibri" charset="0"/>
+                        <a:cs typeface="Calibri" charset="0"/>
+                      </a:endParaRPr>
+                    </a:p>
+                  </a:txBody>
+                  <a:tcPr marL="91440" marR="91440" marT="45720" marB="45720" anchor="ctr">
+                    <a:lnL w="12700" cap="flat" cmpd="sng" algn="ctr">
+                      <a:solidFill>
+                        <a:srgbClr val="E3E9EC"/>
+                      </a:solidFill>
+                      <a:prstDash val="solid"/>
+                      <a:round/>
+                      <a:headEnd type="none" w="med" len="med"/>
+                      <a:tailEnd type="none" w="med" len="med"/>
+                    </a:lnL>
+                    <a:lnR w="12700" cap="flat" cmpd="sng" algn="ctr">
+                      <a:solidFill>
+                        <a:srgbClr val="E3E9EC"/>
+                      </a:solidFill>
+                      <a:prstDash val="solid"/>
+                      <a:round/>
+                      <a:headEnd type="none" w="med" len="med"/>
+                      <a:tailEnd type="none" w="med" len="med"/>
+                    </a:lnR>
+                    <a:lnT w="12700" cap="flat" cmpd="sng" algn="ctr">
+                      <a:solidFill>
+                        <a:srgbClr val="E3E9EC"/>
+                      </a:solidFill>
+                      <a:prstDash val="solid"/>
+                      <a:round/>
+                      <a:headEnd type="none" w="med" len="med"/>
+                      <a:tailEnd type="none" w="med" len="med"/>
+                    </a:lnT>
+                    <a:lnB w="12700" cap="flat" cmpd="sng" algn="ctr">
+                      <a:solidFill>
+                        <a:srgbClr val="E3E9EC"/>
+                      </a:solidFill>
+                      <a:prstDash val="solid"/>
+                      <a:round/>
+                      <a:headEnd type="none" w="med" len="med"/>
+                      <a:tailEnd type="none" w="med" len="med"/>
+                    </a:lnB>
+                    <a:solidFill>
+                      <a:srgbClr val="FFFFFF"/>
+                    </a:solidFill>
+                  </a:tcPr>
+                </a:tc>
+                <a:tc>
+                  <a:txBody>
+                    <a:bodyPr/>
+                    <a:lstStyle/>
+                    <a:p>
+                      <a:pPr algn="r" indent="0" marL="0">
+                        <a:buNone/>
+                      </a:pPr>
+                      <a:r>
+                        <a:rPr lang="en-US" sz="1050" dirty="0">
+                          <a:solidFill>
+                            <a:srgbClr val="55636E"/>
+                          </a:solidFill>
+                          <a:latin typeface="Calibri" pitchFamily="34" charset="0"/>
+                          <a:ea typeface="Calibri" pitchFamily="34" charset="-122"/>
+                          <a:cs typeface="Calibri" pitchFamily="34" charset="-120"/>
+                        </a:rPr>
+                        <a:t>+0.083</a:t>
+                      </a:r>
+                      <a:endParaRPr lang="en-US" sz="1050" dirty="0">
+                        <a:latin typeface="Calibri" charset="0"/>
+                        <a:ea typeface="Calibri" charset="0"/>
+                        <a:cs typeface="Calibri" charset="0"/>
+                      </a:endParaRPr>
+                    </a:p>
+                  </a:txBody>
+                  <a:tcPr marL="91440" marR="91440" marT="45720" marB="45720" anchor="ctr">
+                    <a:lnL w="12700" cap="flat" cmpd="sng" algn="ctr">
+                      <a:solidFill>
+                        <a:srgbClr val="E3E9EC"/>
+                      </a:solidFill>
+                      <a:prstDash val="solid"/>
+                      <a:round/>
+                      <a:headEnd type="none" w="med" len="med"/>
+                      <a:tailEnd type="none" w="med" len="med"/>
+                    </a:lnL>
+                    <a:lnR w="12700" cap="flat" cmpd="sng" algn="ctr">
+                      <a:solidFill>
+                        <a:srgbClr val="E3E9EC"/>
+                      </a:solidFill>
+                      <a:prstDash val="solid"/>
+                      <a:round/>
+                      <a:headEnd type="none" w="med" len="med"/>
+                      <a:tailEnd type="none" w="med" len="med"/>
+                    </a:lnR>
+                    <a:lnT w="12700" cap="flat" cmpd="sng" algn="ctr">
+                      <a:solidFill>
+                        <a:srgbClr val="E3E9EC"/>
+                      </a:solidFill>
+                      <a:prstDash val="solid"/>
+                      <a:round/>
+                      <a:headEnd type="none" w="med" len="med"/>
+                      <a:tailEnd type="none" w="med" len="med"/>
+                    </a:lnT>
+                    <a:lnB w="12700" cap="flat" cmpd="sng" algn="ctr">
+                      <a:solidFill>
+                        <a:srgbClr val="E3E9EC"/>
+                      </a:solidFill>
+                      <a:prstDash val="solid"/>
+                      <a:round/>
+                      <a:headEnd type="none" w="med" len="med"/>
+                      <a:tailEnd type="none" w="med" len="med"/>
+                    </a:lnB>
+                    <a:solidFill>
+                      <a:srgbClr val="FFFFFF"/>
+                    </a:solidFill>
+                  </a:tcPr>
+                </a:tc>
+                <a:tc>
+                  <a:txBody>
+                    <a:bodyPr/>
+                    <a:lstStyle/>
+                    <a:p>
+                      <a:pPr algn="r" indent="0" marL="0">
+                        <a:buNone/>
+                      </a:pPr>
+                      <a:r>
+                        <a:rPr lang="en-US" sz="1050" dirty="0">
+                          <a:solidFill>
+                            <a:srgbClr val="55636E"/>
+                          </a:solidFill>
+                          <a:latin typeface="Calibri" pitchFamily="34" charset="0"/>
+                          <a:ea typeface="Calibri" pitchFamily="34" charset="-122"/>
+                          <a:cs typeface="Calibri" pitchFamily="34" charset="-120"/>
+                        </a:rPr>
+                        <a:t>0.8100</a:t>
+                      </a:r>
+                      <a:endParaRPr lang="en-US" sz="1050" dirty="0">
+                        <a:latin typeface="Calibri" charset="0"/>
+                        <a:ea typeface="Calibri" charset="0"/>
+                        <a:cs typeface="Calibri" charset="0"/>
+                      </a:endParaRPr>
+                    </a:p>
+                  </a:txBody>
+                  <a:tcPr marL="91440" marR="91440" marT="45720" marB="45720" anchor="ctr">
+                    <a:lnL w="12700" cap="flat" cmpd="sng" algn="ctr">
+                      <a:solidFill>
+                        <a:srgbClr val="E3E9EC"/>
+                      </a:solidFill>
+                      <a:prstDash val="solid"/>
+                      <a:round/>
+                      <a:headEnd type="none" w="med" len="med"/>
+                      <a:tailEnd type="none" w="med" len="med"/>
+                    </a:lnL>
+                    <a:lnR w="12700" cap="flat" cmpd="sng" algn="ctr">
+                      <a:solidFill>
+                        <a:srgbClr val="E3E9EC"/>
+                      </a:solidFill>
+                      <a:prstDash val="solid"/>
+                      <a:round/>
+                      <a:headEnd type="none" w="med" len="med"/>
+                      <a:tailEnd type="none" w="med" len="med"/>
+                    </a:lnR>
+                    <a:lnT w="12700" cap="flat" cmpd="sng" algn="ctr">
+                      <a:solidFill>
+                        <a:srgbClr val="E3E9EC"/>
+                      </a:solidFill>
+                      <a:prstDash val="solid"/>
+                      <a:round/>
+                      <a:headEnd type="none" w="med" len="med"/>
+                      <a:tailEnd type="none" w="med" len="med"/>
+                    </a:lnT>
+                    <a:lnB w="12700" cap="flat" cmpd="sng" algn="ctr">
+                      <a:solidFill>
+                        <a:srgbClr val="E3E9EC"/>
+                      </a:solidFill>
+                      <a:prstDash val="solid"/>
+                      <a:round/>
+                      <a:headEnd type="none" w="med" len="med"/>
+                      <a:tailEnd type="none" w="med" len="med"/>
+                    </a:lnB>
+                    <a:solidFill>
+                      <a:srgbClr val="FFFFFF"/>
+                    </a:solidFill>
+                  </a:tcPr>
+                </a:tc>
+                <a:tc>
+                  <a:txBody>
+                    <a:bodyPr/>
+                    <a:lstStyle/>
+                    <a:p>
+                      <a:pPr algn="r" indent="0" marL="0">
+                        <a:buNone/>
+                      </a:pPr>
+                      <a:r>
+                        <a:rPr lang="en-US" sz="1050" dirty="0">
+                          <a:solidFill>
+                            <a:srgbClr val="55636E"/>
+                          </a:solidFill>
+                          <a:latin typeface="Calibri" pitchFamily="34" charset="0"/>
+                          <a:ea typeface="Calibri" pitchFamily="34" charset="-122"/>
+                          <a:cs typeface="Calibri" pitchFamily="34" charset="-120"/>
+                        </a:rPr>
+                        <a:t>0.2217 ✓</a:t>
+                      </a:r>
+                      <a:endParaRPr lang="en-US" sz="1050" dirty="0">
+                        <a:latin typeface="Calibri" charset="0"/>
+                        <a:ea typeface="Calibri" charset="0"/>
+                        <a:cs typeface="Calibri" charset="0"/>
+                      </a:endParaRPr>
+                    </a:p>
+                  </a:txBody>
+                  <a:tcPr marL="91440" marR="91440" marT="45720" marB="45720" anchor="ctr">
+                    <a:lnL w="12700" cap="flat" cmpd="sng" algn="ctr">
+                      <a:solidFill>
+                        <a:srgbClr val="E3E9EC"/>
+                      </a:solidFill>
+                      <a:prstDash val="solid"/>
+                      <a:round/>
+                      <a:headEnd type="none" w="med" len="med"/>
+                      <a:tailEnd type="none" w="med" len="med"/>
+                    </a:lnL>
+                    <a:lnR w="12700" cap="flat" cmpd="sng" algn="ctr">
+                      <a:solidFill>
+                        <a:srgbClr val="E3E9EC"/>
+                      </a:solidFill>
+                      <a:prstDash val="solid"/>
+                      <a:round/>
+                      <a:headEnd type="none" w="med" len="med"/>
+                      <a:tailEnd type="none" w="med" len="med"/>
+                    </a:lnR>
+                    <a:lnT w="12700" cap="flat" cmpd="sng" algn="ctr">
+                      <a:solidFill>
+                        <a:srgbClr val="E3E9EC"/>
+                      </a:solidFill>
+                      <a:prstDash val="solid"/>
+                      <a:round/>
+                      <a:headEnd type="none" w="med" len="med"/>
+                      <a:tailEnd type="none" w="med" len="med"/>
+                    </a:lnT>
+                    <a:lnB w="12700" cap="flat" cmpd="sng" algn="ctr">
+                      <a:solidFill>
+                        <a:srgbClr val="E3E9EC"/>
+                      </a:solidFill>
+                      <a:prstDash val="solid"/>
+                      <a:round/>
+                      <a:headEnd type="none" w="med" len="med"/>
+                      <a:tailEnd type="none" w="med" len="med"/>
+                    </a:lnB>
+                    <a:solidFill>
+                      <a:srgbClr val="FFFFFF"/>
+                    </a:solidFill>
+                  </a:tcPr>
+                </a:tc>
+                <a:tc>
+                  <a:txBody>
+                    <a:bodyPr/>
+                    <a:lstStyle/>
+                    <a:p>
+                      <a:pPr algn="r" indent="0" marL="0">
+                        <a:buNone/>
+                      </a:pPr>
+                      <a:r>
+                        <a:rPr lang="en-US" sz="1050" dirty="0">
+                          <a:solidFill>
+                            <a:srgbClr val="55636E"/>
+                          </a:solidFill>
+                          <a:latin typeface="Calibri" pitchFamily="34" charset="0"/>
+                          <a:ea typeface="Calibri" pitchFamily="34" charset="-122"/>
+                          <a:cs typeface="Calibri" pitchFamily="34" charset="-120"/>
+                        </a:rPr>
+                        <a:t>−0.192</a:t>
+                      </a:r>
+                      <a:endParaRPr lang="en-US" sz="1050" dirty="0">
+                        <a:latin typeface="Calibri" charset="0"/>
+                        <a:ea typeface="Calibri" charset="0"/>
+                        <a:cs typeface="Calibri" charset="0"/>
+                      </a:endParaRPr>
+                    </a:p>
+                  </a:txBody>
+                  <a:tcPr marL="91440" marR="91440" marT="45720" marB="45720" anchor="ctr">
+                    <a:lnL w="12700" cap="flat" cmpd="sng" algn="ctr">
+                      <a:solidFill>
+                        <a:srgbClr val="E3E9EC"/>
+                      </a:solidFill>
+                      <a:prstDash val="solid"/>
+                      <a:round/>
+                      <a:headEnd type="none" w="med" len="med"/>
+                      <a:tailEnd type="none" w="med" len="med"/>
+                    </a:lnL>
+                    <a:lnR w="12700" cap="flat" cmpd="sng" algn="ctr">
+                      <a:solidFill>
+                        <a:srgbClr val="E3E9EC"/>
+                      </a:solidFill>
+                      <a:prstDash val="solid"/>
+                      <a:round/>
+                      <a:headEnd type="none" w="med" len="med"/>
+                      <a:tailEnd type="none" w="med" len="med"/>
+                    </a:lnR>
+                    <a:lnT w="12700" cap="flat" cmpd="sng" algn="ctr">
+                      <a:solidFill>
+                        <a:srgbClr val="E3E9EC"/>
+                      </a:solidFill>
+                      <a:prstDash val="solid"/>
+                      <a:round/>
+                      <a:headEnd type="none" w="med" len="med"/>
+                      <a:tailEnd type="none" w="med" len="med"/>
+                    </a:lnT>
+                    <a:lnB w="12700" cap="flat" cmpd="sng" algn="ctr">
+                      <a:solidFill>
+                        <a:srgbClr val="E3E9EC"/>
+                      </a:solidFill>
+                      <a:prstDash val="solid"/>
+                      <a:round/>
+                      <a:headEnd type="none" w="med" len="med"/>
+                      <a:tailEnd type="none" w="med" len="med"/>
+                    </a:lnB>
+                    <a:solidFill>
+                      <a:srgbClr val="FFFFFF"/>
+                    </a:solidFill>
+                  </a:tcPr>
+                </a:tc>
+                <a:tc>
+                  <a:txBody>
+                    <a:bodyPr/>
+                    <a:lstStyle/>
+                    <a:p>
+                      <a:pPr algn="l" indent="0" marL="0">
+                        <a:buNone/>
+                      </a:pPr>
+                      <a:r>
+                        <a:rPr lang="en-US" sz="1050" dirty="0">
+                          <a:solidFill>
+                            <a:srgbClr val="55636E"/>
+                          </a:solidFill>
+                          <a:latin typeface="맑은 고딕" pitchFamily="34" charset="0"/>
+                          <a:ea typeface="맑은 고딕" pitchFamily="34" charset="-122"/>
+                          <a:cs typeface="맑은 고딕" pitchFamily="34" charset="-120"/>
+                        </a:rPr>
+                        <a:t>LQ 순위 1위, LQ 눈금이 처진다</a:t>
+                      </a:r>
+                      <a:endParaRPr lang="en-US" sz="1050" dirty="0">
+                        <a:latin typeface="맑은 고딕" charset="0"/>
+                        <a:ea typeface="맑은 고딕" charset="0"/>
+                        <a:cs typeface="맑은 고딕" charset="0"/>
+                      </a:endParaRPr>
+                    </a:p>
+                  </a:txBody>
+                  <a:tcPr marL="91440" marR="91440" marT="45720" marB="45720" anchor="ctr">
+                    <a:lnL w="12700" cap="flat" cmpd="sng" algn="ctr">
+                      <a:solidFill>
+                        <a:srgbClr val="E3E9EC"/>
+                      </a:solidFill>
+                      <a:prstDash val="solid"/>
+                      <a:round/>
+                      <a:headEnd type="none" w="med" len="med"/>
+                      <a:tailEnd type="none" w="med" len="med"/>
+                    </a:lnL>
+                    <a:lnR w="12700" cap="flat" cmpd="sng" algn="ctr">
+                      <a:solidFill>
+                        <a:srgbClr val="E3E9EC"/>
+                      </a:solidFill>
+                      <a:prstDash val="solid"/>
+                      <a:round/>
+                      <a:headEnd type="none" w="med" len="med"/>
+                      <a:tailEnd type="none" w="med" len="med"/>
+                    </a:lnR>
+                    <a:lnT w="12700" cap="flat" cmpd="sng" algn="ctr">
+                      <a:solidFill>
+                        <a:srgbClr val="E3E9EC"/>
+                      </a:solidFill>
+                      <a:prstDash val="solid"/>
+                      <a:round/>
+                      <a:headEnd type="none" w="med" len="med"/>
+                      <a:tailEnd type="none" w="med" len="med"/>
+                    </a:lnT>
+                    <a:lnB w="12700" cap="flat" cmpd="sng" algn="ctr">
+                      <a:solidFill>
+                        <a:srgbClr val="E3E9EC"/>
+                      </a:solidFill>
+                      <a:prstDash val="solid"/>
+                      <a:round/>
+                      <a:headEnd type="none" w="med" len="med"/>
+                      <a:tailEnd type="none" w="med" len="med"/>
+                    </a:lnB>
+                    <a:solidFill>
+                      <a:srgbClr val="FFFFFF"/>
+                    </a:solidFill>
+                  </a:tcPr>
+                </a:tc>
+              </a:tr>
+              <a:tr h="329184">
+                <a:tc>
+                  <a:txBody>
+                    <a:bodyPr/>
+                    <a:lstStyle/>
+                    <a:p>
+                      <a:pPr algn="l" indent="0" marL="0">
+                        <a:buNone/>
+                      </a:pPr>
+                      <a:r>
+                        <a:rPr lang="en-US" sz="1050" dirty="0">
+                          <a:solidFill>
+                            <a:srgbClr val="55636E"/>
+                          </a:solidFill>
+                          <a:latin typeface="맑은 고딕" pitchFamily="34" charset="0"/>
+                          <a:ea typeface="맑은 고딕" pitchFamily="34" charset="-122"/>
+                          <a:cs typeface="맑은 고딕" pitchFamily="34" charset="-120"/>
+                        </a:rPr>
+                        <a:t>A</a:t>
+                      </a:r>
+                      <a:endParaRPr lang="en-US" sz="1050" dirty="0">
+                        <a:latin typeface="맑은 고딕" charset="0"/>
+                        <a:ea typeface="맑은 고딕" charset="0"/>
+                        <a:cs typeface="맑은 고딕" charset="0"/>
+                      </a:endParaRPr>
+                    </a:p>
+                  </a:txBody>
+                  <a:tcPr marL="91440" marR="91440" marT="45720" marB="45720" anchor="ctr">
+                    <a:lnL w="12700" cap="flat" cmpd="sng" algn="ctr">
+                      <a:solidFill>
+                        <a:srgbClr val="E3E9EC"/>
+                      </a:solidFill>
+                      <a:prstDash val="solid"/>
+                      <a:round/>
+                      <a:headEnd type="none" w="med" len="med"/>
+                      <a:tailEnd type="none" w="med" len="med"/>
+                    </a:lnL>
+                    <a:lnR w="12700" cap="flat" cmpd="sng" algn="ctr">
+                      <a:solidFill>
+                        <a:srgbClr val="E3E9EC"/>
+                      </a:solidFill>
+                      <a:prstDash val="solid"/>
+                      <a:round/>
+                      <a:headEnd type="none" w="med" len="med"/>
+                      <a:tailEnd type="none" w="med" len="med"/>
+                    </a:lnR>
+                    <a:lnT w="12700" cap="flat" cmpd="sng" algn="ctr">
+                      <a:solidFill>
+                        <a:srgbClr val="E3E9EC"/>
+                      </a:solidFill>
+                      <a:prstDash val="solid"/>
+                      <a:round/>
+                      <a:headEnd type="none" w="med" len="med"/>
+                      <a:tailEnd type="none" w="med" len="med"/>
+                    </a:lnT>
+                    <a:lnB w="12700" cap="flat" cmpd="sng" algn="ctr">
+                      <a:solidFill>
+                        <a:srgbClr val="E3E9EC"/>
+                      </a:solidFill>
+                      <a:prstDash val="solid"/>
+                      <a:round/>
+                      <a:headEnd type="none" w="med" len="med"/>
+                      <a:tailEnd type="none" w="med" len="med"/>
+                    </a:lnB>
+                    <a:solidFill>
+                      <a:srgbClr val="FFFFFF"/>
+                    </a:solidFill>
+                  </a:tcPr>
+                </a:tc>
+                <a:tc>
+                  <a:txBody>
+                    <a:bodyPr/>
+                    <a:lstStyle/>
+                    <a:p>
+                      <a:pPr algn="l" indent="0" marL="0">
+                        <a:buNone/>
+                      </a:pPr>
+                      <a:r>
+                        <a:rPr lang="en-US" sz="1050" dirty="0">
+                          <a:solidFill>
+                            <a:srgbClr val="55636E"/>
+                          </a:solidFill>
+                          <a:latin typeface="맑은 고딕" pitchFamily="34" charset="0"/>
+                          <a:ea typeface="맑은 고딕" pitchFamily="34" charset="-122"/>
+                          <a:cs typeface="맑은 고딕" pitchFamily="34" charset="-120"/>
+                        </a:rPr>
+                        <a:t>유도식 c = 1</a:t>
+                      </a:r>
+                      <a:endParaRPr lang="en-US" sz="1050" dirty="0">
+                        <a:latin typeface="맑은 고딕" charset="0"/>
+                        <a:ea typeface="맑은 고딕" charset="0"/>
+                        <a:cs typeface="맑은 고딕" charset="0"/>
+                      </a:endParaRPr>
+                    </a:p>
+                  </a:txBody>
+                  <a:tcPr marL="91440" marR="91440" marT="45720" marB="45720" anchor="ctr">
+                    <a:lnL w="12700" cap="flat" cmpd="sng" algn="ctr">
+                      <a:solidFill>
+                        <a:srgbClr val="E3E9EC"/>
+                      </a:solidFill>
+                      <a:prstDash val="solid"/>
+                      <a:round/>
+                      <a:headEnd type="none" w="med" len="med"/>
+                      <a:tailEnd type="none" w="med" len="med"/>
+                    </a:lnL>
+                    <a:lnR w="12700" cap="flat" cmpd="sng" algn="ctr">
+                      <a:solidFill>
+                        <a:srgbClr val="E3E9EC"/>
+                      </a:solidFill>
+                      <a:prstDash val="solid"/>
+                      <a:round/>
+                      <a:headEnd type="none" w="med" len="med"/>
+                      <a:tailEnd type="none" w="med" len="med"/>
+                    </a:lnR>
+                    <a:lnT w="12700" cap="flat" cmpd="sng" algn="ctr">
+                      <a:solidFill>
+                        <a:srgbClr val="E3E9EC"/>
+                      </a:solidFill>
+                      <a:prstDash val="solid"/>
+                      <a:round/>
+                      <a:headEnd type="none" w="med" len="med"/>
+                      <a:tailEnd type="none" w="med" len="med"/>
+                    </a:lnT>
+                    <a:lnB w="12700" cap="flat" cmpd="sng" algn="ctr">
+                      <a:solidFill>
+                        <a:srgbClr val="E3E9EC"/>
+                      </a:solidFill>
+                      <a:prstDash val="solid"/>
+                      <a:round/>
+                      <a:headEnd type="none" w="med" len="med"/>
+                      <a:tailEnd type="none" w="med" len="med"/>
+                    </a:lnB>
+                    <a:solidFill>
+                      <a:srgbClr val="FFFFFF"/>
+                    </a:solidFill>
+                  </a:tcPr>
+                </a:tc>
+                <a:tc>
+                  <a:txBody>
+                    <a:bodyPr/>
+                    <a:lstStyle/>
+                    <a:p>
+                      <a:pPr algn="r" indent="0" marL="0">
+                        <a:buNone/>
+                      </a:pPr>
+                      <a:r>
+                        <a:rPr lang="en-US" sz="1050" dirty="0">
+                          <a:solidFill>
+                            <a:srgbClr val="55636E"/>
+                          </a:solidFill>
+                          <a:latin typeface="맑은 고딕" pitchFamily="34" charset="0"/>
+                          <a:ea typeface="맑은 고딕" pitchFamily="34" charset="-122"/>
+                          <a:cs typeface="맑은 고딕" pitchFamily="34" charset="-120"/>
+                        </a:rPr>
+                        <a:t>0</a:t>
+                      </a:r>
+                      <a:endParaRPr lang="en-US" sz="1050" dirty="0">
+                        <a:latin typeface="맑은 고딕" charset="0"/>
+                        <a:ea typeface="맑은 고딕" charset="0"/>
+                        <a:cs typeface="맑은 고딕" charset="0"/>
+                      </a:endParaRPr>
+                    </a:p>
+                  </a:txBody>
+                  <a:tcPr marL="91440" marR="91440" marT="45720" marB="45720" anchor="ctr">
+                    <a:lnL w="12700" cap="flat" cmpd="sng" algn="ctr">
+                      <a:solidFill>
+                        <a:srgbClr val="E3E9EC"/>
+                      </a:solidFill>
+                      <a:prstDash val="solid"/>
+                      <a:round/>
+                      <a:headEnd type="none" w="med" len="med"/>
+                      <a:tailEnd type="none" w="med" len="med"/>
+                    </a:lnL>
+                    <a:lnR w="12700" cap="flat" cmpd="sng" algn="ctr">
+                      <a:solidFill>
+                        <a:srgbClr val="E3E9EC"/>
+                      </a:solidFill>
+                      <a:prstDash val="solid"/>
+                      <a:round/>
+                      <a:headEnd type="none" w="med" len="med"/>
+                      <a:tailEnd type="none" w="med" len="med"/>
+                    </a:lnR>
+                    <a:lnT w="12700" cap="flat" cmpd="sng" algn="ctr">
+                      <a:solidFill>
+                        <a:srgbClr val="E3E9EC"/>
+                      </a:solidFill>
+                      <a:prstDash val="solid"/>
+                      <a:round/>
+                      <a:headEnd type="none" w="med" len="med"/>
+                      <a:tailEnd type="none" w="med" len="med"/>
+                    </a:lnT>
+                    <a:lnB w="12700" cap="flat" cmpd="sng" algn="ctr">
+                      <a:solidFill>
+                        <a:srgbClr val="E3E9EC"/>
+                      </a:solidFill>
+                      <a:prstDash val="solid"/>
+                      <a:round/>
+                      <a:headEnd type="none" w="med" len="med"/>
+                      <a:tailEnd type="none" w="med" len="med"/>
+                    </a:lnB>
+                    <a:solidFill>
+                      <a:srgbClr val="FFFFFF"/>
+                    </a:solidFill>
+                  </a:tcPr>
+                </a:tc>
+                <a:tc>
+                  <a:txBody>
+                    <a:bodyPr/>
+                    <a:lstStyle/>
+                    <a:p>
+                      <a:pPr algn="r" indent="0" marL="0">
+                        <a:buNone/>
+                      </a:pPr>
+                      <a:r>
+                        <a:rPr lang="en-US" sz="1050" dirty="0">
+                          <a:solidFill>
+                            <a:srgbClr val="55636E"/>
+                          </a:solidFill>
+                          <a:latin typeface="Calibri" pitchFamily="34" charset="0"/>
+                          <a:ea typeface="Calibri" pitchFamily="34" charset="-122"/>
+                          <a:cs typeface="Calibri" pitchFamily="34" charset="-120"/>
+                        </a:rPr>
+                        <a:t>0.8607</a:t>
+                      </a:r>
+                      <a:endParaRPr lang="en-US" sz="1050" dirty="0">
+                        <a:latin typeface="Calibri" charset="0"/>
+                        <a:ea typeface="Calibri" charset="0"/>
+                        <a:cs typeface="Calibri" charset="0"/>
+                      </a:endParaRPr>
+                    </a:p>
+                  </a:txBody>
+                  <a:tcPr marL="91440" marR="91440" marT="45720" marB="45720" anchor="ctr">
+                    <a:lnL w="12700" cap="flat" cmpd="sng" algn="ctr">
+                      <a:solidFill>
+                        <a:srgbClr val="E3E9EC"/>
+                      </a:solidFill>
+                      <a:prstDash val="solid"/>
+                      <a:round/>
+                      <a:headEnd type="none" w="med" len="med"/>
+                      <a:tailEnd type="none" w="med" len="med"/>
+                    </a:lnL>
+                    <a:lnR w="12700" cap="flat" cmpd="sng" algn="ctr">
+                      <a:solidFill>
+                        <a:srgbClr val="E3E9EC"/>
+                      </a:solidFill>
+                      <a:prstDash val="solid"/>
+                      <a:round/>
+                      <a:headEnd type="none" w="med" len="med"/>
+                      <a:tailEnd type="none" w="med" len="med"/>
+                    </a:lnR>
+                    <a:lnT w="12700" cap="flat" cmpd="sng" algn="ctr">
+                      <a:solidFill>
+                        <a:srgbClr val="E3E9EC"/>
+                      </a:solidFill>
+                      <a:prstDash val="solid"/>
+                      <a:round/>
+                      <a:headEnd type="none" w="med" len="med"/>
+                      <a:tailEnd type="none" w="med" len="med"/>
+                    </a:lnT>
+                    <a:lnB w="12700" cap="flat" cmpd="sng" algn="ctr">
+                      <a:solidFill>
+                        <a:srgbClr val="E3E9EC"/>
+                      </a:solidFill>
+                      <a:prstDash val="solid"/>
+                      <a:round/>
+                      <a:headEnd type="none" w="med" len="med"/>
+                      <a:tailEnd type="none" w="med" len="med"/>
+                    </a:lnB>
+                    <a:solidFill>
+                      <a:srgbClr val="FFFFFF"/>
+                    </a:solidFill>
+                  </a:tcPr>
+                </a:tc>
+                <a:tc>
+                  <a:txBody>
+                    <a:bodyPr/>
+                    <a:lstStyle/>
+                    <a:p>
+                      <a:pPr algn="r" indent="0" marL="0">
+                        <a:buNone/>
+                      </a:pPr>
+                      <a:r>
+                        <a:rPr lang="en-US" sz="1050" dirty="0">
+                          <a:solidFill>
+                            <a:srgbClr val="55636E"/>
+                          </a:solidFill>
+                          <a:latin typeface="Calibri" pitchFamily="34" charset="0"/>
+                          <a:ea typeface="Calibri" pitchFamily="34" charset="-122"/>
+                          <a:cs typeface="Calibri" pitchFamily="34" charset="-120"/>
+                        </a:rPr>
+                        <a:t>0.3683 ✗</a:t>
+                      </a:r>
+                      <a:endParaRPr lang="en-US" sz="1050" dirty="0">
+                        <a:latin typeface="Calibri" charset="0"/>
+                        <a:ea typeface="Calibri" charset="0"/>
+                        <a:cs typeface="Calibri" charset="0"/>
+                      </a:endParaRPr>
+                    </a:p>
+                  </a:txBody>
+                  <a:tcPr marL="91440" marR="91440" marT="45720" marB="45720" anchor="ctr">
+                    <a:lnL w="12700" cap="flat" cmpd="sng" algn="ctr">
+                      <a:solidFill>
+                        <a:srgbClr val="E3E9EC"/>
+                      </a:solidFill>
+                      <a:prstDash val="solid"/>
+                      <a:round/>
+                      <a:headEnd type="none" w="med" len="med"/>
+                      <a:tailEnd type="none" w="med" len="med"/>
+                    </a:lnL>
+                    <a:lnR w="12700" cap="flat" cmpd="sng" algn="ctr">
+                      <a:solidFill>
+                        <a:srgbClr val="E3E9EC"/>
+                      </a:solidFill>
+                      <a:prstDash val="solid"/>
+                      <a:round/>
+                      <a:headEnd type="none" w="med" len="med"/>
+                      <a:tailEnd type="none" w="med" len="med"/>
+                    </a:lnR>
+                    <a:lnT w="12700" cap="flat" cmpd="sng" algn="ctr">
+                      <a:solidFill>
+                        <a:srgbClr val="E3E9EC"/>
+                      </a:solidFill>
+                      <a:prstDash val="solid"/>
+                      <a:round/>
+                      <a:headEnd type="none" w="med" len="med"/>
+                      <a:tailEnd type="none" w="med" len="med"/>
+                    </a:lnT>
+                    <a:lnB w="12700" cap="flat" cmpd="sng" algn="ctr">
+                      <a:solidFill>
+                        <a:srgbClr val="E3E9EC"/>
+                      </a:solidFill>
+                      <a:prstDash val="solid"/>
+                      <a:round/>
+                      <a:headEnd type="none" w="med" len="med"/>
+                      <a:tailEnd type="none" w="med" len="med"/>
+                    </a:lnB>
+                    <a:solidFill>
+                      <a:srgbClr val="FFFFFF"/>
+                    </a:solidFill>
+                  </a:tcPr>
+                </a:tc>
+                <a:tc>
+                  <a:txBody>
+                    <a:bodyPr/>
+                    <a:lstStyle/>
+                    <a:p>
+                      <a:pPr algn="r" indent="0" marL="0">
+                        <a:buNone/>
+                      </a:pPr>
+                      <a:r>
+                        <a:rPr lang="en-US" sz="1050" dirty="0">
+                          <a:solidFill>
+                            <a:srgbClr val="55636E"/>
+                          </a:solidFill>
+                          <a:latin typeface="Calibri" pitchFamily="34" charset="0"/>
+                          <a:ea typeface="Calibri" pitchFamily="34" charset="-122"/>
+                          <a:cs typeface="Calibri" pitchFamily="34" charset="-120"/>
+                        </a:rPr>
+                        <a:t>+0.436</a:t>
+                      </a:r>
+                      <a:endParaRPr lang="en-US" sz="1050" dirty="0">
+                        <a:latin typeface="Calibri" charset="0"/>
+                        <a:ea typeface="Calibri" charset="0"/>
+                        <a:cs typeface="Calibri" charset="0"/>
+                      </a:endParaRPr>
+                    </a:p>
+                  </a:txBody>
+                  <a:tcPr marL="91440" marR="91440" marT="45720" marB="45720" anchor="ctr">
+                    <a:lnL w="12700" cap="flat" cmpd="sng" algn="ctr">
+                      <a:solidFill>
+                        <a:srgbClr val="E3E9EC"/>
+                      </a:solidFill>
+                      <a:prstDash val="solid"/>
+                      <a:round/>
+                      <a:headEnd type="none" w="med" len="med"/>
+                      <a:tailEnd type="none" w="med" len="med"/>
+                    </a:lnL>
+                    <a:lnR w="12700" cap="flat" cmpd="sng" algn="ctr">
+                      <a:solidFill>
+                        <a:srgbClr val="E3E9EC"/>
+                      </a:solidFill>
+                      <a:prstDash val="solid"/>
+                      <a:round/>
+                      <a:headEnd type="none" w="med" len="med"/>
+                      <a:tailEnd type="none" w="med" len="med"/>
+                    </a:lnR>
+                    <a:lnT w="12700" cap="flat" cmpd="sng" algn="ctr">
+                      <a:solidFill>
+                        <a:srgbClr val="E3E9EC"/>
+                      </a:solidFill>
+                      <a:prstDash val="solid"/>
+                      <a:round/>
+                      <a:headEnd type="none" w="med" len="med"/>
+                      <a:tailEnd type="none" w="med" len="med"/>
+                    </a:lnT>
+                    <a:lnB w="12700" cap="flat" cmpd="sng" algn="ctr">
+                      <a:solidFill>
+                        <a:srgbClr val="E3E9EC"/>
+                      </a:solidFill>
+                      <a:prstDash val="solid"/>
+                      <a:round/>
+                      <a:headEnd type="none" w="med" len="med"/>
+                      <a:tailEnd type="none" w="med" len="med"/>
+                    </a:lnB>
+                    <a:solidFill>
+                      <a:srgbClr val="FFFFFF"/>
+                    </a:solidFill>
+                  </a:tcPr>
+                </a:tc>
+                <a:tc>
+                  <a:txBody>
+                    <a:bodyPr/>
+                    <a:lstStyle/>
+                    <a:p>
+                      <a:pPr algn="r" indent="0" marL="0">
+                        <a:buNone/>
+                      </a:pPr>
+                      <a:r>
+                        <a:rPr lang="en-US" sz="1050" dirty="0">
+                          <a:solidFill>
+                            <a:srgbClr val="55636E"/>
+                          </a:solidFill>
+                          <a:latin typeface="Calibri" pitchFamily="34" charset="0"/>
+                          <a:ea typeface="Calibri" pitchFamily="34" charset="-122"/>
+                          <a:cs typeface="Calibri" pitchFamily="34" charset="-120"/>
+                        </a:rPr>
+                        <a:t>0.7812</a:t>
+                      </a:r>
+                      <a:endParaRPr lang="en-US" sz="1050" dirty="0">
+                        <a:latin typeface="Calibri" charset="0"/>
+                        <a:ea typeface="Calibri" charset="0"/>
+                        <a:cs typeface="Calibri" charset="0"/>
+                      </a:endParaRPr>
+                    </a:p>
+                  </a:txBody>
+                  <a:tcPr marL="91440" marR="91440" marT="45720" marB="45720" anchor="ctr">
+                    <a:lnL w="12700" cap="flat" cmpd="sng" algn="ctr">
+                      <a:solidFill>
+                        <a:srgbClr val="E3E9EC"/>
+                      </a:solidFill>
+                      <a:prstDash val="solid"/>
+                      <a:round/>
+                      <a:headEnd type="none" w="med" len="med"/>
+                      <a:tailEnd type="none" w="med" len="med"/>
+                    </a:lnL>
+                    <a:lnR w="12700" cap="flat" cmpd="sng" algn="ctr">
+                      <a:solidFill>
+                        <a:srgbClr val="E3E9EC"/>
+                      </a:solidFill>
+                      <a:prstDash val="solid"/>
+                      <a:round/>
+                      <a:headEnd type="none" w="med" len="med"/>
+                      <a:tailEnd type="none" w="med" len="med"/>
+                    </a:lnR>
+                    <a:lnT w="12700" cap="flat" cmpd="sng" algn="ctr">
+                      <a:solidFill>
+                        <a:srgbClr val="E3E9EC"/>
+                      </a:solidFill>
+                      <a:prstDash val="solid"/>
+                      <a:round/>
+                      <a:headEnd type="none" w="med" len="med"/>
+                      <a:tailEnd type="none" w="med" len="med"/>
+                    </a:lnT>
+                    <a:lnB w="12700" cap="flat" cmpd="sng" algn="ctr">
+                      <a:solidFill>
+                        <a:srgbClr val="E3E9EC"/>
+                      </a:solidFill>
+                      <a:prstDash val="solid"/>
+                      <a:round/>
+                      <a:headEnd type="none" w="med" len="med"/>
+                      <a:tailEnd type="none" w="med" len="med"/>
+                    </a:lnB>
+                    <a:solidFill>
+                      <a:srgbClr val="FFFFFF"/>
+                    </a:solidFill>
+                  </a:tcPr>
+                </a:tc>
+                <a:tc>
+                  <a:txBody>
+                    <a:bodyPr/>
+                    <a:lstStyle/>
+                    <a:p>
+                      <a:pPr algn="r" indent="0" marL="0">
+                        <a:buNone/>
+                      </a:pPr>
+                      <a:r>
+                        <a:rPr lang="en-US" sz="1050" dirty="0">
+                          <a:solidFill>
+                            <a:srgbClr val="55636E"/>
+                          </a:solidFill>
+                          <a:latin typeface="Calibri" pitchFamily="34" charset="0"/>
+                          <a:ea typeface="Calibri" pitchFamily="34" charset="-122"/>
+                          <a:cs typeface="Calibri" pitchFamily="34" charset="-120"/>
+                        </a:rPr>
+                        <a:t>0.2497 ✗</a:t>
+                      </a:r>
+                      <a:endParaRPr lang="en-US" sz="1050" dirty="0">
+                        <a:latin typeface="Calibri" charset="0"/>
+                        <a:ea typeface="Calibri" charset="0"/>
+                        <a:cs typeface="Calibri" charset="0"/>
+                      </a:endParaRPr>
+                    </a:p>
+                  </a:txBody>
+                  <a:tcPr marL="91440" marR="91440" marT="45720" marB="45720" anchor="ctr">
+                    <a:lnL w="12700" cap="flat" cmpd="sng" algn="ctr">
+                      <a:solidFill>
+                        <a:srgbClr val="E3E9EC"/>
+                      </a:solidFill>
+                      <a:prstDash val="solid"/>
+                      <a:round/>
+                      <a:headEnd type="none" w="med" len="med"/>
+                      <a:tailEnd type="none" w="med" len="med"/>
+                    </a:lnL>
+                    <a:lnR w="12700" cap="flat" cmpd="sng" algn="ctr">
+                      <a:solidFill>
+                        <a:srgbClr val="E3E9EC"/>
+                      </a:solidFill>
+                      <a:prstDash val="solid"/>
+                      <a:round/>
+                      <a:headEnd type="none" w="med" len="med"/>
+                      <a:tailEnd type="none" w="med" len="med"/>
+                    </a:lnR>
+                    <a:lnT w="12700" cap="flat" cmpd="sng" algn="ctr">
+                      <a:solidFill>
+                        <a:srgbClr val="E3E9EC"/>
+                      </a:solidFill>
+                      <a:prstDash val="solid"/>
+                      <a:round/>
+                      <a:headEnd type="none" w="med" len="med"/>
+                      <a:tailEnd type="none" w="med" len="med"/>
+                    </a:lnT>
+                    <a:lnB w="12700" cap="flat" cmpd="sng" algn="ctr">
+                      <a:solidFill>
+                        <a:srgbClr val="E3E9EC"/>
+                      </a:solidFill>
+                      <a:prstDash val="solid"/>
+                      <a:round/>
+                      <a:headEnd type="none" w="med" len="med"/>
+                      <a:tailEnd type="none" w="med" len="med"/>
+                    </a:lnB>
+                    <a:solidFill>
+                      <a:srgbClr val="FFFFFF"/>
+                    </a:solidFill>
+                  </a:tcPr>
+                </a:tc>
+                <a:tc>
+                  <a:txBody>
+                    <a:bodyPr/>
+                    <a:lstStyle/>
+                    <a:p>
+                      <a:pPr algn="r" indent="0" marL="0">
+                        <a:buNone/>
+                      </a:pPr>
+                      <a:r>
+                        <a:rPr lang="en-US" sz="1050" dirty="0">
+                          <a:solidFill>
+                            <a:srgbClr val="55636E"/>
+                          </a:solidFill>
+                          <a:latin typeface="Calibri" pitchFamily="34" charset="0"/>
+                          <a:ea typeface="Calibri" pitchFamily="34" charset="-122"/>
+                          <a:cs typeface="Calibri" pitchFamily="34" charset="-120"/>
+                        </a:rPr>
+                        <a:t>+0.256</a:t>
+                      </a:r>
+                      <a:endParaRPr lang="en-US" sz="1050" dirty="0">
+                        <a:latin typeface="Calibri" charset="0"/>
+                        <a:ea typeface="Calibri" charset="0"/>
+                        <a:cs typeface="Calibri" charset="0"/>
+                      </a:endParaRPr>
+                    </a:p>
+                  </a:txBody>
+                  <a:tcPr marL="91440" marR="91440" marT="45720" marB="45720" anchor="ctr">
+                    <a:lnL w="12700" cap="flat" cmpd="sng" algn="ctr">
+                      <a:solidFill>
+                        <a:srgbClr val="E3E9EC"/>
+                      </a:solidFill>
+                      <a:prstDash val="solid"/>
+                      <a:round/>
+                      <a:headEnd type="none" w="med" len="med"/>
+                      <a:tailEnd type="none" w="med" len="med"/>
+                    </a:lnL>
+                    <a:lnR w="12700" cap="flat" cmpd="sng" algn="ctr">
+                      <a:solidFill>
+                        <a:srgbClr val="E3E9EC"/>
+                      </a:solidFill>
+                      <a:prstDash val="solid"/>
+                      <a:round/>
+                      <a:headEnd type="none" w="med" len="med"/>
+                      <a:tailEnd type="none" w="med" len="med"/>
+                    </a:lnR>
+                    <a:lnT w="12700" cap="flat" cmpd="sng" algn="ctr">
+                      <a:solidFill>
+                        <a:srgbClr val="E3E9EC"/>
+                      </a:solidFill>
+                      <a:prstDash val="solid"/>
+                      <a:round/>
+                      <a:headEnd type="none" w="med" len="med"/>
+                      <a:tailEnd type="none" w="med" len="med"/>
+                    </a:lnT>
+                    <a:lnB w="12700" cap="flat" cmpd="sng" algn="ctr">
+                      <a:solidFill>
+                        <a:srgbClr val="E3E9EC"/>
+                      </a:solidFill>
+                      <a:prstDash val="solid"/>
+                      <a:round/>
+                      <a:headEnd type="none" w="med" len="med"/>
+                      <a:tailEnd type="none" w="med" len="med"/>
+                    </a:lnB>
+                    <a:solidFill>
+                      <a:srgbClr val="FFFFFF"/>
+                    </a:solidFill>
+                  </a:tcPr>
+                </a:tc>
+                <a:tc>
+                  <a:txBody>
+                    <a:bodyPr/>
+                    <a:lstStyle/>
+                    <a:p>
+                      <a:pPr algn="l" indent="0" marL="0">
+                        <a:buNone/>
+                      </a:pPr>
+                      <a:r>
+                        <a:rPr lang="en-US" sz="1050" dirty="0">
+                          <a:solidFill>
+                            <a:srgbClr val="55636E"/>
+                          </a:solidFill>
+                          <a:latin typeface="맑은 고딕" pitchFamily="34" charset="0"/>
+                          <a:ea typeface="맑은 고딕" pitchFamily="34" charset="-122"/>
+                          <a:cs typeface="맑은 고딕" pitchFamily="34" charset="-120"/>
+                        </a:rPr>
+                        <a:t>둘 다 확률을 크게 부풀린다</a:t>
+                      </a:r>
+                      <a:endParaRPr lang="en-US" sz="1050" dirty="0">
+                        <a:latin typeface="맑은 고딕" charset="0"/>
+                        <a:ea typeface="맑은 고딕" charset="0"/>
+                        <a:cs typeface="맑은 고딕" charset="0"/>
+                      </a:endParaRPr>
+                    </a:p>
+                  </a:txBody>
+                  <a:tcPr marL="91440" marR="91440" marT="45720" marB="45720" anchor="ctr">
+                    <a:lnL w="12700" cap="flat" cmpd="sng" algn="ctr">
+                      <a:solidFill>
+                        <a:srgbClr val="E3E9EC"/>
+                      </a:solidFill>
+                      <a:prstDash val="solid"/>
+                      <a:round/>
+                      <a:headEnd type="none" w="med" len="med"/>
+                      <a:tailEnd type="none" w="med" len="med"/>
+                    </a:lnL>
+                    <a:lnR w="12700" cap="flat" cmpd="sng" algn="ctr">
+                      <a:solidFill>
+                        <a:srgbClr val="E3E9EC"/>
+                      </a:solidFill>
+                      <a:prstDash val="solid"/>
+                      <a:round/>
+                      <a:headEnd type="none" w="med" len="med"/>
+                      <a:tailEnd type="none" w="med" len="med"/>
+                    </a:lnR>
+                    <a:lnT w="12700" cap="flat" cmpd="sng" algn="ctr">
+                      <a:solidFill>
+                        <a:srgbClr val="E3E9EC"/>
+                      </a:solidFill>
+                      <a:prstDash val="solid"/>
+                      <a:round/>
+                      <a:headEnd type="none" w="med" len="med"/>
+                      <a:tailEnd type="none" w="med" len="med"/>
+                    </a:lnT>
+                    <a:lnB w="12700" cap="flat" cmpd="sng" algn="ctr">
+                      <a:solidFill>
+                        <a:srgbClr val="E3E9EC"/>
+                      </a:solidFill>
+                      <a:prstDash val="solid"/>
+                      <a:round/>
+                      <a:headEnd type="none" w="med" len="med"/>
+                      <a:tailEnd type="none" w="med" len="med"/>
+                    </a:lnB>
+                    <a:solidFill>
+                      <a:srgbClr val="FFFFFF"/>
+                    </a:solidFill>
+                  </a:tcPr>
+                </a:tc>
+              </a:tr>
+            </a:tbl>
+          </a:graphicData>
+        </a:graphic>
+      </p:graphicFrame>
+      <p:sp>
+        <p:nvSpPr>
+          <p:cNvPr id="6" name="Text 3"/>
+          <p:cNvSpPr txBox="1"/>
+          <p:nvPr/>
+        </p:nvSpPr>
+        <p:spPr>
+          <a:xfrm>
+            <a:off x="566928" y="4160520"/>
+            <a:ext cx="11064240" cy="274320"/>
+          </a:xfrm>
+          <a:prstGeom prst="rect">
+            <a:avLst/>
+          </a:prstGeom>
+          <a:noFill/>
+          <a:ln/>
+        </p:spPr>
+        <p:txBody>
+          <a:bodyPr wrap="square" lIns="0" tIns="0" rIns="0" bIns="0" rtlCol="0" anchor="ctr"/>
+          <a:lstStyle/>
+          <a:p>
+            <a:pPr indent="0" marL="0">
+              <a:buNone/>
+            </a:pPr>
+            <a:r>
+              <a:rPr lang="en-US" sz="1050" dirty="0">
+                <a:solidFill>
+                  <a:srgbClr val="8A9BA8"/>
+                </a:solidFill>
+                <a:latin typeface="맑은 고딕" pitchFamily="34" charset="0"/>
+                <a:ea typeface="맑은 고딕" pitchFamily="34" charset="-122"/>
+                <a:cs typeface="맑은 고딕" pitchFamily="34" charset="-120"/>
+              </a:rPr>
+              <a:t>✓ = MSE가 기저확률(LS 0.1881 / LQ 0.2494)보다 낮다.  ‘학습’은 prior의 a·b·c 중 학습하는 개수다.</a:t>
+            </a:r>
+            <a:endParaRPr lang="en-US" sz="1050" dirty="0"/>
+          </a:p>
+        </p:txBody>
+      </p:sp>
+      <p:sp>
+        <p:nvSpPr>
+          <p:cNvPr id="7" name="Shape 4"/>
+          <p:cNvSpPr/>
+          <p:nvPr/>
+        </p:nvSpPr>
+        <p:spPr>
+          <a:xfrm>
+            <a:off x="566928" y="4572000"/>
+            <a:ext cx="5394960" cy="1783080"/>
+          </a:xfrm>
+          <a:prstGeom prst="roundRect">
+            <a:avLst>
+              <a:gd name="adj" fmla="val 3077"/>
+            </a:avLst>
+          </a:prstGeom>
+          <a:solidFill>
+            <a:srgbClr val="EAF4EE"/>
+          </a:solidFill>
+          <a:ln w="12700">
+            <a:solidFill>
+              <a:srgbClr val="EAF4EE"/>
+            </a:solidFill>
+            <a:prstDash val="solid"/>
+          </a:ln>
+        </p:spPr>
+      </p:sp>
+      <p:sp>
+        <p:nvSpPr>
+          <p:cNvPr id="8" name="Text 5"/>
+          <p:cNvSpPr txBox="1"/>
+          <p:nvPr/>
+        </p:nvSpPr>
+        <p:spPr>
+          <a:xfrm>
+            <a:off x="841248" y="4754880"/>
+            <a:ext cx="4846320" cy="310896"/>
+          </a:xfrm>
+          <a:prstGeom prst="rect">
+            <a:avLst/>
+          </a:prstGeom>
+          <a:noFill/>
+          <a:ln/>
+        </p:spPr>
+        <p:txBody>
+          <a:bodyPr wrap="square" lIns="0" tIns="0" rIns="0" bIns="0" rtlCol="0" anchor="ctr"/>
+          <a:lstStyle/>
+          <a:p>
+            <a:pPr indent="0" marL="0">
+              <a:buNone/>
+            </a:pPr>
+            <a:r>
+              <a:rPr lang="en-US" sz="1450" b="1" dirty="0">
+                <a:solidFill>
+                  <a:srgbClr val="2C7A5A"/>
+                </a:solidFill>
+                <a:latin typeface="맑은 고딕" pitchFamily="34" charset="0"/>
+                <a:ea typeface="맑은 고딕" pitchFamily="34" charset="-122"/>
+                <a:cs typeface="맑은 고딕" pitchFamily="34" charset="-120"/>
+              </a:rPr>
+              <a:t>K 하나뿐이다</a:t>
+            </a:r>
+            <a:endParaRPr lang="en-US" sz="1450" dirty="0"/>
+          </a:p>
+        </p:txBody>
+      </p:sp>
+      <p:sp>
+        <p:nvSpPr>
+          <p:cNvPr id="9" name="Text 6"/>
+          <p:cNvSpPr txBox="1"/>
+          <p:nvPr/>
+        </p:nvSpPr>
+        <p:spPr>
+          <a:xfrm>
+            <a:off x="841248" y="5102352"/>
+            <a:ext cx="4846320" cy="1069848"/>
+          </a:xfrm>
+          <a:prstGeom prst="rect">
+            <a:avLst/>
+          </a:prstGeom>
+          <a:noFill/>
+          <a:ln/>
+        </p:spPr>
+        <p:txBody>
+          <a:bodyPr wrap="square" lIns="0" tIns="0" rIns="0" bIns="0" rtlCol="0" anchor="ctr"/>
+          <a:lstStyle/>
+          <a:p>
+            <a:pPr indent="0" marL="0">
+              <a:lnSpc>
+                <a:spcPts val="1700"/>
+              </a:lnSpc>
+              <a:buNone/>
+            </a:pPr>
+            <a:r>
+              <a:rPr lang="en-US" sz="1200" dirty="0">
+                <a:solidFill>
+                  <a:srgbClr val="55636E"/>
+                </a:solidFill>
+                <a:latin typeface="맑은 고딕" pitchFamily="34" charset="0"/>
+                <a:ea typeface="맑은 고딕" pitchFamily="34" charset="-122"/>
+                <a:cs typeface="맑은 고딕" pitchFamily="34" charset="-120"/>
+              </a:rPr>
+              <a:t>두 MSE가 동시에 기저확률을 밑돌면서 편향도 둘 다 0.004 안에 드는 조건은 K가 유일하다. C는 LQ MSE가 0.0013 차이로 기저를 못 넘고, E·J는 편향이 0.10~0.19 남는다. 게다가 K는 학습하는 prior 파라미터가 0개다 — 과적합할 자유도가 없다.</a:t>
+            </a:r>
+            <a:endParaRPr lang="en-US" sz="1200" dirty="0"/>
+          </a:p>
+        </p:txBody>
+      </p:sp>
+      <p:sp>
+        <p:nvSpPr>
+          <p:cNvPr id="10" name="Shape 7"/>
+          <p:cNvSpPr/>
+          <p:nvPr/>
+        </p:nvSpPr>
+        <p:spPr>
+          <a:xfrm>
+            <a:off x="6236208" y="4572000"/>
+            <a:ext cx="5394960" cy="1783080"/>
+          </a:xfrm>
+          <a:prstGeom prst="roundRect">
+            <a:avLst>
+              <a:gd name="adj" fmla="val 3077"/>
+            </a:avLst>
+          </a:prstGeom>
+          <a:solidFill>
+            <a:srgbClr val="FBF1EE"/>
+          </a:solidFill>
+          <a:ln w="12700">
+            <a:solidFill>
+              <a:srgbClr val="FBF1EE"/>
+            </a:solidFill>
+            <a:prstDash val="solid"/>
+          </a:ln>
+        </p:spPr>
+      </p:sp>
+      <p:sp>
+        <p:nvSpPr>
+          <p:cNvPr id="11" name="Text 8"/>
+          <p:cNvSpPr txBox="1"/>
+          <p:nvPr/>
+        </p:nvSpPr>
+        <p:spPr>
+          <a:xfrm>
+            <a:off x="6510528" y="4754880"/>
+            <a:ext cx="4846320" cy="310896"/>
+          </a:xfrm>
+          <a:prstGeom prst="rect">
+            <a:avLst/>
+          </a:prstGeom>
+          <a:noFill/>
+          <a:ln/>
+        </p:spPr>
+        <p:txBody>
+          <a:bodyPr wrap="square" lIns="0" tIns="0" rIns="0" bIns="0" rtlCol="0" anchor="ctr"/>
+          <a:lstStyle/>
+          <a:p>
+            <a:pPr indent="0" marL="0">
+              <a:buNone/>
+            </a:pPr>
+            <a:r>
+              <a:rPr lang="en-US" sz="1450" b="1" dirty="0">
+                <a:solidFill>
+                  <a:srgbClr val="B85042"/>
+                </a:solidFill>
+                <a:latin typeface="맑은 고딕" pitchFamily="34" charset="0"/>
+                <a:ea typeface="맑은 고딕" pitchFamily="34" charset="-122"/>
+                <a:cs typeface="맑은 고딕" pitchFamily="34" charset="-120"/>
+              </a:rPr>
+              <a:t>그래도 LS 순위 문제는 안 풀린다</a:t>
+            </a:r>
+            <a:endParaRPr lang="en-US" sz="1450" dirty="0"/>
+          </a:p>
+        </p:txBody>
+      </p:sp>
+      <p:sp>
+        <p:nvSpPr>
+          <p:cNvPr id="12" name="Text 9"/>
+          <p:cNvSpPr txBox="1"/>
+          <p:nvPr/>
+        </p:nvSpPr>
+        <p:spPr>
+          <a:xfrm>
+            <a:off x="6510528" y="5102352"/>
+            <a:ext cx="4846320" cy="1069848"/>
+          </a:xfrm>
+          <a:prstGeom prst="rect">
+            <a:avLst/>
+          </a:prstGeom>
+          <a:noFill/>
+          <a:ln/>
+        </p:spPr>
+        <p:txBody>
+          <a:bodyPr wrap="square" lIns="0" tIns="0" rIns="0" bIns="0" rtlCol="0" anchor="ctr"/>
+          <a:lstStyle/>
+          <a:p>
+            <a:pPr indent="0" marL="0">
+              <a:lnSpc>
+                <a:spcPts val="1700"/>
+              </a:lnSpc>
+              <a:buNone/>
+            </a:pPr>
+            <a:r>
+              <a:rPr lang="en-US" sz="1200" dirty="0">
+                <a:solidFill>
+                  <a:srgbClr val="55636E"/>
+                </a:solidFill>
+                <a:latin typeface="맑은 고딕" pitchFamily="34" charset="0"/>
+                <a:ea typeface="맑은 고딕" pitchFamily="34" charset="-122"/>
+                <a:cs typeface="맑은 고딕" pitchFamily="34" charset="-120"/>
+              </a:rPr>
+              <a:t>LS posterior AUC는 오히려 c ≈ 0.6에서 가장 낮다(0.8344). 자기 prior는 전 구간 0.885~0.897이라</a:t>
+            </a:r>
+            <a:endParaRPr lang="en-US" sz="1200" dirty="0"/>
+          </a:p>
+          <a:p>
+            <a:pPr indent="0" marL="0">
+              <a:lnSpc>
+                <a:spcPts val="1700"/>
+              </a:lnSpc>
+              <a:buNone/>
+            </a:pPr>
+            <a:r>
+              <a:rPr lang="en-US" sz="1200" dirty="0">
+                <a:solidFill>
+                  <a:srgbClr val="55636E"/>
+                </a:solidFill>
+                <a:latin typeface="맑은 고딕" pitchFamily="34" charset="0"/>
+                <a:ea typeface="맑은 고딕" pitchFamily="34" charset="-122"/>
+                <a:cs typeface="맑은 고딕" pitchFamily="34" charset="-120"/>
+              </a:rPr>
+              <a:t>보탠양이 c를 어떻게 골라도 음수다(−0.022 ~ −0.063).</a:t>
+            </a:r>
+            <a:endParaRPr lang="en-US" sz="1200" dirty="0"/>
+          </a:p>
+          <a:p>
+            <a:pPr indent="0" marL="0">
+              <a:lnSpc>
+                <a:spcPts val="1700"/>
+              </a:lnSpc>
+              <a:buNone/>
+            </a:pPr>
+            <a:r>
+              <a:rPr lang="en-US" sz="1200" dirty="0">
+                <a:solidFill>
+                  <a:srgbClr val="55636E"/>
+                </a:solidFill>
+                <a:latin typeface="맑은 고딕" pitchFamily="34" charset="0"/>
+                <a:ea typeface="맑은 고딕" pitchFamily="34" charset="-122"/>
+                <a:cs typeface="맑은 고딕" pitchFamily="34" charset="-120"/>
+              </a:rPr>
+              <a:t>c는 눈금 문제를 고치지 순위 문제를 고치지 못한다.</a:t>
+            </a:r>
+            <a:endParaRPr lang="en-US" sz="1200" dirty="0"/>
+          </a:p>
+        </p:txBody>
+      </p:sp>
+    </p:spTree>
+  </p:cSld>
+  <p:clrMapOvr>
+    <a:masterClrMapping/>
+  </p:clrMapOvr>
+</p:sld>
+</file>
+
+<file path=ppt/slides/slide17.xml><?xml version="1.0" encoding="utf-8"?>
+<p:sld xmlns:a="http://schemas.openxmlformats.org/drawingml/2006/main" xmlns:r="http://schemas.openxmlformats.org/officeDocument/2006/relationships" xmlns:p="http://schemas.openxmlformats.org/presentationml/2006/main">
+  <p:cSld name="Slide 17">
+    <p:bg>
+      <p:bgPr>
+        <a:solidFill>
           <a:srgbClr val="1C2A33"/>
         </a:solidFill>
       </p:bgPr>
@@ -22183,7 +28304,7 @@
             <a:avLst/>
           </a:prstGeom>
           <a:solidFill>
-            <a:srgbClr val="C9772F"/>
+            <a:srgbClr val="2C7A5A"/>
           </a:solidFill>
           <a:ln/>
         </p:spPr>
@@ -22221,7 +28342,7 @@
                 <a:ea typeface="맑은 고딕" pitchFamily="34" charset="-122"/>
                 <a:cs typeface="맑은 고딕" pitchFamily="34" charset="-120"/>
               </a:rPr>
-              <a:t>c_LS도 1보다 낮춰야 한다</a:t>
+              <a:t>c 최적값은 찾았지만 왜 학습이 거기로 안 가는지는 모른다</a:t>
             </a:r>
             <a:endParaRPr lang="en-US" sz="1500" dirty="0"/>
           </a:p>
@@ -22263,7 +28384,7 @@
                 <a:ea typeface="맑은 고딕" pitchFamily="34" charset="-122"/>
                 <a:cs typeface="맑은 고딕" pitchFamily="34" charset="-120"/>
               </a:rPr>
-              <a:t>E(c=0.5)의 편향 −0.097과 A(c=1)의 +0.436 사이에 최적값이 있다. c_LS × c_LQ를 0.5~1 구간에서 훑는 실험이 다음 순서다.</a:t>
+              <a:t>⑤에서 c ≈ 0.62가 눈금을 맞춘다는 것을 확인했다. 그런데 c를 학습시킨 D free는 c_LS를 0.006까지 내렸다 — 우도가 c를 눈금이 아니라 순위 쪽으로 끌고 갔다는 뜻이다.</a:t>
             </a:r>
             <a:endParaRPr lang="en-US" sz="1200" dirty="0"/>
           </a:p>
@@ -22322,7 +28443,7 @@
                 <a:ea typeface="맑은 고딕" pitchFamily="34" charset="-122"/>
                 <a:cs typeface="맑은 고딕" pitchFamily="34" charset="-120"/>
               </a:rPr>
-              <a:t>③과 ④를 결합하지 않았다</a:t>
+              <a:t>③·④·⑤를 서로 결합하지 않았다</a:t>
             </a:r>
             <a:endParaRPr lang="en-US" sz="1500" dirty="0"/>
           </a:p>
@@ -22364,7 +28485,7 @@
                 <a:ea typeface="맑은 고딕" pitchFamily="34" charset="-122"/>
                 <a:cs typeface="맑은 고딕" pitchFamily="34" charset="-120"/>
               </a:rPr>
-              <a:t>면적 항 10개 조건은 전부 기존(all) GT로 돌았다.</a:t>
+              <a:t>면적 항과 c 스윕은 전부 기존(all) GT로 돌았고, 자연+혼재 GT와 한 번도 같이 쓰지 않았다.</a:t>
             </a:r>
             <a:endParaRPr lang="en-US" sz="1200" dirty="0"/>
           </a:p>
@@ -24070,7 +30191,7 @@
                 <a:ea typeface="맑은 고딕" pitchFamily="34" charset="-122"/>
                 <a:cs typeface="맑은 고딕" pitchFamily="34" charset="-120"/>
               </a:rPr>
-              <a:t>세 갈래 모두 같은 데이터·같은 seed. 조건마다 브랜치가 다르고, 면적 항은 prior.py / loader.py 자체가 다르다.</a:t>
+              <a:t>네 갈래 모두 같은 데이터·같은 seed. 조건마다 브랜치가 다르고, 면적 항은 prior.py / loader.py 자체가 다르다.</a:t>
             </a:r>
             <a:endParaRPr lang="en-US" sz="1300" dirty="0"/>
           </a:p>
@@ -25232,7 +31353,7 @@
         </p:nvSpPr>
         <p:spPr>
           <a:xfrm>
-            <a:off x="566928" y="4352544"/>
+            <a:off x="566928" y="4215384"/>
             <a:ext cx="365760" cy="365760"/>
           </a:xfrm>
           <a:prstGeom prst="ellipse">
@@ -25252,7 +31373,7 @@
         </p:nvSpPr>
         <p:spPr>
           <a:xfrm>
-            <a:off x="566928" y="4398264"/>
+            <a:off x="566928" y="4261104"/>
             <a:ext cx="365760" cy="274320"/>
           </a:xfrm>
           <a:prstGeom prst="rect">
@@ -25291,7 +31412,7 @@
         </p:nvSpPr>
         <p:spPr>
           <a:xfrm>
-            <a:off x="1115568" y="4297680"/>
+            <a:off x="1115568" y="4160520"/>
             <a:ext cx="4023360" cy="292608"/>
           </a:xfrm>
           <a:prstGeom prst="rect">
@@ -25330,7 +31451,7 @@
         </p:nvSpPr>
         <p:spPr>
           <a:xfrm>
-            <a:off x="1115568" y="4590288"/>
+            <a:off x="1115568" y="4453128"/>
             <a:ext cx="10424160" cy="292608"/>
           </a:xfrm>
           <a:prstGeom prst="rect">
@@ -25369,7 +31490,7 @@
         </p:nvSpPr>
         <p:spPr>
           <a:xfrm>
-            <a:off x="566928" y="5102352"/>
+            <a:off x="566928" y="4873752"/>
             <a:ext cx="365760" cy="365760"/>
           </a:xfrm>
           <a:prstGeom prst="ellipse">
@@ -25389,7 +31510,7 @@
         </p:nvSpPr>
         <p:spPr>
           <a:xfrm>
-            <a:off x="566928" y="5148072"/>
+            <a:off x="566928" y="4919472"/>
             <a:ext cx="365760" cy="274320"/>
           </a:xfrm>
           <a:prstGeom prst="rect">
@@ -25428,7 +31549,7 @@
         </p:nvSpPr>
         <p:spPr>
           <a:xfrm>
-            <a:off x="1115568" y="5047488"/>
+            <a:off x="1115568" y="4818888"/>
             <a:ext cx="4023360" cy="292608"/>
           </a:xfrm>
           <a:prstGeom prst="rect">
@@ -25467,7 +31588,7 @@
         </p:nvSpPr>
         <p:spPr>
           <a:xfrm>
-            <a:off x="1115568" y="5340096"/>
+            <a:off x="1115568" y="5111496"/>
             <a:ext cx="10424160" cy="292608"/>
           </a:xfrm>
           <a:prstGeom prst="rect">
@@ -25506,7 +31627,7 @@
         </p:nvSpPr>
         <p:spPr>
           <a:xfrm>
-            <a:off x="566928" y="5852160"/>
+            <a:off x="566928" y="5532120"/>
             <a:ext cx="365760" cy="365760"/>
           </a:xfrm>
           <a:prstGeom prst="ellipse">
@@ -25526,7 +31647,7 @@
         </p:nvSpPr>
         <p:spPr>
           <a:xfrm>
-            <a:off x="566928" y="5897880"/>
+            <a:off x="566928" y="5577840"/>
             <a:ext cx="365760" cy="274320"/>
           </a:xfrm>
           <a:prstGeom prst="rect">
@@ -25565,7 +31686,7 @@
         </p:nvSpPr>
         <p:spPr>
           <a:xfrm>
-            <a:off x="1115568" y="5797296"/>
+            <a:off x="1115568" y="5477256"/>
             <a:ext cx="4023360" cy="292608"/>
           </a:xfrm>
           <a:prstGeom prst="rect">
@@ -25604,7 +31725,7 @@
         </p:nvSpPr>
         <p:spPr>
           <a:xfrm>
-            <a:off x="1115568" y="6089904"/>
+            <a:off x="1115568" y="5769864"/>
             <a:ext cx="10424160" cy="292608"/>
           </a:xfrm>
           <a:prstGeom prst="rect">
@@ -25643,6 +31764,143 @@
         </p:nvSpPr>
         <p:spPr>
           <a:xfrm>
+            <a:off x="566928" y="6190488"/>
+            <a:ext cx="365760" cy="365760"/>
+          </a:xfrm>
+          <a:prstGeom prst="ellipse">
+            <a:avLst/>
+          </a:prstGeom>
+          <a:solidFill>
+            <a:srgbClr val="2C7A5A"/>
+          </a:solidFill>
+          <a:ln/>
+        </p:spPr>
+      </p:sp>
+      <p:sp>
+        <p:nvSpPr>
+          <p:cNvPr id="19" name="Text 16"/>
+          <p:cNvSpPr txBox="1"/>
+          <p:nvPr/>
+        </p:nvSpPr>
+        <p:spPr>
+          <a:xfrm>
+            <a:off x="566928" y="6236208"/>
+            <a:ext cx="365760" cy="274320"/>
+          </a:xfrm>
+          <a:prstGeom prst="rect">
+            <a:avLst/>
+          </a:prstGeom>
+          <a:noFill/>
+          <a:ln/>
+        </p:spPr>
+        <p:txBody>
+          <a:bodyPr wrap="square" lIns="0" tIns="0" rIns="0" bIns="0" rtlCol="0" anchor="ctr"/>
+          <a:lstStyle/>
+          <a:p>
+            <a:pPr algn="ctr" indent="0" marL="0">
+              <a:buNone/>
+            </a:pPr>
+            <a:r>
+              <a:rPr lang="en-US" sz="1300" b="1" dirty="0">
+                <a:solidFill>
+                  <a:srgbClr val="FFFFFF"/>
+                </a:solidFill>
+                <a:latin typeface="맑은 고딕" pitchFamily="34" charset="0"/>
+                <a:ea typeface="맑은 고딕" pitchFamily="34" charset="-122"/>
+                <a:cs typeface="맑은 고딕" pitchFamily="34" charset="-120"/>
+              </a:rPr>
+              <a:t>⑤</a:t>
+            </a:r>
+            <a:endParaRPr lang="en-US" sz="1300" dirty="0"/>
+          </a:p>
+        </p:txBody>
+      </p:sp>
+      <p:sp>
+        <p:nvSpPr>
+          <p:cNvPr id="20" name="Text 17"/>
+          <p:cNvSpPr txBox="1"/>
+          <p:nvPr/>
+        </p:nvSpPr>
+        <p:spPr>
+          <a:xfrm>
+            <a:off x="1115568" y="6135624"/>
+            <a:ext cx="4023360" cy="292608"/>
+          </a:xfrm>
+          <a:prstGeom prst="rect">
+            <a:avLst/>
+          </a:prstGeom>
+          <a:noFill/>
+          <a:ln/>
+        </p:spPr>
+        <p:txBody>
+          <a:bodyPr wrap="square" lIns="0" tIns="0" rIns="0" bIns="0" rtlCol="0" anchor="ctr"/>
+          <a:lstStyle/>
+          <a:p>
+            <a:pPr indent="0" marL="0">
+              <a:buNone/>
+            </a:pPr>
+            <a:r>
+              <a:rPr lang="en-US" sz="1400" b="1" dirty="0">
+                <a:solidFill>
+                  <a:srgbClr val="1C2A33"/>
+                </a:solidFill>
+                <a:latin typeface="맑은 고딕" pitchFamily="34" charset="0"/>
+                <a:ea typeface="맑은 고딕" pitchFamily="34" charset="-122"/>
+                <a:cs typeface="맑은 고딕" pitchFamily="34" charset="-120"/>
+              </a:rPr>
+              <a:t>면적 계수 c 훑기</a:t>
+            </a:r>
+            <a:endParaRPr lang="en-US" sz="1400" dirty="0"/>
+          </a:p>
+        </p:txBody>
+      </p:sp>
+      <p:sp>
+        <p:nvSpPr>
+          <p:cNvPr id="21" name="Text 18"/>
+          <p:cNvSpPr txBox="1"/>
+          <p:nvPr/>
+        </p:nvSpPr>
+        <p:spPr>
+          <a:xfrm>
+            <a:off x="1115568" y="6428232"/>
+            <a:ext cx="10424160" cy="292608"/>
+          </a:xfrm>
+          <a:prstGeom prst="rect">
+            <a:avLst/>
+          </a:prstGeom>
+          <a:noFill/>
+          <a:ln/>
+        </p:spPr>
+        <p:txBody>
+          <a:bodyPr wrap="square" lIns="0" tIns="0" rIns="0" bIns="0" rtlCol="0" anchor="ctr"/>
+          <a:lstStyle/>
+          <a:p>
+            <a:pPr indent="0" marL="0">
+              <a:buNone/>
+            </a:pPr>
+            <a:r>
+              <a:rPr lang="en-US" sz="1150" dirty="0">
+                <a:solidFill>
+                  <a:srgbClr val="55636E"/>
+                </a:solidFill>
+                <a:latin typeface="맑은 고딕" pitchFamily="34" charset="0"/>
+                <a:ea typeface="맑은 고딕" pitchFamily="34" charset="-122"/>
+                <a:cs typeface="맑은 고딕" pitchFamily="34" charset="-120"/>
+              </a:rPr>
+              <a:t>100개. c를 0.3~1.0에서 격자로 돌려 최적값을 찾는다 (④ 결과를 보고 우리가 추가)</a:t>
+            </a:r>
+            <a:endParaRPr lang="en-US" sz="1150" dirty="0"/>
+          </a:p>
+        </p:txBody>
+      </p:sp>
+      <p:sp>
+        <p:nvSpPr>
+          <p:cNvPr id="22" name="Shape 19"/>
+          <p:cNvSpPr/>
+          <p:nvPr/>
+        </p:nvSpPr>
+        <p:spPr>
+          <a:xfrm>
             <a:off x="6035040" y="2377440"/>
             <a:ext cx="5577840" cy="1609344"/>
           </a:xfrm>
@@ -25664,7 +31922,7 @@
       </p:sp>
       <p:sp>
         <p:nvSpPr>
-          <p:cNvPr id="19" name="Text 16"/>
+          <p:cNvPr id="23" name="Text 20"/>
           <p:cNvSpPr txBox="1"/>
           <p:nvPr/>
         </p:nvSpPr>
@@ -25703,7 +31961,7 @@
       </p:sp>
       <p:sp>
         <p:nvSpPr>
-          <p:cNvPr id="20" name="Text 17"/>
+          <p:cNvPr id="24" name="Text 21"/>
           <p:cNvSpPr txBox="1"/>
           <p:nvPr/>
         </p:nvSpPr>
